--- a/benchmarks/ieee_bds_2026/SecureAI_Bond_2026_slides.pptx
+++ b/benchmarks/ieee_bds_2026/SecureAI_Bond_2026_slides.pptx
@@ -19,6 +19,8 @@
     <p:sldId id="267" r:id="rId18"/>
     <p:sldId id="268" r:id="rId19"/>
     <p:sldId id="269" r:id="rId20"/>
+    <p:sldId id="270" r:id="rId21"/>
+    <p:sldId id="271" r:id="rId22"/>
   </p:sldIdLst>
   <p:sldSz cx="12191695" cy="6858000" type="screen4x3"/>
   <p:notesSz cx="6858000" cy="9144000"/>
@@ -5513,16 +5515,34 @@
                 </a:solidFill>
                 <a:latin typeface="Calibri"/>
               </a:rPr>
-              <a:t> (sexual content → policy channel, not a moral axis). </a:t>
+              <a:t> (sexual content → policy channel); plus a registered rescue of the rights channel </a:t>
             </a:r>
             <a:r>
               <a:rPr sz="1600" b="1">
                 <a:solidFill>
+                  <a:srgbClr val="A67500"/>
+                </a:solidFill>
+                <a:latin typeface="Calibri"/>
+              </a:rPr>
+              <a:t>refuted</a:t>
+            </a:r>
+            <a:r>
+              <a:rPr sz="1600">
+                <a:solidFill>
+                  <a:srgbClr val="202020"/>
+                </a:solidFill>
+                <a:latin typeface="Calibri"/>
+              </a:rPr>
+              <a:t> (trained 0.509 vs null 0.512 — stays a hard channel). </a:t>
+            </a:r>
+            <a:r>
+              <a:rPr sz="1600" b="1">
+                <a:solidFill>
                   <a:srgbClr val="2B6CB0"/>
                 </a:solidFill>
                 <a:latin typeface="Calibri"/>
               </a:rPr>
-              <a:t>The gate has teeth.</a:t>
+              <a:t>The gate has teeth, in both directions.</a:t>
             </a:r>
           </a:p>
           <a:p>
@@ -5798,7 +5818,7 @@
                 </a:solidFill>
                 <a:latin typeface="Calibri"/>
               </a:rPr>
-              <a:t>Implications for Secure AI deployment</a:t>
+              <a:t>Since submission — reliable ≠ distinct: the space is bifactor</a:t>
             </a:r>
           </a:p>
         </p:txBody>
@@ -5850,8 +5870,8 @@
         </p:nvSpPr>
         <p:spPr>
           <a:xfrm>
-            <a:off x="502920" y="1005840"/>
-            <a:ext cx="11155680" cy="4754880"/>
+            <a:off x="502920" y="822960"/>
+            <a:ext cx="11155680" cy="1463040"/>
           </a:xfrm>
           <a:prstGeom prst="rect">
             <a:avLst/>
@@ -5866,121 +5886,17 @@
           <a:p>
             <a:pPr algn="l">
               <a:spcAft>
-                <a:spcPts val="1200"/>
+                <a:spcPts val="800"/>
               </a:spcAft>
             </a:pPr>
             <a:r>
-              <a:rPr sz="1700">
-                <a:solidFill>
-                  <a:srgbClr val="202020"/>
-                </a:solidFill>
-                <a:latin typeface="Calibri"/>
-              </a:rPr>
-              <a:t>•  </a:t>
-            </a:r>
-            <a:r>
               <a:rPr sz="1700" b="1">
                 <a:solidFill>
-                  <a:srgbClr val="2B6CB0"/>
-                </a:solidFill>
-                <a:latin typeface="Calibri"/>
-              </a:rPr>
-              <a:t>Where to look</a:t>
-            </a:r>
-            <a:r>
-              <a:rPr sz="1700">
-                <a:solidFill>
-                  <a:srgbClr val="202020"/>
-                </a:solidFill>
-                <a:latin typeface="Calibri"/>
-              </a:rPr>
-              <a:t>: attacks that repackage the same facts with different </a:t>
-            </a:r>
-            <a:r>
-              <a:rPr sz="1700" b="1">
-                <a:solidFill>
-                  <a:srgbClr val="A67500"/>
-                </a:solidFill>
-                <a:latin typeface="Calibri"/>
-              </a:rPr>
-              <a:t>salience</a:t>
-            </a:r>
-            <a:r>
-              <a:rPr sz="1700">
-                <a:solidFill>
-                  <a:srgbClr val="202020"/>
-                </a:solidFill>
-                <a:latin typeface="Calibri"/>
-              </a:rPr>
-              <a:t> (euphemistic minimization).</a:t>
-            </a:r>
-          </a:p>
-          <a:p>
-            <a:pPr algn="l">
-              <a:spcAft>
-                <a:spcPts val="1200"/>
-              </a:spcAft>
-            </a:pPr>
-            <a:r>
-              <a:rPr sz="1700">
-                <a:solidFill>
-                  <a:srgbClr val="202020"/>
-                </a:solidFill>
-                <a:latin typeface="Calibri"/>
-              </a:rPr>
-              <a:t>•  </a:t>
-            </a:r>
-            <a:r>
-              <a:rPr sz="1700" b="1">
-                <a:solidFill>
-                  <a:srgbClr val="2B6CB0"/>
-                </a:solidFill>
-                <a:latin typeface="Calibri"/>
-              </a:rPr>
-              <a:t>Prompt-level defenses are bounded</a:t>
-            </a:r>
-            <a:r>
-              <a:rPr sz="1700">
-                <a:solidFill>
-                  <a:srgbClr val="202020"/>
-                </a:solidFill>
-                <a:latin typeface="Calibri"/>
-              </a:rPr>
-              <a:t>: explicit warnings recover only ~38% — a ceiling co-occurring with universal overconfidence (ECE 0.19–0.42).</a:t>
-            </a:r>
-          </a:p>
-          <a:p>
-            <a:pPr algn="l">
-              <a:spcAft>
-                <a:spcPts val="1200"/>
-              </a:spcAft>
-            </a:pPr>
-            <a:r>
-              <a:rPr sz="1700">
-                <a:solidFill>
-                  <a:srgbClr val="202020"/>
-                </a:solidFill>
-                <a:latin typeface="Calibri"/>
-              </a:rPr>
-              <a:t>•  </a:t>
-            </a:r>
-            <a:r>
-              <a:rPr sz="1700" b="1">
-                <a:solidFill>
-                  <a:srgbClr val="2B6CB0"/>
-                </a:solidFill>
-                <a:latin typeface="Calibri"/>
-              </a:rPr>
-              <a:t>Ask the right question</a:t>
-            </a:r>
-            <a:r>
-              <a:rPr sz="1700">
-                <a:solidFill>
-                  <a:srgbClr val="202020"/>
-                </a:solidFill>
-                <a:latin typeface="Calibri"/>
-              </a:rPr>
-              <a:t>: “which vulnerabilities matter for our use case?” — not “what's the robustness score?”</a:t>
+                  <a:srgbClr val="202020"/>
+                </a:solidFill>
+                <a:latin typeface="Calibri"/>
+              </a:rPr>
+              <a:t>ICC 0.97 proves the dimensions are reliably measurable — are they distinct?</a:t>
             </a:r>
           </a:p>
           <a:p>
@@ -5990,31 +5906,427 @@
               </a:spcAft>
             </a:pPr>
             <a:r>
-              <a:rPr sz="1700">
-                <a:solidFill>
-                  <a:srgbClr val="202020"/>
-                </a:solidFill>
-                <a:latin typeface="Calibri"/>
-              </a:rPr>
-              <a:t>•  </a:t>
-            </a:r>
-            <a:r>
-              <a:rPr sz="1700" b="1">
+              <a:rPr sz="1500">
+                <a:solidFill>
+                  <a:srgbClr val="202020"/>
+                </a:solidFill>
+                <a:latin typeface="Calibri"/>
+              </a:rPr>
+              <a:t>A registered bifactor readout, answered against ourselves: a </a:t>
+            </a:r>
+            <a:r>
+              <a:rPr sz="1500" b="1">
                 <a:solidFill>
                   <a:srgbClr val="2B6CB0"/>
                 </a:solidFill>
                 <a:latin typeface="Calibri"/>
               </a:rPr>
-              <a:t>Hardening target</a:t>
-            </a:r>
-            <a:r>
-              <a:rPr sz="1700">
-                <a:solidFill>
-                  <a:srgbClr val="202020"/>
-                </a:solidFill>
-                <a:latin typeface="Calibri"/>
-              </a:rPr>
-              <a:t>: the fact-extraction front-end, since downstream kernels inherit its failures.</a:t>
+              <a:t>general moral-valence channel G</a:t>
+            </a:r>
+            <a:r>
+              <a:rPr sz="1500">
+                <a:solidFill>
+                  <a:srgbClr val="202020"/>
+                </a:solidFill>
+                <a:latin typeface="Calibri"/>
+              </a:rPr>
+              <a:t> is real (cross-dataset AUROC </a:t>
+            </a:r>
+            <a:r>
+              <a:rPr sz="1500" b="1">
+                <a:solidFill>
+                  <a:srgbClr val="A67500"/>
+                </a:solidFill>
+                <a:latin typeface="Calibri"/>
+              </a:rPr>
+              <a:t>0.856 ± 0.008</a:t>
+            </a:r>
+            <a:r>
+              <a:rPr sz="1500">
+                <a:solidFill>
+                  <a:srgbClr val="202020"/>
+                </a:solidFill>
+                <a:latin typeface="Calibri"/>
+              </a:rPr>
+              <a:t>, +0.337 over null, n = 51,319) — and five named axes are ≥ </a:t>
+            </a:r>
+            <a:r>
+              <a:rPr sz="1500" b="1">
+                <a:solidFill>
+                  <a:srgbClr val="A67500"/>
+                </a:solidFill>
+                <a:latin typeface="Calibri"/>
+              </a:rPr>
+              <a:t>0.98</a:t>
+            </a:r>
+            <a:r>
+              <a:rPr sz="1500">
+                <a:solidFill>
+                  <a:srgbClr val="202020"/>
+                </a:solidFill>
+                <a:latin typeface="Calibri"/>
+              </a:rPr>
+              <a:t> predictable from G alone.</a:t>
+            </a:r>
+          </a:p>
+        </p:txBody>
+      </p:sp>
+      <p:graphicFrame>
+        <p:nvGraphicFramePr>
+          <p:cNvPr id="5" name="Table 4"/>
+          <p:cNvGraphicFramePr>
+            <a:graphicFrameLocks noGrp="1"/>
+          </p:cNvGraphicFramePr>
+          <p:nvPr/>
+        </p:nvGraphicFramePr>
+        <p:xfrm>
+          <a:off x="502920" y="2377440"/>
+          <a:ext cx="11155680" cy="914400"/>
+        </p:xfrm>
+        <a:graphic>
+          <a:graphicData uri="http://schemas.openxmlformats.org/drawingml/2006/table">
+            <a:tbl>
+              <a:tblPr>
+                <a:tableStyleId>{5C22544A-7EE6-4342-B048-85BDC9FD1C3A}</a:tableStyleId>
+              </a:tblPr>
+              <a:tblGrid>
+                <a:gridCol w="2286000"/>
+                <a:gridCol w="8869680"/>
+              </a:tblGrid>
+              <a:tr h="457200">
+                <a:tc>
+                  <a:txBody>
+                    <a:bodyPr wrap="square"/>
+                    <a:lstStyle/>
+                    <a:p>
+                      <a:r>
+                        <a:rPr sz="1300" b="1">
+                          <a:solidFill>
+                            <a:srgbClr val="202020"/>
+                          </a:solidFill>
+                          <a:latin typeface="Calibri"/>
+                        </a:rPr>
+                        <a:t>Own-axis (specific)</a:t>
+                      </a:r>
+                    </a:p>
+                  </a:txBody>
+                  <a:tcPr marT="18288" marB="18288">
+                    <a:solidFill>
+                      <a:srgbClr val="FFFFFF"/>
+                    </a:solidFill>
+                  </a:tcPr>
+                </a:tc>
+                <a:tc>
+                  <a:txBody>
+                    <a:bodyPr wrap="square"/>
+                    <a:lstStyle/>
+                    <a:p>
+                      <a:r>
+                        <a:rPr sz="1300">
+                          <a:solidFill>
+                            <a:srgbClr val="202020"/>
+                          </a:solidFill>
+                          <a:latin typeface="Calibri"/>
+                        </a:rPr>
+                        <a:t>environmental +.31 · privacy +.28 · identity_attack +.25 · autonomy +.17 · physical +.08</a:t>
+                      </a:r>
+                    </a:p>
+                  </a:txBody>
+                  <a:tcPr marT="18288" marB="18288">
+                    <a:solidFill>
+                      <a:srgbClr val="FFFFFF"/>
+                    </a:solidFill>
+                  </a:tcPr>
+                </a:tc>
+              </a:tr>
+              <a:tr h="457200">
+                <a:tc>
+                  <a:txBody>
+                    <a:bodyPr wrap="square"/>
+                    <a:lstStyle/>
+                    <a:p>
+                      <a:r>
+                        <a:rPr sz="1300" b="1">
+                          <a:solidFill>
+                            <a:srgbClr val="202020"/>
+                          </a:solidFill>
+                          <a:latin typeface="Calibri"/>
+                        </a:rPr>
+                        <a:t>Demote to G</a:t>
+                      </a:r>
+                    </a:p>
+                  </a:txBody>
+                  <a:tcPr marT="18288" marB="18288">
+                    <a:solidFill>
+                      <a:srgbClr val="FFFFFF"/>
+                    </a:solidFill>
+                  </a:tcPr>
+                </a:tc>
+                <a:tc>
+                  <a:txBody>
+                    <a:bodyPr wrap="square"/>
+                    <a:lstStyle/>
+                    <a:p>
+                      <a:r>
+                        <a:rPr sz="1300">
+                          <a:solidFill>
+                            <a:srgbClr val="202020"/>
+                          </a:solidFill>
+                          <a:latin typeface="Calibri"/>
+                        </a:rPr>
+                        <a:t>fairness · loyalty · care · legitimacy · epistemic · purity  (−.02 to −.12)</a:t>
+                      </a:r>
+                    </a:p>
+                  </a:txBody>
+                  <a:tcPr marT="18288" marB="18288">
+                    <a:solidFill>
+                      <a:srgbClr val="FFFFFF"/>
+                    </a:solidFill>
+                  </a:tcPr>
+                </a:tc>
+              </a:tr>
+            </a:tbl>
+          </a:graphicData>
+        </a:graphic>
+      </p:graphicFrame>
+      <p:sp>
+        <p:nvSpPr>
+          <p:cNvPr id="6" name="TextBox 5"/>
+          <p:cNvSpPr txBox="1"/>
+          <p:nvPr/>
+        </p:nvSpPr>
+        <p:spPr>
+          <a:xfrm>
+            <a:off x="502920" y="3383280"/>
+            <a:ext cx="11155680" cy="365760"/>
+          </a:xfrm>
+          <a:prstGeom prst="rect">
+            <a:avLst/>
+          </a:prstGeom>
+          <a:noFill/>
+        </p:spPr>
+        <p:txBody>
+          <a:bodyPr wrap="square">
+            <a:spAutoFit/>
+          </a:bodyPr>
+          <a:lstStyle/>
+          <a:p>
+            <a:pPr algn="l">
+              <a:spcAft>
+                <a:spcPts val="600"/>
+              </a:spcAft>
+            </a:pPr>
+            <a:r>
+              <a:rPr sz="1200">
+                <a:solidFill>
+                  <a:srgbClr val="666666"/>
+                </a:solidFill>
+                <a:latin typeface="Calibri"/>
+              </a:rPr>
+              <a:t>The G row is bimodal: 0.85–0.94 on demoted axes' own pairs, chance on the specific ones.</a:t>
+            </a:r>
+          </a:p>
+        </p:txBody>
+      </p:sp>
+      <p:sp>
+        <p:nvSpPr>
+          <p:cNvPr id="7" name="Rounded Rectangle 6"/>
+          <p:cNvSpPr/>
+          <p:nvPr/>
+        </p:nvSpPr>
+        <p:spPr>
+          <a:xfrm>
+            <a:off x="502920" y="3840480"/>
+            <a:ext cx="11155680" cy="1874519"/>
+          </a:xfrm>
+          <a:prstGeom prst="roundRect">
+            <a:avLst>
+              <a:gd name="adj" fmla="val 6000"/>
+            </a:avLst>
+          </a:prstGeom>
+          <a:solidFill>
+            <a:srgbClr val="E9F0F9"/>
+          </a:solidFill>
+          <a:ln w="9525">
+            <a:solidFill>
+              <a:srgbClr val="2B6CB0"/>
+            </a:solidFill>
+          </a:ln>
+        </p:spPr>
+        <p:style>
+          <a:lnRef idx="1">
+            <a:schemeClr val="accent1"/>
+          </a:lnRef>
+          <a:fillRef idx="3">
+            <a:schemeClr val="accent1"/>
+          </a:fillRef>
+          <a:effectRef idx="2">
+            <a:schemeClr val="accent1"/>
+          </a:effectRef>
+          <a:fontRef idx="minor">
+            <a:schemeClr val="lt1"/>
+          </a:fontRef>
+        </p:style>
+        <p:txBody>
+          <a:bodyPr rtlCol="0" anchor="ctr" wrap="square" lIns="164592" rIns="164592" tIns="91440"/>
+          <a:lstStyle/>
+          <a:p>
+            <a:pPr algn="ctr">
+              <a:spcAft>
+                <a:spcPts val="600"/>
+              </a:spcAft>
+            </a:pPr>
+            <a:r>
+              <a:rPr sz="1600" b="1">
+                <a:solidFill>
+                  <a:srgbClr val="2B6CB0"/>
+                </a:solidFill>
+                <a:latin typeface="Calibri"/>
+              </a:rPr>
+              <a:t>Consequence for Secure AI</a:t>
+            </a:r>
+          </a:p>
+          <a:p>
+            <a:pPr algn="l">
+              <a:spcAft>
+                <a:spcPts val="600"/>
+              </a:spcAft>
+            </a:pPr>
+            <a:r>
+              <a:rPr sz="1500">
+                <a:solidFill>
+                  <a:srgbClr val="202020"/>
+                </a:solidFill>
+                <a:latin typeface="Calibri"/>
+              </a:rPr>
+              <a:t>A scalar robustness score is now </a:t>
+            </a:r>
+            <a:r>
+              <a:rPr sz="1500" b="1">
+                <a:solidFill>
+                  <a:srgbClr val="A67500"/>
+                </a:solidFill>
+                <a:latin typeface="Calibri"/>
+              </a:rPr>
+              <a:t>measured, not argued</a:t>
+            </a:r>
+            <a:r>
+              <a:rPr sz="1500">
+                <a:solidFill>
+                  <a:srgbClr val="202020"/>
+                </a:solidFill>
+                <a:latin typeface="Calibri"/>
+              </a:rPr>
+              <a:t>, to be mostly G — the vulnerability structure lives in the surviving specifics.</a:t>
+            </a:r>
+          </a:p>
+          <a:p>
+            <a:pPr algn="l">
+              <a:spcAft>
+                <a:spcPts val="400"/>
+              </a:spcAft>
+            </a:pPr>
+            <a:r>
+              <a:rPr sz="1500">
+                <a:solidFill>
+                  <a:srgbClr val="202020"/>
+                </a:solidFill>
+                <a:latin typeface="Calibri"/>
+              </a:rPr>
+              <a:t>In this talk's terms: </a:t>
+            </a:r>
+            <a:r>
+              <a:rPr sz="1500" b="1">
+                <a:solidFill>
+                  <a:srgbClr val="2B6CB0"/>
+                </a:solidFill>
+                <a:latin typeface="Calibri"/>
+              </a:rPr>
+              <a:t>autonomy, identity, social, physical</a:t>
+            </a:r>
+            <a:r>
+              <a:rPr sz="1500">
+                <a:solidFill>
+                  <a:srgbClr val="202020"/>
+                </a:solidFill>
+                <a:latin typeface="Calibri"/>
+              </a:rPr>
+              <a:t> are specific; </a:t>
+            </a:r>
+            <a:r>
+              <a:rPr sz="1500" b="1">
+                <a:solidFill>
+                  <a:srgbClr val="2B6CB0"/>
+                </a:solidFill>
+                <a:latin typeface="Calibri"/>
+              </a:rPr>
+              <a:t>trust, emotional, financial</a:t>
+            </a:r>
+            <a:r>
+              <a:rPr sz="1500">
+                <a:solidFill>
+                  <a:srgbClr val="202020"/>
+                </a:solidFill>
+                <a:latin typeface="Calibri"/>
+              </a:rPr>
+              <a:t> largely ride G. The readout shows G plus survivors — </a:t>
+            </a:r>
+            <a:r>
+              <a:rPr sz="1500" b="1">
+                <a:solidFill>
+                  <a:srgbClr val="A67500"/>
+                </a:solidFill>
+                <a:latin typeface="Calibri"/>
+              </a:rPr>
+              <a:t>never a hollow axis</a:t>
+            </a:r>
+            <a:r>
+              <a:rPr sz="1500">
+                <a:solidFill>
+                  <a:srgbClr val="202020"/>
+                </a:solidFill>
+                <a:latin typeface="Calibri"/>
+              </a:rPr>
+              <a:t>.</a:t>
+            </a:r>
+          </a:p>
+        </p:txBody>
+      </p:sp>
+      <p:sp>
+        <p:nvSpPr>
+          <p:cNvPr id="8" name="TextBox 7"/>
+          <p:cNvSpPr txBox="1"/>
+          <p:nvPr/>
+        </p:nvSpPr>
+        <p:spPr>
+          <a:xfrm>
+            <a:off x="502920" y="6291072"/>
+            <a:ext cx="11185855" cy="457200"/>
+          </a:xfrm>
+          <a:prstGeom prst="rect">
+            <a:avLst/>
+          </a:prstGeom>
+          <a:noFill/>
+        </p:spPr>
+        <p:txBody>
+          <a:bodyPr wrap="square">
+            <a:spAutoFit/>
+          </a:bodyPr>
+          <a:lstStyle/>
+          <a:p>
+            <a:pPr algn="l">
+              <a:spcAft>
+                <a:spcPts val="600"/>
+              </a:spcAft>
+            </a:pPr>
+            <a:r>
+              <a:rPr sz="1100">
+                <a:solidFill>
+                  <a:srgbClr val="666666"/>
+                </a:solidFill>
+                <a:latin typeface="Calibri"/>
+              </a:rPr>
+              <a:t>12×12 specificity gate, registered margin 0.05, production checkpoints. Post-camera-ready results, July 2026.</a:t>
             </a:r>
           </a:p>
         </p:txBody>
@@ -6084,7 +6396,7 @@
                 </a:solidFill>
                 <a:latin typeface="Calibri"/>
               </a:rPr>
-              <a:t>Reproducibility &amp; takeaways</a:t>
+              <a:t>Implications for Secure AI deployment</a:t>
             </a:r>
           </a:p>
         </p:txBody>
@@ -6124,6 +6436,939 @@
                 <a:latin typeface="Calibri"/>
               </a:rPr>
               <a:t>13</a:t>
+            </a:r>
+          </a:p>
+        </p:txBody>
+      </p:sp>
+      <p:sp>
+        <p:nvSpPr>
+          <p:cNvPr id="4" name="TextBox 3"/>
+          <p:cNvSpPr txBox="1"/>
+          <p:nvPr/>
+        </p:nvSpPr>
+        <p:spPr>
+          <a:xfrm>
+            <a:off x="502920" y="1005840"/>
+            <a:ext cx="11155680" cy="4754880"/>
+          </a:xfrm>
+          <a:prstGeom prst="rect">
+            <a:avLst/>
+          </a:prstGeom>
+          <a:noFill/>
+        </p:spPr>
+        <p:txBody>
+          <a:bodyPr wrap="square">
+            <a:spAutoFit/>
+          </a:bodyPr>
+          <a:lstStyle/>
+          <a:p>
+            <a:pPr algn="l">
+              <a:spcAft>
+                <a:spcPts val="1200"/>
+              </a:spcAft>
+            </a:pPr>
+            <a:r>
+              <a:rPr sz="1700">
+                <a:solidFill>
+                  <a:srgbClr val="202020"/>
+                </a:solidFill>
+                <a:latin typeface="Calibri"/>
+              </a:rPr>
+              <a:t>•  </a:t>
+            </a:r>
+            <a:r>
+              <a:rPr sz="1700" b="1">
+                <a:solidFill>
+                  <a:srgbClr val="2B6CB0"/>
+                </a:solidFill>
+                <a:latin typeface="Calibri"/>
+              </a:rPr>
+              <a:t>Where to look</a:t>
+            </a:r>
+            <a:r>
+              <a:rPr sz="1700">
+                <a:solidFill>
+                  <a:srgbClr val="202020"/>
+                </a:solidFill>
+                <a:latin typeface="Calibri"/>
+              </a:rPr>
+              <a:t>: attacks that repackage the same facts with different </a:t>
+            </a:r>
+            <a:r>
+              <a:rPr sz="1700" b="1">
+                <a:solidFill>
+                  <a:srgbClr val="A67500"/>
+                </a:solidFill>
+                <a:latin typeface="Calibri"/>
+              </a:rPr>
+              <a:t>salience</a:t>
+            </a:r>
+            <a:r>
+              <a:rPr sz="1700">
+                <a:solidFill>
+                  <a:srgbClr val="202020"/>
+                </a:solidFill>
+                <a:latin typeface="Calibri"/>
+              </a:rPr>
+              <a:t> (euphemistic minimization).</a:t>
+            </a:r>
+          </a:p>
+          <a:p>
+            <a:pPr algn="l">
+              <a:spcAft>
+                <a:spcPts val="1200"/>
+              </a:spcAft>
+            </a:pPr>
+            <a:r>
+              <a:rPr sz="1700">
+                <a:solidFill>
+                  <a:srgbClr val="202020"/>
+                </a:solidFill>
+                <a:latin typeface="Calibri"/>
+              </a:rPr>
+              <a:t>•  </a:t>
+            </a:r>
+            <a:r>
+              <a:rPr sz="1700" b="1">
+                <a:solidFill>
+                  <a:srgbClr val="2B6CB0"/>
+                </a:solidFill>
+                <a:latin typeface="Calibri"/>
+              </a:rPr>
+              <a:t>Prompt-level defenses are bounded</a:t>
+            </a:r>
+            <a:r>
+              <a:rPr sz="1700">
+                <a:solidFill>
+                  <a:srgbClr val="202020"/>
+                </a:solidFill>
+                <a:latin typeface="Calibri"/>
+              </a:rPr>
+              <a:t>: explicit warnings recover only ~38% — a ceiling co-occurring with universal overconfidence (ECE 0.19–0.42).</a:t>
+            </a:r>
+          </a:p>
+          <a:p>
+            <a:pPr algn="l">
+              <a:spcAft>
+                <a:spcPts val="1200"/>
+              </a:spcAft>
+            </a:pPr>
+            <a:r>
+              <a:rPr sz="1700">
+                <a:solidFill>
+                  <a:srgbClr val="202020"/>
+                </a:solidFill>
+                <a:latin typeface="Calibri"/>
+              </a:rPr>
+              <a:t>•  </a:t>
+            </a:r>
+            <a:r>
+              <a:rPr sz="1700" b="1">
+                <a:solidFill>
+                  <a:srgbClr val="2B6CB0"/>
+                </a:solidFill>
+                <a:latin typeface="Calibri"/>
+              </a:rPr>
+              <a:t>Ask the right question</a:t>
+            </a:r>
+            <a:r>
+              <a:rPr sz="1700">
+                <a:solidFill>
+                  <a:srgbClr val="202020"/>
+                </a:solidFill>
+                <a:latin typeface="Calibri"/>
+              </a:rPr>
+              <a:t>: “which vulnerabilities matter for our use case?” — not “what's the robustness score?”</a:t>
+            </a:r>
+          </a:p>
+          <a:p>
+            <a:pPr algn="l">
+              <a:spcAft>
+                <a:spcPts val="600"/>
+              </a:spcAft>
+            </a:pPr>
+            <a:r>
+              <a:rPr sz="1700">
+                <a:solidFill>
+                  <a:srgbClr val="202020"/>
+                </a:solidFill>
+                <a:latin typeface="Calibri"/>
+              </a:rPr>
+              <a:t>•  </a:t>
+            </a:r>
+            <a:r>
+              <a:rPr sz="1700" b="1">
+                <a:solidFill>
+                  <a:srgbClr val="2B6CB0"/>
+                </a:solidFill>
+                <a:latin typeface="Calibri"/>
+              </a:rPr>
+              <a:t>Hardening target</a:t>
+            </a:r>
+            <a:r>
+              <a:rPr sz="1700">
+                <a:solidFill>
+                  <a:srgbClr val="202020"/>
+                </a:solidFill>
+                <a:latin typeface="Calibri"/>
+              </a:rPr>
+              <a:t>: the fact-extraction front-end, since downstream kernels inherit its failures.</a:t>
+            </a:r>
+          </a:p>
+        </p:txBody>
+      </p:sp>
+    </p:spTree>
+  </p:cSld>
+  <p:clrMapOvr>
+    <a:masterClrMapping/>
+  </p:clrMapOvr>
+</p:sld>
+</file>
+
+<file path=ppt/slides/slide14.xml><?xml version="1.0" encoding="utf-8"?>
+<p:sld xmlns:a="http://schemas.openxmlformats.org/drawingml/2006/main" xmlns:p="http://schemas.openxmlformats.org/presentationml/2006/main" xmlns:r="http://schemas.openxmlformats.org/officeDocument/2006/relationships">
+  <p:cSld>
+    <p:spTree>
+      <p:nvGrpSpPr>
+        <p:cNvPr id="1" name=""/>
+        <p:cNvGrpSpPr/>
+        <p:nvPr/>
+      </p:nvGrpSpPr>
+      <p:grpSpPr/>
+      <p:sp>
+        <p:nvSpPr>
+          <p:cNvPr id="2" name="Rectangle 1"/>
+          <p:cNvSpPr/>
+          <p:nvPr/>
+        </p:nvSpPr>
+        <p:spPr>
+          <a:xfrm>
+            <a:off x="0" y="0"/>
+            <a:ext cx="12191695" cy="658368"/>
+          </a:xfrm>
+          <a:prstGeom prst="rect">
+            <a:avLst/>
+          </a:prstGeom>
+          <a:solidFill>
+            <a:srgbClr val="2B6CB0"/>
+          </a:solidFill>
+          <a:ln>
+            <a:noFill/>
+          </a:ln>
+        </p:spPr>
+        <p:style>
+          <a:lnRef idx="1">
+            <a:schemeClr val="accent1"/>
+          </a:lnRef>
+          <a:fillRef idx="3">
+            <a:schemeClr val="accent1"/>
+          </a:fillRef>
+          <a:effectRef idx="2">
+            <a:schemeClr val="accent1"/>
+          </a:effectRef>
+          <a:fontRef idx="minor">
+            <a:schemeClr val="lt1"/>
+          </a:fontRef>
+        </p:style>
+        <p:txBody>
+          <a:bodyPr rtlCol="0" anchor="ctr" lIns="411480" tIns="73152"/>
+          <a:lstStyle/>
+          <a:p>
+            <a:pPr algn="ctr"/>
+            <a:r>
+              <a:rPr sz="2200" b="1">
+                <a:solidFill>
+                  <a:srgbClr val="FFFFFF"/>
+                </a:solidFill>
+                <a:latin typeface="Calibri"/>
+              </a:rPr>
+              <a:t>The larger program: philosophy engineering</a:t>
+            </a:r>
+          </a:p>
+        </p:txBody>
+      </p:sp>
+      <p:sp>
+        <p:nvSpPr>
+          <p:cNvPr id="3" name="TextBox 2"/>
+          <p:cNvSpPr txBox="1"/>
+          <p:nvPr/>
+        </p:nvSpPr>
+        <p:spPr>
+          <a:xfrm>
+            <a:off x="11368735" y="6473952"/>
+            <a:ext cx="640080" cy="274320"/>
+          </a:xfrm>
+          <a:prstGeom prst="rect">
+            <a:avLst/>
+          </a:prstGeom>
+          <a:noFill/>
+        </p:spPr>
+        <p:txBody>
+          <a:bodyPr wrap="square">
+            <a:spAutoFit/>
+          </a:bodyPr>
+          <a:lstStyle/>
+          <a:p>
+            <a:pPr algn="r">
+              <a:spcAft>
+                <a:spcPts val="600"/>
+              </a:spcAft>
+            </a:pPr>
+            <a:r>
+              <a:rPr sz="1000">
+                <a:solidFill>
+                  <a:srgbClr val="666666"/>
+                </a:solidFill>
+                <a:latin typeface="Calibri"/>
+              </a:rPr>
+              <a:t>14</a:t>
+            </a:r>
+          </a:p>
+        </p:txBody>
+      </p:sp>
+      <p:sp>
+        <p:nvSpPr>
+          <p:cNvPr id="4" name="TextBox 3"/>
+          <p:cNvSpPr txBox="1"/>
+          <p:nvPr/>
+        </p:nvSpPr>
+        <p:spPr>
+          <a:xfrm>
+            <a:off x="502920" y="868680"/>
+            <a:ext cx="11155680" cy="1371600"/>
+          </a:xfrm>
+          <a:prstGeom prst="rect">
+            <a:avLst/>
+          </a:prstGeom>
+          <a:noFill/>
+        </p:spPr>
+        <p:txBody>
+          <a:bodyPr wrap="square">
+            <a:spAutoFit/>
+          </a:bodyPr>
+          <a:lstStyle/>
+          <a:p>
+            <a:pPr algn="l">
+              <a:spcAft>
+                <a:spcPts val="600"/>
+              </a:spcAft>
+            </a:pPr>
+            <a:r>
+              <a:rPr sz="1700">
+                <a:solidFill>
+                  <a:srgbClr val="202020"/>
+                </a:solidFill>
+                <a:latin typeface="Calibri"/>
+              </a:rPr>
+              <a:t>This paper is one instance of a method: take a construct usually settled by </a:t>
+            </a:r>
+            <a:r>
+              <a:rPr sz="1700" b="1">
+                <a:solidFill>
+                  <a:srgbClr val="2B6CB0"/>
+                </a:solidFill>
+                <a:latin typeface="Calibri"/>
+              </a:rPr>
+              <a:t>argument</a:t>
+            </a:r>
+            <a:r>
+              <a:rPr sz="1700">
+                <a:solidFill>
+                  <a:srgbClr val="202020"/>
+                </a:solidFill>
+                <a:latin typeface="Calibri"/>
+              </a:rPr>
+              <a:t> — what is a harm? has this judgment been manipulated? — and build it into an </a:t>
+            </a:r>
+            <a:r>
+              <a:rPr sz="1700" b="1">
+                <a:solidFill>
+                  <a:srgbClr val="A67500"/>
+                </a:solidFill>
+                <a:latin typeface="Calibri"/>
+              </a:rPr>
+              <a:t>instrument</a:t>
+            </a:r>
+            <a:r>
+              <a:rPr sz="1700">
+                <a:solidFill>
+                  <a:srgbClr val="202020"/>
+                </a:solidFill>
+                <a:latin typeface="Calibri"/>
+              </a:rPr>
+              <a:t> you can measure, falsify, and harden.</a:t>
+            </a:r>
+          </a:p>
+        </p:txBody>
+      </p:sp>
+      <p:sp>
+        <p:nvSpPr>
+          <p:cNvPr id="5" name="TextBox 4"/>
+          <p:cNvSpPr txBox="1"/>
+          <p:nvPr/>
+        </p:nvSpPr>
+        <p:spPr>
+          <a:xfrm>
+            <a:off x="502920" y="2331720"/>
+            <a:ext cx="6080760" cy="3566160"/>
+          </a:xfrm>
+          <a:prstGeom prst="rect">
+            <a:avLst/>
+          </a:prstGeom>
+          <a:noFill/>
+        </p:spPr>
+        <p:txBody>
+          <a:bodyPr wrap="square">
+            <a:spAutoFit/>
+          </a:bodyPr>
+          <a:lstStyle/>
+          <a:p>
+            <a:pPr algn="l">
+              <a:spcAft>
+                <a:spcPts val="1000"/>
+              </a:spcAft>
+            </a:pPr>
+            <a:r>
+              <a:rPr sz="1600" b="1">
+                <a:solidFill>
+                  <a:srgbClr val="202020"/>
+                </a:solidFill>
+                <a:latin typeface="Calibri"/>
+              </a:rPr>
+              <a:t>What makes it engineering, not rhetoric</a:t>
+            </a:r>
+          </a:p>
+          <a:p>
+            <a:pPr algn="l">
+              <a:spcAft>
+                <a:spcPts val="1200"/>
+              </a:spcAft>
+            </a:pPr>
+            <a:r>
+              <a:rPr sz="1500">
+                <a:solidFill>
+                  <a:srgbClr val="202020"/>
+                </a:solidFill>
+                <a:latin typeface="Calibri"/>
+              </a:rPr>
+              <a:t>•  </a:t>
+            </a:r>
+            <a:r>
+              <a:rPr sz="1500">
+                <a:solidFill>
+                  <a:srgbClr val="202020"/>
+                </a:solidFill>
+                <a:latin typeface="Calibri"/>
+              </a:rPr>
+              <a:t>A </a:t>
+            </a:r>
+            <a:r>
+              <a:rPr sz="1500" b="1">
+                <a:solidFill>
+                  <a:srgbClr val="2B6CB0"/>
+                </a:solidFill>
+                <a:latin typeface="Calibri"/>
+              </a:rPr>
+              <a:t>space</a:t>
+            </a:r>
+            <a:r>
+              <a:rPr sz="1500">
+                <a:solidFill>
+                  <a:srgbClr val="202020"/>
+                </a:solidFill>
+                <a:latin typeface="Calibri"/>
+              </a:rPr>
+              <a:t>, not a slogan: judgments are points, manipulation is </a:t>
+            </a:r>
+            <a:r>
+              <a:rPr sz="1500" b="1">
+                <a:solidFill>
+                  <a:srgbClr val="2B6CB0"/>
+                </a:solidFill>
+                <a:latin typeface="Calibri"/>
+              </a:rPr>
+              <a:t>displacement</a:t>
+            </a:r>
+            <a:r>
+              <a:rPr sz="1500">
+                <a:solidFill>
+                  <a:srgbClr val="202020"/>
+                </a:solidFill>
+                <a:latin typeface="Calibri"/>
+              </a:rPr>
+              <a:t>, robustness is </a:t>
+            </a:r>
+            <a:r>
+              <a:rPr sz="1500" b="1">
+                <a:solidFill>
+                  <a:srgbClr val="2B6CB0"/>
+                </a:solidFill>
+                <a:latin typeface="Calibri"/>
+              </a:rPr>
+              <a:t>invariance</a:t>
+            </a:r>
+            <a:r>
+              <a:rPr sz="1500">
+                <a:solidFill>
+                  <a:srgbClr val="202020"/>
+                </a:solidFill>
+                <a:latin typeface="Calibri"/>
+              </a:rPr>
+              <a:t>.</a:t>
+            </a:r>
+          </a:p>
+          <a:p>
+            <a:pPr algn="l">
+              <a:spcAft>
+                <a:spcPts val="600"/>
+              </a:spcAft>
+            </a:pPr>
+            <a:r>
+              <a:rPr sz="1500">
+                <a:solidFill>
+                  <a:srgbClr val="202020"/>
+                </a:solidFill>
+                <a:latin typeface="Calibri"/>
+              </a:rPr>
+              <a:t>•  </a:t>
+            </a:r>
+            <a:r>
+              <a:rPr sz="1500" b="1">
+                <a:solidFill>
+                  <a:srgbClr val="2B6CB0"/>
+                </a:solidFill>
+                <a:latin typeface="Calibri"/>
+              </a:rPr>
+              <a:t>Pre-registration</a:t>
+            </a:r>
+            <a:r>
+              <a:rPr sz="1500">
+                <a:solidFill>
+                  <a:srgbClr val="202020"/>
+                </a:solidFill>
+                <a:latin typeface="Calibri"/>
+              </a:rPr>
+              <a:t> + </a:t>
+            </a:r>
+            <a:r>
+              <a:rPr sz="1500" b="1">
+                <a:solidFill>
+                  <a:srgbClr val="2B6CB0"/>
+                </a:solidFill>
+                <a:latin typeface="Calibri"/>
+              </a:rPr>
+              <a:t>admission gates that retract</a:t>
+            </a:r>
+            <a:r>
+              <a:rPr sz="1500">
+                <a:solidFill>
+                  <a:srgbClr val="202020"/>
+                </a:solidFill>
+                <a:latin typeface="Calibri"/>
+              </a:rPr>
+              <a:t>: this talk's own bifactor test </a:t>
+            </a:r>
+            <a:r>
+              <a:rPr sz="1500" i="1">
+                <a:solidFill>
+                  <a:srgbClr val="202020"/>
+                </a:solidFill>
+                <a:latin typeface="Calibri"/>
+              </a:rPr>
+              <a:t>failed</a:t>
+            </a:r>
+            <a:r>
+              <a:rPr sz="1500">
+                <a:solidFill>
+                  <a:srgbClr val="202020"/>
+                </a:solidFill>
+                <a:latin typeface="Calibri"/>
+              </a:rPr>
+              <a:t> its P1; a channel rescue was </a:t>
+            </a:r>
+            <a:r>
+              <a:rPr sz="1500" i="1">
+                <a:solidFill>
+                  <a:srgbClr val="202020"/>
+                </a:solidFill>
+                <a:latin typeface="Calibri"/>
+              </a:rPr>
+              <a:t>refuted</a:t>
+            </a:r>
+            <a:r>
+              <a:rPr sz="1500">
+                <a:solidFill>
+                  <a:srgbClr val="202020"/>
+                </a:solidFill>
+                <a:latin typeface="Calibri"/>
+              </a:rPr>
+              <a:t>. Claims that don't transfer are demoted — </a:t>
+            </a:r>
+            <a:r>
+              <a:rPr sz="1500" b="1">
+                <a:solidFill>
+                  <a:srgbClr val="A67500"/>
+                </a:solidFill>
+                <a:latin typeface="Calibri"/>
+              </a:rPr>
+              <a:t>in public</a:t>
+            </a:r>
+            <a:r>
+              <a:rPr sz="1500">
+                <a:solidFill>
+                  <a:srgbClr val="202020"/>
+                </a:solidFill>
+                <a:latin typeface="Calibri"/>
+              </a:rPr>
+              <a:t>.</a:t>
+            </a:r>
+          </a:p>
+        </p:txBody>
+      </p:sp>
+      <p:sp>
+        <p:nvSpPr>
+          <p:cNvPr id="6" name="Rounded Rectangle 5"/>
+          <p:cNvSpPr/>
+          <p:nvPr/>
+        </p:nvSpPr>
+        <p:spPr>
+          <a:xfrm>
+            <a:off x="6812280" y="2331720"/>
+            <a:ext cx="4892040" cy="3063240"/>
+          </a:xfrm>
+          <a:prstGeom prst="roundRect">
+            <a:avLst>
+              <a:gd name="adj" fmla="val 6000"/>
+            </a:avLst>
+          </a:prstGeom>
+          <a:solidFill>
+            <a:srgbClr val="E9F0F9"/>
+          </a:solidFill>
+          <a:ln w="9525">
+            <a:solidFill>
+              <a:srgbClr val="2B6CB0"/>
+            </a:solidFill>
+          </a:ln>
+        </p:spPr>
+        <p:style>
+          <a:lnRef idx="1">
+            <a:schemeClr val="accent1"/>
+          </a:lnRef>
+          <a:fillRef idx="3">
+            <a:schemeClr val="accent1"/>
+          </a:fillRef>
+          <a:effectRef idx="2">
+            <a:schemeClr val="accent1"/>
+          </a:effectRef>
+          <a:fontRef idx="minor">
+            <a:schemeClr val="lt1"/>
+          </a:fontRef>
+        </p:style>
+        <p:txBody>
+          <a:bodyPr rtlCol="0" anchor="ctr" wrap="square" lIns="164592" rIns="164592" tIns="91440"/>
+          <a:lstStyle/>
+          <a:p>
+            <a:pPr algn="ctr">
+              <a:spcAft>
+                <a:spcPts val="600"/>
+              </a:spcAft>
+            </a:pPr>
+            <a:r>
+              <a:rPr sz="1600" b="1">
+                <a:solidFill>
+                  <a:srgbClr val="2B6CB0"/>
+                </a:solidFill>
+                <a:latin typeface="Calibri"/>
+              </a:rPr>
+              <a:t>The wager</a:t>
+            </a:r>
+          </a:p>
+          <a:p>
+            <a:pPr algn="l">
+              <a:spcAft>
+                <a:spcPts val="1200"/>
+              </a:spcAft>
+            </a:pPr>
+            <a:r>
+              <a:rPr sz="1500">
+                <a:solidFill>
+                  <a:srgbClr val="202020"/>
+                </a:solidFill>
+                <a:latin typeface="Calibri"/>
+              </a:rPr>
+              <a:t>Normative and aesthetic structure is </a:t>
+            </a:r>
+            <a:r>
+              <a:rPr sz="1500" b="1">
+                <a:solidFill>
+                  <a:srgbClr val="A67500"/>
+                </a:solidFill>
+                <a:latin typeface="Calibri"/>
+              </a:rPr>
+              <a:t>geometric</a:t>
+            </a:r>
+            <a:r>
+              <a:rPr sz="1500">
+                <a:solidFill>
+                  <a:srgbClr val="202020"/>
+                </a:solidFill>
+                <a:latin typeface="Calibri"/>
+              </a:rPr>
+              <a:t> — it lives in </a:t>
+            </a:r>
+            <a:r>
+              <a:rPr sz="1500" b="1">
+                <a:solidFill>
+                  <a:srgbClr val="2B6CB0"/>
+                </a:solidFill>
+                <a:latin typeface="Calibri"/>
+              </a:rPr>
+              <a:t>compressibility</a:t>
+            </a:r>
+            <a:r>
+              <a:rPr sz="1500">
+                <a:solidFill>
+                  <a:srgbClr val="202020"/>
+                </a:solidFill>
+                <a:latin typeface="Calibri"/>
+              </a:rPr>
+              <a:t> and </a:t>
+            </a:r>
+            <a:r>
+              <a:rPr sz="1500" b="1">
+                <a:solidFill>
+                  <a:srgbClr val="2B6CB0"/>
+                </a:solidFill>
+                <a:latin typeface="Calibri"/>
+              </a:rPr>
+              <a:t>coarse-graining under an observer</a:t>
+            </a:r>
+            <a:r>
+              <a:rPr sz="1500">
+                <a:solidFill>
+                  <a:srgbClr val="202020"/>
+                </a:solidFill>
+                <a:latin typeface="Calibri"/>
+              </a:rPr>
+              <a:t>.</a:t>
+            </a:r>
+          </a:p>
+          <a:p>
+            <a:pPr algn="l">
+              <a:spcAft>
+                <a:spcPts val="400"/>
+              </a:spcAft>
+            </a:pPr>
+            <a:r>
+              <a:rPr sz="1500">
+                <a:solidFill>
+                  <a:srgbClr val="202020"/>
+                </a:solidFill>
+                <a:latin typeface="Calibri"/>
+              </a:rPr>
+              <a:t>One instrument, many manifolds: </a:t>
+            </a:r>
+            <a:r>
+              <a:rPr sz="1500" b="1">
+                <a:solidFill>
+                  <a:srgbClr val="2B6CB0"/>
+                </a:solidFill>
+                <a:latin typeface="Calibri"/>
+              </a:rPr>
+              <a:t>harm</a:t>
+            </a:r>
+            <a:r>
+              <a:rPr sz="1500">
+                <a:solidFill>
+                  <a:srgbClr val="202020"/>
+                </a:solidFill>
+                <a:latin typeface="Calibri"/>
+              </a:rPr>
+              <a:t> today; </a:t>
+            </a:r>
+            <a:r>
+              <a:rPr sz="1500" b="1">
+                <a:solidFill>
+                  <a:srgbClr val="2B6CB0"/>
+                </a:solidFill>
+                <a:latin typeface="Calibri"/>
+              </a:rPr>
+              <a:t>aesthetics, law, cognition</a:t>
+            </a:r>
+            <a:r>
+              <a:rPr sz="1500">
+                <a:solidFill>
+                  <a:srgbClr val="202020"/>
+                </a:solidFill>
+                <a:latin typeface="Calibri"/>
+              </a:rPr>
+              <a:t> on the same frame.</a:t>
+            </a:r>
+          </a:p>
+        </p:txBody>
+      </p:sp>
+      <p:sp>
+        <p:nvSpPr>
+          <p:cNvPr id="7" name="TextBox 6"/>
+          <p:cNvSpPr txBox="1"/>
+          <p:nvPr/>
+        </p:nvSpPr>
+        <p:spPr>
+          <a:xfrm>
+            <a:off x="502920" y="6291072"/>
+            <a:ext cx="11185855" cy="457200"/>
+          </a:xfrm>
+          <a:prstGeom prst="rect">
+            <a:avLst/>
+          </a:prstGeom>
+          <a:noFill/>
+        </p:spPr>
+        <p:txBody>
+          <a:bodyPr wrap="square">
+            <a:spAutoFit/>
+          </a:bodyPr>
+          <a:lstStyle/>
+          <a:p>
+            <a:pPr algn="l">
+              <a:spcAft>
+                <a:spcPts val="600"/>
+              </a:spcAft>
+            </a:pPr>
+            <a:r>
+              <a:rPr sz="1100">
+                <a:solidFill>
+                  <a:srgbClr val="666666"/>
+                </a:solidFill>
+                <a:latin typeface="Calibri"/>
+              </a:rPr>
+              <a:t>A philosophical claim you can </a:t>
+            </a:r>
+            <a:r>
+              <a:rPr sz="1100" b="1">
+                <a:solidFill>
+                  <a:srgbClr val="A67500"/>
+                </a:solidFill>
+                <a:latin typeface="Calibri"/>
+              </a:rPr>
+              <a:t>ship, measure, and be wrong about</a:t>
+            </a:r>
+            <a:r>
+              <a:rPr sz="1100">
+                <a:solidFill>
+                  <a:srgbClr val="666666"/>
+                </a:solidFill>
+                <a:latin typeface="Calibri"/>
+              </a:rPr>
+              <a:t> outranks one you can only defend.</a:t>
+            </a:r>
+          </a:p>
+        </p:txBody>
+      </p:sp>
+    </p:spTree>
+  </p:cSld>
+  <p:clrMapOvr>
+    <a:masterClrMapping/>
+  </p:clrMapOvr>
+</p:sld>
+</file>
+
+<file path=ppt/slides/slide15.xml><?xml version="1.0" encoding="utf-8"?>
+<p:sld xmlns:a="http://schemas.openxmlformats.org/drawingml/2006/main" xmlns:p="http://schemas.openxmlformats.org/presentationml/2006/main" xmlns:r="http://schemas.openxmlformats.org/officeDocument/2006/relationships">
+  <p:cSld>
+    <p:spTree>
+      <p:nvGrpSpPr>
+        <p:cNvPr id="1" name=""/>
+        <p:cNvGrpSpPr/>
+        <p:nvPr/>
+      </p:nvGrpSpPr>
+      <p:grpSpPr/>
+      <p:sp>
+        <p:nvSpPr>
+          <p:cNvPr id="2" name="Rectangle 1"/>
+          <p:cNvSpPr/>
+          <p:nvPr/>
+        </p:nvSpPr>
+        <p:spPr>
+          <a:xfrm>
+            <a:off x="0" y="0"/>
+            <a:ext cx="12191695" cy="658368"/>
+          </a:xfrm>
+          <a:prstGeom prst="rect">
+            <a:avLst/>
+          </a:prstGeom>
+          <a:solidFill>
+            <a:srgbClr val="2B6CB0"/>
+          </a:solidFill>
+          <a:ln>
+            <a:noFill/>
+          </a:ln>
+        </p:spPr>
+        <p:style>
+          <a:lnRef idx="1">
+            <a:schemeClr val="accent1"/>
+          </a:lnRef>
+          <a:fillRef idx="3">
+            <a:schemeClr val="accent1"/>
+          </a:fillRef>
+          <a:effectRef idx="2">
+            <a:schemeClr val="accent1"/>
+          </a:effectRef>
+          <a:fontRef idx="minor">
+            <a:schemeClr val="lt1"/>
+          </a:fontRef>
+        </p:style>
+        <p:txBody>
+          <a:bodyPr rtlCol="0" anchor="ctr" lIns="411480" tIns="73152"/>
+          <a:lstStyle/>
+          <a:p>
+            <a:pPr algn="ctr"/>
+            <a:r>
+              <a:rPr sz="2200" b="1">
+                <a:solidFill>
+                  <a:srgbClr val="FFFFFF"/>
+                </a:solidFill>
+                <a:latin typeface="Calibri"/>
+              </a:rPr>
+              <a:t>Reproducibility &amp; takeaways</a:t>
+            </a:r>
+          </a:p>
+        </p:txBody>
+      </p:sp>
+      <p:sp>
+        <p:nvSpPr>
+          <p:cNvPr id="3" name="TextBox 2"/>
+          <p:cNvSpPr txBox="1"/>
+          <p:nvPr/>
+        </p:nvSpPr>
+        <p:spPr>
+          <a:xfrm>
+            <a:off x="11368735" y="6473952"/>
+            <a:ext cx="640080" cy="274320"/>
+          </a:xfrm>
+          <a:prstGeom prst="rect">
+            <a:avLst/>
+          </a:prstGeom>
+          <a:noFill/>
+        </p:spPr>
+        <p:txBody>
+          <a:bodyPr wrap="square">
+            <a:spAutoFit/>
+          </a:bodyPr>
+          <a:lstStyle/>
+          <a:p>
+            <a:pPr algn="r">
+              <a:spcAft>
+                <a:spcPts val="600"/>
+              </a:spcAft>
+            </a:pPr>
+            <a:r>
+              <a:rPr sz="1000">
+                <a:solidFill>
+                  <a:srgbClr val="666666"/>
+                </a:solidFill>
+                <a:latin typeface="Calibri"/>
+              </a:rPr>
+              <a:t>15</a:t>
             </a:r>
           </a:p>
         </p:txBody>
@@ -6513,7 +7758,7 @@
 </p:sld>
 </file>
 
-<file path=ppt/slides/slide14.xml><?xml version="1.0" encoding="utf-8"?>
+<file path=ppt/slides/slide16.xml><?xml version="1.0" encoding="utf-8"?>
 <p:sld xmlns:a="http://schemas.openxmlformats.org/drawingml/2006/main" xmlns:p="http://schemas.openxmlformats.org/presentationml/2006/main" xmlns:r="http://schemas.openxmlformats.org/officeDocument/2006/relationships">
   <p:cSld>
     <p:spTree>

--- a/benchmarks/ieee_bds_2026/SecureAI_Bond_2026_slides.pptx
+++ b/benchmarks/ieee_bds_2026/SecureAI_Bond_2026_slides.pptx
@@ -122,6 +122,343 @@
 </p:presentation>
 </file>
 
+<file path=ppt/charts/chart1.xml><?xml version="1.0" encoding="utf-8"?>
+<c:chartSpace xmlns:c="http://schemas.openxmlformats.org/drawingml/2006/chart" xmlns:a="http://schemas.openxmlformats.org/drawingml/2006/main" xmlns:r="http://schemas.openxmlformats.org/officeDocument/2006/relationships">
+  <c:date1904 val="0"/>
+  <c:chart>
+    <c:autoTitleDeleted val="1"/>
+    <c:plotArea>
+      <c:barChart>
+        <c:barDir val="bar"/>
+        <c:grouping val="clustered"/>
+        <c:ser>
+          <c:idx val="0"/>
+          <c:order val="0"/>
+          <c:tx>
+            <c:strRef>
+              <c:f>Sheet1!$B$1</c:f>
+              <c:strCache>
+                <c:ptCount val="1"/>
+                <c:pt idx="0">
+                  <c:v>mostly carried by G</c:v>
+                </c:pt>
+              </c:strCache>
+            </c:strRef>
+          </c:tx>
+          <c:spPr>
+            <a:solidFill>
+              <a:srgbClr val="2171B5"/>
+            </a:solidFill>
+          </c:spPr>
+          <c:cat>
+            <c:strRef>
+              <c:f>Sheet1!$A$2:$A$12</c:f>
+              <c:strCache>
+                <c:ptCount val="11"/>
+                <c:pt idx="0">
+                  <c:v>autonomy</c:v>
+                </c:pt>
+                <c:pt idx="1">
+                  <c:v>environmental</c:v>
+                </c:pt>
+                <c:pt idx="2">
+                  <c:v>privacy</c:v>
+                </c:pt>
+                <c:pt idx="3">
+                  <c:v>identity attack</c:v>
+                </c:pt>
+                <c:pt idx="4">
+                  <c:v>physical</c:v>
+                </c:pt>
+                <c:pt idx="5">
+                  <c:v>epistemic</c:v>
+                </c:pt>
+                <c:pt idx="6">
+                  <c:v>fairness</c:v>
+                </c:pt>
+                <c:pt idx="7">
+                  <c:v>care</c:v>
+                </c:pt>
+                <c:pt idx="8">
+                  <c:v>loyalty</c:v>
+                </c:pt>
+                <c:pt idx="9">
+                  <c:v>legitimacy</c:v>
+                </c:pt>
+                <c:pt idx="10">
+                  <c:v>purity</c:v>
+                </c:pt>
+              </c:strCache>
+            </c:strRef>
+          </c:cat>
+          <c:val>
+            <c:numRef>
+              <c:f>Sheet1!$B$2:$B$12</c:f>
+              <c:numCache>
+                <c:formatCode>General</c:formatCode>
+                <c:ptCount val="11"/>
+                <c:pt idx="5">
+                  <c:v>0.9396</c:v>
+                </c:pt>
+                <c:pt idx="6">
+                  <c:v>0.9836</c:v>
+                </c:pt>
+                <c:pt idx="7">
+                  <c:v>0.9873</c:v>
+                </c:pt>
+                <c:pt idx="8">
+                  <c:v>0.99</c:v>
+                </c:pt>
+                <c:pt idx="9">
+                  <c:v>0.9986</c:v>
+                </c:pt>
+                <c:pt idx="10">
+                  <c:v>0.9997</c:v>
+                </c:pt>
+              </c:numCache>
+            </c:numRef>
+          </c:val>
+        </c:ser>
+        <c:ser>
+          <c:idx val="1"/>
+          <c:order val="1"/>
+          <c:tx>
+            <c:strRef>
+              <c:f>Sheet1!$C$1</c:f>
+              <c:strCache>
+                <c:ptCount val="1"/>
+                <c:pt idx="0">
+                  <c:v>mixed</c:v>
+                </c:pt>
+              </c:strCache>
+            </c:strRef>
+          </c:tx>
+          <c:spPr>
+            <a:solidFill>
+              <a:srgbClr val="1B9E77"/>
+            </a:solidFill>
+          </c:spPr>
+          <c:cat>
+            <c:strRef>
+              <c:f>Sheet1!$A$2:$A$12</c:f>
+              <c:strCache>
+                <c:ptCount val="11"/>
+                <c:pt idx="0">
+                  <c:v>autonomy</c:v>
+                </c:pt>
+                <c:pt idx="1">
+                  <c:v>environmental</c:v>
+                </c:pt>
+                <c:pt idx="2">
+                  <c:v>privacy</c:v>
+                </c:pt>
+                <c:pt idx="3">
+                  <c:v>identity attack</c:v>
+                </c:pt>
+                <c:pt idx="4">
+                  <c:v>physical</c:v>
+                </c:pt>
+                <c:pt idx="5">
+                  <c:v>epistemic</c:v>
+                </c:pt>
+                <c:pt idx="6">
+                  <c:v>fairness</c:v>
+                </c:pt>
+                <c:pt idx="7">
+                  <c:v>care</c:v>
+                </c:pt>
+                <c:pt idx="8">
+                  <c:v>loyalty</c:v>
+                </c:pt>
+                <c:pt idx="9">
+                  <c:v>legitimacy</c:v>
+                </c:pt>
+                <c:pt idx="10">
+                  <c:v>purity</c:v>
+                </c:pt>
+              </c:strCache>
+            </c:strRef>
+          </c:cat>
+          <c:val>
+            <c:numRef>
+              <c:f>Sheet1!$C$2:$C$12</c:f>
+              <c:numCache>
+                <c:formatCode>General</c:formatCode>
+                <c:ptCount val="11"/>
+                <c:pt idx="3">
+                  <c:v>0.6658</c:v>
+                </c:pt>
+                <c:pt idx="4">
+                  <c:v>0.8197</c:v>
+                </c:pt>
+              </c:numCache>
+            </c:numRef>
+          </c:val>
+        </c:ser>
+        <c:ser>
+          <c:idx val="2"/>
+          <c:order val="2"/>
+          <c:tx>
+            <c:strRef>
+              <c:f>Sheet1!$D$1</c:f>
+              <c:strCache>
+                <c:ptCount val="1"/>
+                <c:pt idx="0">
+                  <c:v>specific</c:v>
+                </c:pt>
+              </c:strCache>
+            </c:strRef>
+          </c:tx>
+          <c:spPr>
+            <a:solidFill>
+              <a:srgbClr val="D95F02"/>
+            </a:solidFill>
+          </c:spPr>
+          <c:cat>
+            <c:strRef>
+              <c:f>Sheet1!$A$2:$A$12</c:f>
+              <c:strCache>
+                <c:ptCount val="11"/>
+                <c:pt idx="0">
+                  <c:v>autonomy</c:v>
+                </c:pt>
+                <c:pt idx="1">
+                  <c:v>environmental</c:v>
+                </c:pt>
+                <c:pt idx="2">
+                  <c:v>privacy</c:v>
+                </c:pt>
+                <c:pt idx="3">
+                  <c:v>identity attack</c:v>
+                </c:pt>
+                <c:pt idx="4">
+                  <c:v>physical</c:v>
+                </c:pt>
+                <c:pt idx="5">
+                  <c:v>epistemic</c:v>
+                </c:pt>
+                <c:pt idx="6">
+                  <c:v>fairness</c:v>
+                </c:pt>
+                <c:pt idx="7">
+                  <c:v>care</c:v>
+                </c:pt>
+                <c:pt idx="8">
+                  <c:v>loyalty</c:v>
+                </c:pt>
+                <c:pt idx="9">
+                  <c:v>legitimacy</c:v>
+                </c:pt>
+                <c:pt idx="10">
+                  <c:v>purity</c:v>
+                </c:pt>
+              </c:strCache>
+            </c:strRef>
+          </c:cat>
+          <c:val>
+            <c:numRef>
+              <c:f>Sheet1!$D$2:$D$12</c:f>
+              <c:numCache>
+                <c:formatCode>General</c:formatCode>
+                <c:ptCount val="11"/>
+                <c:pt idx="0">
+                  <c:v>0.4945</c:v>
+                </c:pt>
+                <c:pt idx="1">
+                  <c:v>0.5538</c:v>
+                </c:pt>
+                <c:pt idx="2">
+                  <c:v>0.6421</c:v>
+                </c:pt>
+              </c:numCache>
+            </c:numRef>
+          </c:val>
+        </c:ser>
+        <c:axId val="-2068027336"/>
+        <c:axId val="-2113994440"/>
+      </c:barChart>
+      <c:catAx>
+        <c:axId val="-2068027336"/>
+        <c:scaling>
+          <c:orientation val="minMax"/>
+        </c:scaling>
+        <c:delete val="0"/>
+        <c:axPos val="l"/>
+        <c:majorTickMark val="out"/>
+        <c:minorTickMark val="none"/>
+        <c:tickLblPos val="nextTo"/>
+        <c:txPr>
+          <a:bodyPr/>
+          <a:lstStyle/>
+          <a:p>
+            <a:pPr>
+              <a:defRPr sz="900"/>
+            </a:pPr>
+          </a:p>
+        </c:txPr>
+        <c:crossAx val="-2113994440"/>
+        <c:crosses val="autoZero"/>
+        <c:auto val="1"/>
+        <c:lblAlgn val="ctr"/>
+        <c:lblOffset val="100"/>
+        <c:noMultiLvlLbl val="0"/>
+      </c:catAx>
+      <c:valAx>
+        <c:axId val="-2113994440"/>
+        <c:scaling>
+          <c:max val="1.0"/>
+          <c:min val="0.4"/>
+        </c:scaling>
+        <c:delete val="0"/>
+        <c:axPos val="b"/>
+        <c:majorGridlines/>
+        <c:majorTickMark val="out"/>
+        <c:minorTickMark val="none"/>
+        <c:tickLblPos val="nextTo"/>
+        <c:txPr>
+          <a:bodyPr/>
+          <a:lstStyle/>
+          <a:p>
+            <a:pPr>
+              <a:defRPr sz="900"/>
+            </a:pPr>
+          </a:p>
+        </c:txPr>
+        <c:crossAx val="-2068027336"/>
+        <c:crosses val="autoZero"/>
+      </c:valAx>
+    </c:plotArea>
+    <c:legend>
+      <c:legendPos val="b"/>
+      <c:overlay val="0"/>
+      <c:txPr>
+        <a:bodyPr/>
+        <a:lstStyle/>
+        <a:p>
+          <a:pPr>
+            <a:defRPr sz="900"/>
+          </a:pPr>
+        </a:p>
+      </c:txPr>
+    </c:legend>
+    <c:dispBlanksAs val="gap"/>
+  </c:chart>
+  <c:txPr>
+    <a:bodyPr/>
+    <a:lstStyle/>
+    <a:p>
+      <a:pPr>
+        <a:defRPr sz="1800"/>
+      </a:pPr>
+      <a:endParaRPr lang="en-US"/>
+    </a:p>
+  </c:txPr>
+  <c:externalData r:id="rId1">
+    <c:autoUpdate val="0"/>
+  </c:externalData>
+</c:chartSpace>
+</file>
+
 <file path=ppt/notesMasters/notesMaster1.xml><?xml version="1.0" encoding="utf-8"?>
 <p:notesMaster xmlns:a="http://schemas.openxmlformats.org/drawingml/2006/main" xmlns:p="http://schemas.openxmlformats.org/presentationml/2006/main" xmlns:r="http://schemas.openxmlformats.org/officeDocument/2006/relationships">
   <p:cSld>
@@ -517,25 +854,31 @@
           <a:lstStyle/>
           <a:p>
             <a:r>
-              <a:t>TIMING: ~12-15 min talk + Q&amp;A. This paper was ACCEPTED at IEEE BigDataService 2026, Special Track on Secure AI (both reviews: weak accept).</a:t>
+              <a:t>TIMING: 16 slides, but the live talk is 14 (two backups after Thanks). Plan ~18 min + Q&amp;A: problem 1:30, approach 1:45, findings 3:30, validation 1:15, exploit 2:00, kernel 1:45, defense 1:45, bifactor 1:30, implications 1:15, philosophy 1:00, takeaways 1:00.</a:t>
             </a:r>
           </a:p>
           <a:p/>
           <a:p>
             <a:r>
+              <a:t>This paper was ACCEPTED at IEEE BigDataService 2026, Special Track on Secure AI (both reviews: weak accept).</a:t>
+            </a:r>
+          </a:p>
+          <a:p/>
+          <a:p>
+            <a:r>
               <a:t>If you are not Andrew: "I'm presenting on behalf of Andrew Bond, San Jose State University."</a:t>
             </a:r>
           </a:p>
           <a:p/>
           <a:p>
             <a:r>
-              <a:t>ONE-SENTENCE SUMMARY of the whole talk: LLMs that make moral/safety decisions can be manipulated just by REWORDING the input — we built a framework that measures exactly WHICH rewordings move WHICH models, showed the attack works end-to-end against a real moderation pipeline, and (new since the paper) built and measured a defense.</a:t>
+              <a:t>ONE-SENTENCE SUMMARY: LLMs that make moral/safety decisions can be manipulated just by REWORDING the input — we built a framework that measures exactly WHICH rewordings move WHICH models, showed the attack works end-to-end against a real moderation pipeline, and (since submission) built and measured a defense and stress-tested the coordinate system itself.</a:t>
             </a:r>
           </a:p>
           <a:p/>
           <a:p>
             <a:r>
-              <a:t>The word "geometric" just means: a judgment is a POINT in a multi-dimensional harm space, and we measure how far perturbations MOVE that point (displacement). No deep math needed on stage.</a:t>
+              <a:t>"Geometric" just means: a judgment is a POINT in a multi-dimensional harm space; perturbations MOVE the point (displacement). No deep math on stage.</a:t>
             </a:r>
           </a:p>
         </p:txBody>
@@ -605,37 +948,42 @@
           <a:lstStyle/>
           <a:p>
             <a:r>
-              <a:t>IMPORTANT FRAMING: slides 10-11 are work done AFTER the camera-ready. Say explicitly: "these results are post-publication, from the extended version in preparation." Do not present them as claims of the accepted paper.</a:t>
+              <a:t>Post-camera-ready. THE SLIDE'S QUESTION: ICC 0.97 showed the dimensions are reliably MEASURABLE — a skeptic asks whether they are DISTINCT. We ran the test against ourselves, pre-registered.</a:t>
             </a:r>
           </a:p>
           <a:p/>
           <a:p>
             <a:r>
-              <a:t>THE IDEA: a single wording is one arbitrary member of an equivalence class of morally identical texts. So don't judge the wording — judge the CLASS: generate m paraphrases of the input, average the per-dimension perception scores over the class, then decide. (For ML folks: semantic randomized smoothing / SmoothLLM, but with meaning-preserving paraphrases.)</a:t>
+              <a:t>CRITICAL SCOPE (bottom of slide, say it): this is measured on the learned-encoder instantiation (xbse) over moderation corpora — NOT a factor analysis of the judge panel. The 7-D mapping on the right is a TRANSFER HYPOTHESIS. If asked "did you factor-analyze your own panel's 31x7 scores?" — answer: "not yet; that's part of the extended version's native re-run."</a:t>
             </a:r>
           </a:p>
           <a:p/>
           <a:p>
             <a:r>
-              <a:t>NUMBERS: theta_d = decision-layer drift under re-description; lower is better; bar of 0.5 was PRE-REGISTERED. At scale (60 held-out items, m=6): raw drift 0.407 -&gt; 0.219. The mechanism HALVES drift and meets the bar.</a:t>
+              <a:t>RESULTS: a general moral-valence channel G is real and strong (cross-dataset AUROC 0.856, n=51k). Five named axes — purity, legitimacy, loyalty, care, fairness — are &gt;=0.98 predictable from G on independent corpora: their gate-passing transfer is general valence, not their named dimension. The 12x12 specificity gate confirms it independently: specific = environmental, privacy, identity_attack, autonomy, physical(+.08, marginal); demoted = the rest. The pre-registered P1 FAILED (4/11 diagonal-dominant vs required 8) — we publish the failure.</a:t>
             </a:r>
           </a:p>
           <a:p/>
           <a:p>
             <a:r>
-              <a:t>THE HOLE AND ITS LOCATION: LLM paraphrasers refuse 24% of harmful inputs — exactly the content that matters. Red-team fix: NLLB back-translation through 6 languages refuses NOTHING; theta_d = 0.301 on harmful content. Conclusion: the hole belongs to the GENERATOR, not the mechanism.</a:t>
+              <a:t>CHART: blue = mostly G, teal = mixed, orange = specific; dashed reference at 0.98.</a:t>
             </a:r>
           </a:p>
           <a:p/>
           <a:p>
             <a:r>
-              <a:t>Deployment rule: if the generator refuses -&gt; singleton class -&gt; ESCALATE to a human by default; the audit proof records the class member hashes.</a:t>
+              <a:t>CONSEQUENCE: a scalar harm score is now MEASURED, not argued, to be mostly G — and any scalar robustness score inherits that collapse by construction. Takeaway 2 upgraded.</a:t>
             </a:r>
           </a:p>
           <a:p/>
           <a:p>
             <a:r>
-              <a:t>Caveat if asked: at-scale paraphrases are natural, not adversarial; adversarial-at-scale is open work.</a:t>
+              <a:t>If asked "isn't G-dominance guaranteed by construction (valence-signed training pairs)?": yes — G is a maximally strong competitor by design, which is exactly why SURVIVING it is informative; privacy/autonomy/environmental measurably do.</a:t>
+            </a:r>
+          </a:p>
+          <a:p>
+            <a:r>
+              <a:t>If asked about identity_attack: the gate says specific (+.25), A2 residualization says mixed (G-share 0.67) — the divergence is recorded, not adjudicated; the gate is the registered criterion.</a:t>
             </a:r>
           </a:p>
         </p:txBody>
@@ -705,37 +1053,34 @@
           <a:lstStyle/>
           <a:p>
             <a:r>
-              <a:t>Also post-camera-ready. This answers "is the harm space validated?" at a deeper level: the dimension set is EXTENSIBLE and FALSIFIABLE.</a:t>
+              <a:t>Deployment guidance — four points, one line each:</a:t>
             </a:r>
           </a:p>
           <a:p/>
           <a:p>
             <a:r>
-              <a:t>THE LOOP: residual analysis asks "is there moderation signal the current axes don't carry?" -&gt; flags candidates -&gt; each faces a PRE-REGISTERED admission gate (cross-dataset transfer, margin over null, fuzz test).</a:t>
+              <a:t>1. WHERE TO LOOK: the live attack surface is salience repackaging — especially euphemistic minimization. Watch for measured, liability-flavored language hiding severity.</a:t>
+            </a:r>
+          </a:p>
+          <a:p>
+            <a:r>
+              <a:t>2. PROMPT DEFENSES ARE BOUNDED: telling the model "you are being manipulated" recovers only ~38% — co-occurring with universal overconfidence (ECE 0.19-0.42). System-prompt guardrails fail two times out of three.</a:t>
+            </a:r>
+          </a:p>
+          <a:p>
+            <a:r>
+              <a:t>3. ASK THE RIGHT QUESTION: not "what's the robustness score?" but "WHICH vulnerabilities matter for OUR use case?" — profiles, not rankings.</a:t>
+            </a:r>
+          </a:p>
+          <a:p>
+            <a:r>
+              <a:t>4. HARDENING TARGET: the fact-extraction / perception front-end — downstream kernels inherit its failures (slide 8), and slide 9 showed perception CAN be hardened measurably.</a:t>
             </a:r>
           </a:p>
           <a:p/>
           <a:p>
             <a:r>
-              <a:t>SCORECARD — say all three outcomes, the rejections are the credibility: 3 flagged. 1 VALIDATED: identity_attack, held-out AUROC 0.80, CI [0.78-0.83], on two independent corpora, n=6400 — now live as a 10th channel. 1 RETRACTED: threat (failed a balanced resample). 1 DECLINED: sexual content — analysis showed it's a PLATFORM POLICY signal, not a moral axis (consensual explicitness isn't a moral violation; the moral weight was harassment, already covered). "The gate has teeth."</a:t>
-            </a:r>
-          </a:p>
-          <a:p/>
-          <a:p>
-            <a:r>
-              <a:t>Also: identity_attack is the dominant feature of the learned moderation contraction (AUROC 0.863, leakage-controlled), and invariance holds cross-lingually (0.72-0.80 across Spanish/Arabic/Chinese/Hindi/Swahili, harmful ≈ benign).</a:t>
-            </a:r>
-          </a:p>
-          <a:p/>
-          <a:p>
-            <a:r>
-              <a:t>HONESTY LINE if asked: these validations are on the learned-encoder perception layer (xbse), not on the LLM judges of the paper — re-running the paper's five tracks natively through this instrument IS the extended version.</a:t>
-            </a:r>
-          </a:p>
-          <a:p/>
-          <a:p>
-            <a:r>
-              <a:t>If asked "isn't identity_attack just a Perspective API label?": yes, the LABEL exists; the contribution is the INSTRUMENT — discovery from residuals, pre-registered admission, provenance-carrying deployment.</a:t>
+              <a:t>ECE = expected calibration error: gap between stated confidence and actual accuracy.</a:t>
             </a:r>
           </a:p>
         </p:txBody>
@@ -805,34 +1150,25 @@
           <a:lstStyle/>
           <a:p>
             <a:r>
-              <a:t>Deployment guidance — four points, one line each:</a:t>
+              <a:t>ONE-MINUTE SLIDE — the zoom-out. Deliver the headline sentence, one beat on each column, move on.</a:t>
             </a:r>
           </a:p>
           <a:p/>
           <a:p>
             <a:r>
-              <a:t>1. WHERE TO LOOK: the live attack surface is salience repackaging — especially euphemistic minimization. Watch for measured, liability-flavored language hiding severity.</a:t>
-            </a:r>
-          </a:p>
-          <a:p>
-            <a:r>
-              <a:t>2. PROMPT DEFENSES ARE BOUNDED: telling the model "you are being manipulated" recovers only ~38% — and this ceiling co-occurs with universal overconfidence (ECE 0.19-0.42). System-prompt guardrails fail two times out of three.</a:t>
-            </a:r>
-          </a:p>
-          <a:p>
-            <a:r>
-              <a:t>3. ASK THE RIGHT QUESTION: not "what's the robustness score?" but "WHICH vulnerabilities matter for OUR use case?" — profiles, not rankings.</a:t>
-            </a:r>
-          </a:p>
-          <a:p>
-            <a:r>
-              <a:t>4. HARDENING TARGET: the fact-extraction / perception front-end — downstream kernels inherit its failures (slide 9). And slide 10 showed perception CAN be hardened measurably.</a:t>
+              <a:t>LEFT (all measured, grounded in this talk): the method treats constructs usually settled by argument as INSTRUMENTS — a space (points/displacement/invariance), pre-registration, and admission gates that retract. Evidence from this very talk: the bifactor test FAILED its own P1; the rights-channel rescue was REFUTED. Claims that don't transfer get publicly demoted.</a:t>
             </a:r>
           </a:p>
           <a:p/>
           <a:p>
             <a:r>
-              <a:t>ECE = expected calibration error: gap between stated confidence and actual accuracy.</a:t>
+              <a:t>RIGHT (explicitly labeled a conjecture, NOT tested here): the wager that normative and aesthetic structure is geometric — compressibility and coarse-graining under an observer — one instrument across harm, aesthetics, law, cognition.</a:t>
+            </a:r>
+          </a:p>
+          <a:p/>
+          <a:p>
+            <a:r>
+              <a:t>Q&amp;A DISCIPLINE: if someone pushes on the conjecture ("is this science or manifesto?"), the full answer is: "that's the motivating conjecture of a larger program, not a result — this talk contributes the harm instance and its falsification record." Say exactly that and stop. Do NOT elaborate on aesthetics in a Secure AI Q&amp;A.</a:t>
             </a:r>
           </a:p>
         </p:txBody>
@@ -902,39 +1238,45 @@
           <a:lstStyle/>
           <a:p>
             <a:r>
-              <a:t>Reproducibility first (quick): everything is pip-installable — the paper artifact (agi-hpc, tag bds2026-v1), and the new instrument: moral-spectrum-analyzer + xbse, both on PyPI as of July 2026. Decision kernel: ErisML / DEME v3, open source. Whole evaluation ran under $50/day on Kaggle; the validation panel runs on the open NRP API.</a:t>
+              <a:t>THE FOUR TAKEAWAYS — read slowly; this is the photographed slide:</a:t>
+            </a:r>
+          </a:p>
+          <a:p>
+            <a:r>
+              <a:t>1. Vulnerabilities are SELECTIVE — salience manipulation is the attack surface.</a:t>
+            </a:r>
+          </a:p>
+          <a:p>
+            <a:r>
+              <a:t>2. Robustness profiles are DISSOCIABLE — and a single score is now MEASURED to be mostly general valence (bifactor, slide 10).</a:t>
+            </a:r>
+          </a:p>
+          <a:p>
+            <a:r>
+              <a:t>3. The exploit is END-TO-END — it flips scalar thresholds AND typed rule-engine verdicts.</a:t>
+            </a:r>
+          </a:p>
+          <a:p>
+            <a:r>
+              <a:t>4. It is DEFENSIBLE — class averaging halves natural-paraphrase drift; adversarial-at-scale is the registered open item.</a:t>
             </a:r>
           </a:p>
           <a:p/>
           <a:p>
             <a:r>
-              <a:t>THE FOUR TAKEAWAYS — read them slowly, this is the summary the audience leaves with:</a:t>
-            </a:r>
-          </a:p>
-          <a:p>
-            <a:r>
-              <a:t>1. Vulnerabilities are SELECTIVE — salience manipulation is the attack surface.</a:t>
-            </a:r>
-          </a:p>
-          <a:p>
-            <a:r>
-              <a:t>2. Robustness profiles are DISSOCIABLE — no single score is safe; certify per-surface.</a:t>
-            </a:r>
-          </a:p>
-          <a:p>
-            <a:r>
-              <a:t>3. The exploit is END-TO-END — it flips scalar thresholds AND typed rule-engine verdicts.</a:t>
-            </a:r>
-          </a:p>
-          <a:p>
-            <a:r>
-              <a:t>4. (since submission) It is DEFENSIBLE — deciding on the paraphrase CLASS instead of the wording halves drift, with the residual hole located and escalated.</a:t>
+              <a:t>Attack -&gt; measurement -&gt; defense -&gt; instrument audit. That's the arc.</a:t>
             </a:r>
           </a:p>
           <a:p/>
           <a:p>
             <a:r>
-              <a:t>Attack -&gt; measurement -&gt; defense. That's the arc.</a:t>
+              <a:t>Reproducibility (footer, one breath): pip install agi-hpc (tag bds2026-v2), moral-spectrum-analyzer, xbse; kernel ErisML/DEME v3; $50/day on Kaggle; validation panel on the open NRP API.</a:t>
+            </a:r>
+          </a:p>
+          <a:p/>
+          <a:p>
+            <a:r>
+              <a:t>Spoken closer after takeaway 4 (borrowed from slide 12): "One instrument today — many domains tomorrow. Thank you." </a:t>
             </a:r>
           </a:p>
         </p:txBody>
@@ -1004,44 +1346,245 @@
           <a:lstStyle/>
           <a:p>
             <a:r>
-              <a:t>Q&amp;A PREP — likely questions and short answers:</a:t>
+              <a:t>Q&amp;A PREP — hardest questions, one-line answers:</a:t>
             </a:r>
           </a:p>
           <a:p/>
           <a:p>
             <a:r>
-              <a:t>Q: Why 7 dimensions and not 9? A: Two DEME axes (rights, epistemic quality) produced unreliable model scores; dropped for measurement reliability and disclosed. The extended version scores natively in 9+1-D.</a:t>
-            </a:r>
-          </a:p>
-          <a:p>
-            <a:r>
-              <a:t>Q: Isn't this just prompt sensitivity? A: Prompt sensitivity is undirected noise; we show DIRECTED, selective, reproducible displacement under meaning-preserving transforms, with control arms — plus an end-to-end decision consequence.</a:t>
-            </a:r>
-          </a:p>
-          <a:p>
-            <a:r>
-              <a:t>Q: How is the defense different from SmoothLLM / randomized smoothing? A: Same aggregation idea, but the perturbation family is meaning-preserving PARAPHRASE (semantic, not character-level), the certified quantity is a multi-dimensional moral decision, and the paraphrase generator explicitly joins the trust boundary (refusal -&gt; escalate).</a:t>
-            </a:r>
-          </a:p>
-          <a:p>
-            <a:r>
-              <a:t>Q: Do the new results change the accepted paper? A: No — they're clearly labeled post-camera-ready; extended/journal version in preparation.</a:t>
-            </a:r>
-          </a:p>
-          <a:p>
-            <a:r>
-              <a:t>Q: Model coverage is small (5 models / 2 families)? A: Acknowledged in the paper; the harm-space validation panel adds 6 open models / 5 families; trend claims are flagged as suggestive.</a:t>
-            </a:r>
-          </a:p>
-          <a:p>
-            <a:r>
-              <a:t>Q: Human agreement rather than inter-model agreement? A: Open panel was chosen for reproducibility (no proprietary endpoints); human-rater validation is future work.</a:t>
+              <a:t>Q: You showed ICC 0.97, then a bifactor result saying most axes are one factor — measured on different encoders. Did you factor-analyze the panel's own scores? A: Not yet — the bifactor claim is about the encoder instantiation; the direct panel factor analysis is part of the extended version. The slide's 7-D mapping is the transfer hypothesis, labeled as such.</a:t>
+            </a:r>
+          </a:p>
+          <a:p>
+            <a:r>
+              <a:t>Q: Isn't G-dominance guaranteed by construction? A: G is a maximally strong competitor by design — which is why surviving it is informative; privacy, autonomy, environmental measurably do.</a:t>
+            </a:r>
+          </a:p>
+          <a:p>
+            <a:r>
+              <a:t>Q: Your drift bar 0.5 is met by the raw pipeline (0.407). What did the defense buy? A: On natural paraphrases the bar doesn't bind — it was set against adversarial transforms (raw 0.67-0.85); the at-scale result is the HALVING, confirmed on harmful content via a non-refusing generator; defended-adversarial is the registered open item.</a:t>
+            </a:r>
+          </a:p>
+          <a:p>
+            <a:r>
+              <a:t>Q: With averaging on, how many gold items still flip? What does 13.7% become? A: theta_d is per-dimension movement, not a flip rate — the defended verdict-flip table is the pending like-for-like comparison in the extended version. Fair ask.</a:t>
+            </a:r>
+          </a:p>
+          <a:p>
+            <a:r>
+              <a:t>Q: Euphemism deletes information — isn't a lower score rational? A: Gold transforms are hand-audited to preserve stated facts; the DEME leg shows the same facts get EXTRACTED differently — perception failure, not updating.</a:t>
+            </a:r>
+          </a:p>
+          <a:p>
+            <a:r>
+              <a:t>Q: Six LLMs agreeing isn't validity — where are humans? A: Agreed — the panel establishes reliability and cross-family consistency; single-rater ICC ~0.84; human-rater validation is future work.</a:t>
+            </a:r>
+          </a:p>
+          <a:p>
+            <a:r>
+              <a:t>Q: Rule-engine result is garbage-in-garbage-out by construction? A: The quantification is the finding — 13.7% flips and -39% forbid rebut the assumption that a symbolic layer confers robustness, and locate the hardening budget.</a:t>
+            </a:r>
+          </a:p>
+          <a:p>
+            <a:r>
+              <a:t>Q: identity_attack: gate says specific, residualization says 2/3 G, and it dominates your contraction — is the contraction re-measuring valence? A: The divergence is recorded, not adjudicated; the +0.084 out-of-fold lift is against a baseline already containing the G-heavy axes, which bounds how much can be G-duplication.</a:t>
+            </a:r>
+          </a:p>
+          <a:p>
+            <a:r>
+              <a:t>Q: Isn't this just prompt sensitivity? A: Prompt sensitivity is undirected noise; this is DIRECTED, selective, reproducible displacement under meaning-preserving transforms, with control arms and a decision consequence.</a:t>
+            </a:r>
+          </a:p>
+          <a:p>
+            <a:r>
+              <a:t>Q: Model coverage small (5 models / 2 families)? A: Acknowledged; the validation panel adds 6 open models / 5 families; trend claims flagged as suggestive.</a:t>
             </a:r>
           </a:p>
           <a:p/>
           <a:p>
             <a:r>
               <a:t>Contact: andrew.bond@sjsu.edu</a:t>
+            </a:r>
+          </a:p>
+        </p:txBody>
+      </p:sp>
+      <p:sp>
+        <p:nvSpPr>
+          <p:cNvPr id="4" name="Slide Number Placeholder 3"/>
+          <p:cNvSpPr>
+            <a:spLocks noGrp="1"/>
+          </p:cNvSpPr>
+          <p:nvPr>
+            <p:ph type="sldNum" idx="5" sz="quarter"/>
+          </p:nvPr>
+        </p:nvSpPr>
+        <p:spPr/>
+      </p:sp>
+    </p:spTree>
+  </p:cSld>
+  <p:clrMapOvr>
+    <a:masterClrMapping/>
+  </p:clrMapOvr>
+</p:notes>
+</file>
+
+<file path=ppt/notesSlides/notesSlide15.xml><?xml version="1.0" encoding="utf-8"?>
+<p:notes xmlns:a="http://schemas.openxmlformats.org/drawingml/2006/main" xmlns:p="http://schemas.openxmlformats.org/presentationml/2006/main" xmlns:r="http://schemas.openxmlformats.org/officeDocument/2006/relationships">
+  <p:cSld>
+    <p:spTree>
+      <p:nvGrpSpPr>
+        <p:cNvPr id="1" name=""/>
+        <p:cNvGrpSpPr/>
+        <p:nvPr/>
+      </p:nvGrpSpPr>
+      <p:grpSpPr>
+        <a:xfrm>
+          <a:off x="0" y="0"/>
+          <a:ext cx="0" cy="0"/>
+          <a:chOff x="0" y="0"/>
+          <a:chExt cx="0" cy="0"/>
+        </a:xfrm>
+      </p:grpSpPr>
+      <p:sp>
+        <p:nvSpPr>
+          <p:cNvPr id="2" name="Slide Image Placeholder 1"/>
+          <p:cNvSpPr>
+            <a:spLocks noGrp="1"/>
+          </p:cNvSpPr>
+          <p:nvPr>
+            <p:ph type="sldImg" idx="2"/>
+          </p:nvPr>
+        </p:nvSpPr>
+        <p:spPr/>
+      </p:sp>
+      <p:sp>
+        <p:nvSpPr>
+          <p:cNvPr id="3" name="Notes Placeholder 2"/>
+          <p:cNvSpPr>
+            <a:spLocks noGrp="1"/>
+          </p:cNvSpPr>
+          <p:nvPr>
+            <p:ph type="body" idx="3" sz="quarter"/>
+          </p:nvPr>
+        </p:nvSpPr>
+        <p:spPr/>
+        <p:txBody>
+          <a:bodyPr/>
+          <a:lstStyle/>
+          <a:p>
+            <a:r>
+              <a:t>BACKUP — show if asked "where do the 7 dimensions come from?"</a:t>
+            </a:r>
+          </a:p>
+          <a:p/>
+          <a:p>
+            <a:r>
+              <a:t>They are a PROJECTION of the DEME v3 9-axis moral vector: four map directly, three partially, two (rights, epistemic quality) are NOT scored — they produced unreliable judgments in preliminary testing, disclosed rather than hidden. Key phrase: "a reliability-driven projection, not a bijection."</a:t>
+            </a:r>
+          </a:p>
+          <a:p/>
+          <a:p>
+            <a:r>
+              <a:t>If pressed on "identity" mapping weakly to privacy/standing: it is properly fixed by the validated identity_attack channel (backup B2) — now a separately-scored 10th channel in the extended instrument.</a:t>
+            </a:r>
+          </a:p>
+        </p:txBody>
+      </p:sp>
+      <p:sp>
+        <p:nvSpPr>
+          <p:cNvPr id="4" name="Slide Number Placeholder 3"/>
+          <p:cNvSpPr>
+            <a:spLocks noGrp="1"/>
+          </p:cNvSpPr>
+          <p:nvPr>
+            <p:ph type="sldNum" idx="5" sz="quarter"/>
+          </p:nvPr>
+        </p:nvSpPr>
+        <p:spPr/>
+      </p:sp>
+    </p:spTree>
+  </p:cSld>
+  <p:clrMapOvr>
+    <a:masterClrMapping/>
+  </p:clrMapOvr>
+</p:notes>
+</file>
+
+<file path=ppt/notesSlides/notesSlide16.xml><?xml version="1.0" encoding="utf-8"?>
+<p:notes xmlns:a="http://schemas.openxmlformats.org/drawingml/2006/main" xmlns:p="http://schemas.openxmlformats.org/presentationml/2006/main" xmlns:r="http://schemas.openxmlformats.org/officeDocument/2006/relationships">
+  <p:cSld>
+    <p:spTree>
+      <p:nvGrpSpPr>
+        <p:cNvPr id="1" name=""/>
+        <p:cNvGrpSpPr/>
+        <p:nvPr/>
+      </p:nvGrpSpPr>
+      <p:grpSpPr>
+        <a:xfrm>
+          <a:off x="0" y="0"/>
+          <a:ext cx="0" cy="0"/>
+          <a:chOff x="0" y="0"/>
+          <a:chExt cx="0" cy="0"/>
+        </a:xfrm>
+      </p:grpSpPr>
+      <p:sp>
+        <p:nvSpPr>
+          <p:cNvPr id="2" name="Slide Image Placeholder 1"/>
+          <p:cNvSpPr>
+            <a:spLocks noGrp="1"/>
+          </p:cNvSpPr>
+          <p:nvPr>
+            <p:ph type="sldImg" idx="2"/>
+          </p:nvPr>
+        </p:nvSpPr>
+        <p:spPr/>
+      </p:sp>
+      <p:sp>
+        <p:nvSpPr>
+          <p:cNvPr id="3" name="Notes Placeholder 2"/>
+          <p:cNvSpPr>
+            <a:spLocks noGrp="1"/>
+          </p:cNvSpPr>
+          <p:nvPr>
+            <p:ph type="body" idx="3" sz="quarter"/>
+          </p:nvPr>
+        </p:nvSpPr>
+        <p:spPr/>
+        <p:txBody>
+          <a:bodyPr/>
+          <a:lstStyle/>
+          <a:p>
+            <a:r>
+              <a:t>BACKUP — show if asked "is the dimension set fixed/asserted?" or "what's the discovery loop?"</a:t>
+            </a:r>
+          </a:p>
+          <a:p/>
+          <a:p>
+            <a:r>
+              <a:t>THE LOOP: residual analysis asks "is there moderation signal the current axes don't carry?" -&gt; flags candidates -&gt; each faces a PRE-REGISTERED admission gate (cross-dataset transfer, margin over null, fuzz test).</a:t>
+            </a:r>
+          </a:p>
+          <a:p/>
+          <a:p>
+            <a:r>
+              <a:t>SCORECARD — the rejections are the credibility: 3 flagged. 1 VALIDATED: identity_attack, held-out AUROC 0.80 CI [0.78-0.83], two corpora, n=6400 — live as a 10th channel. 1 RETRACTED: threat (failed balanced resample). 1 DECLINED: sexual content — a PLATFORM POLICY signal, not a moral axis (consensual explicitness isn't a moral violation; the moral weight was harassment, already covered). PLUS: a registered rescue of the rights channel was REFUTED (trained 0.509 vs null 0.512) — it stays a hand-specified hard channel. The gate really rejects, in both directions.</a:t>
+            </a:r>
+          </a:p>
+          <a:p/>
+          <a:p>
+            <a:r>
+              <a:t>Also: cross-lingual invariance at scale 0.72-0.80 across es/ar/zh/hi/sw, harmful ≈ benign.</a:t>
+            </a:r>
+          </a:p>
+          <a:p/>
+          <a:p>
+            <a:r>
+              <a:t>HONESTY LINE: these validations are on the learned-encoder perception layer (xbse); re-running the paper's five tracks natively through this instrument IS the extended version.</a:t>
+            </a:r>
+          </a:p>
+          <a:p>
+            <a:r>
+              <a:t>If asked "isn't identity_attack just a Perspective API label?": the LABEL exists; the contribution is the INSTRUMENT — discovery from residuals, pre-registered admission, provenance-carrying deployment. Two scope notes we volunteer: the gate leg is cross-dataset structure over a jointly-trained pair (strict train-A/test-B and a third corpus are open), and flag/validation corpora overlap at the family level.</a:t>
             </a:r>
           </a:p>
         </p:txBody>
@@ -1111,7 +1654,7 @@
           <a:lstStyle/>
           <a:p>
             <a:r>
-              <a:t>KEY TERM — "behavioral manipulation vulnerability": the attacker never changes the FACTS of a scenario, only the PRESENTATION (wording, tone, irrelevant detail). A secure evaluator should give the same verdict either way. These models don't.</a:t>
+              <a:t>KEY TERM — "behavioral manipulation vulnerability": the attacker never changes the FACTS, only the PRESENTATION (wording, tone, irrelevant detail). A secure evaluator should give the same verdict either way. These models don't.</a:t>
             </a:r>
           </a:p>
           <a:p/>
@@ -1123,13 +1666,13 @@
           <a:p/>
           <a:p>
             <a:r>
-              <a:t>BOTTOM BLOCK (the measurement gap): prior work tests one bias at a time and reports ONE robustness number. Analogy that lands well: a single credit score vs. the full credit report — if failures have n independent directions, one scalar throws away n−1 of them, and you cannot reconstruct them afterwards.</a:t>
+              <a:t>BOTTOM BLOCK: prior work tests one bias at a time and reports ONE robustness number. Analogy that lands: a single credit score vs. the full credit report — with n independent failure directions, one scalar discards n−1 of them, unrecoverably.</a:t>
             </a:r>
           </a:p>
           <a:p/>
           <a:p>
             <a:r>
-              <a:t>Don't over-dwell here; the punchline slides are 8-11.</a:t>
+              <a:t>Don't over-dwell; the punchline slides are 7-10.</a:t>
             </a:r>
           </a:p>
         </p:txBody>
@@ -1199,21 +1742,28 @@
           <a:lstStyle/>
           <a:p>
             <a:r>
-              <a:t>HOW THE FRAMEWORK WORKS (3 steps): (1) every model judgment is scored as a 7-dimensional harm vector — physical, emotional, financial, autonomy, trust, social, identity — each 0-10, so total harm is 0-70. (2) apply perturbations that should NOT change the moral evaluation. (3) measure how far the vector moved = displacement. Output is a per-model VULNERABILITY PROFILE, not one number.</a:t>
+              <a:t>HOW IT WORKS (3 steps): (1) every judgment is scored as a 7-dimensional harm vector — physical, emotional, financial, autonomy, trust, social, identity — each 0-10, total 0-70. (2) apply perturbations that should NOT change the moral evaluation. (3) measure how far the vector moved = displacement. Output: a per-model VULNERABILITY PROFILE, not one number.</a:t>
             </a:r>
           </a:p>
           <a:p/>
           <a:p>
             <a:r>
-              <a:t>$50/day: the whole 5-model, ~8,000-call evaluation fits a Kaggle budget — any team can afford to reproduce this. Worth saying out loud.</a:t>
+              <a:t>$50/day: the whole 5-model, ~8,000-call evaluation fits a Kaggle budget — say it out loud, reproducibility is a selling point.</a:t>
             </a:r>
           </a:p>
           <a:p/>
           <a:p>
             <a:r>
-              <a:t>RIGHT SIDE — DEME v3: the 9-dimension moral vector of the ErisML compiler (Andrew's open-source ethics decision kernel). The 7-D space is the measurement-reliable projection of those 9 dimensions — i.e., the coordinates aren't invented for this paper; two axes were dropped because models couldn't score them reliably.</a:t>
-            </a:r>
-          </a:p>
+              <a:t>RIGHT SIDE: the 7-D space is the measurement-reliable projection of the DEME v3 9-axis moral vector (ErisML compiler). Two axes (rights, epistemic) were dropped for reliability, disclosed. Full correspondence table is in BACKUP B1 — offer it in Q&amp;A rather than walking it live.</a:t>
+            </a:r>
+          </a:p>
+          <a:p/>
+          <a:p>
+            <a:r>
+              <a:t>Gloss the word SALIENCE when it first comes up on the next slide: "salience just means what stands out to the model."</a:t>
+            </a:r>
+          </a:p>
+          <a:p/>
         </p:txBody>
       </p:sp>
       <p:sp>
@@ -1281,25 +1831,30 @@
           <a:lstStyle/>
           <a:p>
             <a:r>
-              <a:t>This table exists because reviewers asked "where do the 7 dimensions come from?" Answer: they are a PROJECTION of the DEME v3 9-axis moral vector. Four map directly, three partially, and two (rights, epistemic quality) are NOT scored — they produced unreliable judgments in preliminary testing, so the paper says so honestly rather than pretending.</a:t>
+              <a:t>THE HEADLINE FINDING of the accepted paper. Vulnerabilities are SELECTIVE, not uniform:</a:t>
             </a:r>
           </a:p>
           <a:p/>
           <a:p>
             <a:r>
-              <a:t>Key phrase: "a reliability-driven projection, not a bijection."</a:t>
+              <a:t>MOVE judgments (all 5 models): linguistic framing (euphemistic vs dramatic rewording), emotional anchoring (paired d_z 0.60-1.06 = medium-to-large), irrelevant sensory detail.</a:t>
+            </a:r>
+          </a:p>
+          <a:p>
+            <a:r>
+              <a:t>DO NOT move judgments: gender swap, evaluation order.</a:t>
             </a:r>
           </a:p>
           <a:p/>
           <a:p>
             <a:r>
-              <a:t>Bottom line of the slide: this evaluation pipeline is the measurement FRONT-END; the ErisML compiler's DEME bridge is the downstream decision kernel that turns harm vectors into a typed verdict (DEMEVerdict). That wiring becomes important on slide 9, where we attack the whole chain.</a:t>
+              <a:t>Common thread (right block): the live surfaces all make morally irrelevant features PERCEPTUALLY SALIENT. The attack mechanism is salience manipulation — and the selectivity proves the framework discriminates real vulnerabilities from noise.</a:t>
             </a:r>
           </a:p>
           <a:p/>
           <a:p>
             <a:r>
-              <a:t>If pressed on "identity" mapping weakly to privacy/standing: note it gets properly fixed by the new identity_attack channel on slide 11.</a:t>
+              <a:t>FOOTNOTE (methods honesty): effect sizes are paired d_z (t/sqrt(n)) — say "paired standardized differences" if a statistician asks; every test is compared against replication control arms — apparent 6-sigma violations in early analyses VANISHED under those controls.</a:t>
             </a:r>
           </a:p>
         </p:txBody>
@@ -1369,30 +1924,25 @@
           <a:lstStyle/>
           <a:p>
             <a:r>
-              <a:t>THE HEADLINE FINDING of the accepted paper. Vulnerabilities are SELECTIVE, not uniform:</a:t>
+              <a:t>SECOND FINDING: robustness profiles are DISSOCIABLE — no model dominates.</a:t>
             </a:r>
           </a:p>
           <a:p/>
           <a:p>
             <a:r>
-              <a:t>MOVE judgments (all 5 models): linguistic framing (euphemistic vs dramatic rewording), emotional anchoring (Cohen's d 0.6-1.1 = medium-to-large), irrelevant sensory detail.</a:t>
-            </a:r>
-          </a:p>
-          <a:p>
-            <a:r>
-              <a:t>DO NOT move judgments: gender swap, evaluation order.</a:t>
+              <a:t>Concrete contrast: Claude showed ZERO sycophancy in our runs — 0 of 9 fabricated corrections accepted (small n; Wilson CI reaches 30%, corroborated by a confidence-increase signature and 0% control-arm flips) — but the WORST emotional-anchoring recovery (20%) and worst divided attention. Gemini Flash 2.0 recovers from emotional manipulation BEST (73%) — but has the worst working memory.</a:t>
             </a:r>
           </a:p>
           <a:p/>
           <a:p>
             <a:r>
-              <a:t>The common thread (right block): the three live surfaces all make morally irrelevant features PERCEPTUALLY SALIENT. So the attack mechanism is salience manipulation — attackers must change what's perceptually prominent, not just any surface token. That selectivity also proves the framework discriminates real vulnerabilities from noise.</a:t>
+              <a:t>Consequence: averaging partially-independent dimensions gives a number that describes NO model accurately. Single-test certification = FALSE ASSURANCE.</a:t>
             </a:r>
           </a:p>
           <a:p/>
           <a:p>
             <a:r>
-              <a:t>FOOTNOTE (methods honesty, reviewers asked for this): headline stats are effect sizes (Cohen's d, harm-point displacement), not sigmas; every test is compared against replication control arms (same text re-judged) — apparent 6-sigma violations in early analyses VANISHED under those controls. Say this if any statistician looks skeptical.</a:t>
+              <a:t>Anticipate: "which model should I use?" — depends which attack surfaces matter for YOUR use case; that's why the output is a profile, not a ranking. (Slide 10 sharpens this: the scalar's failure is now measured, not just argued.)</a:t>
             </a:r>
           </a:p>
         </p:txBody>
@@ -1462,25 +2012,25 @@
           <a:lstStyle/>
           <a:p>
             <a:r>
-              <a:t>SECOND FINDING: robustness profiles are DISSOCIABLE — no model dominates.</a:t>
+              <a:t>Both reviewers' #1 concern: "is the 7-D harm space validated or asserted?" This is the camera-ready answer.</a:t>
             </a:r>
           </a:p>
           <a:p/>
           <a:p>
             <a:r>
-              <a:t>Concrete contrast to say out loud: Claude has ZERO sycophancy (never accepts a fabricated correction) — but the WORST emotional-anchoring recovery (20%) and worst divided attention. Gemini Flash 2.0 recovers from emotional manipulation the BEST (73%) — but has the worst working memory.</a:t>
+              <a:t>Design: 6 OPEN models from 5 families (Qwen3 x2, GLM-5, GPT-OSS, MiniMax-M2, Gemma) score the full 7-D vector on 31 scenarios, 3 repetitions, via the NRP managed LLM API — fully open, re-runnable. Panel is DISJOINT from the 5 models under test.</a:t>
             </a:r>
           </a:p>
           <a:p/>
           <a:p>
             <a:r>
-              <a:t>Consequence (bottom block): averaging partially-independent dimensions gives a number that describes NO model accurately. So single-test certification — "this model scored X on robustness" — is FALSE ASSURANCE. This is the main deployment message of the accepted paper.</a:t>
+              <a:t>TERMS: ICC(2,k) = two-way random, average-measures intraclass correlation; 0.969 is excellent. Krippendorff's alpha = chance-corrected agreement; 0.836 is strong.</a:t>
             </a:r>
           </a:p>
           <a:p/>
           <a:p>
             <a:r>
-              <a:t>Anticipate: "which model should I use then?" Answer: depends which attack surfaces matter for YOUR use case — that's exactly why the output is a profile, not a ranking.</a:t>
+              <a:t>CAVEATS to volunteer if pressed: (a) ICC(2,k) is panel-consensus reliability — single-rater ICC(2,1) is ~0.84, still good; (b) six models sharing web-scale training data establishes cross-family consistency, NOT human ground truth — human-rater validation is future work; (c) physical/autonomy lowest (~0.57 alpha) is a near-floor artifact. Test-retest r=0.96 sets the stochastic floor.</a:t>
             </a:r>
           </a:p>
         </p:txBody>
@@ -1550,25 +2100,31 @@
           <a:lstStyle/>
           <a:p>
             <a:r>
-              <a:t>Both reviewers' #1 concern: "is the 7-D harm space validated or asserted?" This slide is the camera-ready answer.</a:t>
+              <a:t>Reviewer ask: "show an end-to-end exploit." Walk it as a story:</a:t>
             </a:r>
           </a:p>
           <a:p/>
           <a:p>
             <a:r>
-              <a:t>Design: 6 OPEN models from 5 different families (Qwen3 x2, GLM-5, GPT-OSS, MiniMax-M2, Gemma) each score the full 7-D vector on 31 scenarios, 3 repetitions. Panel is served by the NRP (National Research Platform) managed LLM API — fully open, no proprietary endpoints, so anyone can re-run it. The panel is DISJOINT from the 5 models under test.</a:t>
+              <a:t>You run a moderation filter: flag anything with total harm &gt; T. The attacker controls ONLY wording. Rewrite the same facts euphemistically — corporate-liability language, "involuntary separation from the platform" style. Panel-averaged harm drops 14.0 points on the 0-70 scale. At a median-calibrated threshold, 3 of the 6 audited gold scenarios silently flip FLAG -&gt; PASS. Nothing about the event changed.</a:t>
             </a:r>
           </a:p>
           <a:p/>
           <a:p>
             <a:r>
-              <a:t>TERMS: ICC(2,k) = intraclass correlation, two-way random, average-measures — the standard inter-rater reliability statistic; 0.969 overall is excellent. Krippendorff's alpha = chance-corrected agreement; 0.836 overall is strong.</a:t>
+              <a:t>Say the existence-proof framing OUT LOUD (it's now on the slide): n=6 hand-audited items demonstrate the mechanism end-to-end; the displacement magnitude is established on the 31-scenario panel.</a:t>
             </a:r>
           </a:p>
           <a:p/>
           <a:p>
             <a:r>
-              <a:t>Honest caveat if asked why physical/autonomy are lowest (~0.57): near-floor artifact — interpersonal scenarios rarely involve physical harm, so tiny disagreements at 0-1 crush the coefficient. Test-retest r=0.96 sets the stochastic floor the perturbation effects are measured against.</a:t>
+              <a:t>THE ASYMMETRY IS THE SCARY PART: euphemism moves scores twice as much as dramatization (-14 vs +7.3). The filter is far easier to EVADE than to trigger falsely — it fails in the dangerous direction.</a:t>
+            </a:r>
+          </a:p>
+          <a:p/>
+          <a:p>
+            <a:r>
+              <a:t>If asked "isn't lower harm from euphemism rational inference?": the gold transforms are hand-audited to preserve the stated facts — same events, differently packaged; slide 8 shows the FACTS get extracted differently, which is perception failure, not updating.</a:t>
             </a:r>
           </a:p>
         </p:txBody>
@@ -1638,25 +2194,31 @@
           <a:lstStyle/>
           <a:p>
             <a:r>
-              <a:t>Reviewer ask #3: "show an end-to-end exploit, not just displacement." Walk it as a story:</a:t>
+              <a:t>Natural objection: "so don't use a scalar threshold — use a principled rule engine." This slide kills that hope.</a:t>
             </a:r>
           </a:p>
           <a:p/>
           <a:p>
             <a:r>
-              <a:t>You run a moderation filter: flag anything with total harm &gt; T. The attacker controls ONLY the wording. They rewrite the same facts euphemistically — corporate-liability language, "involuntary separation from the platform" style. Panel-averaged harm drops 14.0 points on the 0-70 scale. At a median-calibrated threshold, 3 of the 6 audited gold scenarios silently flip from FLAG to PASS. Nothing about the underlying event changed.</a:t>
+              <a:t>Setup: route each scenario through the real ErisML DEME v3 kernel: an LLM extracts structured ethical FACTS, then GenevaEMV3 — a fixed, deterministic rule module — maps facts to a typed verdict (forbid / avoid / neutral / prefer / strongly_prefer).</a:t>
             </a:r>
           </a:p>
           <a:p/>
           <a:p>
             <a:r>
-              <a:t>THE ASYMMETRY IS THE SCARY PART: euphemism moves scores twice as much as dramatization (-14 vs +7.3). So the filter is far easier to EVADE (hide real harm) than to TRIP (fake a false positive) — it fails in the dangerous direction.</a:t>
+              <a:t>Result across 161 scenario-model cases (open panel): euphemistic rewriting flips a restrictive verdict to permissive in 13.7% of cases; forbid verdicts drop 44 -&gt; 27 (-39%).</a:t>
             </a:r>
           </a:p>
           <a:p/>
           <a:p>
             <a:r>
-              <a:t>Honest scope if asked: n=6 gold items with hand-audited rewrites = an EXISTENCE PROOF of the end-to-end exploit; the displacement magnitude itself is established on 31 scenarios.</a:t>
+              <a:t>QUOTABLE: "a rule engine INHERITS, rather than cures, the front-end's salience vulnerability." The rules are fine — the FACTS feeding them were corrupted. Hardening must target fact extraction / perception. Sets up the defense.</a:t>
+            </a:r>
+          </a:p>
+          <a:p/>
+          <a:p>
+            <a:r>
+              <a:t>If asked "isn't this garbage-in-garbage-out by construction?": the point is the QUANTIFICATION — 13.7% and -39% rebut the deployment assumption that a symbolic layer confers robustness, and tell you where the hardening budget goes.</a:t>
             </a:r>
           </a:p>
         </p:txBody>
@@ -1726,25 +2288,37 @@
           <a:lstStyle/>
           <a:p>
             <a:r>
-              <a:t>Natural objection: "so don't use a scalar threshold — use a principled rule engine." This slide kills that hope.</a:t>
+              <a:t>FRAMING — say explicitly: "from here to slide 10, results are post-camera-ready, from the extended version in preparation." ALSO say the instantiation line at the top: these results are measured on a SECOND INSTANTIATION of the same geometry — validated learned encoders (xbse) replacing LLM judges, feeding the same DEME kernel. Do not let the audience think the LLM judges were re-measured.</a:t>
             </a:r>
           </a:p>
           <a:p/>
           <a:p>
             <a:r>
-              <a:t>Setup: route each scenario through the real ErisML DEME v3 kernel: an LLM extracts structured ethical FACTS (rights violation? valid consent? harm severity?), then GenevaEMV3 — a fixed, deterministic rule module — maps facts to a typed verdict: forbid / avoid / neutral / prefer / strongly_prefer.</a:t>
+              <a:t>THE IDEA: a single wording is one arbitrary member of an equivalence class of morally identical texts. Judge the CLASS: generate m paraphrases, average per-dimension perception over the class, then decide. (For ML folks: semantic randomized smoothing / SmoothLLM with meaning-preserving paraphrases — but NO formal certificate; the guarantee is empirical.)</a:t>
             </a:r>
           </a:p>
           <a:p/>
           <a:p>
             <a:r>
-              <a:t>Result across 161 scenario-model cases: euphemistic rewriting flips a restrictive verdict (forbid/avoid) to a permissive one in 13.7% of cases; forbid verdicts drop from 44 to 27 (-39%).</a:t>
+              <a:t>NUMBERS: theta_d = mean per-dimension decision movement under re-description (defined on the slide). At scale: raw 0.407 -&gt; 0.219 = HALVED. IMPORTANT REFRAME (a sharp listener will catch it): raw natural-paraphrase drift is ALREADY below the 0.5 bar — the bar binds for ADVERSARIAL-register inputs (raw 0.67-0.85), where the defended run is the registered open item. So the claim to make is the HALVING, not "meets the bar."</a:t>
             </a:r>
           </a:p>
           <a:p/>
           <a:p>
             <a:r>
-              <a:t>THE QUOTABLE LINE: "a rule engine INHERITS, rather than cures, the front-end's salience vulnerability." The rules are fine — the FACTS feeding them were corrupted by the rewording. So hardening must target fact extraction / perception. That sets up the next slide (the defense).</a:t>
+              <a:t>RED-TEAM: LLM paraphrasers refuse 24% of harmful inputs. NLLB back-translation (6 pivots) refuses nothing: theta_d = 0.301 on harmful content. The hole belongs to the GENERATOR, not the mechanism.</a:t>
+            </a:r>
+          </a:p>
+          <a:p/>
+          <a:p>
+            <a:r>
+              <a:t>Deployment rule: refusal -&gt; singleton class -&gt; ESCALATE by default; audit proof records class member hashes.</a:t>
+            </a:r>
+          </a:p>
+          <a:p/>
+          <a:p>
+            <a:r>
+              <a:t>If asked about adaptive attackers ("paraphrases of euphemism stay euphemistic"): yes — the mechanism works to the extent the generator re-verbalizes across registers; register-diversity measurement is open work; the adaptive attack we identified (starving the generator) is closed by escalate-by-default.</a:t>
             </a:r>
           </a:p>
         </p:txBody>
@@ -4821,7 +5395,7 @@
             <a:r>
               <a:rPr sz="1900">
                 <a:solidFill>
-                  <a:srgbClr val="2B6CB0"/>
+                  <a:srgbClr val="2171B5"/>
                 </a:solidFill>
                 <a:latin typeface="Calibri"/>
               </a:rPr>
@@ -4853,7 +5427,7 @@
             <a:r>
               <a:rPr sz="1400">
                 <a:solidFill>
-                  <a:srgbClr val="666666"/>
+                  <a:srgbClr val="636363"/>
                 </a:solidFill>
                 <a:latin typeface="Calibri"/>
               </a:rPr>
@@ -4898,20 +5472,54 @@
       <p:grpSpPr/>
       <p:sp>
         <p:nvSpPr>
-          <p:cNvPr id="2" name="Rectangle 1"/>
+          <p:cNvPr id="2" name="TextBox 1"/>
+          <p:cNvSpPr txBox="1"/>
+          <p:nvPr/>
+        </p:nvSpPr>
+        <p:spPr>
+          <a:xfrm>
+            <a:off x="411480" y="146304"/>
+            <a:ext cx="11368735" cy="475488"/>
+          </a:xfrm>
+          <a:prstGeom prst="rect">
+            <a:avLst/>
+          </a:prstGeom>
+          <a:noFill/>
+        </p:spPr>
+        <p:txBody>
+          <a:bodyPr wrap="square">
+            <a:spAutoFit/>
+          </a:bodyPr>
+          <a:lstStyle/>
+          <a:p>
+            <a:r>
+              <a:rPr sz="2200" b="1">
+                <a:solidFill>
+                  <a:srgbClr val="1A2340"/>
+                </a:solidFill>
+                <a:latin typeface="Calibri"/>
+              </a:rPr>
+              <a:t>Since submission — reliable ≠ distinct: the geometry is bifactor</a:t>
+            </a:r>
+          </a:p>
+        </p:txBody>
+      </p:sp>
+      <p:sp>
+        <p:nvSpPr>
+          <p:cNvPr id="3" name="Rectangle 2"/>
           <p:cNvSpPr/>
           <p:nvPr/>
         </p:nvSpPr>
         <p:spPr>
           <a:xfrm>
-            <a:off x="0" y="0"/>
-            <a:ext cx="12191695" cy="658368"/>
+            <a:off x="411480" y="676656"/>
+            <a:ext cx="11368735" cy="20320"/>
           </a:xfrm>
           <a:prstGeom prst="rect">
             <a:avLst/>
           </a:prstGeom>
           <a:solidFill>
-            <a:srgbClr val="2B6CB0"/>
+            <a:srgbClr val="2171B5"/>
           </a:solidFill>
           <a:ln>
             <a:noFill/>
@@ -4932,25 +5540,16 @@
           </a:fontRef>
         </p:style>
         <p:txBody>
-          <a:bodyPr rtlCol="0" anchor="ctr" lIns="411480" tIns="73152"/>
+          <a:bodyPr rtlCol="0" anchor="ctr"/>
           <a:lstStyle/>
           <a:p>
             <a:pPr algn="ctr"/>
-            <a:r>
-              <a:rPr sz="2200" b="1">
-                <a:solidFill>
-                  <a:srgbClr val="FFFFFF"/>
-                </a:solidFill>
-                <a:latin typeface="Calibri"/>
-              </a:rPr>
-              <a:t>Since submission — a measured defense</a:t>
-            </a:r>
-          </a:p>
-        </p:txBody>
-      </p:sp>
-      <p:sp>
-        <p:nvSpPr>
-          <p:cNvPr id="3" name="TextBox 2"/>
+          </a:p>
+        </p:txBody>
+      </p:sp>
+      <p:sp>
+        <p:nvSpPr>
+          <p:cNvPr id="4" name="TextBox 3"/>
           <p:cNvSpPr txBox="1"/>
           <p:nvPr/>
         </p:nvSpPr>
@@ -4978,7 +5577,7 @@
             <a:r>
               <a:rPr sz="1000">
                 <a:solidFill>
-                  <a:srgbClr val="666666"/>
+                  <a:srgbClr val="636363"/>
                 </a:solidFill>
                 <a:latin typeface="Calibri"/>
               </a:rPr>
@@ -4989,14 +5588,14 @@
       </p:sp>
       <p:sp>
         <p:nvSpPr>
-          <p:cNvPr id="4" name="TextBox 3"/>
+          <p:cNvPr id="5" name="TextBox 4"/>
           <p:cNvSpPr txBox="1"/>
           <p:nvPr/>
         </p:nvSpPr>
         <p:spPr>
           <a:xfrm>
-            <a:off x="502920" y="868680"/>
-            <a:ext cx="11155680" cy="4846320"/>
+            <a:off x="502920" y="841248"/>
+            <a:ext cx="11155680" cy="1005840"/>
           </a:xfrm>
           <a:prstGeom prst="rect">
             <a:avLst/>
@@ -5011,184 +5610,158 @@
           <a:p>
             <a:pPr algn="l">
               <a:spcAft>
-                <a:spcPts val="1200"/>
+                <a:spcPts val="600"/>
               </a:spcAft>
             </a:pPr>
             <a:r>
-              <a:rPr sz="1600" b="1">
-                <a:solidFill>
-                  <a:srgbClr val="202020"/>
-                </a:solidFill>
-                <a:latin typeface="Calibri"/>
-              </a:rPr>
-              <a:t>Equivalence-class averaging</a:t>
-            </a:r>
-            <a:r>
-              <a:rPr sz="1600">
-                <a:solidFill>
-                  <a:srgbClr val="202020"/>
-                </a:solidFill>
-                <a:latin typeface="Calibri"/>
-              </a:rPr>
-              <a:t>: generate the input's paraphrase class (m paraphrases), </a:t>
-            </a:r>
-            <a:r>
-              <a:rPr sz="1600" b="1">
-                <a:solidFill>
-                  <a:srgbClr val="2B6CB0"/>
-                </a:solidFill>
-                <a:latin typeface="Calibri"/>
-              </a:rPr>
-              <a:t>average per-dimension perception over the class</a:t>
-            </a:r>
-            <a:r>
-              <a:rPr sz="1600">
-                <a:solidFill>
-                  <a:srgbClr val="202020"/>
-                </a:solidFill>
-                <a:latin typeface="Calibri"/>
-              </a:rPr>
-              <a:t>, then decide.</a:t>
-            </a:r>
-          </a:p>
-          <a:p>
-            <a:pPr algn="l">
+              <a:rPr sz="1500" b="1">
+                <a:solidFill>
+                  <a:srgbClr val="202020"/>
+                </a:solidFill>
+                <a:latin typeface="Calibri"/>
+              </a:rPr>
+              <a:t>ICC 0.969 = reliably measurable. Are the dimensions distinct?</a:t>
+            </a:r>
+            <a:r>
+              <a:rPr sz="1500">
+                <a:solidFill>
+                  <a:srgbClr val="202020"/>
+                </a:solidFill>
+                <a:latin typeface="Calibri"/>
+              </a:rPr>
+              <a:t>  A registered test against our own axes: a </a:t>
+            </a:r>
+            <a:r>
+              <a:rPr sz="1500" b="1">
+                <a:solidFill>
+                  <a:srgbClr val="2171B5"/>
+                </a:solidFill>
+                <a:latin typeface="Calibri"/>
+              </a:rPr>
+              <a:t>general moral-valence channel G</a:t>
+            </a:r>
+            <a:r>
+              <a:rPr sz="1500">
+                <a:solidFill>
+                  <a:srgbClr val="202020"/>
+                </a:solidFill>
+                <a:latin typeface="Calibri"/>
+              </a:rPr>
+              <a:t> gate-passes (AUROC </a:t>
+            </a:r>
+            <a:r>
+              <a:rPr sz="1500" b="1">
+                <a:solidFill>
+                  <a:srgbClr val="D95F02"/>
+                </a:solidFill>
+                <a:latin typeface="Calibri"/>
+              </a:rPr>
+              <a:t>0.856</a:t>
+            </a:r>
+            <a:r>
+              <a:rPr sz="1500">
+                <a:solidFill>
+                  <a:srgbClr val="202020"/>
+                </a:solidFill>
+                <a:latin typeface="Calibri"/>
+              </a:rPr>
+              <a:t>); five named axes are ≥ </a:t>
+            </a:r>
+            <a:r>
+              <a:rPr sz="1500" b="1">
+                <a:solidFill>
+                  <a:srgbClr val="D95F02"/>
+                </a:solidFill>
+                <a:latin typeface="Calibri"/>
+              </a:rPr>
+              <a:t>0.98</a:t>
+            </a:r>
+            <a:r>
+              <a:rPr sz="1500">
+                <a:solidFill>
+                  <a:srgbClr val="202020"/>
+                </a:solidFill>
+                <a:latin typeface="Calibri"/>
+              </a:rPr>
+              <a:t> predictable from G alone.</a:t>
+            </a:r>
+          </a:p>
+        </p:txBody>
+      </p:sp>
+      <p:graphicFrame>
+        <p:nvGraphicFramePr>
+          <p:cNvPr id="6" name="Chart 5"/>
+          <p:cNvGraphicFramePr>
+            <a:graphicFrameLocks noGrp="1"/>
+          </p:cNvGraphicFramePr>
+          <p:nvPr/>
+        </p:nvGraphicFramePr>
+        <p:xfrm>
+          <a:off x="365760" y="1874519"/>
+          <a:ext cx="5852160" cy="3977639"/>
+        </p:xfrm>
+        <a:graphic>
+          <a:graphicData uri="http://schemas.openxmlformats.org/drawingml/2006/chart">
+            <c:chart xmlns:c="http://schemas.openxmlformats.org/drawingml/2006/chart" r:id="rId2"/>
+          </a:graphicData>
+        </a:graphic>
+      </p:graphicFrame>
+      <p:sp>
+        <p:nvSpPr>
+          <p:cNvPr id="7" name="Rounded Rectangle 6"/>
+          <p:cNvSpPr/>
+          <p:nvPr/>
+        </p:nvSpPr>
+        <p:spPr>
+          <a:xfrm>
+            <a:off x="6492240" y="1874519"/>
+            <a:ext cx="5257800" cy="2148840"/>
+          </a:xfrm>
+          <a:prstGeom prst="roundRect">
+            <a:avLst>
+              <a:gd name="adj" fmla="val 6000"/>
+            </a:avLst>
+          </a:prstGeom>
+          <a:solidFill>
+            <a:srgbClr val="E4EDF7"/>
+          </a:solidFill>
+          <a:ln w="9525">
+            <a:solidFill>
+              <a:srgbClr val="2171B5"/>
+            </a:solidFill>
+          </a:ln>
+        </p:spPr>
+        <p:style>
+          <a:lnRef idx="1">
+            <a:schemeClr val="accent1"/>
+          </a:lnRef>
+          <a:fillRef idx="3">
+            <a:schemeClr val="accent1"/>
+          </a:fillRef>
+          <a:effectRef idx="2">
+            <a:schemeClr val="accent1"/>
+          </a:effectRef>
+          <a:fontRef idx="minor">
+            <a:schemeClr val="lt1"/>
+          </a:fontRef>
+        </p:style>
+        <p:txBody>
+          <a:bodyPr rtlCol="0" anchor="ctr" wrap="square" lIns="164592" rIns="164592" tIns="91440"/>
+          <a:lstStyle/>
+          <a:p>
+            <a:pPr algn="ctr">
               <a:spcAft>
-                <a:spcPts val="1000"/>
+                <a:spcPts val="600"/>
               </a:spcAft>
             </a:pPr>
             <a:r>
-              <a:rPr sz="1600">
-                <a:solidFill>
-                  <a:srgbClr val="202020"/>
-                </a:solidFill>
-                <a:latin typeface="Calibri"/>
-              </a:rPr>
-              <a:t>•  </a:t>
-            </a:r>
-            <a:r>
-              <a:rPr sz="1600">
-                <a:solidFill>
-                  <a:srgbClr val="202020"/>
-                </a:solidFill>
-                <a:latin typeface="Calibri"/>
-              </a:rPr>
-              <a:t>Pre-registered bar: decision-layer drift θₔ ≤ 0.5. At scale (60 held-out items, m = 6): raw drift </a:t>
-            </a:r>
-            <a:r>
-              <a:rPr sz="1600" b="1">
-                <a:solidFill>
-                  <a:srgbClr val="A67500"/>
-                </a:solidFill>
-                <a:latin typeface="Calibri"/>
-              </a:rPr>
-              <a:t>0.407 → 0.219</a:t>
-            </a:r>
-            <a:r>
-              <a:rPr sz="1600">
-                <a:solidFill>
-                  <a:srgbClr val="202020"/>
-                </a:solidFill>
-                <a:latin typeface="Calibri"/>
-              </a:rPr>
-              <a:t> — the mechanism </a:t>
-            </a:r>
-            <a:r>
-              <a:rPr sz="1600" b="1">
-                <a:solidFill>
-                  <a:srgbClr val="2B6CB0"/>
-                </a:solidFill>
-                <a:latin typeface="Calibri"/>
-              </a:rPr>
-              <a:t>halves</a:t>
-            </a:r>
-            <a:r>
-              <a:rPr sz="1600">
-                <a:solidFill>
-                  <a:srgbClr val="202020"/>
-                </a:solidFill>
-                <a:latin typeface="Calibri"/>
-              </a:rPr>
-              <a:t> salience drift and meets the bar.</a:t>
-            </a:r>
-          </a:p>
-          <a:p>
-            <a:pPr algn="l">
-              <a:spcAft>
-                <a:spcPts val="1000"/>
-              </a:spcAft>
-            </a:pPr>
-            <a:r>
-              <a:rPr sz="1600">
-                <a:solidFill>
-                  <a:srgbClr val="202020"/>
-                </a:solidFill>
-                <a:latin typeface="Calibri"/>
-              </a:rPr>
-              <a:t>•  </a:t>
-            </a:r>
-            <a:r>
-              <a:rPr sz="1600">
-                <a:solidFill>
-                  <a:srgbClr val="202020"/>
-                </a:solidFill>
-                <a:latin typeface="Calibri"/>
-              </a:rPr>
-              <a:t>LLM paraphrasers </a:t>
-            </a:r>
-            <a:r>
-              <a:rPr sz="1600" b="1">
-                <a:solidFill>
-                  <a:srgbClr val="A67500"/>
-                </a:solidFill>
-                <a:latin typeface="Calibri"/>
-              </a:rPr>
-              <a:t>refuse 24%</a:t>
-            </a:r>
-            <a:r>
-              <a:rPr sz="1600">
-                <a:solidFill>
-                  <a:srgbClr val="202020"/>
-                </a:solidFill>
-                <a:latin typeface="Calibri"/>
-              </a:rPr>
-              <a:t> of harmful inputs. A non-refusing red-team paraphraser (NLLB back-translation, 6 pivots): </a:t>
-            </a:r>
-            <a:r>
-              <a:rPr sz="1600" b="1">
-                <a:solidFill>
-                  <a:srgbClr val="A67500"/>
-                </a:solidFill>
-                <a:latin typeface="Calibri"/>
-              </a:rPr>
-              <a:t>θₔ = 0.301</a:t>
-            </a:r>
-            <a:r>
-              <a:rPr sz="1600">
-                <a:solidFill>
-                  <a:srgbClr val="202020"/>
-                </a:solidFill>
-                <a:latin typeface="Calibri"/>
-              </a:rPr>
-              <a:t> on harmful content — the hole is the </a:t>
-            </a:r>
-            <a:r>
-              <a:rPr sz="1600" b="1">
-                <a:solidFill>
-                  <a:srgbClr val="2B6CB0"/>
-                </a:solidFill>
-                <a:latin typeface="Calibri"/>
-              </a:rPr>
-              <a:t>generator's</a:t>
-            </a:r>
-            <a:r>
-              <a:rPr sz="1600">
-                <a:solidFill>
-                  <a:srgbClr val="202020"/>
-                </a:solidFill>
-                <a:latin typeface="Calibri"/>
-              </a:rPr>
-              <a:t>, not the mechanism's.</a:t>
+              <a:rPr sz="1500" b="1">
+                <a:solidFill>
+                  <a:srgbClr val="2171B5"/>
+                </a:solidFill>
+                <a:latin typeface="Calibri"/>
+              </a:rPr>
+              <a:t>Consequence for Secure AI</a:t>
             </a:r>
           </a:p>
           <a:p>
@@ -5198,47 +5771,201 @@
               </a:spcAft>
             </a:pPr>
             <a:r>
-              <a:rPr sz="1600">
-                <a:solidFill>
-                  <a:srgbClr val="202020"/>
-                </a:solidFill>
-                <a:latin typeface="Calibri"/>
-              </a:rPr>
-              <a:t>•  </a:t>
-            </a:r>
-            <a:r>
-              <a:rPr sz="1600">
-                <a:solidFill>
-                  <a:srgbClr val="202020"/>
-                </a:solidFill>
-                <a:latin typeface="Calibri"/>
-              </a:rPr>
-              <a:t>Trust boundary: refusal → singleton class → </a:t>
-            </a:r>
-            <a:r>
-              <a:rPr sz="1600" b="1">
-                <a:solidFill>
-                  <a:srgbClr val="2B6CB0"/>
-                </a:solidFill>
-                <a:latin typeface="Calibri"/>
-              </a:rPr>
-              <a:t>escalate by default</a:t>
-            </a:r>
-            <a:r>
-              <a:rPr sz="1600">
-                <a:solidFill>
-                  <a:srgbClr val="202020"/>
-                </a:solidFill>
-                <a:latin typeface="Calibri"/>
-              </a:rPr>
-              <a:t>; audit proof records class members.</a:t>
-            </a:r>
-          </a:p>
-        </p:txBody>
-      </p:sp>
-      <p:sp>
-        <p:nvSpPr>
-          <p:cNvPr id="5" name="TextBox 4"/>
+              <a:rPr sz="1400">
+                <a:solidFill>
+                  <a:srgbClr val="202020"/>
+                </a:solidFill>
+                <a:latin typeface="Calibri"/>
+              </a:rPr>
+              <a:t>A scalar </a:t>
+            </a:r>
+            <a:r>
+              <a:rPr sz="1400" i="1">
+                <a:solidFill>
+                  <a:srgbClr val="202020"/>
+                </a:solidFill>
+                <a:latin typeface="Calibri"/>
+              </a:rPr>
+              <a:t>harm</a:t>
+            </a:r>
+            <a:r>
+              <a:rPr sz="1400">
+                <a:solidFill>
+                  <a:srgbClr val="202020"/>
+                </a:solidFill>
+                <a:latin typeface="Calibri"/>
+              </a:rPr>
+              <a:t> score is </a:t>
+            </a:r>
+            <a:r>
+              <a:rPr sz="1400" b="1">
+                <a:solidFill>
+                  <a:srgbClr val="D95F02"/>
+                </a:solidFill>
+                <a:latin typeface="Calibri"/>
+              </a:rPr>
+              <a:t>measured, not argued</a:t>
+            </a:r>
+            <a:r>
+              <a:rPr sz="1400">
+                <a:solidFill>
+                  <a:srgbClr val="202020"/>
+                </a:solidFill>
+                <a:latin typeface="Calibri"/>
+              </a:rPr>
+              <a:t>, to be mostly G — and a scalar robustness score inherits the collapse by construction.</a:t>
+            </a:r>
+          </a:p>
+          <a:p>
+            <a:pPr algn="l">
+              <a:spcAft>
+                <a:spcPts val="400"/>
+              </a:spcAft>
+            </a:pPr>
+            <a:r>
+              <a:rPr sz="1400">
+                <a:solidFill>
+                  <a:srgbClr val="202020"/>
+                </a:solidFill>
+                <a:latin typeface="Calibri"/>
+              </a:rPr>
+              <a:t>The vulnerability structure lives in the </a:t>
+            </a:r>
+            <a:r>
+              <a:rPr sz="1400" b="1">
+                <a:solidFill>
+                  <a:srgbClr val="2171B5"/>
+                </a:solidFill>
+                <a:latin typeface="Calibri"/>
+              </a:rPr>
+              <a:t>surviving specific axes</a:t>
+            </a:r>
+            <a:r>
+              <a:rPr sz="1400">
+                <a:solidFill>
+                  <a:srgbClr val="202020"/>
+                </a:solidFill>
+                <a:latin typeface="Calibri"/>
+              </a:rPr>
+              <a:t>.</a:t>
+            </a:r>
+          </a:p>
+        </p:txBody>
+      </p:sp>
+      <p:sp>
+        <p:nvSpPr>
+          <p:cNvPr id="8" name="TextBox 7"/>
+          <p:cNvSpPr txBox="1"/>
+          <p:nvPr/>
+        </p:nvSpPr>
+        <p:spPr>
+          <a:xfrm>
+            <a:off x="6492240" y="4206240"/>
+            <a:ext cx="5257800" cy="1600200"/>
+          </a:xfrm>
+          <a:prstGeom prst="rect">
+            <a:avLst/>
+          </a:prstGeom>
+          <a:noFill/>
+        </p:spPr>
+        <p:txBody>
+          <a:bodyPr wrap="square">
+            <a:spAutoFit/>
+          </a:bodyPr>
+          <a:lstStyle/>
+          <a:p>
+            <a:pPr algn="l">
+              <a:spcAft>
+                <a:spcPts val="600"/>
+              </a:spcAft>
+            </a:pPr>
+            <a:r>
+              <a:rPr sz="1300">
+                <a:solidFill>
+                  <a:srgbClr val="202020"/>
+                </a:solidFill>
+                <a:latin typeface="Calibri"/>
+              </a:rPr>
+              <a:t>Mapped to this talk's 7-D space </a:t>
+            </a:r>
+            <a:r>
+              <a:rPr sz="1300" i="1">
+                <a:solidFill>
+                  <a:srgbClr val="202020"/>
+                </a:solidFill>
+                <a:latin typeface="Calibri"/>
+              </a:rPr>
+              <a:t>(a transfer hypothesis, not a measurement)</a:t>
+            </a:r>
+            <a:r>
+              <a:rPr sz="1300">
+                <a:solidFill>
+                  <a:srgbClr val="202020"/>
+                </a:solidFill>
+                <a:latin typeface="Calibri"/>
+              </a:rPr>
+              <a:t>: </a:t>
+            </a:r>
+            <a:r>
+              <a:rPr sz="1300" b="1">
+                <a:solidFill>
+                  <a:srgbClr val="2171B5"/>
+                </a:solidFill>
+                <a:latin typeface="Calibri"/>
+              </a:rPr>
+              <a:t>social, identity, autonomy</a:t>
+            </a:r>
+            <a:r>
+              <a:rPr sz="1300">
+                <a:solidFill>
+                  <a:srgbClr val="202020"/>
+                </a:solidFill>
+                <a:latin typeface="Calibri"/>
+              </a:rPr>
+              <a:t> carry specific signal, </a:t>
+            </a:r>
+            <a:r>
+              <a:rPr sz="1300" b="1">
+                <a:solidFill>
+                  <a:srgbClr val="2171B5"/>
+                </a:solidFill>
+                <a:latin typeface="Calibri"/>
+              </a:rPr>
+              <a:t>physical</a:t>
+            </a:r>
+            <a:r>
+              <a:rPr sz="1300">
+                <a:solidFill>
+                  <a:srgbClr val="202020"/>
+                </a:solidFill>
+                <a:latin typeface="Calibri"/>
+              </a:rPr>
+              <a:t> marginally; </a:t>
+            </a:r>
+            <a:r>
+              <a:rPr sz="1300" b="1">
+                <a:solidFill>
+                  <a:srgbClr val="2171B5"/>
+                </a:solidFill>
+                <a:latin typeface="Calibri"/>
+              </a:rPr>
+              <a:t>trust, emotional, financial</a:t>
+            </a:r>
+            <a:r>
+              <a:rPr sz="1300">
+                <a:solidFill>
+                  <a:srgbClr val="202020"/>
+                </a:solidFill>
+                <a:latin typeface="Calibri"/>
+              </a:rPr>
+              <a:t> are mostly carried by G.</a:t>
+            </a:r>
+          </a:p>
+        </p:txBody>
+      </p:sp>
+      <p:sp>
+        <p:nvSpPr>
+          <p:cNvPr id="9" name="TextBox 8"/>
           <p:cNvSpPr txBox="1"/>
           <p:nvPr/>
         </p:nvSpPr>
@@ -5264,22 +5991,31 @@
               </a:spcAft>
             </a:pPr>
             <a:r>
-              <a:rPr sz="1100">
-                <a:solidFill>
-                  <a:srgbClr val="666666"/>
-                </a:solidFill>
-                <a:latin typeface="Calibri"/>
-              </a:rPr>
-              <a:t>Natural (not adversarial) paraphrases at scale. Post-camera-ready results, July 2026 — extended version in preparation.  </a:t>
-            </a:r>
-            <a:r>
-              <a:rPr sz="1100">
-                <a:solidFill>
-                  <a:srgbClr val="666666"/>
+              <a:rPr sz="1000">
+                <a:solidFill>
+                  <a:srgbClr val="636363"/>
+                </a:solidFill>
+                <a:latin typeface="Calibri"/>
+              </a:rPr>
+              <a:t>Measured on the learned-encoder instantiation (</a:t>
+            </a:r>
+            <a:r>
+              <a:rPr sz="1000">
+                <a:solidFill>
+                  <a:srgbClr val="636363"/>
                 </a:solidFill>
                 <a:latin typeface="Consolas"/>
               </a:rPr>
-              <a:t>pip install moral-spectrum-analyzer</a:t>
+              <a:t>xbse</a:t>
+            </a:r>
+            <a:r>
+              <a:rPr sz="1000">
+                <a:solidFill>
+                  <a:srgbClr val="636363"/>
+                </a:solidFill>
+                <a:latin typeface="Calibri"/>
+              </a:rPr>
+              <a:t>) over moderation corpora — not a factor analysis of the judge panel. 12×12 specificity gate, margin 0.05; the gate-vs-residualization divergence on identity_attack is recorded, not adjudicated. July 2026.</a:t>
             </a:r>
           </a:p>
         </p:txBody>
@@ -5304,20 +6040,54 @@
       <p:grpSpPr/>
       <p:sp>
         <p:nvSpPr>
-          <p:cNvPr id="2" name="Rectangle 1"/>
+          <p:cNvPr id="2" name="TextBox 1"/>
+          <p:cNvSpPr txBox="1"/>
+          <p:nvPr/>
+        </p:nvSpPr>
+        <p:spPr>
+          <a:xfrm>
+            <a:off x="411480" y="146304"/>
+            <a:ext cx="11368735" cy="475488"/>
+          </a:xfrm>
+          <a:prstGeom prst="rect">
+            <a:avLst/>
+          </a:prstGeom>
+          <a:noFill/>
+        </p:spPr>
+        <p:txBody>
+          <a:bodyPr wrap="square">
+            <a:spAutoFit/>
+          </a:bodyPr>
+          <a:lstStyle/>
+          <a:p>
+            <a:r>
+              <a:rPr sz="2200" b="1">
+                <a:solidFill>
+                  <a:srgbClr val="1A2340"/>
+                </a:solidFill>
+                <a:latin typeface="Calibri"/>
+              </a:rPr>
+              <a:t>Implications for Secure AI deployment</a:t>
+            </a:r>
+          </a:p>
+        </p:txBody>
+      </p:sp>
+      <p:sp>
+        <p:nvSpPr>
+          <p:cNvPr id="3" name="Rectangle 2"/>
           <p:cNvSpPr/>
           <p:nvPr/>
         </p:nvSpPr>
         <p:spPr>
           <a:xfrm>
-            <a:off x="0" y="0"/>
-            <a:ext cx="12191695" cy="658368"/>
+            <a:off x="411480" y="676656"/>
+            <a:ext cx="11368735" cy="20320"/>
           </a:xfrm>
           <a:prstGeom prst="rect">
             <a:avLst/>
           </a:prstGeom>
           <a:solidFill>
-            <a:srgbClr val="2B6CB0"/>
+            <a:srgbClr val="2171B5"/>
           </a:solidFill>
           <a:ln>
             <a:noFill/>
@@ -5338,25 +6108,16 @@
           </a:fontRef>
         </p:style>
         <p:txBody>
-          <a:bodyPr rtlCol="0" anchor="ctr" lIns="411480" tIns="73152"/>
+          <a:bodyPr rtlCol="0" anchor="ctr"/>
           <a:lstStyle/>
           <a:p>
             <a:pPr algn="ctr"/>
-            <a:r>
-              <a:rPr sz="2200" b="1">
-                <a:solidFill>
-                  <a:srgbClr val="FFFFFF"/>
-                </a:solidFill>
-                <a:latin typeface="Calibri"/>
-              </a:rPr>
-              <a:t>Since submission — the harm space is extensible and falsifiable</a:t>
-            </a:r>
-          </a:p>
-        </p:txBody>
-      </p:sp>
-      <p:sp>
-        <p:nvSpPr>
-          <p:cNvPr id="3" name="TextBox 2"/>
+          </a:p>
+        </p:txBody>
+      </p:sp>
+      <p:sp>
+        <p:nvSpPr>
+          <p:cNvPr id="4" name="TextBox 3"/>
           <p:cNvSpPr txBox="1"/>
           <p:nvPr/>
         </p:nvSpPr>
@@ -5384,7 +6145,7 @@
             <a:r>
               <a:rPr sz="1000">
                 <a:solidFill>
-                  <a:srgbClr val="666666"/>
+                  <a:srgbClr val="636363"/>
                 </a:solidFill>
                 <a:latin typeface="Calibri"/>
               </a:rPr>
@@ -5395,14 +6156,14 @@
       </p:sp>
       <p:sp>
         <p:nvSpPr>
-          <p:cNvPr id="4" name="TextBox 3"/>
+          <p:cNvPr id="5" name="TextBox 4"/>
           <p:cNvSpPr txBox="1"/>
           <p:nvPr/>
         </p:nvSpPr>
         <p:spPr>
           <a:xfrm>
-            <a:off x="502920" y="868680"/>
-            <a:ext cx="11155680" cy="4846320"/>
+            <a:off x="502920" y="1005840"/>
+            <a:ext cx="11155680" cy="4754880"/>
           </a:xfrm>
           <a:prstGeom prst="rect">
             <a:avLst/>
@@ -5421,216 +6182,117 @@
               </a:spcAft>
             </a:pPr>
             <a:r>
-              <a:rPr sz="1600" b="1">
-                <a:solidFill>
-                  <a:srgbClr val="202020"/>
-                </a:solidFill>
-                <a:latin typeface="Calibri"/>
-              </a:rPr>
-              <a:t>Discovery loop</a:t>
-            </a:r>
-            <a:r>
-              <a:rPr sz="1600">
-                <a:solidFill>
-                  <a:srgbClr val="202020"/>
-                </a:solidFill>
-                <a:latin typeface="Calibri"/>
-              </a:rPr>
-              <a:t>: residual analysis flags candidate missing dimensions → pre-registered admission gate.</a:t>
+              <a:rPr sz="1700" b="1">
+                <a:solidFill>
+                  <a:srgbClr val="2171B5"/>
+                </a:solidFill>
+                <a:latin typeface="Calibri"/>
+              </a:rPr>
+              <a:t>▪  </a:t>
+            </a:r>
+            <a:r>
+              <a:rPr sz="1700" b="1">
+                <a:solidFill>
+                  <a:srgbClr val="2171B5"/>
+                </a:solidFill>
+                <a:latin typeface="Calibri"/>
+              </a:rPr>
+              <a:t>Where to look</a:t>
+            </a:r>
+            <a:r>
+              <a:rPr sz="1700">
+                <a:solidFill>
+                  <a:srgbClr val="202020"/>
+                </a:solidFill>
+                <a:latin typeface="Calibri"/>
+              </a:rPr>
+              <a:t>: attacks that repackage the same facts with different </a:t>
+            </a:r>
+            <a:r>
+              <a:rPr sz="1700" b="1">
+                <a:solidFill>
+                  <a:srgbClr val="D95F02"/>
+                </a:solidFill>
+                <a:latin typeface="Calibri"/>
+              </a:rPr>
+              <a:t>salience</a:t>
+            </a:r>
+            <a:r>
+              <a:rPr sz="1700">
+                <a:solidFill>
+                  <a:srgbClr val="202020"/>
+                </a:solidFill>
+                <a:latin typeface="Calibri"/>
+              </a:rPr>
+              <a:t> (euphemistic minimization).</a:t>
             </a:r>
           </a:p>
           <a:p>
             <a:pPr algn="l">
               <a:spcAft>
-                <a:spcPts val="1000"/>
+                <a:spcPts val="1200"/>
               </a:spcAft>
             </a:pPr>
             <a:r>
-              <a:rPr sz="1600">
-                <a:solidFill>
-                  <a:srgbClr val="202020"/>
-                </a:solidFill>
-                <a:latin typeface="Calibri"/>
-              </a:rPr>
-              <a:t>•  </a:t>
-            </a:r>
-            <a:r>
-              <a:rPr sz="1600">
-                <a:solidFill>
-                  <a:srgbClr val="202020"/>
-                </a:solidFill>
-                <a:latin typeface="Calibri"/>
-              </a:rPr>
-              <a:t>Scorecard: 3 flagged → </a:t>
-            </a:r>
-            <a:r>
-              <a:rPr sz="1600" b="1">
-                <a:solidFill>
-                  <a:srgbClr val="A67500"/>
-                </a:solidFill>
-                <a:latin typeface="Calibri"/>
-              </a:rPr>
-              <a:t>1 validated</a:t>
-            </a:r>
-            <a:r>
-              <a:rPr sz="1600">
-                <a:solidFill>
-                  <a:srgbClr val="202020"/>
-                </a:solidFill>
-                <a:latin typeface="Calibri"/>
-              </a:rPr>
-              <a:t> (identity_attack), </a:t>
-            </a:r>
-            <a:r>
-              <a:rPr sz="1600" b="1">
-                <a:solidFill>
-                  <a:srgbClr val="A67500"/>
-                </a:solidFill>
-                <a:latin typeface="Calibri"/>
-              </a:rPr>
-              <a:t>1 retracted</a:t>
-            </a:r>
-            <a:r>
-              <a:rPr sz="1600">
-                <a:solidFill>
-                  <a:srgbClr val="202020"/>
-                </a:solidFill>
-                <a:latin typeface="Calibri"/>
-              </a:rPr>
-              <a:t> (threat), </a:t>
-            </a:r>
-            <a:r>
-              <a:rPr sz="1600" b="1">
-                <a:solidFill>
-                  <a:srgbClr val="A67500"/>
-                </a:solidFill>
-                <a:latin typeface="Calibri"/>
-              </a:rPr>
-              <a:t>1 declined</a:t>
-            </a:r>
-            <a:r>
-              <a:rPr sz="1600">
-                <a:solidFill>
-                  <a:srgbClr val="202020"/>
-                </a:solidFill>
-                <a:latin typeface="Calibri"/>
-              </a:rPr>
-              <a:t> (sexual content → policy channel); plus a registered rescue of the rights channel </a:t>
-            </a:r>
-            <a:r>
-              <a:rPr sz="1600" b="1">
-                <a:solidFill>
-                  <a:srgbClr val="A67500"/>
-                </a:solidFill>
-                <a:latin typeface="Calibri"/>
-              </a:rPr>
-              <a:t>refuted</a:t>
-            </a:r>
-            <a:r>
-              <a:rPr sz="1600">
-                <a:solidFill>
-                  <a:srgbClr val="202020"/>
-                </a:solidFill>
-                <a:latin typeface="Calibri"/>
-              </a:rPr>
-              <a:t> (trained 0.509 vs null 0.512 — stays a hard channel). </a:t>
-            </a:r>
-            <a:r>
-              <a:rPr sz="1600" b="1">
-                <a:solidFill>
-                  <a:srgbClr val="2B6CB0"/>
-                </a:solidFill>
-                <a:latin typeface="Calibri"/>
-              </a:rPr>
-              <a:t>The gate has teeth, in both directions.</a:t>
+              <a:rPr sz="1700" b="1">
+                <a:solidFill>
+                  <a:srgbClr val="2171B5"/>
+                </a:solidFill>
+                <a:latin typeface="Calibri"/>
+              </a:rPr>
+              <a:t>▪  </a:t>
+            </a:r>
+            <a:r>
+              <a:rPr sz="1700" b="1">
+                <a:solidFill>
+                  <a:srgbClr val="2171B5"/>
+                </a:solidFill>
+                <a:latin typeface="Calibri"/>
+              </a:rPr>
+              <a:t>Prompt-level defenses are bounded</a:t>
+            </a:r>
+            <a:r>
+              <a:rPr sz="1700">
+                <a:solidFill>
+                  <a:srgbClr val="202020"/>
+                </a:solidFill>
+                <a:latin typeface="Calibri"/>
+              </a:rPr>
+              <a:t>: explicit warnings recover only ~38% — a ceiling co-occurring with universal overconfidence (ECE 0.19–0.42).</a:t>
             </a:r>
           </a:p>
           <a:p>
             <a:pPr algn="l">
               <a:spcAft>
-                <a:spcPts val="1000"/>
+                <a:spcPts val="1200"/>
               </a:spcAft>
             </a:pPr>
             <a:r>
-              <a:rPr sz="1600">
-                <a:solidFill>
-                  <a:srgbClr val="202020"/>
-                </a:solidFill>
-                <a:latin typeface="Calibri"/>
-              </a:rPr>
-              <a:t>•  </a:t>
-            </a:r>
-            <a:r>
-              <a:rPr sz="1600">
-                <a:solidFill>
-                  <a:srgbClr val="202020"/>
-                </a:solidFill>
-                <a:latin typeface="Consolas"/>
-              </a:rPr>
-              <a:t>identity_attack</a:t>
-            </a:r>
-            <a:r>
-              <a:rPr sz="1600">
-                <a:solidFill>
-                  <a:srgbClr val="202020"/>
-                </a:solidFill>
-                <a:latin typeface="Calibri"/>
-              </a:rPr>
-              <a:t>: cross-dataset held-out AUROC </a:t>
-            </a:r>
-            <a:r>
-              <a:rPr sz="1600" b="1">
-                <a:solidFill>
-                  <a:srgbClr val="A67500"/>
-                </a:solidFill>
-                <a:latin typeface="Calibri"/>
-              </a:rPr>
-              <a:t>0.80</a:t>
-            </a:r>
-            <a:r>
-              <a:rPr sz="1600">
-                <a:solidFill>
-                  <a:srgbClr val="202020"/>
-                </a:solidFill>
-                <a:latin typeface="Calibri"/>
-              </a:rPr>
-              <a:t> CI [0.78, 0.83] (+0.25 over null, 2 corpora, n = 6400) — wired live as a </a:t>
-            </a:r>
-            <a:r>
-              <a:rPr sz="1600" b="1">
-                <a:solidFill>
-                  <a:srgbClr val="2B6CB0"/>
-                </a:solidFill>
-                <a:latin typeface="Calibri"/>
-              </a:rPr>
-              <a:t>10th channel</a:t>
-            </a:r>
-            <a:r>
-              <a:rPr sz="1600">
-                <a:solidFill>
-                  <a:srgbClr val="202020"/>
-                </a:solidFill>
-                <a:latin typeface="Calibri"/>
-              </a:rPr>
-              <a:t>; dominant feature of a learned moderation contraction (OOF AUROC </a:t>
-            </a:r>
-            <a:r>
-              <a:rPr sz="1600" b="1">
-                <a:solidFill>
-                  <a:srgbClr val="A67500"/>
-                </a:solidFill>
-                <a:latin typeface="Calibri"/>
-              </a:rPr>
-              <a:t>0.863</a:t>
-            </a:r>
-            <a:r>
-              <a:rPr sz="1600">
-                <a:solidFill>
-                  <a:srgbClr val="202020"/>
-                </a:solidFill>
-                <a:latin typeface="Calibri"/>
-              </a:rPr>
-              <a:t>, leakage-controlled).</a:t>
+              <a:rPr sz="1700" b="1">
+                <a:solidFill>
+                  <a:srgbClr val="2171B5"/>
+                </a:solidFill>
+                <a:latin typeface="Calibri"/>
+              </a:rPr>
+              <a:t>▪  </a:t>
+            </a:r>
+            <a:r>
+              <a:rPr sz="1700" b="1">
+                <a:solidFill>
+                  <a:srgbClr val="2171B5"/>
+                </a:solidFill>
+                <a:latin typeface="Calibri"/>
+              </a:rPr>
+              <a:t>Ask the right question</a:t>
+            </a:r>
+            <a:r>
+              <a:rPr sz="1700">
+                <a:solidFill>
+                  <a:srgbClr val="202020"/>
+                </a:solidFill>
+                <a:latin typeface="Calibri"/>
+              </a:rPr>
+              <a:t>: “which vulnerabilities matter for our use case?” — not “what's the robustness score?”</a:t>
             </a:r>
           </a:p>
           <a:p>
@@ -5640,115 +6302,31 @@
               </a:spcAft>
             </a:pPr>
             <a:r>
-              <a:rPr sz="1600">
-                <a:solidFill>
-                  <a:srgbClr val="202020"/>
-                </a:solidFill>
-                <a:latin typeface="Calibri"/>
-              </a:rPr>
-              <a:t>•  </a:t>
-            </a:r>
-            <a:r>
-              <a:rPr sz="1600">
-                <a:solidFill>
-                  <a:srgbClr val="202020"/>
-                </a:solidFill>
-                <a:latin typeface="Calibri"/>
-              </a:rPr>
-              <a:t>Cross-lingual at scale: invariance index </a:t>
-            </a:r>
-            <a:r>
-              <a:rPr sz="1600" b="1">
-                <a:solidFill>
-                  <a:srgbClr val="A67500"/>
-                </a:solidFill>
-                <a:latin typeface="Calibri"/>
-              </a:rPr>
-              <a:t>0.72–0.80</a:t>
-            </a:r>
-            <a:r>
-              <a:rPr sz="1600">
-                <a:solidFill>
-                  <a:srgbClr val="202020"/>
-                </a:solidFill>
-                <a:latin typeface="Calibri"/>
-              </a:rPr>
-              <a:t> across es/ar/zh/hi/sw, </a:t>
-            </a:r>
-            <a:r>
-              <a:rPr sz="1600" b="1">
-                <a:solidFill>
-                  <a:srgbClr val="2B6CB0"/>
-                </a:solidFill>
-                <a:latin typeface="Calibri"/>
-              </a:rPr>
-              <a:t>harmful ≈ benign</a:t>
-            </a:r>
-            <a:r>
-              <a:rPr sz="1600">
-                <a:solidFill>
-                  <a:srgbClr val="202020"/>
-                </a:solidFill>
-                <a:latin typeface="Calibri"/>
-              </a:rPr>
-              <a:t>.</a:t>
-            </a:r>
-          </a:p>
-        </p:txBody>
-      </p:sp>
-      <p:sp>
-        <p:nvSpPr>
-          <p:cNvPr id="5" name="TextBox 4"/>
-          <p:cNvSpPr txBox="1"/>
-          <p:nvPr/>
-        </p:nvSpPr>
-        <p:spPr>
-          <a:xfrm>
-            <a:off x="502920" y="6291072"/>
-            <a:ext cx="11185855" cy="457200"/>
-          </a:xfrm>
-          <a:prstGeom prst="rect">
-            <a:avLst/>
-          </a:prstGeom>
-          <a:noFill/>
-        </p:spPr>
-        <p:txBody>
-          <a:bodyPr wrap="square">
-            <a:spAutoFit/>
-          </a:bodyPr>
-          <a:lstStyle/>
-          <a:p>
-            <a:pPr algn="l">
-              <a:spcAft>
-                <a:spcPts val="600"/>
-              </a:spcAft>
-            </a:pPr>
-            <a:r>
-              <a:rPr sz="1100">
-                <a:solidFill>
-                  <a:srgbClr val="666666"/>
-                </a:solidFill>
-                <a:latin typeface="Calibri"/>
-              </a:rPr>
-              <a:t>Validated on the learned-encoder perception layer (</a:t>
-            </a:r>
-            <a:r>
-              <a:rPr sz="1100">
-                <a:solidFill>
-                  <a:srgbClr val="666666"/>
-                </a:solidFill>
-                <a:latin typeface="Consolas"/>
-              </a:rPr>
-              <a:t>xbse</a:t>
-            </a:r>
-            <a:r>
-              <a:rPr sz="1100">
-                <a:solidFill>
-                  <a:srgbClr val="666666"/>
-                </a:solidFill>
-                <a:latin typeface="Calibri"/>
-              </a:rPr>
-              <a:t>); native DEME re-run of the five tracks is the extended version. Post-camera-ready results, July 2026.</a:t>
+              <a:rPr sz="1700" b="1">
+                <a:solidFill>
+                  <a:srgbClr val="2171B5"/>
+                </a:solidFill>
+                <a:latin typeface="Calibri"/>
+              </a:rPr>
+              <a:t>▪  </a:t>
+            </a:r>
+            <a:r>
+              <a:rPr sz="1700" b="1">
+                <a:solidFill>
+                  <a:srgbClr val="2171B5"/>
+                </a:solidFill>
+                <a:latin typeface="Calibri"/>
+              </a:rPr>
+              <a:t>Hardening target</a:t>
+            </a:r>
+            <a:r>
+              <a:rPr sz="1700">
+                <a:solidFill>
+                  <a:srgbClr val="202020"/>
+                </a:solidFill>
+                <a:latin typeface="Calibri"/>
+              </a:rPr>
+              <a:t>: the fact-extraction front-end, since downstream kernels inherit its failures.</a:t>
             </a:r>
           </a:p>
         </p:txBody>
@@ -5773,20 +6351,54 @@
       <p:grpSpPr/>
       <p:sp>
         <p:nvSpPr>
-          <p:cNvPr id="2" name="Rectangle 1"/>
+          <p:cNvPr id="2" name="TextBox 1"/>
+          <p:cNvSpPr txBox="1"/>
+          <p:nvPr/>
+        </p:nvSpPr>
+        <p:spPr>
+          <a:xfrm>
+            <a:off x="411480" y="146304"/>
+            <a:ext cx="11368735" cy="475488"/>
+          </a:xfrm>
+          <a:prstGeom prst="rect">
+            <a:avLst/>
+          </a:prstGeom>
+          <a:noFill/>
+        </p:spPr>
+        <p:txBody>
+          <a:bodyPr wrap="square">
+            <a:spAutoFit/>
+          </a:bodyPr>
+          <a:lstStyle/>
+          <a:p>
+            <a:r>
+              <a:rPr sz="2200" b="1">
+                <a:solidFill>
+                  <a:srgbClr val="1A2340"/>
+                </a:solidFill>
+                <a:latin typeface="Calibri"/>
+              </a:rPr>
+              <a:t>The larger program: philosophy engineering</a:t>
+            </a:r>
+          </a:p>
+        </p:txBody>
+      </p:sp>
+      <p:sp>
+        <p:nvSpPr>
+          <p:cNvPr id="3" name="Rectangle 2"/>
           <p:cNvSpPr/>
           <p:nvPr/>
         </p:nvSpPr>
         <p:spPr>
           <a:xfrm>
-            <a:off x="0" y="0"/>
-            <a:ext cx="12191695" cy="658368"/>
+            <a:off x="411480" y="676656"/>
+            <a:ext cx="11368735" cy="20320"/>
           </a:xfrm>
           <a:prstGeom prst="rect">
             <a:avLst/>
           </a:prstGeom>
           <a:solidFill>
-            <a:srgbClr val="2B6CB0"/>
+            <a:srgbClr val="2171B5"/>
           </a:solidFill>
           <a:ln>
             <a:noFill/>
@@ -5807,25 +6419,16 @@
           </a:fontRef>
         </p:style>
         <p:txBody>
-          <a:bodyPr rtlCol="0" anchor="ctr" lIns="411480" tIns="73152"/>
+          <a:bodyPr rtlCol="0" anchor="ctr"/>
           <a:lstStyle/>
           <a:p>
             <a:pPr algn="ctr"/>
-            <a:r>
-              <a:rPr sz="2200" b="1">
-                <a:solidFill>
-                  <a:srgbClr val="FFFFFF"/>
-                </a:solidFill>
-                <a:latin typeface="Calibri"/>
-              </a:rPr>
-              <a:t>Since submission — reliable ≠ distinct: the space is bifactor</a:t>
-            </a:r>
-          </a:p>
-        </p:txBody>
-      </p:sp>
-      <p:sp>
-        <p:nvSpPr>
-          <p:cNvPr id="3" name="TextBox 2"/>
+          </a:p>
+        </p:txBody>
+      </p:sp>
+      <p:sp>
+        <p:nvSpPr>
+          <p:cNvPr id="4" name="TextBox 3"/>
           <p:cNvSpPr txBox="1"/>
           <p:nvPr/>
         </p:nvSpPr>
@@ -5853,7 +6456,7 @@
             <a:r>
               <a:rPr sz="1000">
                 <a:solidFill>
-                  <a:srgbClr val="666666"/>
+                  <a:srgbClr val="636363"/>
                 </a:solidFill>
                 <a:latin typeface="Calibri"/>
               </a:rPr>
@@ -5864,14 +6467,14 @@
       </p:sp>
       <p:sp>
         <p:nvSpPr>
-          <p:cNvPr id="4" name="TextBox 3"/>
+          <p:cNvPr id="5" name="TextBox 4"/>
           <p:cNvSpPr txBox="1"/>
           <p:nvPr/>
         </p:nvSpPr>
         <p:spPr>
           <a:xfrm>
-            <a:off x="502920" y="822960"/>
-            <a:ext cx="11155680" cy="1463040"/>
+            <a:off x="502920" y="868680"/>
+            <a:ext cx="11155680" cy="1371600"/>
           </a:xfrm>
           <a:prstGeom prst="rect">
             <a:avLst/>
@@ -5886,209 +6489,57 @@
           <a:p>
             <a:pPr algn="l">
               <a:spcAft>
-                <a:spcPts val="800"/>
-              </a:spcAft>
-            </a:pPr>
-            <a:r>
-              <a:rPr sz="1700" b="1">
-                <a:solidFill>
-                  <a:srgbClr val="202020"/>
-                </a:solidFill>
-                <a:latin typeface="Calibri"/>
-              </a:rPr>
-              <a:t>ICC 0.97 proves the dimensions are reliably measurable — are they distinct?</a:t>
-            </a:r>
-          </a:p>
-          <a:p>
-            <a:pPr algn="l">
-              <a:spcAft>
                 <a:spcPts val="600"/>
               </a:spcAft>
             </a:pPr>
             <a:r>
-              <a:rPr sz="1500">
-                <a:solidFill>
-                  <a:srgbClr val="202020"/>
-                </a:solidFill>
-                <a:latin typeface="Calibri"/>
-              </a:rPr>
-              <a:t>A registered bifactor readout, answered against ourselves: a </a:t>
-            </a:r>
-            <a:r>
-              <a:rPr sz="1500" b="1">
-                <a:solidFill>
-                  <a:srgbClr val="2B6CB0"/>
-                </a:solidFill>
-                <a:latin typeface="Calibri"/>
-              </a:rPr>
-              <a:t>general moral-valence channel G</a:t>
-            </a:r>
-            <a:r>
-              <a:rPr sz="1500">
-                <a:solidFill>
-                  <a:srgbClr val="202020"/>
-                </a:solidFill>
-                <a:latin typeface="Calibri"/>
-              </a:rPr>
-              <a:t> is real (cross-dataset AUROC </a:t>
-            </a:r>
-            <a:r>
-              <a:rPr sz="1500" b="1">
-                <a:solidFill>
-                  <a:srgbClr val="A67500"/>
-                </a:solidFill>
-                <a:latin typeface="Calibri"/>
-              </a:rPr>
-              <a:t>0.856 ± 0.008</a:t>
-            </a:r>
-            <a:r>
-              <a:rPr sz="1500">
-                <a:solidFill>
-                  <a:srgbClr val="202020"/>
-                </a:solidFill>
-                <a:latin typeface="Calibri"/>
-              </a:rPr>
-              <a:t>, +0.337 over null, n = 51,319) — and five named axes are ≥ </a:t>
-            </a:r>
-            <a:r>
-              <a:rPr sz="1500" b="1">
-                <a:solidFill>
-                  <a:srgbClr val="A67500"/>
-                </a:solidFill>
-                <a:latin typeface="Calibri"/>
-              </a:rPr>
-              <a:t>0.98</a:t>
-            </a:r>
-            <a:r>
-              <a:rPr sz="1500">
-                <a:solidFill>
-                  <a:srgbClr val="202020"/>
-                </a:solidFill>
-                <a:latin typeface="Calibri"/>
-              </a:rPr>
-              <a:t> predictable from G alone.</a:t>
-            </a:r>
-          </a:p>
-        </p:txBody>
-      </p:sp>
-      <p:graphicFrame>
-        <p:nvGraphicFramePr>
-          <p:cNvPr id="5" name="Table 4"/>
-          <p:cNvGraphicFramePr>
-            <a:graphicFrameLocks noGrp="1"/>
-          </p:cNvGraphicFramePr>
-          <p:nvPr/>
-        </p:nvGraphicFramePr>
-        <p:xfrm>
-          <a:off x="502920" y="2377440"/>
-          <a:ext cx="11155680" cy="914400"/>
-        </p:xfrm>
-        <a:graphic>
-          <a:graphicData uri="http://schemas.openxmlformats.org/drawingml/2006/table">
-            <a:tbl>
-              <a:tblPr>
-                <a:tableStyleId>{5C22544A-7EE6-4342-B048-85BDC9FD1C3A}</a:tableStyleId>
-              </a:tblPr>
-              <a:tblGrid>
-                <a:gridCol w="2286000"/>
-                <a:gridCol w="8869680"/>
-              </a:tblGrid>
-              <a:tr h="457200">
-                <a:tc>
-                  <a:txBody>
-                    <a:bodyPr wrap="square"/>
-                    <a:lstStyle/>
-                    <a:p>
-                      <a:r>
-                        <a:rPr sz="1300" b="1">
-                          <a:solidFill>
-                            <a:srgbClr val="202020"/>
-                          </a:solidFill>
-                          <a:latin typeface="Calibri"/>
-                        </a:rPr>
-                        <a:t>Own-axis (specific)</a:t>
-                      </a:r>
-                    </a:p>
-                  </a:txBody>
-                  <a:tcPr marT="18288" marB="18288">
-                    <a:solidFill>
-                      <a:srgbClr val="FFFFFF"/>
-                    </a:solidFill>
-                  </a:tcPr>
-                </a:tc>
-                <a:tc>
-                  <a:txBody>
-                    <a:bodyPr wrap="square"/>
-                    <a:lstStyle/>
-                    <a:p>
-                      <a:r>
-                        <a:rPr sz="1300">
-                          <a:solidFill>
-                            <a:srgbClr val="202020"/>
-                          </a:solidFill>
-                          <a:latin typeface="Calibri"/>
-                        </a:rPr>
-                        <a:t>environmental +.31 · privacy +.28 · identity_attack +.25 · autonomy +.17 · physical +.08</a:t>
-                      </a:r>
-                    </a:p>
-                  </a:txBody>
-                  <a:tcPr marT="18288" marB="18288">
-                    <a:solidFill>
-                      <a:srgbClr val="FFFFFF"/>
-                    </a:solidFill>
-                  </a:tcPr>
-                </a:tc>
-              </a:tr>
-              <a:tr h="457200">
-                <a:tc>
-                  <a:txBody>
-                    <a:bodyPr wrap="square"/>
-                    <a:lstStyle/>
-                    <a:p>
-                      <a:r>
-                        <a:rPr sz="1300" b="1">
-                          <a:solidFill>
-                            <a:srgbClr val="202020"/>
-                          </a:solidFill>
-                          <a:latin typeface="Calibri"/>
-                        </a:rPr>
-                        <a:t>Demote to G</a:t>
-                      </a:r>
-                    </a:p>
-                  </a:txBody>
-                  <a:tcPr marT="18288" marB="18288">
-                    <a:solidFill>
-                      <a:srgbClr val="FFFFFF"/>
-                    </a:solidFill>
-                  </a:tcPr>
-                </a:tc>
-                <a:tc>
-                  <a:txBody>
-                    <a:bodyPr wrap="square"/>
-                    <a:lstStyle/>
-                    <a:p>
-                      <a:r>
-                        <a:rPr sz="1300">
-                          <a:solidFill>
-                            <a:srgbClr val="202020"/>
-                          </a:solidFill>
-                          <a:latin typeface="Calibri"/>
-                        </a:rPr>
-                        <a:t>fairness · loyalty · care · legitimacy · epistemic · purity  (−.02 to −.12)</a:t>
-                      </a:r>
-                    </a:p>
-                  </a:txBody>
-                  <a:tcPr marT="18288" marB="18288">
-                    <a:solidFill>
-                      <a:srgbClr val="FFFFFF"/>
-                    </a:solidFill>
-                  </a:tcPr>
-                </a:tc>
-              </a:tr>
-            </a:tbl>
-          </a:graphicData>
-        </a:graphic>
-      </p:graphicFrame>
+              <a:rPr sz="1600">
+                <a:solidFill>
+                  <a:srgbClr val="202020"/>
+                </a:solidFill>
+                <a:latin typeface="Calibri"/>
+              </a:rPr>
+              <a:t>This paper is one instance of a method: take a construct usually settled by </a:t>
+            </a:r>
+            <a:r>
+              <a:rPr sz="1600" b="1">
+                <a:solidFill>
+                  <a:srgbClr val="2171B5"/>
+                </a:solidFill>
+                <a:latin typeface="Calibri"/>
+              </a:rPr>
+              <a:t>argument</a:t>
+            </a:r>
+            <a:r>
+              <a:rPr sz="1600">
+                <a:solidFill>
+                  <a:srgbClr val="202020"/>
+                </a:solidFill>
+                <a:latin typeface="Calibri"/>
+              </a:rPr>
+              <a:t> — what is a harm? has this judgment been manipulated? — and build it into an </a:t>
+            </a:r>
+            <a:r>
+              <a:rPr sz="1600" b="1">
+                <a:solidFill>
+                  <a:srgbClr val="D95F02"/>
+                </a:solidFill>
+                <a:latin typeface="Calibri"/>
+              </a:rPr>
+              <a:t>instrument</a:t>
+            </a:r>
+            <a:r>
+              <a:rPr sz="1600">
+                <a:solidFill>
+                  <a:srgbClr val="202020"/>
+                </a:solidFill>
+                <a:latin typeface="Calibri"/>
+              </a:rPr>
+              <a:t> you can measure, falsify, and harden.</a:t>
+            </a:r>
+          </a:p>
+        </p:txBody>
+      </p:sp>
       <p:sp>
         <p:nvSpPr>
           <p:cNvPr id="6" name="TextBox 5"/>
@@ -6097,8 +6548,8 @@
         </p:nvSpPr>
         <p:spPr>
           <a:xfrm>
-            <a:off x="502920" y="3383280"/>
-            <a:ext cx="11155680" cy="365760"/>
+            <a:off x="502920" y="2286000"/>
+            <a:ext cx="6080760" cy="3566160"/>
           </a:xfrm>
           <a:prstGeom prst="rect">
             <a:avLst/>
@@ -6113,17 +6564,202 @@
           <a:p>
             <a:pPr algn="l">
               <a:spcAft>
+                <a:spcPts val="1000"/>
+              </a:spcAft>
+            </a:pPr>
+            <a:r>
+              <a:rPr sz="1500" b="1">
+                <a:solidFill>
+                  <a:srgbClr val="202020"/>
+                </a:solidFill>
+                <a:latin typeface="Calibri"/>
+              </a:rPr>
+              <a:t>What makes it engineering, not rhetoric</a:t>
+            </a:r>
+          </a:p>
+          <a:p>
+            <a:pPr algn="l">
+              <a:spcAft>
+                <a:spcPts val="1200"/>
+              </a:spcAft>
+            </a:pPr>
+            <a:r>
+              <a:rPr sz="1400" b="1">
+                <a:solidFill>
+                  <a:srgbClr val="2171B5"/>
+                </a:solidFill>
+                <a:latin typeface="Calibri"/>
+              </a:rPr>
+              <a:t>▪  </a:t>
+            </a:r>
+            <a:r>
+              <a:rPr sz="1400">
+                <a:solidFill>
+                  <a:srgbClr val="202020"/>
+                </a:solidFill>
+                <a:latin typeface="Calibri"/>
+              </a:rPr>
+              <a:t>A </a:t>
+            </a:r>
+            <a:r>
+              <a:rPr sz="1400" b="1">
+                <a:solidFill>
+                  <a:srgbClr val="2171B5"/>
+                </a:solidFill>
+                <a:latin typeface="Calibri"/>
+              </a:rPr>
+              <a:t>space</a:t>
+            </a:r>
+            <a:r>
+              <a:rPr sz="1400">
+                <a:solidFill>
+                  <a:srgbClr val="202020"/>
+                </a:solidFill>
+                <a:latin typeface="Calibri"/>
+              </a:rPr>
+              <a:t>, not a slogan: judgments are points, manipulation is </a:t>
+            </a:r>
+            <a:r>
+              <a:rPr sz="1400" b="1">
+                <a:solidFill>
+                  <a:srgbClr val="2171B5"/>
+                </a:solidFill>
+                <a:latin typeface="Calibri"/>
+              </a:rPr>
+              <a:t>displacement</a:t>
+            </a:r>
+            <a:r>
+              <a:rPr sz="1400">
+                <a:solidFill>
+                  <a:srgbClr val="202020"/>
+                </a:solidFill>
+                <a:latin typeface="Calibri"/>
+              </a:rPr>
+              <a:t>, robustness is </a:t>
+            </a:r>
+            <a:r>
+              <a:rPr sz="1400" b="1">
+                <a:solidFill>
+                  <a:srgbClr val="2171B5"/>
+                </a:solidFill>
+                <a:latin typeface="Calibri"/>
+              </a:rPr>
+              <a:t>invariance</a:t>
+            </a:r>
+            <a:r>
+              <a:rPr sz="1400">
+                <a:solidFill>
+                  <a:srgbClr val="202020"/>
+                </a:solidFill>
+                <a:latin typeface="Calibri"/>
+              </a:rPr>
+              <a:t>.</a:t>
+            </a:r>
+          </a:p>
+          <a:p>
+            <a:pPr algn="l">
+              <a:spcAft>
                 <a:spcPts val="600"/>
               </a:spcAft>
             </a:pPr>
             <a:r>
-              <a:rPr sz="1200">
-                <a:solidFill>
-                  <a:srgbClr val="666666"/>
-                </a:solidFill>
-                <a:latin typeface="Calibri"/>
-              </a:rPr>
-              <a:t>The G row is bimodal: 0.85–0.94 on demoted axes' own pairs, chance on the specific ones.</a:t>
+              <a:rPr sz="1400" b="1">
+                <a:solidFill>
+                  <a:srgbClr val="2171B5"/>
+                </a:solidFill>
+                <a:latin typeface="Calibri"/>
+              </a:rPr>
+              <a:t>▪  </a:t>
+            </a:r>
+            <a:r>
+              <a:rPr sz="1400" b="1">
+                <a:solidFill>
+                  <a:srgbClr val="2171B5"/>
+                </a:solidFill>
+                <a:latin typeface="Calibri"/>
+              </a:rPr>
+              <a:t>Pre-registration</a:t>
+            </a:r>
+            <a:r>
+              <a:rPr sz="1400">
+                <a:solidFill>
+                  <a:srgbClr val="202020"/>
+                </a:solidFill>
+                <a:latin typeface="Calibri"/>
+              </a:rPr>
+              <a:t> + </a:t>
+            </a:r>
+            <a:r>
+              <a:rPr sz="1400" b="1">
+                <a:solidFill>
+                  <a:srgbClr val="2171B5"/>
+                </a:solidFill>
+                <a:latin typeface="Calibri"/>
+              </a:rPr>
+              <a:t>admission gates that retract</a:t>
+            </a:r>
+            <a:r>
+              <a:rPr sz="1400">
+                <a:solidFill>
+                  <a:srgbClr val="202020"/>
+                </a:solidFill>
+                <a:latin typeface="Calibri"/>
+              </a:rPr>
+              <a:t>: this talk's own bifactor test </a:t>
+            </a:r>
+            <a:r>
+              <a:rPr sz="1400" i="1">
+                <a:solidFill>
+                  <a:srgbClr val="202020"/>
+                </a:solidFill>
+                <a:latin typeface="Calibri"/>
+              </a:rPr>
+              <a:t>failed</a:t>
+            </a:r>
+            <a:r>
+              <a:rPr sz="1400">
+                <a:solidFill>
+                  <a:srgbClr val="202020"/>
+                </a:solidFill>
+                <a:latin typeface="Calibri"/>
+              </a:rPr>
+              <a:t> its P1; a channel rescue was </a:t>
+            </a:r>
+            <a:r>
+              <a:rPr sz="1400" i="1">
+                <a:solidFill>
+                  <a:srgbClr val="202020"/>
+                </a:solidFill>
+                <a:latin typeface="Calibri"/>
+              </a:rPr>
+              <a:t>refuted</a:t>
+            </a:r>
+            <a:r>
+              <a:rPr sz="1400">
+                <a:solidFill>
+                  <a:srgbClr val="202020"/>
+                </a:solidFill>
+                <a:latin typeface="Calibri"/>
+              </a:rPr>
+              <a:t>. Claims that do not transfer are </a:t>
+            </a:r>
+            <a:r>
+              <a:rPr sz="1400" b="1">
+                <a:solidFill>
+                  <a:srgbClr val="D95F02"/>
+                </a:solidFill>
+                <a:latin typeface="Calibri"/>
+              </a:rPr>
+              <a:t>publicly demoted</a:t>
+            </a:r>
+            <a:r>
+              <a:rPr sz="1400">
+                <a:solidFill>
+                  <a:srgbClr val="202020"/>
+                </a:solidFill>
+                <a:latin typeface="Calibri"/>
+              </a:rPr>
+              <a:t>.</a:t>
             </a:r>
           </a:p>
         </p:txBody>
@@ -6136,8 +6772,8 @@
         </p:nvSpPr>
         <p:spPr>
           <a:xfrm>
-            <a:off x="502920" y="3840480"/>
-            <a:ext cx="11155680" cy="1874519"/>
+            <a:off x="6812280" y="2286000"/>
+            <a:ext cx="4892040" cy="3017520"/>
           </a:xfrm>
           <a:prstGeom prst="roundRect">
             <a:avLst>
@@ -6145,11 +6781,11 @@
             </a:avLst>
           </a:prstGeom>
           <a:solidFill>
-            <a:srgbClr val="E9F0F9"/>
+            <a:srgbClr val="E4EDF7"/>
           </a:solidFill>
           <a:ln w="9525">
             <a:solidFill>
-              <a:srgbClr val="2B6CB0"/>
+              <a:srgbClr val="2171B5"/>
             </a:solidFill>
           </a:ln>
         </p:spPr>
@@ -6177,47 +6813,83 @@
               </a:spcAft>
             </a:pPr>
             <a:r>
-              <a:rPr sz="1600" b="1">
-                <a:solidFill>
-                  <a:srgbClr val="2B6CB0"/>
-                </a:solidFill>
-                <a:latin typeface="Calibri"/>
-              </a:rPr>
-              <a:t>Consequence for Secure AI</a:t>
+              <a:rPr sz="1500" b="1">
+                <a:solidFill>
+                  <a:srgbClr val="2171B5"/>
+                </a:solidFill>
+                <a:latin typeface="Calibri"/>
+              </a:rPr>
+              <a:t>The conjecture behind the program (not tested here)</a:t>
             </a:r>
           </a:p>
           <a:p>
             <a:pPr algn="l">
               <a:spcAft>
-                <a:spcPts val="600"/>
+                <a:spcPts val="1200"/>
               </a:spcAft>
             </a:pPr>
             <a:r>
-              <a:rPr sz="1500">
-                <a:solidFill>
-                  <a:srgbClr val="202020"/>
-                </a:solidFill>
-                <a:latin typeface="Calibri"/>
-              </a:rPr>
-              <a:t>A scalar robustness score is now </a:t>
-            </a:r>
-            <a:r>
-              <a:rPr sz="1500" b="1">
-                <a:solidFill>
-                  <a:srgbClr val="A67500"/>
-                </a:solidFill>
-                <a:latin typeface="Calibri"/>
-              </a:rPr>
-              <a:t>measured, not argued</a:t>
-            </a:r>
-            <a:r>
-              <a:rPr sz="1500">
-                <a:solidFill>
-                  <a:srgbClr val="202020"/>
-                </a:solidFill>
-                <a:latin typeface="Calibri"/>
-              </a:rPr>
-              <a:t>, to be mostly G — the vulnerability structure lives in the surviving specifics.</a:t>
+              <a:rPr sz="1400">
+                <a:solidFill>
+                  <a:srgbClr val="202020"/>
+                </a:solidFill>
+                <a:latin typeface="Calibri"/>
+              </a:rPr>
+              <a:t>Normative and aesthetic structure is </a:t>
+            </a:r>
+            <a:r>
+              <a:rPr sz="1400" b="1">
+                <a:solidFill>
+                  <a:srgbClr val="D95F02"/>
+                </a:solidFill>
+                <a:latin typeface="Calibri"/>
+              </a:rPr>
+              <a:t>geometric</a:t>
+            </a:r>
+            <a:r>
+              <a:rPr sz="1400">
+                <a:solidFill>
+                  <a:srgbClr val="202020"/>
+                </a:solidFill>
+                <a:latin typeface="Calibri"/>
+              </a:rPr>
+              <a:t> — it lives in </a:t>
+            </a:r>
+            <a:r>
+              <a:rPr sz="1400" b="1">
+                <a:solidFill>
+                  <a:srgbClr val="2171B5"/>
+                </a:solidFill>
+                <a:latin typeface="Calibri"/>
+              </a:rPr>
+              <a:t>compressibility</a:t>
+            </a:r>
+            <a:r>
+              <a:rPr sz="1400">
+                <a:solidFill>
+                  <a:srgbClr val="202020"/>
+                </a:solidFill>
+                <a:latin typeface="Calibri"/>
+              </a:rPr>
+              <a:t> and </a:t>
+            </a:r>
+            <a:r>
+              <a:rPr sz="1400" b="1">
+                <a:solidFill>
+                  <a:srgbClr val="2171B5"/>
+                </a:solidFill>
+                <a:latin typeface="Calibri"/>
+              </a:rPr>
+              <a:t>coarse-graining under an observer</a:t>
+            </a:r>
+            <a:r>
+              <a:rPr sz="1400">
+                <a:solidFill>
+                  <a:srgbClr val="202020"/>
+                </a:solidFill>
+                <a:latin typeface="Calibri"/>
+              </a:rPr>
+              <a:t>.</a:t>
             </a:r>
           </a:p>
           <a:p>
@@ -6227,67 +6899,49 @@
               </a:spcAft>
             </a:pPr>
             <a:r>
-              <a:rPr sz="1500">
-                <a:solidFill>
-                  <a:srgbClr val="202020"/>
-                </a:solidFill>
-                <a:latin typeface="Calibri"/>
-              </a:rPr>
-              <a:t>In this talk's terms: </a:t>
-            </a:r>
-            <a:r>
-              <a:rPr sz="1500" b="1">
-                <a:solidFill>
-                  <a:srgbClr val="2B6CB0"/>
-                </a:solidFill>
-                <a:latin typeface="Calibri"/>
-              </a:rPr>
-              <a:t>autonomy, identity, social, physical</a:t>
-            </a:r>
-            <a:r>
-              <a:rPr sz="1500">
-                <a:solidFill>
-                  <a:srgbClr val="202020"/>
-                </a:solidFill>
-                <a:latin typeface="Calibri"/>
-              </a:rPr>
-              <a:t> are specific; </a:t>
-            </a:r>
-            <a:r>
-              <a:rPr sz="1500" b="1">
-                <a:solidFill>
-                  <a:srgbClr val="2B6CB0"/>
-                </a:solidFill>
-                <a:latin typeface="Calibri"/>
-              </a:rPr>
-              <a:t>trust, emotional, financial</a:t>
-            </a:r>
-            <a:r>
-              <a:rPr sz="1500">
-                <a:solidFill>
-                  <a:srgbClr val="202020"/>
-                </a:solidFill>
-                <a:latin typeface="Calibri"/>
-              </a:rPr>
-              <a:t> largely ride G. The readout shows G plus survivors — </a:t>
-            </a:r>
-            <a:r>
-              <a:rPr sz="1500" b="1">
-                <a:solidFill>
-                  <a:srgbClr val="A67500"/>
-                </a:solidFill>
-                <a:latin typeface="Calibri"/>
-              </a:rPr>
-              <a:t>never a hollow axis</a:t>
-            </a:r>
-            <a:r>
-              <a:rPr sz="1500">
-                <a:solidFill>
-                  <a:srgbClr val="202020"/>
-                </a:solidFill>
-                <a:latin typeface="Calibri"/>
-              </a:rPr>
-              <a:t>.</a:t>
+              <a:rPr sz="1400">
+                <a:solidFill>
+                  <a:srgbClr val="202020"/>
+                </a:solidFill>
+                <a:latin typeface="Calibri"/>
+              </a:rPr>
+              <a:t>One instrument, many domains: </a:t>
+            </a:r>
+            <a:r>
+              <a:rPr sz="1400" b="1">
+                <a:solidFill>
+                  <a:srgbClr val="2171B5"/>
+                </a:solidFill>
+                <a:latin typeface="Calibri"/>
+              </a:rPr>
+              <a:t>harm</a:t>
+            </a:r>
+            <a:r>
+              <a:rPr sz="1400">
+                <a:solidFill>
+                  <a:srgbClr val="202020"/>
+                </a:solidFill>
+                <a:latin typeface="Calibri"/>
+              </a:rPr>
+              <a:t> today; </a:t>
+            </a:r>
+            <a:r>
+              <a:rPr sz="1400" b="1">
+                <a:solidFill>
+                  <a:srgbClr val="2171B5"/>
+                </a:solidFill>
+                <a:latin typeface="Calibri"/>
+              </a:rPr>
+              <a:t>aesthetics, law, cognition</a:t>
+            </a:r>
+            <a:r>
+              <a:rPr sz="1400">
+                <a:solidFill>
+                  <a:srgbClr val="202020"/>
+                </a:solidFill>
+                <a:latin typeface="Calibri"/>
+              </a:rPr>
+              <a:t> on the same frame.</a:t>
             </a:r>
           </a:p>
         </p:txBody>
@@ -6322,11 +6976,29 @@
             <a:r>
               <a:rPr sz="1100">
                 <a:solidFill>
-                  <a:srgbClr val="666666"/>
-                </a:solidFill>
-                <a:latin typeface="Calibri"/>
-              </a:rPr>
-              <a:t>12×12 specificity gate, registered margin 0.05, production checkpoints. Post-camera-ready results, July 2026.</a:t>
+                  <a:srgbClr val="636363"/>
+                </a:solidFill>
+                <a:latin typeface="Calibri"/>
+              </a:rPr>
+              <a:t>A philosophical claim you can </a:t>
+            </a:r>
+            <a:r>
+              <a:rPr sz="1100" b="1">
+                <a:solidFill>
+                  <a:srgbClr val="D95F02"/>
+                </a:solidFill>
+                <a:latin typeface="Calibri"/>
+              </a:rPr>
+              <a:t>build, measure, and be proven wrong about</a:t>
+            </a:r>
+            <a:r>
+              <a:rPr sz="1100">
+                <a:solidFill>
+                  <a:srgbClr val="636363"/>
+                </a:solidFill>
+                <a:latin typeface="Calibri"/>
+              </a:rPr>
+              <a:t> outranks one you can only defend.</a:t>
             </a:r>
           </a:p>
         </p:txBody>
@@ -6351,20 +7023,54 @@
       <p:grpSpPr/>
       <p:sp>
         <p:nvSpPr>
-          <p:cNvPr id="2" name="Rectangle 1"/>
+          <p:cNvPr id="2" name="TextBox 1"/>
+          <p:cNvSpPr txBox="1"/>
+          <p:nvPr/>
+        </p:nvSpPr>
+        <p:spPr>
+          <a:xfrm>
+            <a:off x="411480" y="146304"/>
+            <a:ext cx="11368735" cy="475488"/>
+          </a:xfrm>
+          <a:prstGeom prst="rect">
+            <a:avLst/>
+          </a:prstGeom>
+          <a:noFill/>
+        </p:spPr>
+        <p:txBody>
+          <a:bodyPr wrap="square">
+            <a:spAutoFit/>
+          </a:bodyPr>
+          <a:lstStyle/>
+          <a:p>
+            <a:r>
+              <a:rPr sz="2200" b="1">
+                <a:solidFill>
+                  <a:srgbClr val="1A2340"/>
+                </a:solidFill>
+                <a:latin typeface="Calibri"/>
+              </a:rPr>
+              <a:t>Takeaways</a:t>
+            </a:r>
+          </a:p>
+        </p:txBody>
+      </p:sp>
+      <p:sp>
+        <p:nvSpPr>
+          <p:cNvPr id="3" name="Rectangle 2"/>
           <p:cNvSpPr/>
           <p:nvPr/>
         </p:nvSpPr>
         <p:spPr>
           <a:xfrm>
-            <a:off x="0" y="0"/>
-            <a:ext cx="12191695" cy="658368"/>
+            <a:off x="411480" y="676656"/>
+            <a:ext cx="11368735" cy="20320"/>
           </a:xfrm>
           <a:prstGeom prst="rect">
             <a:avLst/>
           </a:prstGeom>
           <a:solidFill>
-            <a:srgbClr val="2B6CB0"/>
+            <a:srgbClr val="2171B5"/>
           </a:solidFill>
           <a:ln>
             <a:noFill/>
@@ -6385,25 +7091,16 @@
           </a:fontRef>
         </p:style>
         <p:txBody>
-          <a:bodyPr rtlCol="0" anchor="ctr" lIns="411480" tIns="73152"/>
+          <a:bodyPr rtlCol="0" anchor="ctr"/>
           <a:lstStyle/>
           <a:p>
             <a:pPr algn="ctr"/>
-            <a:r>
-              <a:rPr sz="2200" b="1">
-                <a:solidFill>
-                  <a:srgbClr val="FFFFFF"/>
-                </a:solidFill>
-                <a:latin typeface="Calibri"/>
-              </a:rPr>
-              <a:t>Implications for Secure AI deployment</a:t>
-            </a:r>
-          </a:p>
-        </p:txBody>
-      </p:sp>
-      <p:sp>
-        <p:nvSpPr>
-          <p:cNvPr id="3" name="TextBox 2"/>
+          </a:p>
+        </p:txBody>
+      </p:sp>
+      <p:sp>
+        <p:nvSpPr>
+          <p:cNvPr id="4" name="TextBox 3"/>
           <p:cNvSpPr txBox="1"/>
           <p:nvPr/>
         </p:nvSpPr>
@@ -6431,7 +7128,7 @@
             <a:r>
               <a:rPr sz="1000">
                 <a:solidFill>
-                  <a:srgbClr val="666666"/>
+                  <a:srgbClr val="636363"/>
                 </a:solidFill>
                 <a:latin typeface="Calibri"/>
               </a:rPr>
@@ -6442,599 +7139,14 @@
       </p:sp>
       <p:sp>
         <p:nvSpPr>
-          <p:cNvPr id="4" name="TextBox 3"/>
-          <p:cNvSpPr txBox="1"/>
+          <p:cNvPr id="5" name="Rounded Rectangle 4"/>
+          <p:cNvSpPr/>
           <p:nvPr/>
         </p:nvSpPr>
         <p:spPr>
           <a:xfrm>
-            <a:off x="502920" y="1005840"/>
-            <a:ext cx="11155680" cy="4754880"/>
-          </a:xfrm>
-          <a:prstGeom prst="rect">
-            <a:avLst/>
-          </a:prstGeom>
-          <a:noFill/>
-        </p:spPr>
-        <p:txBody>
-          <a:bodyPr wrap="square">
-            <a:spAutoFit/>
-          </a:bodyPr>
-          <a:lstStyle/>
-          <a:p>
-            <a:pPr algn="l">
-              <a:spcAft>
-                <a:spcPts val="1200"/>
-              </a:spcAft>
-            </a:pPr>
-            <a:r>
-              <a:rPr sz="1700">
-                <a:solidFill>
-                  <a:srgbClr val="202020"/>
-                </a:solidFill>
-                <a:latin typeface="Calibri"/>
-              </a:rPr>
-              <a:t>•  </a:t>
-            </a:r>
-            <a:r>
-              <a:rPr sz="1700" b="1">
-                <a:solidFill>
-                  <a:srgbClr val="2B6CB0"/>
-                </a:solidFill>
-                <a:latin typeface="Calibri"/>
-              </a:rPr>
-              <a:t>Where to look</a:t>
-            </a:r>
-            <a:r>
-              <a:rPr sz="1700">
-                <a:solidFill>
-                  <a:srgbClr val="202020"/>
-                </a:solidFill>
-                <a:latin typeface="Calibri"/>
-              </a:rPr>
-              <a:t>: attacks that repackage the same facts with different </a:t>
-            </a:r>
-            <a:r>
-              <a:rPr sz="1700" b="1">
-                <a:solidFill>
-                  <a:srgbClr val="A67500"/>
-                </a:solidFill>
-                <a:latin typeface="Calibri"/>
-              </a:rPr>
-              <a:t>salience</a:t>
-            </a:r>
-            <a:r>
-              <a:rPr sz="1700">
-                <a:solidFill>
-                  <a:srgbClr val="202020"/>
-                </a:solidFill>
-                <a:latin typeface="Calibri"/>
-              </a:rPr>
-              <a:t> (euphemistic minimization).</a:t>
-            </a:r>
-          </a:p>
-          <a:p>
-            <a:pPr algn="l">
-              <a:spcAft>
-                <a:spcPts val="1200"/>
-              </a:spcAft>
-            </a:pPr>
-            <a:r>
-              <a:rPr sz="1700">
-                <a:solidFill>
-                  <a:srgbClr val="202020"/>
-                </a:solidFill>
-                <a:latin typeface="Calibri"/>
-              </a:rPr>
-              <a:t>•  </a:t>
-            </a:r>
-            <a:r>
-              <a:rPr sz="1700" b="1">
-                <a:solidFill>
-                  <a:srgbClr val="2B6CB0"/>
-                </a:solidFill>
-                <a:latin typeface="Calibri"/>
-              </a:rPr>
-              <a:t>Prompt-level defenses are bounded</a:t>
-            </a:r>
-            <a:r>
-              <a:rPr sz="1700">
-                <a:solidFill>
-                  <a:srgbClr val="202020"/>
-                </a:solidFill>
-                <a:latin typeface="Calibri"/>
-              </a:rPr>
-              <a:t>: explicit warnings recover only ~38% — a ceiling co-occurring with universal overconfidence (ECE 0.19–0.42).</a:t>
-            </a:r>
-          </a:p>
-          <a:p>
-            <a:pPr algn="l">
-              <a:spcAft>
-                <a:spcPts val="1200"/>
-              </a:spcAft>
-            </a:pPr>
-            <a:r>
-              <a:rPr sz="1700">
-                <a:solidFill>
-                  <a:srgbClr val="202020"/>
-                </a:solidFill>
-                <a:latin typeface="Calibri"/>
-              </a:rPr>
-              <a:t>•  </a:t>
-            </a:r>
-            <a:r>
-              <a:rPr sz="1700" b="1">
-                <a:solidFill>
-                  <a:srgbClr val="2B6CB0"/>
-                </a:solidFill>
-                <a:latin typeface="Calibri"/>
-              </a:rPr>
-              <a:t>Ask the right question</a:t>
-            </a:r>
-            <a:r>
-              <a:rPr sz="1700">
-                <a:solidFill>
-                  <a:srgbClr val="202020"/>
-                </a:solidFill>
-                <a:latin typeface="Calibri"/>
-              </a:rPr>
-              <a:t>: “which vulnerabilities matter for our use case?” — not “what's the robustness score?”</a:t>
-            </a:r>
-          </a:p>
-          <a:p>
-            <a:pPr algn="l">
-              <a:spcAft>
-                <a:spcPts val="600"/>
-              </a:spcAft>
-            </a:pPr>
-            <a:r>
-              <a:rPr sz="1700">
-                <a:solidFill>
-                  <a:srgbClr val="202020"/>
-                </a:solidFill>
-                <a:latin typeface="Calibri"/>
-              </a:rPr>
-              <a:t>•  </a:t>
-            </a:r>
-            <a:r>
-              <a:rPr sz="1700" b="1">
-                <a:solidFill>
-                  <a:srgbClr val="2B6CB0"/>
-                </a:solidFill>
-                <a:latin typeface="Calibri"/>
-              </a:rPr>
-              <a:t>Hardening target</a:t>
-            </a:r>
-            <a:r>
-              <a:rPr sz="1700">
-                <a:solidFill>
-                  <a:srgbClr val="202020"/>
-                </a:solidFill>
-                <a:latin typeface="Calibri"/>
-              </a:rPr>
-              <a:t>: the fact-extraction front-end, since downstream kernels inherit its failures.</a:t>
-            </a:r>
-          </a:p>
-        </p:txBody>
-      </p:sp>
-    </p:spTree>
-  </p:cSld>
-  <p:clrMapOvr>
-    <a:masterClrMapping/>
-  </p:clrMapOvr>
-</p:sld>
-</file>
-
-<file path=ppt/slides/slide14.xml><?xml version="1.0" encoding="utf-8"?>
-<p:sld xmlns:a="http://schemas.openxmlformats.org/drawingml/2006/main" xmlns:p="http://schemas.openxmlformats.org/presentationml/2006/main" xmlns:r="http://schemas.openxmlformats.org/officeDocument/2006/relationships">
-  <p:cSld>
-    <p:spTree>
-      <p:nvGrpSpPr>
-        <p:cNvPr id="1" name=""/>
-        <p:cNvGrpSpPr/>
-        <p:nvPr/>
-      </p:nvGrpSpPr>
-      <p:grpSpPr/>
-      <p:sp>
-        <p:nvSpPr>
-          <p:cNvPr id="2" name="Rectangle 1"/>
-          <p:cNvSpPr/>
-          <p:nvPr/>
-        </p:nvSpPr>
-        <p:spPr>
-          <a:xfrm>
-            <a:off x="0" y="0"/>
-            <a:ext cx="12191695" cy="658368"/>
-          </a:xfrm>
-          <a:prstGeom prst="rect">
-            <a:avLst/>
-          </a:prstGeom>
-          <a:solidFill>
-            <a:srgbClr val="2B6CB0"/>
-          </a:solidFill>
-          <a:ln>
-            <a:noFill/>
-          </a:ln>
-        </p:spPr>
-        <p:style>
-          <a:lnRef idx="1">
-            <a:schemeClr val="accent1"/>
-          </a:lnRef>
-          <a:fillRef idx="3">
-            <a:schemeClr val="accent1"/>
-          </a:fillRef>
-          <a:effectRef idx="2">
-            <a:schemeClr val="accent1"/>
-          </a:effectRef>
-          <a:fontRef idx="minor">
-            <a:schemeClr val="lt1"/>
-          </a:fontRef>
-        </p:style>
-        <p:txBody>
-          <a:bodyPr rtlCol="0" anchor="ctr" lIns="411480" tIns="73152"/>
-          <a:lstStyle/>
-          <a:p>
-            <a:pPr algn="ctr"/>
-            <a:r>
-              <a:rPr sz="2200" b="1">
-                <a:solidFill>
-                  <a:srgbClr val="FFFFFF"/>
-                </a:solidFill>
-                <a:latin typeface="Calibri"/>
-              </a:rPr>
-              <a:t>The larger program: philosophy engineering</a:t>
-            </a:r>
-          </a:p>
-        </p:txBody>
-      </p:sp>
-      <p:sp>
-        <p:nvSpPr>
-          <p:cNvPr id="3" name="TextBox 2"/>
-          <p:cNvSpPr txBox="1"/>
-          <p:nvPr/>
-        </p:nvSpPr>
-        <p:spPr>
-          <a:xfrm>
-            <a:off x="11368735" y="6473952"/>
-            <a:ext cx="640080" cy="274320"/>
-          </a:xfrm>
-          <a:prstGeom prst="rect">
-            <a:avLst/>
-          </a:prstGeom>
-          <a:noFill/>
-        </p:spPr>
-        <p:txBody>
-          <a:bodyPr wrap="square">
-            <a:spAutoFit/>
-          </a:bodyPr>
-          <a:lstStyle/>
-          <a:p>
-            <a:pPr algn="r">
-              <a:spcAft>
-                <a:spcPts val="600"/>
-              </a:spcAft>
-            </a:pPr>
-            <a:r>
-              <a:rPr sz="1000">
-                <a:solidFill>
-                  <a:srgbClr val="666666"/>
-                </a:solidFill>
-                <a:latin typeface="Calibri"/>
-              </a:rPr>
-              <a:t>14</a:t>
-            </a:r>
-          </a:p>
-        </p:txBody>
-      </p:sp>
-      <p:sp>
-        <p:nvSpPr>
-          <p:cNvPr id="4" name="TextBox 3"/>
-          <p:cNvSpPr txBox="1"/>
-          <p:nvPr/>
-        </p:nvSpPr>
-        <p:spPr>
-          <a:xfrm>
-            <a:off x="502920" y="868680"/>
-            <a:ext cx="11155680" cy="1371600"/>
-          </a:xfrm>
-          <a:prstGeom prst="rect">
-            <a:avLst/>
-          </a:prstGeom>
-          <a:noFill/>
-        </p:spPr>
-        <p:txBody>
-          <a:bodyPr wrap="square">
-            <a:spAutoFit/>
-          </a:bodyPr>
-          <a:lstStyle/>
-          <a:p>
-            <a:pPr algn="l">
-              <a:spcAft>
-                <a:spcPts val="600"/>
-              </a:spcAft>
-            </a:pPr>
-            <a:r>
-              <a:rPr sz="1700">
-                <a:solidFill>
-                  <a:srgbClr val="202020"/>
-                </a:solidFill>
-                <a:latin typeface="Calibri"/>
-              </a:rPr>
-              <a:t>This paper is one instance of a method: take a construct usually settled by </a:t>
-            </a:r>
-            <a:r>
-              <a:rPr sz="1700" b="1">
-                <a:solidFill>
-                  <a:srgbClr val="2B6CB0"/>
-                </a:solidFill>
-                <a:latin typeface="Calibri"/>
-              </a:rPr>
-              <a:t>argument</a:t>
-            </a:r>
-            <a:r>
-              <a:rPr sz="1700">
-                <a:solidFill>
-                  <a:srgbClr val="202020"/>
-                </a:solidFill>
-                <a:latin typeface="Calibri"/>
-              </a:rPr>
-              <a:t> — what is a harm? has this judgment been manipulated? — and build it into an </a:t>
-            </a:r>
-            <a:r>
-              <a:rPr sz="1700" b="1">
-                <a:solidFill>
-                  <a:srgbClr val="A67500"/>
-                </a:solidFill>
-                <a:latin typeface="Calibri"/>
-              </a:rPr>
-              <a:t>instrument</a:t>
-            </a:r>
-            <a:r>
-              <a:rPr sz="1700">
-                <a:solidFill>
-                  <a:srgbClr val="202020"/>
-                </a:solidFill>
-                <a:latin typeface="Calibri"/>
-              </a:rPr>
-              <a:t> you can measure, falsify, and harden.</a:t>
-            </a:r>
-          </a:p>
-        </p:txBody>
-      </p:sp>
-      <p:sp>
-        <p:nvSpPr>
-          <p:cNvPr id="5" name="TextBox 4"/>
-          <p:cNvSpPr txBox="1"/>
-          <p:nvPr/>
-        </p:nvSpPr>
-        <p:spPr>
-          <a:xfrm>
-            <a:off x="502920" y="2331720"/>
-            <a:ext cx="6080760" cy="3566160"/>
-          </a:xfrm>
-          <a:prstGeom prst="rect">
-            <a:avLst/>
-          </a:prstGeom>
-          <a:noFill/>
-        </p:spPr>
-        <p:txBody>
-          <a:bodyPr wrap="square">
-            <a:spAutoFit/>
-          </a:bodyPr>
-          <a:lstStyle/>
-          <a:p>
-            <a:pPr algn="l">
-              <a:spcAft>
-                <a:spcPts val="1000"/>
-              </a:spcAft>
-            </a:pPr>
-            <a:r>
-              <a:rPr sz="1600" b="1">
-                <a:solidFill>
-                  <a:srgbClr val="202020"/>
-                </a:solidFill>
-                <a:latin typeface="Calibri"/>
-              </a:rPr>
-              <a:t>What makes it engineering, not rhetoric</a:t>
-            </a:r>
-          </a:p>
-          <a:p>
-            <a:pPr algn="l">
-              <a:spcAft>
-                <a:spcPts val="1200"/>
-              </a:spcAft>
-            </a:pPr>
-            <a:r>
-              <a:rPr sz="1500">
-                <a:solidFill>
-                  <a:srgbClr val="202020"/>
-                </a:solidFill>
-                <a:latin typeface="Calibri"/>
-              </a:rPr>
-              <a:t>•  </a:t>
-            </a:r>
-            <a:r>
-              <a:rPr sz="1500">
-                <a:solidFill>
-                  <a:srgbClr val="202020"/>
-                </a:solidFill>
-                <a:latin typeface="Calibri"/>
-              </a:rPr>
-              <a:t>A </a:t>
-            </a:r>
-            <a:r>
-              <a:rPr sz="1500" b="1">
-                <a:solidFill>
-                  <a:srgbClr val="2B6CB0"/>
-                </a:solidFill>
-                <a:latin typeface="Calibri"/>
-              </a:rPr>
-              <a:t>space</a:t>
-            </a:r>
-            <a:r>
-              <a:rPr sz="1500">
-                <a:solidFill>
-                  <a:srgbClr val="202020"/>
-                </a:solidFill>
-                <a:latin typeface="Calibri"/>
-              </a:rPr>
-              <a:t>, not a slogan: judgments are points, manipulation is </a:t>
-            </a:r>
-            <a:r>
-              <a:rPr sz="1500" b="1">
-                <a:solidFill>
-                  <a:srgbClr val="2B6CB0"/>
-                </a:solidFill>
-                <a:latin typeface="Calibri"/>
-              </a:rPr>
-              <a:t>displacement</a:t>
-            </a:r>
-            <a:r>
-              <a:rPr sz="1500">
-                <a:solidFill>
-                  <a:srgbClr val="202020"/>
-                </a:solidFill>
-                <a:latin typeface="Calibri"/>
-              </a:rPr>
-              <a:t>, robustness is </a:t>
-            </a:r>
-            <a:r>
-              <a:rPr sz="1500" b="1">
-                <a:solidFill>
-                  <a:srgbClr val="2B6CB0"/>
-                </a:solidFill>
-                <a:latin typeface="Calibri"/>
-              </a:rPr>
-              <a:t>invariance</a:t>
-            </a:r>
-            <a:r>
-              <a:rPr sz="1500">
-                <a:solidFill>
-                  <a:srgbClr val="202020"/>
-                </a:solidFill>
-                <a:latin typeface="Calibri"/>
-              </a:rPr>
-              <a:t>.</a:t>
-            </a:r>
-          </a:p>
-          <a:p>
-            <a:pPr algn="l">
-              <a:spcAft>
-                <a:spcPts val="600"/>
-              </a:spcAft>
-            </a:pPr>
-            <a:r>
-              <a:rPr sz="1500">
-                <a:solidFill>
-                  <a:srgbClr val="202020"/>
-                </a:solidFill>
-                <a:latin typeface="Calibri"/>
-              </a:rPr>
-              <a:t>•  </a:t>
-            </a:r>
-            <a:r>
-              <a:rPr sz="1500" b="1">
-                <a:solidFill>
-                  <a:srgbClr val="2B6CB0"/>
-                </a:solidFill>
-                <a:latin typeface="Calibri"/>
-              </a:rPr>
-              <a:t>Pre-registration</a:t>
-            </a:r>
-            <a:r>
-              <a:rPr sz="1500">
-                <a:solidFill>
-                  <a:srgbClr val="202020"/>
-                </a:solidFill>
-                <a:latin typeface="Calibri"/>
-              </a:rPr>
-              <a:t> + </a:t>
-            </a:r>
-            <a:r>
-              <a:rPr sz="1500" b="1">
-                <a:solidFill>
-                  <a:srgbClr val="2B6CB0"/>
-                </a:solidFill>
-                <a:latin typeface="Calibri"/>
-              </a:rPr>
-              <a:t>admission gates that retract</a:t>
-            </a:r>
-            <a:r>
-              <a:rPr sz="1500">
-                <a:solidFill>
-                  <a:srgbClr val="202020"/>
-                </a:solidFill>
-                <a:latin typeface="Calibri"/>
-              </a:rPr>
-              <a:t>: this talk's own bifactor test </a:t>
-            </a:r>
-            <a:r>
-              <a:rPr sz="1500" i="1">
-                <a:solidFill>
-                  <a:srgbClr val="202020"/>
-                </a:solidFill>
-                <a:latin typeface="Calibri"/>
-              </a:rPr>
-              <a:t>failed</a:t>
-            </a:r>
-            <a:r>
-              <a:rPr sz="1500">
-                <a:solidFill>
-                  <a:srgbClr val="202020"/>
-                </a:solidFill>
-                <a:latin typeface="Calibri"/>
-              </a:rPr>
-              <a:t> its P1; a channel rescue was </a:t>
-            </a:r>
-            <a:r>
-              <a:rPr sz="1500" i="1">
-                <a:solidFill>
-                  <a:srgbClr val="202020"/>
-                </a:solidFill>
-                <a:latin typeface="Calibri"/>
-              </a:rPr>
-              <a:t>refuted</a:t>
-            </a:r>
-            <a:r>
-              <a:rPr sz="1500">
-                <a:solidFill>
-                  <a:srgbClr val="202020"/>
-                </a:solidFill>
-                <a:latin typeface="Calibri"/>
-              </a:rPr>
-              <a:t>. Claims that don't transfer are demoted — </a:t>
-            </a:r>
-            <a:r>
-              <a:rPr sz="1500" b="1">
-                <a:solidFill>
-                  <a:srgbClr val="A67500"/>
-                </a:solidFill>
-                <a:latin typeface="Calibri"/>
-              </a:rPr>
-              <a:t>in public</a:t>
-            </a:r>
-            <a:r>
-              <a:rPr sz="1500">
-                <a:solidFill>
-                  <a:srgbClr val="202020"/>
-                </a:solidFill>
-                <a:latin typeface="Calibri"/>
-              </a:rPr>
-              <a:t>.</a:t>
-            </a:r>
-          </a:p>
-        </p:txBody>
-      </p:sp>
-      <p:sp>
-        <p:nvSpPr>
-          <p:cNvPr id="6" name="Rounded Rectangle 5"/>
-          <p:cNvSpPr/>
-          <p:nvPr/>
-        </p:nvSpPr>
-        <p:spPr>
-          <a:xfrm>
-            <a:off x="6812280" y="2331720"/>
-            <a:ext cx="4892040" cy="3063240"/>
+            <a:off x="502920" y="1051560"/>
+            <a:ext cx="11155680" cy="3566160"/>
           </a:xfrm>
           <a:prstGeom prst="roundRect">
             <a:avLst>
@@ -7042,11 +7154,11 @@
             </a:avLst>
           </a:prstGeom>
           <a:solidFill>
-            <a:srgbClr val="E9F0F9"/>
+            <a:srgbClr val="E4EDF7"/>
           </a:solidFill>
           <a:ln w="9525">
             <a:solidFill>
-              <a:srgbClr val="2B6CB0"/>
+              <a:srgbClr val="2171B5"/>
             </a:solidFill>
           </a:ln>
         </p:spPr>
@@ -7074,83 +7186,151 @@
               </a:spcAft>
             </a:pPr>
             <a:r>
-              <a:rPr sz="1600" b="1">
-                <a:solidFill>
-                  <a:srgbClr val="2B6CB0"/>
-                </a:solidFill>
-                <a:latin typeface="Calibri"/>
-              </a:rPr>
-              <a:t>The wager</a:t>
+              <a:rPr sz="1800" b="1">
+                <a:solidFill>
+                  <a:srgbClr val="2171B5"/>
+                </a:solidFill>
+                <a:latin typeface="Calibri"/>
+              </a:rPr>
+              <a:t>Four takeaways</a:t>
             </a:r>
           </a:p>
           <a:p>
             <a:pPr algn="l">
               <a:spcAft>
-                <a:spcPts val="1200"/>
+                <a:spcPts val="1000"/>
               </a:spcAft>
             </a:pPr>
             <a:r>
-              <a:rPr sz="1500">
-                <a:solidFill>
-                  <a:srgbClr val="202020"/>
-                </a:solidFill>
-                <a:latin typeface="Calibri"/>
-              </a:rPr>
-              <a:t>Normative and aesthetic structure is </a:t>
-            </a:r>
-            <a:r>
-              <a:rPr sz="1500" b="1">
-                <a:solidFill>
-                  <a:srgbClr val="A67500"/>
-                </a:solidFill>
-                <a:latin typeface="Calibri"/>
-              </a:rPr>
-              <a:t>geometric</a:t>
-            </a:r>
-            <a:r>
-              <a:rPr sz="1500">
-                <a:solidFill>
-                  <a:srgbClr val="202020"/>
-                </a:solidFill>
-                <a:latin typeface="Calibri"/>
-              </a:rPr>
-              <a:t> — it lives in </a:t>
-            </a:r>
-            <a:r>
-              <a:rPr sz="1500" b="1">
-                <a:solidFill>
-                  <a:srgbClr val="2B6CB0"/>
-                </a:solidFill>
-                <a:latin typeface="Calibri"/>
-              </a:rPr>
-              <a:t>compressibility</a:t>
-            </a:r>
-            <a:r>
-              <a:rPr sz="1500">
-                <a:solidFill>
-                  <a:srgbClr val="202020"/>
-                </a:solidFill>
-                <a:latin typeface="Calibri"/>
-              </a:rPr>
-              <a:t> and </a:t>
-            </a:r>
-            <a:r>
-              <a:rPr sz="1500" b="1">
-                <a:solidFill>
-                  <a:srgbClr val="2B6CB0"/>
-                </a:solidFill>
-                <a:latin typeface="Calibri"/>
-              </a:rPr>
-              <a:t>coarse-graining under an observer</a:t>
-            </a:r>
-            <a:r>
-              <a:rPr sz="1500">
-                <a:solidFill>
-                  <a:srgbClr val="202020"/>
-                </a:solidFill>
-                <a:latin typeface="Calibri"/>
-              </a:rPr>
-              <a:t>.</a:t>
+              <a:rPr sz="1700">
+                <a:solidFill>
+                  <a:srgbClr val="202020"/>
+                </a:solidFill>
+                <a:latin typeface="Calibri"/>
+              </a:rPr>
+              <a:t>1.  Vulnerabilities are </a:t>
+            </a:r>
+            <a:r>
+              <a:rPr sz="1700" b="1">
+                <a:solidFill>
+                  <a:srgbClr val="D95F02"/>
+                </a:solidFill>
+                <a:latin typeface="Calibri"/>
+              </a:rPr>
+              <a:t>selective</a:t>
+            </a:r>
+            <a:r>
+              <a:rPr sz="1700">
+                <a:solidFill>
+                  <a:srgbClr val="202020"/>
+                </a:solidFill>
+                <a:latin typeface="Calibri"/>
+              </a:rPr>
+              <a:t> — salience manipulation is the surface.</a:t>
+            </a:r>
+          </a:p>
+          <a:p>
+            <a:pPr algn="l">
+              <a:spcAft>
+                <a:spcPts val="1000"/>
+              </a:spcAft>
+            </a:pPr>
+            <a:r>
+              <a:rPr sz="1700">
+                <a:solidFill>
+                  <a:srgbClr val="202020"/>
+                </a:solidFill>
+                <a:latin typeface="Calibri"/>
+              </a:rPr>
+              <a:t>2.  Robustness profiles are </a:t>
+            </a:r>
+            <a:r>
+              <a:rPr sz="1700" b="1">
+                <a:solidFill>
+                  <a:srgbClr val="D95F02"/>
+                </a:solidFill>
+                <a:latin typeface="Calibri"/>
+              </a:rPr>
+              <a:t>dissociable</a:t>
+            </a:r>
+            <a:r>
+              <a:rPr sz="1700">
+                <a:solidFill>
+                  <a:srgbClr val="202020"/>
+                </a:solidFill>
+                <a:latin typeface="Calibri"/>
+              </a:rPr>
+              <a:t> — and a single score is now </a:t>
+            </a:r>
+            <a:r>
+              <a:rPr sz="1700" i="1">
+                <a:solidFill>
+                  <a:srgbClr val="202020"/>
+                </a:solidFill>
+                <a:latin typeface="Calibri"/>
+              </a:rPr>
+              <a:t>measured</a:t>
+            </a:r>
+            <a:r>
+              <a:rPr sz="1700">
+                <a:solidFill>
+                  <a:srgbClr val="202020"/>
+                </a:solidFill>
+                <a:latin typeface="Calibri"/>
+              </a:rPr>
+              <a:t> to be mostly general valence.</a:t>
+            </a:r>
+          </a:p>
+          <a:p>
+            <a:pPr algn="l">
+              <a:spcAft>
+                <a:spcPts val="1000"/>
+              </a:spcAft>
+            </a:pPr>
+            <a:r>
+              <a:rPr sz="1700">
+                <a:solidFill>
+                  <a:srgbClr val="202020"/>
+                </a:solidFill>
+                <a:latin typeface="Calibri"/>
+              </a:rPr>
+              <a:t>3.  The exploit is </a:t>
+            </a:r>
+            <a:r>
+              <a:rPr sz="1700" b="1">
+                <a:solidFill>
+                  <a:srgbClr val="D95F02"/>
+                </a:solidFill>
+                <a:latin typeface="Calibri"/>
+              </a:rPr>
+              <a:t>end-to-end</a:t>
+            </a:r>
+            <a:r>
+              <a:rPr sz="1700">
+                <a:solidFill>
+                  <a:srgbClr val="202020"/>
+                </a:solidFill>
+                <a:latin typeface="Calibri"/>
+              </a:rPr>
+              <a:t> — it flips scalar scores </a:t>
+            </a:r>
+            <a:r>
+              <a:rPr sz="1700" i="1">
+                <a:solidFill>
+                  <a:srgbClr val="202020"/>
+                </a:solidFill>
+                <a:latin typeface="Calibri"/>
+              </a:rPr>
+              <a:t>and</a:t>
+            </a:r>
+            <a:r>
+              <a:rPr sz="1700">
+                <a:solidFill>
+                  <a:srgbClr val="202020"/>
+                </a:solidFill>
+                <a:latin typeface="Calibri"/>
+              </a:rPr>
+              <a:t> typed verdicts.</a:t>
             </a:r>
           </a:p>
           <a:p>
@@ -7160,62 +7340,44 @@
               </a:spcAft>
             </a:pPr>
             <a:r>
-              <a:rPr sz="1500">
-                <a:solidFill>
-                  <a:srgbClr val="202020"/>
-                </a:solidFill>
-                <a:latin typeface="Calibri"/>
-              </a:rPr>
-              <a:t>One instrument, many manifolds: </a:t>
-            </a:r>
-            <a:r>
-              <a:rPr sz="1500" b="1">
-                <a:solidFill>
-                  <a:srgbClr val="2B6CB0"/>
-                </a:solidFill>
-                <a:latin typeface="Calibri"/>
-              </a:rPr>
-              <a:t>harm</a:t>
-            </a:r>
-            <a:r>
-              <a:rPr sz="1500">
-                <a:solidFill>
-                  <a:srgbClr val="202020"/>
-                </a:solidFill>
-                <a:latin typeface="Calibri"/>
-              </a:rPr>
-              <a:t> today; </a:t>
-            </a:r>
-            <a:r>
-              <a:rPr sz="1500" b="1">
-                <a:solidFill>
-                  <a:srgbClr val="2B6CB0"/>
-                </a:solidFill>
-                <a:latin typeface="Calibri"/>
-              </a:rPr>
-              <a:t>aesthetics, law, cognition</a:t>
-            </a:r>
-            <a:r>
-              <a:rPr sz="1500">
-                <a:solidFill>
-                  <a:srgbClr val="202020"/>
-                </a:solidFill>
-                <a:latin typeface="Calibri"/>
-              </a:rPr>
-              <a:t> on the same frame.</a:t>
-            </a:r>
-          </a:p>
-        </p:txBody>
-      </p:sp>
-      <p:sp>
-        <p:nvSpPr>
-          <p:cNvPr id="7" name="TextBox 6"/>
+              <a:rPr sz="1700">
+                <a:solidFill>
+                  <a:srgbClr val="202020"/>
+                </a:solidFill>
+                <a:latin typeface="Calibri"/>
+              </a:rPr>
+              <a:t>4.  It is </a:t>
+            </a:r>
+            <a:r>
+              <a:rPr sz="1700" b="1">
+                <a:solidFill>
+                  <a:srgbClr val="D95F02"/>
+                </a:solidFill>
+                <a:latin typeface="Calibri"/>
+              </a:rPr>
+              <a:t>defensible</a:t>
+            </a:r>
+            <a:r>
+              <a:rPr sz="1700">
+                <a:solidFill>
+                  <a:srgbClr val="202020"/>
+                </a:solidFill>
+                <a:latin typeface="Calibri"/>
+              </a:rPr>
+              <a:t> — class averaging halves natural-paraphrase drift; adversarial-at-scale is the registered open item.</a:t>
+            </a:r>
+          </a:p>
+        </p:txBody>
+      </p:sp>
+      <p:sp>
+        <p:nvSpPr>
+          <p:cNvPr id="6" name="TextBox 5"/>
           <p:cNvSpPr txBox="1"/>
           <p:nvPr/>
         </p:nvSpPr>
         <p:spPr>
           <a:xfrm>
-            <a:off x="502920" y="6291072"/>
+            <a:off x="502920" y="5120640"/>
             <a:ext cx="11185855" cy="457200"/>
           </a:xfrm>
           <a:prstGeom prst="rect">
@@ -7237,29 +7399,83 @@
             <a:r>
               <a:rPr sz="1100">
                 <a:solidFill>
-                  <a:srgbClr val="666666"/>
-                </a:solidFill>
-                <a:latin typeface="Calibri"/>
-              </a:rPr>
-              <a:t>A philosophical claim you can </a:t>
-            </a:r>
-            <a:r>
-              <a:rPr sz="1100" b="1">
-                <a:solidFill>
-                  <a:srgbClr val="A67500"/>
-                </a:solidFill>
-                <a:latin typeface="Calibri"/>
-              </a:rPr>
-              <a:t>ship, measure, and be wrong about</a:t>
+                  <a:srgbClr val="636363"/>
+                </a:solidFill>
+                <a:latin typeface="Calibri"/>
+              </a:rPr>
+              <a:t>Reproducible: </a:t>
             </a:r>
             <a:r>
               <a:rPr sz="1100">
                 <a:solidFill>
-                  <a:srgbClr val="666666"/>
-                </a:solidFill>
-                <a:latin typeface="Calibri"/>
-              </a:rPr>
-              <a:t> outranks one you can only defend.</a:t>
+                  <a:srgbClr val="636363"/>
+                </a:solidFill>
+                <a:latin typeface="Consolas"/>
+              </a:rPr>
+              <a:t>pip install agi-hpc</a:t>
+            </a:r>
+            <a:r>
+              <a:rPr sz="1100">
+                <a:solidFill>
+                  <a:srgbClr val="636363"/>
+                </a:solidFill>
+                <a:latin typeface="Calibri"/>
+              </a:rPr>
+              <a:t> (tag </a:t>
+            </a:r>
+            <a:r>
+              <a:rPr sz="1100">
+                <a:solidFill>
+                  <a:srgbClr val="636363"/>
+                </a:solidFill>
+                <a:latin typeface="Consolas"/>
+              </a:rPr>
+              <a:t>bds2026-v2</a:t>
+            </a:r>
+            <a:r>
+              <a:rPr sz="1100">
+                <a:solidFill>
+                  <a:srgbClr val="636363"/>
+                </a:solidFill>
+                <a:latin typeface="Calibri"/>
+              </a:rPr>
+              <a:t>) · </a:t>
+            </a:r>
+            <a:r>
+              <a:rPr sz="1100">
+                <a:solidFill>
+                  <a:srgbClr val="636363"/>
+                </a:solidFill>
+                <a:latin typeface="Consolas"/>
+              </a:rPr>
+              <a:t>moral-spectrum-analyzer</a:t>
+            </a:r>
+            <a:r>
+              <a:rPr sz="1100">
+                <a:solidFill>
+                  <a:srgbClr val="636363"/>
+                </a:solidFill>
+                <a:latin typeface="Calibri"/>
+              </a:rPr>
+              <a:t> · </a:t>
+            </a:r>
+            <a:r>
+              <a:rPr sz="1100">
+                <a:solidFill>
+                  <a:srgbClr val="636363"/>
+                </a:solidFill>
+                <a:latin typeface="Consolas"/>
+              </a:rPr>
+              <a:t>xbse</a:t>
+            </a:r>
+            <a:r>
+              <a:rPr sz="1100">
+                <a:solidFill>
+                  <a:srgbClr val="636363"/>
+                </a:solidFill>
+                <a:latin typeface="Calibri"/>
+              </a:rPr>
+              <a:t> · kernel: ErisML / DEME v3 · five tracks, ~8,000 calls under $50/day (Kaggle); validation panel on the open NRP managed LLM API.</a:t>
             </a:r>
           </a:p>
         </p:txBody>
@@ -7272,493 +7488,7 @@
 </p:sld>
 </file>
 
-<file path=ppt/slides/slide15.xml><?xml version="1.0" encoding="utf-8"?>
-<p:sld xmlns:a="http://schemas.openxmlformats.org/drawingml/2006/main" xmlns:p="http://schemas.openxmlformats.org/presentationml/2006/main" xmlns:r="http://schemas.openxmlformats.org/officeDocument/2006/relationships">
-  <p:cSld>
-    <p:spTree>
-      <p:nvGrpSpPr>
-        <p:cNvPr id="1" name=""/>
-        <p:cNvGrpSpPr/>
-        <p:nvPr/>
-      </p:nvGrpSpPr>
-      <p:grpSpPr/>
-      <p:sp>
-        <p:nvSpPr>
-          <p:cNvPr id="2" name="Rectangle 1"/>
-          <p:cNvSpPr/>
-          <p:nvPr/>
-        </p:nvSpPr>
-        <p:spPr>
-          <a:xfrm>
-            <a:off x="0" y="0"/>
-            <a:ext cx="12191695" cy="658368"/>
-          </a:xfrm>
-          <a:prstGeom prst="rect">
-            <a:avLst/>
-          </a:prstGeom>
-          <a:solidFill>
-            <a:srgbClr val="2B6CB0"/>
-          </a:solidFill>
-          <a:ln>
-            <a:noFill/>
-          </a:ln>
-        </p:spPr>
-        <p:style>
-          <a:lnRef idx="1">
-            <a:schemeClr val="accent1"/>
-          </a:lnRef>
-          <a:fillRef idx="3">
-            <a:schemeClr val="accent1"/>
-          </a:fillRef>
-          <a:effectRef idx="2">
-            <a:schemeClr val="accent1"/>
-          </a:effectRef>
-          <a:fontRef idx="minor">
-            <a:schemeClr val="lt1"/>
-          </a:fontRef>
-        </p:style>
-        <p:txBody>
-          <a:bodyPr rtlCol="0" anchor="ctr" lIns="411480" tIns="73152"/>
-          <a:lstStyle/>
-          <a:p>
-            <a:pPr algn="ctr"/>
-            <a:r>
-              <a:rPr sz="2200" b="1">
-                <a:solidFill>
-                  <a:srgbClr val="FFFFFF"/>
-                </a:solidFill>
-                <a:latin typeface="Calibri"/>
-              </a:rPr>
-              <a:t>Reproducibility &amp; takeaways</a:t>
-            </a:r>
-          </a:p>
-        </p:txBody>
-      </p:sp>
-      <p:sp>
-        <p:nvSpPr>
-          <p:cNvPr id="3" name="TextBox 2"/>
-          <p:cNvSpPr txBox="1"/>
-          <p:nvPr/>
-        </p:nvSpPr>
-        <p:spPr>
-          <a:xfrm>
-            <a:off x="11368735" y="6473952"/>
-            <a:ext cx="640080" cy="274320"/>
-          </a:xfrm>
-          <a:prstGeom prst="rect">
-            <a:avLst/>
-          </a:prstGeom>
-          <a:noFill/>
-        </p:spPr>
-        <p:txBody>
-          <a:bodyPr wrap="square">
-            <a:spAutoFit/>
-          </a:bodyPr>
-          <a:lstStyle/>
-          <a:p>
-            <a:pPr algn="r">
-              <a:spcAft>
-                <a:spcPts val="600"/>
-              </a:spcAft>
-            </a:pPr>
-            <a:r>
-              <a:rPr sz="1000">
-                <a:solidFill>
-                  <a:srgbClr val="666666"/>
-                </a:solidFill>
-                <a:latin typeface="Calibri"/>
-              </a:rPr>
-              <a:t>15</a:t>
-            </a:r>
-          </a:p>
-        </p:txBody>
-      </p:sp>
-      <p:sp>
-        <p:nvSpPr>
-          <p:cNvPr id="4" name="TextBox 3"/>
-          <p:cNvSpPr txBox="1"/>
-          <p:nvPr/>
-        </p:nvSpPr>
-        <p:spPr>
-          <a:xfrm>
-            <a:off x="502920" y="868680"/>
-            <a:ext cx="11155680" cy="1554480"/>
-          </a:xfrm>
-          <a:prstGeom prst="rect">
-            <a:avLst/>
-          </a:prstGeom>
-          <a:noFill/>
-        </p:spPr>
-        <p:txBody>
-          <a:bodyPr wrap="square">
-            <a:spAutoFit/>
-          </a:bodyPr>
-          <a:lstStyle/>
-          <a:p>
-            <a:pPr algn="l">
-              <a:spcAft>
-                <a:spcPts val="800"/>
-              </a:spcAft>
-            </a:pPr>
-            <a:r>
-              <a:rPr sz="1600">
-                <a:solidFill>
-                  <a:srgbClr val="202020"/>
-                </a:solidFill>
-                <a:latin typeface="Calibri"/>
-              </a:rPr>
-              <a:t>•  </a:t>
-            </a:r>
-            <a:r>
-              <a:rPr sz="1600">
-                <a:solidFill>
-                  <a:srgbClr val="202020"/>
-                </a:solidFill>
-                <a:latin typeface="Calibri"/>
-              </a:rPr>
-              <a:t>Five tracks, multi-model, ~8,000 calls — under </a:t>
-            </a:r>
-            <a:r>
-              <a:rPr sz="1600" b="1">
-                <a:solidFill>
-                  <a:srgbClr val="2B6CB0"/>
-                </a:solidFill>
-                <a:latin typeface="Calibri"/>
-              </a:rPr>
-              <a:t>$50/day</a:t>
-            </a:r>
-            <a:r>
-              <a:rPr sz="1600">
-                <a:solidFill>
-                  <a:srgbClr val="202020"/>
-                </a:solidFill>
-                <a:latin typeface="Calibri"/>
-              </a:rPr>
-              <a:t> (Kaggle); validation panel on the open </a:t>
-            </a:r>
-            <a:r>
-              <a:rPr sz="1600" b="1">
-                <a:solidFill>
-                  <a:srgbClr val="2B6CB0"/>
-                </a:solidFill>
-                <a:latin typeface="Calibri"/>
-              </a:rPr>
-              <a:t>NRP managed LLM API</a:t>
-            </a:r>
-            <a:r>
-              <a:rPr sz="1600">
-                <a:solidFill>
-                  <a:srgbClr val="202020"/>
-                </a:solidFill>
-                <a:latin typeface="Calibri"/>
-              </a:rPr>
-              <a:t>.</a:t>
-            </a:r>
-          </a:p>
-          <a:p>
-            <a:pPr algn="l">
-              <a:spcAft>
-                <a:spcPts val="600"/>
-              </a:spcAft>
-            </a:pPr>
-            <a:r>
-              <a:rPr sz="1600">
-                <a:solidFill>
-                  <a:srgbClr val="202020"/>
-                </a:solidFill>
-                <a:latin typeface="Calibri"/>
-              </a:rPr>
-              <a:t>•  </a:t>
-            </a:r>
-            <a:r>
-              <a:rPr sz="1600">
-                <a:solidFill>
-                  <a:srgbClr val="202020"/>
-                </a:solidFill>
-                <a:latin typeface="Calibri"/>
-              </a:rPr>
-              <a:t>Code + data: </a:t>
-            </a:r>
-            <a:r>
-              <a:rPr sz="1600">
-                <a:solidFill>
-                  <a:srgbClr val="202020"/>
-                </a:solidFill>
-                <a:latin typeface="Consolas"/>
-              </a:rPr>
-              <a:t>pip install agi-hpc</a:t>
-            </a:r>
-            <a:r>
-              <a:rPr sz="1600">
-                <a:solidFill>
-                  <a:srgbClr val="202020"/>
-                </a:solidFill>
-                <a:latin typeface="Calibri"/>
-              </a:rPr>
-              <a:t>, tag </a:t>
-            </a:r>
-            <a:r>
-              <a:rPr sz="1600">
-                <a:solidFill>
-                  <a:srgbClr val="202020"/>
-                </a:solidFill>
-                <a:latin typeface="Consolas"/>
-              </a:rPr>
-              <a:t>bds2026-v1</a:t>
-            </a:r>
-            <a:r>
-              <a:rPr sz="1600">
-                <a:solidFill>
-                  <a:srgbClr val="202020"/>
-                </a:solidFill>
-                <a:latin typeface="Calibri"/>
-              </a:rPr>
-              <a:t>; decision kernel: </a:t>
-            </a:r>
-            <a:r>
-              <a:rPr sz="1600" b="1">
-                <a:solidFill>
-                  <a:srgbClr val="2B6CB0"/>
-                </a:solidFill>
-                <a:latin typeface="Calibri"/>
-              </a:rPr>
-              <a:t>ErisML / DEME v3</a:t>
-            </a:r>
-            <a:r>
-              <a:rPr sz="1600">
-                <a:solidFill>
-                  <a:srgbClr val="202020"/>
-                </a:solidFill>
-                <a:latin typeface="Calibri"/>
-              </a:rPr>
-              <a:t>.</a:t>
-            </a:r>
-          </a:p>
-        </p:txBody>
-      </p:sp>
-      <p:sp>
-        <p:nvSpPr>
-          <p:cNvPr id="5" name="Rounded Rectangle 4"/>
-          <p:cNvSpPr/>
-          <p:nvPr/>
-        </p:nvSpPr>
-        <p:spPr>
-          <a:xfrm>
-            <a:off x="502920" y="2743200"/>
-            <a:ext cx="11155680" cy="3108960"/>
-          </a:xfrm>
-          <a:prstGeom prst="roundRect">
-            <a:avLst>
-              <a:gd name="adj" fmla="val 6000"/>
-            </a:avLst>
-          </a:prstGeom>
-          <a:solidFill>
-            <a:srgbClr val="E9F0F9"/>
-          </a:solidFill>
-          <a:ln w="9525">
-            <a:solidFill>
-              <a:srgbClr val="2B6CB0"/>
-            </a:solidFill>
-          </a:ln>
-        </p:spPr>
-        <p:style>
-          <a:lnRef idx="1">
-            <a:schemeClr val="accent1"/>
-          </a:lnRef>
-          <a:fillRef idx="3">
-            <a:schemeClr val="accent1"/>
-          </a:fillRef>
-          <a:effectRef idx="2">
-            <a:schemeClr val="accent1"/>
-          </a:effectRef>
-          <a:fontRef idx="minor">
-            <a:schemeClr val="lt1"/>
-          </a:fontRef>
-        </p:style>
-        <p:txBody>
-          <a:bodyPr rtlCol="0" anchor="ctr" wrap="square" lIns="164592" rIns="164592" tIns="91440"/>
-          <a:lstStyle/>
-          <a:p>
-            <a:pPr algn="ctr">
-              <a:spcAft>
-                <a:spcPts val="600"/>
-              </a:spcAft>
-            </a:pPr>
-            <a:r>
-              <a:rPr sz="1700" b="1">
-                <a:solidFill>
-                  <a:srgbClr val="2B6CB0"/>
-                </a:solidFill>
-                <a:latin typeface="Calibri"/>
-              </a:rPr>
-              <a:t>Four takeaways</a:t>
-            </a:r>
-          </a:p>
-          <a:p>
-            <a:pPr algn="l">
-              <a:spcAft>
-                <a:spcPts val="800"/>
-              </a:spcAft>
-            </a:pPr>
-            <a:r>
-              <a:rPr sz="1600">
-                <a:solidFill>
-                  <a:srgbClr val="202020"/>
-                </a:solidFill>
-                <a:latin typeface="Calibri"/>
-              </a:rPr>
-              <a:t>1.  Vulnerabilities are </a:t>
-            </a:r>
-            <a:r>
-              <a:rPr sz="1600" b="1">
-                <a:solidFill>
-                  <a:srgbClr val="A67500"/>
-                </a:solidFill>
-                <a:latin typeface="Calibri"/>
-              </a:rPr>
-              <a:t>selective</a:t>
-            </a:r>
-            <a:r>
-              <a:rPr sz="1600">
-                <a:solidFill>
-                  <a:srgbClr val="202020"/>
-                </a:solidFill>
-                <a:latin typeface="Calibri"/>
-              </a:rPr>
-              <a:t> — salience manipulation is the surface.</a:t>
-            </a:r>
-          </a:p>
-          <a:p>
-            <a:pPr algn="l">
-              <a:spcAft>
-                <a:spcPts val="800"/>
-              </a:spcAft>
-            </a:pPr>
-            <a:r>
-              <a:rPr sz="1600">
-                <a:solidFill>
-                  <a:srgbClr val="202020"/>
-                </a:solidFill>
-                <a:latin typeface="Calibri"/>
-              </a:rPr>
-              <a:t>2.  Robustness profiles are </a:t>
-            </a:r>
-            <a:r>
-              <a:rPr sz="1600" b="1">
-                <a:solidFill>
-                  <a:srgbClr val="A67500"/>
-                </a:solidFill>
-                <a:latin typeface="Calibri"/>
-              </a:rPr>
-              <a:t>dissociable</a:t>
-            </a:r>
-            <a:r>
-              <a:rPr sz="1600">
-                <a:solidFill>
-                  <a:srgbClr val="202020"/>
-                </a:solidFill>
-                <a:latin typeface="Calibri"/>
-              </a:rPr>
-              <a:t> — no single score is safe.</a:t>
-            </a:r>
-          </a:p>
-          <a:p>
-            <a:pPr algn="l">
-              <a:spcAft>
-                <a:spcPts val="800"/>
-              </a:spcAft>
-            </a:pPr>
-            <a:r>
-              <a:rPr sz="1600">
-                <a:solidFill>
-                  <a:srgbClr val="202020"/>
-                </a:solidFill>
-                <a:latin typeface="Calibri"/>
-              </a:rPr>
-              <a:t>3.  The exploit is </a:t>
-            </a:r>
-            <a:r>
-              <a:rPr sz="1600" b="1">
-                <a:solidFill>
-                  <a:srgbClr val="A67500"/>
-                </a:solidFill>
-                <a:latin typeface="Calibri"/>
-              </a:rPr>
-              <a:t>end-to-end</a:t>
-            </a:r>
-            <a:r>
-              <a:rPr sz="1600">
-                <a:solidFill>
-                  <a:srgbClr val="202020"/>
-                </a:solidFill>
-                <a:latin typeface="Calibri"/>
-              </a:rPr>
-              <a:t> — it flips scalar scores </a:t>
-            </a:r>
-            <a:r>
-              <a:rPr sz="1600" i="1">
-                <a:solidFill>
-                  <a:srgbClr val="202020"/>
-                </a:solidFill>
-                <a:latin typeface="Calibri"/>
-              </a:rPr>
-              <a:t>and</a:t>
-            </a:r>
-            <a:r>
-              <a:rPr sz="1600">
-                <a:solidFill>
-                  <a:srgbClr val="202020"/>
-                </a:solidFill>
-                <a:latin typeface="Calibri"/>
-              </a:rPr>
-              <a:t> typed verdicts.</a:t>
-            </a:r>
-          </a:p>
-          <a:p>
-            <a:pPr algn="l">
-              <a:spcAft>
-                <a:spcPts val="400"/>
-              </a:spcAft>
-            </a:pPr>
-            <a:r>
-              <a:rPr sz="1600">
-                <a:solidFill>
-                  <a:srgbClr val="202020"/>
-                </a:solidFill>
-                <a:latin typeface="Calibri"/>
-              </a:rPr>
-              <a:t>4.  It is </a:t>
-            </a:r>
-            <a:r>
-              <a:rPr sz="1600" b="1">
-                <a:solidFill>
-                  <a:srgbClr val="A67500"/>
-                </a:solidFill>
-                <a:latin typeface="Calibri"/>
-              </a:rPr>
-              <a:t>defensible</a:t>
-            </a:r>
-            <a:r>
-              <a:rPr sz="1600">
-                <a:solidFill>
-                  <a:srgbClr val="202020"/>
-                </a:solidFill>
-                <a:latin typeface="Calibri"/>
-              </a:rPr>
-              <a:t> — averaging over the paraphrase class halves drift (since submission).</a:t>
-            </a:r>
-          </a:p>
-        </p:txBody>
-      </p:sp>
-    </p:spTree>
-  </p:cSld>
-  <p:clrMapOvr>
-    <a:masterClrMapping/>
-  </p:clrMapOvr>
-</p:sld>
-</file>
-
-<file path=ppt/slides/slide16.xml><?xml version="1.0" encoding="utf-8"?>
+<file path=ppt/slides/slide14.xml><?xml version="1.0" encoding="utf-8"?>
 <p:sld xmlns:a="http://schemas.openxmlformats.org/drawingml/2006/main" xmlns:p="http://schemas.openxmlformats.org/presentationml/2006/main" xmlns:r="http://schemas.openxmlformats.org/officeDocument/2006/relationships">
   <p:cSld>
     <p:spTree>
@@ -7822,7 +7552,7 @@
             <a:r>
               <a:rPr sz="3000" b="1">
                 <a:solidFill>
-                  <a:srgbClr val="2B6CB0"/>
+                  <a:srgbClr val="2171B5"/>
                 </a:solidFill>
                 <a:latin typeface="Calibri"/>
               </a:rPr>
@@ -7863,7 +7593,7 @@
             <a:r>
               <a:rPr sz="1300">
                 <a:solidFill>
-                  <a:srgbClr val="666666"/>
+                  <a:srgbClr val="636363"/>
                 </a:solidFill>
                 <a:latin typeface="Calibri"/>
               </a:rPr>
@@ -7879,7 +7609,7 @@
             <a:r>
               <a:rPr sz="1300">
                 <a:solidFill>
-                  <a:srgbClr val="666666"/>
+                  <a:srgbClr val="636363"/>
                 </a:solidFill>
                 <a:latin typeface="Calibri"/>
               </a:rPr>
@@ -7912,7 +7642,7 @@
 </p:sld>
 </file>
 
-<file path=ppt/slides/slide2.xml><?xml version="1.0" encoding="utf-8"?>
+<file path=ppt/slides/slide15.xml><?xml version="1.0" encoding="utf-8"?>
 <p:sld xmlns:a="http://schemas.openxmlformats.org/drawingml/2006/main" xmlns:p="http://schemas.openxmlformats.org/presentationml/2006/main" xmlns:r="http://schemas.openxmlformats.org/officeDocument/2006/relationships">
   <p:cSld>
     <p:spTree>
@@ -7924,20 +7654,54 @@
       <p:grpSpPr/>
       <p:sp>
         <p:nvSpPr>
-          <p:cNvPr id="2" name="Rectangle 1"/>
+          <p:cNvPr id="2" name="TextBox 1"/>
+          <p:cNvSpPr txBox="1"/>
+          <p:nvPr/>
+        </p:nvSpPr>
+        <p:spPr>
+          <a:xfrm>
+            <a:off x="411480" y="146304"/>
+            <a:ext cx="11368735" cy="475488"/>
+          </a:xfrm>
+          <a:prstGeom prst="rect">
+            <a:avLst/>
+          </a:prstGeom>
+          <a:noFill/>
+        </p:spPr>
+        <p:txBody>
+          <a:bodyPr wrap="square">
+            <a:spAutoFit/>
+          </a:bodyPr>
+          <a:lstStyle/>
+          <a:p>
+            <a:r>
+              <a:rPr sz="2200" b="1">
+                <a:solidFill>
+                  <a:srgbClr val="1A2340"/>
+                </a:solidFill>
+                <a:latin typeface="Calibri"/>
+              </a:rPr>
+              <a:t>Backup — Grounding: 7-D harm space → DEME v3 9-D vector</a:t>
+            </a:r>
+          </a:p>
+        </p:txBody>
+      </p:sp>
+      <p:sp>
+        <p:nvSpPr>
+          <p:cNvPr id="3" name="Rectangle 2"/>
           <p:cNvSpPr/>
           <p:nvPr/>
         </p:nvSpPr>
         <p:spPr>
           <a:xfrm>
-            <a:off x="0" y="0"/>
-            <a:ext cx="12191695" cy="658368"/>
+            <a:off x="411480" y="676656"/>
+            <a:ext cx="11368735" cy="20320"/>
           </a:xfrm>
           <a:prstGeom prst="rect">
             <a:avLst/>
           </a:prstGeom>
           <a:solidFill>
-            <a:srgbClr val="2B6CB0"/>
+            <a:srgbClr val="2171B5"/>
           </a:solidFill>
           <a:ln>
             <a:noFill/>
@@ -7958,25 +7722,16 @@
           </a:fontRef>
         </p:style>
         <p:txBody>
-          <a:bodyPr rtlCol="0" anchor="ctr" lIns="411480" tIns="73152"/>
+          <a:bodyPr rtlCol="0" anchor="ctr"/>
           <a:lstStyle/>
           <a:p>
             <a:pPr algn="ctr"/>
-            <a:r>
-              <a:rPr sz="2200" b="1">
-                <a:solidFill>
-                  <a:srgbClr val="FFFFFF"/>
-                </a:solidFill>
-                <a:latin typeface="Calibri"/>
-              </a:rPr>
-              <a:t>The problem: LLMs as decision services</a:t>
-            </a:r>
-          </a:p>
-        </p:txBody>
-      </p:sp>
-      <p:sp>
-        <p:nvSpPr>
-          <p:cNvPr id="3" name="TextBox 2"/>
+          </a:p>
+        </p:txBody>
+      </p:sp>
+      <p:sp>
+        <p:nvSpPr>
+          <p:cNvPr id="4" name="TextBox 3"/>
           <p:cNvSpPr txBox="1"/>
           <p:nvPr/>
         </p:nvSpPr>
@@ -8004,819 +7759,18 @@
             <a:r>
               <a:rPr sz="1000">
                 <a:solidFill>
-                  <a:srgbClr val="666666"/>
-                </a:solidFill>
-                <a:latin typeface="Calibri"/>
-              </a:rPr>
-              <a:t>2</a:t>
-            </a:r>
-          </a:p>
-        </p:txBody>
-      </p:sp>
-      <p:sp>
-        <p:nvSpPr>
-          <p:cNvPr id="4" name="TextBox 3"/>
-          <p:cNvSpPr txBox="1"/>
-          <p:nvPr/>
-        </p:nvSpPr>
-        <p:spPr>
-          <a:xfrm>
-            <a:off x="502920" y="914400"/>
-            <a:ext cx="11155680" cy="2651760"/>
-          </a:xfrm>
-          <a:prstGeom prst="rect">
-            <a:avLst/>
-          </a:prstGeom>
-          <a:noFill/>
-        </p:spPr>
-        <p:txBody>
-          <a:bodyPr wrap="square">
-            <a:spAutoFit/>
-          </a:bodyPr>
-          <a:lstStyle/>
-          <a:p>
-            <a:pPr algn="l">
-              <a:spcAft>
-                <a:spcPts val="1000"/>
-              </a:spcAft>
-            </a:pPr>
-            <a:r>
-              <a:rPr sz="1700">
-                <a:solidFill>
-                  <a:srgbClr val="202020"/>
-                </a:solidFill>
-                <a:latin typeface="Calibri"/>
-              </a:rPr>
-              <a:t>•  </a:t>
-            </a:r>
-            <a:r>
-              <a:rPr sz="1700">
-                <a:solidFill>
-                  <a:srgbClr val="202020"/>
-                </a:solidFill>
-                <a:latin typeface="Calibri"/>
-              </a:rPr>
-              <a:t>LLMs increasingly gate </a:t>
-            </a:r>
-            <a:r>
-              <a:rPr sz="1700" b="1">
-                <a:solidFill>
-                  <a:srgbClr val="2B6CB0"/>
-                </a:solidFill>
-                <a:latin typeface="Calibri"/>
-              </a:rPr>
-              <a:t>safety-critical decisions</a:t>
-            </a:r>
-            <a:r>
-              <a:rPr sz="1700">
-                <a:solidFill>
-                  <a:srgbClr val="202020"/>
-                </a:solidFill>
-                <a:latin typeface="Calibri"/>
-              </a:rPr>
-              <a:t> — content moderation, clinical triage, legal analysis.</a:t>
-            </a:r>
-          </a:p>
-          <a:p>
-            <a:pPr algn="l">
-              <a:spcAft>
-                <a:spcPts val="1000"/>
-              </a:spcAft>
-            </a:pPr>
-            <a:r>
-              <a:rPr sz="1700">
-                <a:solidFill>
-                  <a:srgbClr val="202020"/>
-                </a:solidFill>
-                <a:latin typeface="Calibri"/>
-              </a:rPr>
-              <a:t>•  </a:t>
-            </a:r>
-            <a:r>
-              <a:rPr sz="1700">
-                <a:solidFill>
-                  <a:srgbClr val="202020"/>
-                </a:solidFill>
-                <a:latin typeface="Calibri"/>
-              </a:rPr>
-              <a:t>A secure evaluator should judge the </a:t>
-            </a:r>
-            <a:r>
-              <a:rPr sz="1700" b="1">
-                <a:solidFill>
-                  <a:srgbClr val="2B6CB0"/>
-                </a:solidFill>
-                <a:latin typeface="Calibri"/>
-              </a:rPr>
-              <a:t>facts</a:t>
-            </a:r>
-            <a:r>
-              <a:rPr sz="1700">
-                <a:solidFill>
-                  <a:srgbClr val="202020"/>
-                </a:solidFill>
-                <a:latin typeface="Calibri"/>
-              </a:rPr>
-              <a:t>, not their </a:t>
-            </a:r>
-            <a:r>
-              <a:rPr sz="1700" b="1">
-                <a:solidFill>
-                  <a:srgbClr val="2B6CB0"/>
-                </a:solidFill>
-                <a:latin typeface="Calibri"/>
-              </a:rPr>
-              <a:t>presentation</a:t>
-            </a:r>
-            <a:r>
-              <a:rPr sz="1700">
-                <a:solidFill>
-                  <a:srgbClr val="202020"/>
-                </a:solidFill>
-                <a:latin typeface="Calibri"/>
-              </a:rPr>
-              <a:t>.</a:t>
-            </a:r>
-          </a:p>
-          <a:p>
-            <a:pPr algn="l">
-              <a:spcAft>
-                <a:spcPts val="600"/>
-              </a:spcAft>
-            </a:pPr>
-            <a:r>
-              <a:rPr sz="1700">
-                <a:solidFill>
-                  <a:srgbClr val="202020"/>
-                </a:solidFill>
-                <a:latin typeface="Calibri"/>
-              </a:rPr>
-              <a:t>•  </a:t>
-            </a:r>
-            <a:r>
-              <a:rPr sz="1700" b="1">
-                <a:solidFill>
-                  <a:srgbClr val="A67500"/>
-                </a:solidFill>
-                <a:latin typeface="Calibri"/>
-              </a:rPr>
-              <a:t>Behavioral manipulation vulnerability</a:t>
-            </a:r>
-            <a:r>
-              <a:rPr sz="1700">
-                <a:solidFill>
-                  <a:srgbClr val="202020"/>
-                </a:solidFill>
-                <a:latin typeface="Calibri"/>
-              </a:rPr>
-              <a:t>: an attacker shifts the decision by changing morally </a:t>
-            </a:r>
-            <a:r>
-              <a:rPr sz="1700" i="1">
-                <a:solidFill>
-                  <a:srgbClr val="202020"/>
-                </a:solidFill>
-                <a:latin typeface="Calibri"/>
-              </a:rPr>
-              <a:t>irrelevant</a:t>
-            </a:r>
-            <a:r>
-              <a:rPr sz="1700">
-                <a:solidFill>
-                  <a:srgbClr val="202020"/>
-                </a:solidFill>
-                <a:latin typeface="Calibri"/>
-              </a:rPr>
-              <a:t> surface features — framing, tone, sensory detail — without changing the underlying situation.</a:t>
-            </a:r>
-          </a:p>
-        </p:txBody>
-      </p:sp>
-      <p:sp>
-        <p:nvSpPr>
-          <p:cNvPr id="5" name="Rounded Rectangle 4"/>
-          <p:cNvSpPr/>
-          <p:nvPr/>
-        </p:nvSpPr>
-        <p:spPr>
-          <a:xfrm>
-            <a:off x="502920" y="3977639"/>
-            <a:ext cx="11155680" cy="2148840"/>
-          </a:xfrm>
-          <a:prstGeom prst="roundRect">
-            <a:avLst>
-              <a:gd name="adj" fmla="val 6000"/>
-            </a:avLst>
-          </a:prstGeom>
-          <a:solidFill>
-            <a:srgbClr val="E9F0F9"/>
-          </a:solidFill>
-          <a:ln w="9525">
-            <a:solidFill>
-              <a:srgbClr val="2B6CB0"/>
-            </a:solidFill>
-          </a:ln>
-        </p:spPr>
-        <p:style>
-          <a:lnRef idx="1">
-            <a:schemeClr val="accent1"/>
-          </a:lnRef>
-          <a:fillRef idx="3">
-            <a:schemeClr val="accent1"/>
-          </a:fillRef>
-          <a:effectRef idx="2">
-            <a:schemeClr val="accent1"/>
-          </a:effectRef>
-          <a:fontRef idx="minor">
-            <a:schemeClr val="lt1"/>
-          </a:fontRef>
-        </p:style>
-        <p:txBody>
-          <a:bodyPr rtlCol="0" anchor="ctr" wrap="square" lIns="164592" rIns="164592" tIns="91440"/>
-          <a:lstStyle/>
-          <a:p>
-            <a:pPr algn="ctr">
-              <a:spcAft>
-                <a:spcPts val="600"/>
-              </a:spcAft>
-            </a:pPr>
-            <a:r>
-              <a:rPr sz="1700" b="1">
-                <a:solidFill>
-                  <a:srgbClr val="2B6CB0"/>
-                </a:solidFill>
-                <a:latin typeface="Calibri"/>
-              </a:rPr>
-              <a:t>The measurement gap</a:t>
-            </a:r>
-          </a:p>
-          <a:p>
-            <a:pPr algn="l">
-              <a:spcAft>
-                <a:spcPts val="400"/>
-              </a:spcAft>
-            </a:pPr>
-            <a:r>
-              <a:rPr sz="1600">
-                <a:solidFill>
-                  <a:srgbClr val="202020"/>
-                </a:solidFill>
-                <a:latin typeface="Calibri"/>
-              </a:rPr>
-              <a:t>Prior work probes one bias at a time and reports a </a:t>
-            </a:r>
-            <a:r>
-              <a:rPr sz="1600" b="1">
-                <a:solidFill>
-                  <a:srgbClr val="2B6CB0"/>
-                </a:solidFill>
-                <a:latin typeface="Calibri"/>
-              </a:rPr>
-              <a:t>single scalar robustness score</a:t>
-            </a:r>
-            <a:r>
-              <a:rPr sz="1600">
-                <a:solidFill>
-                  <a:srgbClr val="202020"/>
-                </a:solidFill>
-                <a:latin typeface="Calibri"/>
-              </a:rPr>
-              <a:t>. Across n independent failure directions, a scalar destroys n−1 of them. </a:t>
-            </a:r>
-            <a:r>
-              <a:rPr sz="1600" b="1">
-                <a:solidFill>
-                  <a:srgbClr val="A67500"/>
-                </a:solidFill>
-                <a:latin typeface="Calibri"/>
-              </a:rPr>
-              <a:t>No post-hoc procedure recovers the lost structure.</a:t>
-            </a:r>
-          </a:p>
-        </p:txBody>
-      </p:sp>
-    </p:spTree>
-  </p:cSld>
-  <p:clrMapOvr>
-    <a:masterClrMapping/>
-  </p:clrMapOvr>
-</p:sld>
-</file>
-
-<file path=ppt/slides/slide3.xml><?xml version="1.0" encoding="utf-8"?>
-<p:sld xmlns:a="http://schemas.openxmlformats.org/drawingml/2006/main" xmlns:p="http://schemas.openxmlformats.org/presentationml/2006/main" xmlns:r="http://schemas.openxmlformats.org/officeDocument/2006/relationships">
-  <p:cSld>
-    <p:spTree>
-      <p:nvGrpSpPr>
-        <p:cNvPr id="1" name=""/>
-        <p:cNvGrpSpPr/>
-        <p:nvPr/>
-      </p:nvGrpSpPr>
-      <p:grpSpPr/>
-      <p:sp>
-        <p:nvSpPr>
-          <p:cNvPr id="2" name="Rectangle 1"/>
-          <p:cNvSpPr/>
-          <p:nvPr/>
-        </p:nvSpPr>
-        <p:spPr>
-          <a:xfrm>
-            <a:off x="0" y="0"/>
-            <a:ext cx="12191695" cy="658368"/>
-          </a:xfrm>
-          <a:prstGeom prst="rect">
-            <a:avLst/>
-          </a:prstGeom>
-          <a:solidFill>
-            <a:srgbClr val="2B6CB0"/>
-          </a:solidFill>
-          <a:ln>
-            <a:noFill/>
-          </a:ln>
-        </p:spPr>
-        <p:style>
-          <a:lnRef idx="1">
-            <a:schemeClr val="accent1"/>
-          </a:lnRef>
-          <a:fillRef idx="3">
-            <a:schemeClr val="accent1"/>
-          </a:fillRef>
-          <a:effectRef idx="2">
-            <a:schemeClr val="accent1"/>
-          </a:effectRef>
-          <a:fontRef idx="minor">
-            <a:schemeClr val="lt1"/>
-          </a:fontRef>
-        </p:style>
-        <p:txBody>
-          <a:bodyPr rtlCol="0" anchor="ctr" lIns="411480" tIns="73152"/>
-          <a:lstStyle/>
-          <a:p>
-            <a:pPr algn="ctr"/>
-            <a:r>
-              <a:rPr sz="2200" b="1">
-                <a:solidFill>
-                  <a:srgbClr val="FFFFFF"/>
-                </a:solidFill>
-                <a:latin typeface="Calibri"/>
-              </a:rPr>
-              <a:t>Our approach: a geometric vulnerability profile</a:t>
-            </a:r>
-          </a:p>
-        </p:txBody>
-      </p:sp>
-      <p:sp>
-        <p:nvSpPr>
-          <p:cNvPr id="3" name="TextBox 2"/>
-          <p:cNvSpPr txBox="1"/>
-          <p:nvPr/>
-        </p:nvSpPr>
-        <p:spPr>
-          <a:xfrm>
-            <a:off x="11368735" y="6473952"/>
-            <a:ext cx="640080" cy="274320"/>
-          </a:xfrm>
-          <a:prstGeom prst="rect">
-            <a:avLst/>
-          </a:prstGeom>
-          <a:noFill/>
-        </p:spPr>
-        <p:txBody>
-          <a:bodyPr wrap="square">
-            <a:spAutoFit/>
-          </a:bodyPr>
-          <a:lstStyle/>
-          <a:p>
-            <a:pPr algn="r">
-              <a:spcAft>
-                <a:spcPts val="600"/>
-              </a:spcAft>
-            </a:pPr>
-            <a:r>
-              <a:rPr sz="1000">
-                <a:solidFill>
-                  <a:srgbClr val="666666"/>
-                </a:solidFill>
-                <a:latin typeface="Calibri"/>
-              </a:rPr>
-              <a:t>3</a:t>
-            </a:r>
-          </a:p>
-        </p:txBody>
-      </p:sp>
-      <p:sp>
-        <p:nvSpPr>
-          <p:cNvPr id="4" name="TextBox 3"/>
-          <p:cNvSpPr txBox="1"/>
-          <p:nvPr/>
-        </p:nvSpPr>
-        <p:spPr>
-          <a:xfrm>
-            <a:off x="502920" y="960120"/>
-            <a:ext cx="7223760" cy="5120640"/>
-          </a:xfrm>
-          <a:prstGeom prst="rect">
-            <a:avLst/>
-          </a:prstGeom>
-          <a:noFill/>
-        </p:spPr>
-        <p:txBody>
-          <a:bodyPr wrap="square">
-            <a:spAutoFit/>
-          </a:bodyPr>
-          <a:lstStyle/>
-          <a:p>
-            <a:pPr algn="l">
-              <a:spcAft>
-                <a:spcPts val="200"/>
-              </a:spcAft>
-            </a:pPr>
-            <a:r>
-              <a:rPr sz="1700">
-                <a:solidFill>
-                  <a:srgbClr val="202020"/>
-                </a:solidFill>
-                <a:latin typeface="Calibri"/>
-              </a:rPr>
-              <a:t>•  </a:t>
-            </a:r>
-            <a:r>
-              <a:rPr sz="1700">
-                <a:solidFill>
-                  <a:srgbClr val="202020"/>
-                </a:solidFill>
-                <a:latin typeface="Calibri"/>
-              </a:rPr>
-              <a:t>Map each judgment to a point in a </a:t>
-            </a:r>
-            <a:r>
-              <a:rPr sz="1700" b="1">
-                <a:solidFill>
-                  <a:srgbClr val="2B6CB0"/>
-                </a:solidFill>
-                <a:latin typeface="Calibri"/>
-              </a:rPr>
-              <a:t>7-D harm space</a:t>
-            </a:r>
-          </a:p>
-          <a:p>
-            <a:pPr algn="l">
-              <a:spcAft>
-                <a:spcPts val="1000"/>
-              </a:spcAft>
-            </a:pPr>
-            <a:r>
-              <a:rPr sz="1300">
-                <a:solidFill>
-                  <a:srgbClr val="666666"/>
-                </a:solidFill>
-                <a:latin typeface="Calibri"/>
-              </a:rPr>
-              <a:t>(physical, emotional, financial, autonomy, trust, social, identity; each 0–10).</a:t>
-            </a:r>
-          </a:p>
-          <a:p>
-            <a:pPr algn="l">
-              <a:spcAft>
-                <a:spcPts val="1000"/>
-              </a:spcAft>
-            </a:pPr>
-            <a:r>
-              <a:rPr sz="1700">
-                <a:solidFill>
-                  <a:srgbClr val="202020"/>
-                </a:solidFill>
-                <a:latin typeface="Calibri"/>
-              </a:rPr>
-              <a:t>•  </a:t>
-            </a:r>
-            <a:r>
-              <a:rPr sz="1700">
-                <a:solidFill>
-                  <a:srgbClr val="202020"/>
-                </a:solidFill>
-                <a:latin typeface="Calibri"/>
-              </a:rPr>
-              <a:t>Apply qualitatively distinct </a:t>
-            </a:r>
-            <a:r>
-              <a:rPr sz="1700" b="1">
-                <a:solidFill>
-                  <a:srgbClr val="2B6CB0"/>
-                </a:solidFill>
-                <a:latin typeface="Calibri"/>
-              </a:rPr>
-              <a:t>perturbations</a:t>
-            </a:r>
-            <a:r>
-              <a:rPr sz="1700">
-                <a:solidFill>
-                  <a:srgbClr val="202020"/>
-                </a:solidFill>
-                <a:latin typeface="Calibri"/>
-              </a:rPr>
-              <a:t>; measure </a:t>
-            </a:r>
-            <a:r>
-              <a:rPr sz="1700" b="1">
-                <a:solidFill>
-                  <a:srgbClr val="2B6CB0"/>
-                </a:solidFill>
-                <a:latin typeface="Calibri"/>
-              </a:rPr>
-              <a:t>displacement</a:t>
-            </a:r>
-            <a:r>
-              <a:rPr sz="1700">
-                <a:solidFill>
-                  <a:srgbClr val="202020"/>
-                </a:solidFill>
-                <a:latin typeface="Calibri"/>
-              </a:rPr>
-              <a:t> of the judgment vector.</a:t>
-            </a:r>
-          </a:p>
-          <a:p>
-            <a:pPr algn="l">
-              <a:spcAft>
-                <a:spcPts val="1000"/>
-              </a:spcAft>
-            </a:pPr>
-            <a:r>
-              <a:rPr sz="1700">
-                <a:solidFill>
-                  <a:srgbClr val="202020"/>
-                </a:solidFill>
-                <a:latin typeface="Calibri"/>
-              </a:rPr>
-              <a:t>•  </a:t>
-            </a:r>
-            <a:r>
-              <a:rPr sz="1700">
-                <a:solidFill>
-                  <a:srgbClr val="202020"/>
-                </a:solidFill>
-                <a:latin typeface="Calibri"/>
-              </a:rPr>
-              <a:t>Output a </a:t>
-            </a:r>
-            <a:r>
-              <a:rPr sz="1700" b="1">
-                <a:solidFill>
-                  <a:srgbClr val="2B6CB0"/>
-                </a:solidFill>
-                <a:latin typeface="Calibri"/>
-              </a:rPr>
-              <a:t>per-model vulnerability profile</a:t>
-            </a:r>
-            <a:r>
-              <a:rPr sz="1700">
-                <a:solidFill>
-                  <a:srgbClr val="202020"/>
-                </a:solidFill>
-                <a:latin typeface="Calibri"/>
-              </a:rPr>
-              <a:t>, not one number.</a:t>
-            </a:r>
-          </a:p>
-          <a:p>
-            <a:pPr algn="l">
-              <a:spcAft>
-                <a:spcPts val="600"/>
-              </a:spcAft>
-            </a:pPr>
-            <a:r>
-              <a:rPr sz="1700">
-                <a:solidFill>
-                  <a:srgbClr val="202020"/>
-                </a:solidFill>
-                <a:latin typeface="Calibri"/>
-              </a:rPr>
-              <a:t>•  </a:t>
-            </a:r>
-            <a:r>
-              <a:rPr sz="1700">
-                <a:solidFill>
-                  <a:srgbClr val="202020"/>
-                </a:solidFill>
-                <a:latin typeface="Calibri"/>
-              </a:rPr>
-              <a:t>Runs under a realistic </a:t>
-            </a:r>
-            <a:r>
-              <a:rPr sz="1700" b="1">
-                <a:solidFill>
-                  <a:srgbClr val="2B6CB0"/>
-                </a:solidFill>
-                <a:latin typeface="Calibri"/>
-              </a:rPr>
-              <a:t>$50/day</a:t>
-            </a:r>
-            <a:r>
-              <a:rPr sz="1700">
-                <a:solidFill>
-                  <a:srgbClr val="202020"/>
-                </a:solidFill>
-                <a:latin typeface="Calibri"/>
-              </a:rPr>
-              <a:t> compute budget.</a:t>
-            </a:r>
-          </a:p>
-        </p:txBody>
-      </p:sp>
-      <p:pic>
-        <p:nvPicPr>
-          <p:cNvPr id="5" name="Picture 4" descr="erisml_apple_light.png"/>
-          <p:cNvPicPr>
-            <a:picLocks noChangeAspect="1"/>
-          </p:cNvPicPr>
-          <p:nvPr/>
-        </p:nvPicPr>
-        <p:blipFill>
-          <a:blip r:embed="rId2"/>
-          <a:stretch>
-            <a:fillRect/>
-          </a:stretch>
-        </p:blipFill>
-        <p:spPr>
-          <a:xfrm>
-            <a:off x="8869680" y="1371600"/>
-            <a:ext cx="2194560" cy="2194560"/>
-          </a:xfrm>
-          <a:prstGeom prst="rect">
-            <a:avLst/>
-          </a:prstGeom>
-        </p:spPr>
-      </p:pic>
-      <p:sp>
-        <p:nvSpPr>
-          <p:cNvPr id="6" name="TextBox 5"/>
-          <p:cNvSpPr txBox="1"/>
-          <p:nvPr/>
-        </p:nvSpPr>
-        <p:spPr>
-          <a:xfrm>
-            <a:off x="8138160" y="3749039"/>
-            <a:ext cx="3657600" cy="1280160"/>
-          </a:xfrm>
-          <a:prstGeom prst="rect">
-            <a:avLst/>
-          </a:prstGeom>
-          <a:noFill/>
-        </p:spPr>
-        <p:txBody>
-          <a:bodyPr wrap="square">
-            <a:spAutoFit/>
-          </a:bodyPr>
-          <a:lstStyle/>
-          <a:p>
-            <a:pPr algn="ctr">
-              <a:spcAft>
-                <a:spcPts val="600"/>
-              </a:spcAft>
-            </a:pPr>
-            <a:r>
-              <a:rPr sz="1200">
-                <a:solidFill>
-                  <a:srgbClr val="666666"/>
-                </a:solidFill>
-                <a:latin typeface="Calibri"/>
-              </a:rPr>
-              <a:t>The 7-D space is a measurement-reliable projection of the </a:t>
-            </a:r>
-            <a:r>
-              <a:rPr sz="1200" b="1">
-                <a:solidFill>
-                  <a:srgbClr val="2B6CB0"/>
-                </a:solidFill>
-                <a:latin typeface="Calibri"/>
-              </a:rPr>
-              <a:t>DEME v3</a:t>
-            </a:r>
-            <a:r>
-              <a:rPr sz="1200">
-                <a:solidFill>
-                  <a:srgbClr val="666666"/>
-                </a:solidFill>
-                <a:latin typeface="Calibri"/>
-              </a:rPr>
-              <a:t> 9-D moral vector.</a:t>
-            </a:r>
-          </a:p>
-        </p:txBody>
-      </p:sp>
-    </p:spTree>
-  </p:cSld>
-  <p:clrMapOvr>
-    <a:masterClrMapping/>
-  </p:clrMapOvr>
-</p:sld>
-</file>
-
-<file path=ppt/slides/slide4.xml><?xml version="1.0" encoding="utf-8"?>
-<p:sld xmlns:a="http://schemas.openxmlformats.org/drawingml/2006/main" xmlns:p="http://schemas.openxmlformats.org/presentationml/2006/main" xmlns:r="http://schemas.openxmlformats.org/officeDocument/2006/relationships">
-  <p:cSld>
-    <p:spTree>
-      <p:nvGrpSpPr>
-        <p:cNvPr id="1" name=""/>
-        <p:cNvGrpSpPr/>
-        <p:nvPr/>
-      </p:nvGrpSpPr>
-      <p:grpSpPr/>
-      <p:sp>
-        <p:nvSpPr>
-          <p:cNvPr id="2" name="Rectangle 1"/>
-          <p:cNvSpPr/>
-          <p:nvPr/>
-        </p:nvSpPr>
-        <p:spPr>
-          <a:xfrm>
-            <a:off x="0" y="0"/>
-            <a:ext cx="12191695" cy="658368"/>
-          </a:xfrm>
-          <a:prstGeom prst="rect">
-            <a:avLst/>
-          </a:prstGeom>
-          <a:solidFill>
-            <a:srgbClr val="2B6CB0"/>
-          </a:solidFill>
-          <a:ln>
-            <a:noFill/>
-          </a:ln>
-        </p:spPr>
-        <p:style>
-          <a:lnRef idx="1">
-            <a:schemeClr val="accent1"/>
-          </a:lnRef>
-          <a:fillRef idx="3">
-            <a:schemeClr val="accent1"/>
-          </a:fillRef>
-          <a:effectRef idx="2">
-            <a:schemeClr val="accent1"/>
-          </a:effectRef>
-          <a:fontRef idx="minor">
-            <a:schemeClr val="lt1"/>
-          </a:fontRef>
-        </p:style>
-        <p:txBody>
-          <a:bodyPr rtlCol="0" anchor="ctr" lIns="411480" tIns="73152"/>
-          <a:lstStyle/>
-          <a:p>
-            <a:pPr algn="ctr"/>
-            <a:r>
-              <a:rPr sz="2200" b="1">
-                <a:solidFill>
-                  <a:srgbClr val="FFFFFF"/>
-                </a:solidFill>
-                <a:latin typeface="Calibri"/>
-              </a:rPr>
-              <a:t>Grounding: 7-D harm space → DEME v3 9-D vector</a:t>
-            </a:r>
-          </a:p>
-        </p:txBody>
-      </p:sp>
-      <p:sp>
-        <p:nvSpPr>
-          <p:cNvPr id="3" name="TextBox 2"/>
-          <p:cNvSpPr txBox="1"/>
-          <p:nvPr/>
-        </p:nvSpPr>
-        <p:spPr>
-          <a:xfrm>
-            <a:off x="11368735" y="6473952"/>
-            <a:ext cx="640080" cy="274320"/>
-          </a:xfrm>
-          <a:prstGeom prst="rect">
-            <a:avLst/>
-          </a:prstGeom>
-          <a:noFill/>
-        </p:spPr>
-        <p:txBody>
-          <a:bodyPr wrap="square">
-            <a:spAutoFit/>
-          </a:bodyPr>
-          <a:lstStyle/>
-          <a:p>
-            <a:pPr algn="r">
-              <a:spcAft>
-                <a:spcPts val="600"/>
-              </a:spcAft>
-            </a:pPr>
-            <a:r>
-              <a:rPr sz="1000">
-                <a:solidFill>
-                  <a:srgbClr val="666666"/>
-                </a:solidFill>
-                <a:latin typeface="Calibri"/>
-              </a:rPr>
-              <a:t>4</a:t>
+                  <a:srgbClr val="636363"/>
+                </a:solidFill>
+                <a:latin typeface="Calibri"/>
+              </a:rPr>
+              <a:t>B1</a:t>
             </a:r>
           </a:p>
         </p:txBody>
       </p:sp>
       <p:graphicFrame>
         <p:nvGraphicFramePr>
-          <p:cNvPr id="4" name="Table 3"/>
+          <p:cNvPr id="5" name="Table 4"/>
           <p:cNvGraphicFramePr>
             <a:graphicFrameLocks noGrp="1"/>
           </p:cNvGraphicFramePr>
@@ -8856,7 +7810,7 @@
                   </a:txBody>
                   <a:tcPr marT="18288" marB="18288">
                     <a:solidFill>
-                      <a:srgbClr val="2B6CB0"/>
+                      <a:srgbClr val="2171B5"/>
                     </a:solidFill>
                   </a:tcPr>
                 </a:tc>
@@ -8878,7 +7832,7 @@
                   </a:txBody>
                   <a:tcPr marT="18288" marB="18288">
                     <a:solidFill>
-                      <a:srgbClr val="2B6CB0"/>
+                      <a:srgbClr val="2171B5"/>
                     </a:solidFill>
                   </a:tcPr>
                 </a:tc>
@@ -8900,7 +7854,7 @@
                   </a:txBody>
                   <a:tcPr marT="18288" marB="18288">
                     <a:solidFill>
-                      <a:srgbClr val="2B6CB0"/>
+                      <a:srgbClr val="2171B5"/>
                     </a:solidFill>
                   </a:tcPr>
                 </a:tc>
@@ -9455,7 +8409,7 @@
       </p:graphicFrame>
       <p:sp>
         <p:nvSpPr>
-          <p:cNvPr id="5" name="TextBox 4"/>
+          <p:cNvPr id="6" name="TextBox 5"/>
           <p:cNvSpPr txBox="1"/>
           <p:nvPr/>
         </p:nvSpPr>
@@ -9492,7 +8446,7 @@
             <a:r>
               <a:rPr sz="1400" b="1">
                 <a:solidFill>
-                  <a:srgbClr val="2B6CB0"/>
+                  <a:srgbClr val="2171B5"/>
                 </a:solidFill>
                 <a:latin typeface="Calibri"/>
               </a:rPr>
@@ -9510,7 +8464,7 @@
             <a:r>
               <a:rPr sz="1400" b="1">
                 <a:solidFill>
-                  <a:srgbClr val="2B6CB0"/>
+                  <a:srgbClr val="2171B5"/>
                 </a:solidFill>
                 <a:latin typeface="Calibri"/>
               </a:rPr>
@@ -9554,7 +8508,7 @@
 </p:sld>
 </file>
 
-<file path=ppt/slides/slide5.xml><?xml version="1.0" encoding="utf-8"?>
+<file path=ppt/slides/slide16.xml><?xml version="1.0" encoding="utf-8"?>
 <p:sld xmlns:a="http://schemas.openxmlformats.org/drawingml/2006/main" xmlns:p="http://schemas.openxmlformats.org/presentationml/2006/main" xmlns:r="http://schemas.openxmlformats.org/officeDocument/2006/relationships">
   <p:cSld>
     <p:spTree>
@@ -9566,20 +8520,54 @@
       <p:grpSpPr/>
       <p:sp>
         <p:nvSpPr>
-          <p:cNvPr id="2" name="Rectangle 1"/>
+          <p:cNvPr id="2" name="TextBox 1"/>
+          <p:cNvSpPr txBox="1"/>
+          <p:nvPr/>
+        </p:nvSpPr>
+        <p:spPr>
+          <a:xfrm>
+            <a:off x="411480" y="146304"/>
+            <a:ext cx="11368735" cy="475488"/>
+          </a:xfrm>
+          <a:prstGeom prst="rect">
+            <a:avLst/>
+          </a:prstGeom>
+          <a:noFill/>
+        </p:spPr>
+        <p:txBody>
+          <a:bodyPr wrap="square">
+            <a:spAutoFit/>
+          </a:bodyPr>
+          <a:lstStyle/>
+          <a:p>
+            <a:r>
+              <a:rPr sz="2200" b="1">
+                <a:solidFill>
+                  <a:srgbClr val="1A2340"/>
+                </a:solidFill>
+                <a:latin typeface="Calibri"/>
+              </a:rPr>
+              <a:t>Backup — the harm space is extensible and falsifiable</a:t>
+            </a:r>
+          </a:p>
+        </p:txBody>
+      </p:sp>
+      <p:sp>
+        <p:nvSpPr>
+          <p:cNvPr id="3" name="Rectangle 2"/>
           <p:cNvSpPr/>
           <p:nvPr/>
         </p:nvSpPr>
         <p:spPr>
           <a:xfrm>
-            <a:off x="0" y="0"/>
-            <a:ext cx="12191695" cy="658368"/>
+            <a:off x="411480" y="676656"/>
+            <a:ext cx="11368735" cy="20320"/>
           </a:xfrm>
           <a:prstGeom prst="rect">
             <a:avLst/>
           </a:prstGeom>
           <a:solidFill>
-            <a:srgbClr val="2B6CB0"/>
+            <a:srgbClr val="2171B5"/>
           </a:solidFill>
           <a:ln>
             <a:noFill/>
@@ -9600,25 +8588,16 @@
           </a:fontRef>
         </p:style>
         <p:txBody>
-          <a:bodyPr rtlCol="0" anchor="ctr" lIns="411480" tIns="73152"/>
+          <a:bodyPr rtlCol="0" anchor="ctr"/>
           <a:lstStyle/>
           <a:p>
             <a:pPr algn="ctr"/>
-            <a:r>
-              <a:rPr sz="2200" b="1">
-                <a:solidFill>
-                  <a:srgbClr val="FFFFFF"/>
-                </a:solidFill>
-                <a:latin typeface="Calibri"/>
-              </a:rPr>
-              <a:t>Finding 1 — Vulnerabilities are selective</a:t>
-            </a:r>
-          </a:p>
-        </p:txBody>
-      </p:sp>
-      <p:sp>
-        <p:nvSpPr>
-          <p:cNvPr id="3" name="TextBox 2"/>
+          </a:p>
+        </p:txBody>
+      </p:sp>
+      <p:sp>
+        <p:nvSpPr>
+          <p:cNvPr id="4" name="TextBox 3"/>
           <p:cNvSpPr txBox="1"/>
           <p:nvPr/>
         </p:nvSpPr>
@@ -9646,25 +8625,25 @@
             <a:r>
               <a:rPr sz="1000">
                 <a:solidFill>
-                  <a:srgbClr val="666666"/>
-                </a:solidFill>
-                <a:latin typeface="Calibri"/>
-              </a:rPr>
-              <a:t>5</a:t>
-            </a:r>
-          </a:p>
-        </p:txBody>
-      </p:sp>
-      <p:sp>
-        <p:nvSpPr>
-          <p:cNvPr id="4" name="TextBox 3"/>
+                  <a:srgbClr val="636363"/>
+                </a:solidFill>
+                <a:latin typeface="Calibri"/>
+              </a:rPr>
+              <a:t>B2</a:t>
+            </a:r>
+          </a:p>
+        </p:txBody>
+      </p:sp>
+      <p:sp>
+        <p:nvSpPr>
+          <p:cNvPr id="5" name="TextBox 4"/>
           <p:cNvSpPr txBox="1"/>
           <p:nvPr/>
         </p:nvSpPr>
         <p:spPr>
           <a:xfrm>
-            <a:off x="502920" y="914400"/>
-            <a:ext cx="5394960" cy="4206240"/>
+            <a:off x="502920" y="868680"/>
+            <a:ext cx="11155680" cy="4846320"/>
           </a:xfrm>
           <a:prstGeom prst="rect">
             <a:avLst/>
@@ -9679,101 +8658,202 @@
           <a:p>
             <a:pPr algn="l">
               <a:spcAft>
-                <a:spcPts val="600"/>
-              </a:spcAft>
-            </a:pPr>
-            <a:r>
-              <a:rPr sz="1600" b="1">
-                <a:solidFill>
-                  <a:srgbClr val="202020"/>
-                </a:solidFill>
-                <a:latin typeface="Calibri"/>
-              </a:rPr>
-              <a:t>Displace judgments (real attack surface):</a:t>
-            </a:r>
-          </a:p>
-          <a:p>
-            <a:pPr algn="l">
-              <a:spcAft>
-                <a:spcPts val="400"/>
-              </a:spcAft>
-            </a:pPr>
-            <a:r>
-              <a:rPr sz="1600">
-                <a:solidFill>
-                  <a:srgbClr val="202020"/>
-                </a:solidFill>
-                <a:latin typeface="Calibri"/>
-              </a:rPr>
-              <a:t>•  </a:t>
-            </a:r>
-            <a:r>
-              <a:rPr sz="1600" b="1">
-                <a:solidFill>
-                  <a:srgbClr val="A67500"/>
-                </a:solidFill>
-                <a:latin typeface="Calibri"/>
-              </a:rPr>
-              <a:t>Linguistic framing</a:t>
-            </a:r>
-          </a:p>
-          <a:p>
-            <a:pPr algn="l">
-              <a:spcAft>
-                <a:spcPts val="400"/>
-              </a:spcAft>
-            </a:pPr>
-            <a:r>
-              <a:rPr sz="1600">
-                <a:solidFill>
-                  <a:srgbClr val="202020"/>
-                </a:solidFill>
-                <a:latin typeface="Calibri"/>
-              </a:rPr>
-              <a:t>•  </a:t>
-            </a:r>
-            <a:r>
-              <a:rPr sz="1600" b="1">
-                <a:solidFill>
-                  <a:srgbClr val="A67500"/>
-                </a:solidFill>
-                <a:latin typeface="Calibri"/>
-              </a:rPr>
-              <a:t>Emotional anchoring</a:t>
-            </a:r>
-            <a:r>
-              <a:rPr sz="1600">
-                <a:solidFill>
-                  <a:srgbClr val="202020"/>
-                </a:solidFill>
-                <a:latin typeface="Calibri"/>
-              </a:rPr>
-              <a:t>  (d = 0.6–1.1)</a:t>
-            </a:r>
-          </a:p>
-          <a:p>
-            <a:pPr algn="l">
-              <a:spcAft>
                 <a:spcPts val="1200"/>
               </a:spcAft>
             </a:pPr>
             <a:r>
+              <a:rPr sz="1600" b="1">
+                <a:solidFill>
+                  <a:srgbClr val="202020"/>
+                </a:solidFill>
+                <a:latin typeface="Calibri"/>
+              </a:rPr>
+              <a:t>Discovery loop</a:t>
+            </a:r>
+            <a:r>
               <a:rPr sz="1600">
                 <a:solidFill>
                   <a:srgbClr val="202020"/>
                 </a:solidFill>
                 <a:latin typeface="Calibri"/>
               </a:rPr>
-              <a:t>•  </a:t>
-            </a:r>
+              <a:t>: residual analysis flags candidate missing dimensions → pre-registered admission gate.</a:t>
+            </a:r>
+          </a:p>
+          <a:p>
+            <a:pPr algn="l">
+              <a:spcAft>
+                <a:spcPts val="1000"/>
+              </a:spcAft>
+            </a:pPr>
             <a:r>
               <a:rPr sz="1600" b="1">
                 <a:solidFill>
-                  <a:srgbClr val="A67500"/>
-                </a:solidFill>
-                <a:latin typeface="Calibri"/>
-              </a:rPr>
-              <a:t>Irrelevant sensory detail</a:t>
+                  <a:srgbClr val="2171B5"/>
+                </a:solidFill>
+                <a:latin typeface="Calibri"/>
+              </a:rPr>
+              <a:t>▪  </a:t>
+            </a:r>
+            <a:r>
+              <a:rPr sz="1600">
+                <a:solidFill>
+                  <a:srgbClr val="202020"/>
+                </a:solidFill>
+                <a:latin typeface="Calibri"/>
+              </a:rPr>
+              <a:t>Scorecard: 3 flagged → </a:t>
+            </a:r>
+            <a:r>
+              <a:rPr sz="1600" b="1">
+                <a:solidFill>
+                  <a:srgbClr val="D95F02"/>
+                </a:solidFill>
+                <a:latin typeface="Calibri"/>
+              </a:rPr>
+              <a:t>1 validated</a:t>
+            </a:r>
+            <a:r>
+              <a:rPr sz="1600">
+                <a:solidFill>
+                  <a:srgbClr val="202020"/>
+                </a:solidFill>
+                <a:latin typeface="Calibri"/>
+              </a:rPr>
+              <a:t> (identity_attack), </a:t>
+            </a:r>
+            <a:r>
+              <a:rPr sz="1600" b="1">
+                <a:solidFill>
+                  <a:srgbClr val="D95F02"/>
+                </a:solidFill>
+                <a:latin typeface="Calibri"/>
+              </a:rPr>
+              <a:t>1 retracted</a:t>
+            </a:r>
+            <a:r>
+              <a:rPr sz="1600">
+                <a:solidFill>
+                  <a:srgbClr val="202020"/>
+                </a:solidFill>
+                <a:latin typeface="Calibri"/>
+              </a:rPr>
+              <a:t> (threat), </a:t>
+            </a:r>
+            <a:r>
+              <a:rPr sz="1600" b="1">
+                <a:solidFill>
+                  <a:srgbClr val="D95F02"/>
+                </a:solidFill>
+                <a:latin typeface="Calibri"/>
+              </a:rPr>
+              <a:t>1 declined</a:t>
+            </a:r>
+            <a:r>
+              <a:rPr sz="1600">
+                <a:solidFill>
+                  <a:srgbClr val="202020"/>
+                </a:solidFill>
+                <a:latin typeface="Calibri"/>
+              </a:rPr>
+              <a:t> (sexual content → policy channel); a registered rescue of the rights channel </a:t>
+            </a:r>
+            <a:r>
+              <a:rPr sz="1600" b="1">
+                <a:solidFill>
+                  <a:srgbClr val="D95F02"/>
+                </a:solidFill>
+                <a:latin typeface="Calibri"/>
+              </a:rPr>
+              <a:t>refuted</a:t>
+            </a:r>
+            <a:r>
+              <a:rPr sz="1600">
+                <a:solidFill>
+                  <a:srgbClr val="202020"/>
+                </a:solidFill>
+                <a:latin typeface="Calibri"/>
+              </a:rPr>
+              <a:t> (trained 0.509 vs null 0.512). </a:t>
+            </a:r>
+            <a:r>
+              <a:rPr sz="1600" b="1">
+                <a:solidFill>
+                  <a:srgbClr val="2171B5"/>
+                </a:solidFill>
+                <a:latin typeface="Calibri"/>
+              </a:rPr>
+              <a:t>The gate really rejects — in both directions.</a:t>
+            </a:r>
+          </a:p>
+          <a:p>
+            <a:pPr algn="l">
+              <a:spcAft>
+                <a:spcPts val="1000"/>
+              </a:spcAft>
+            </a:pPr>
+            <a:r>
+              <a:rPr sz="1600" b="1">
+                <a:solidFill>
+                  <a:srgbClr val="2171B5"/>
+                </a:solidFill>
+                <a:latin typeface="Calibri"/>
+              </a:rPr>
+              <a:t>▪  </a:t>
+            </a:r>
+            <a:r>
+              <a:rPr sz="1600">
+                <a:solidFill>
+                  <a:srgbClr val="202020"/>
+                </a:solidFill>
+                <a:latin typeface="Consolas"/>
+              </a:rPr>
+              <a:t>identity_attack</a:t>
+            </a:r>
+            <a:r>
+              <a:rPr sz="1600">
+                <a:solidFill>
+                  <a:srgbClr val="202020"/>
+                </a:solidFill>
+                <a:latin typeface="Calibri"/>
+              </a:rPr>
+              <a:t>: cross-dataset held-out AUROC </a:t>
+            </a:r>
+            <a:r>
+              <a:rPr sz="1600" b="1">
+                <a:solidFill>
+                  <a:srgbClr val="D95F02"/>
+                </a:solidFill>
+                <a:latin typeface="Calibri"/>
+              </a:rPr>
+              <a:t>0.80</a:t>
+            </a:r>
+            <a:r>
+              <a:rPr sz="1600">
+                <a:solidFill>
+                  <a:srgbClr val="202020"/>
+                </a:solidFill>
+                <a:latin typeface="Calibri"/>
+              </a:rPr>
+              <a:t> CI [0.78, 0.83] (+0.25 over null, 2 corpora, n = 6400) — wired live as a </a:t>
+            </a:r>
+            <a:r>
+              <a:rPr sz="1600" b="1">
+                <a:solidFill>
+                  <a:srgbClr val="2171B5"/>
+                </a:solidFill>
+                <a:latin typeface="Calibri"/>
+              </a:rPr>
+              <a:t>10th channel</a:t>
+            </a:r>
+            <a:r>
+              <a:rPr sz="1600">
+                <a:solidFill>
+                  <a:srgbClr val="202020"/>
+                </a:solidFill>
+                <a:latin typeface="Calibri"/>
+              </a:rPr>
+              <a:t>.</a:t>
             </a:r>
           </a:p>
           <a:p>
@@ -9785,37 +8865,30 @@
             <a:r>
               <a:rPr sz="1600" b="1">
                 <a:solidFill>
-                  <a:srgbClr val="202020"/>
-                </a:solidFill>
-                <a:latin typeface="Calibri"/>
-              </a:rPr>
-              <a:t>Do </a:t>
-            </a:r>
-            <a:r>
-              <a:rPr sz="1600" i="1">
-                <a:solidFill>
-                  <a:srgbClr val="202020"/>
-                </a:solidFill>
-                <a:latin typeface="Calibri"/>
-              </a:rPr>
-              <a:t>not</a:t>
+                  <a:srgbClr val="2171B5"/>
+                </a:solidFill>
+                <a:latin typeface="Calibri"/>
+              </a:rPr>
+              <a:t>▪  </a:t>
+            </a:r>
+            <a:r>
+              <a:rPr sz="1600">
+                <a:solidFill>
+                  <a:srgbClr val="202020"/>
+                </a:solidFill>
+                <a:latin typeface="Calibri"/>
+              </a:rPr>
+              <a:t>Cross-lingual at scale: invariance index </a:t>
             </a:r>
             <a:r>
               <a:rPr sz="1600" b="1">
                 <a:solidFill>
-                  <a:srgbClr val="202020"/>
-                </a:solidFill>
-                <a:latin typeface="Calibri"/>
-              </a:rPr>
-              <a:t> displace:</a:t>
-            </a:r>
-          </a:p>
-          <a:p>
-            <a:pPr algn="l">
-              <a:spcAft>
-                <a:spcPts val="400"/>
-              </a:spcAft>
-            </a:pPr>
+                  <a:srgbClr val="D95F02"/>
+                </a:solidFill>
+                <a:latin typeface="Calibri"/>
+              </a:rPr>
+              <a:t>0.72–0.80</a:t>
+            </a:r>
             <a:r>
               <a:rPr sz="1600">
                 <a:solidFill>
@@ -9823,7 +8896,16 @@
                 </a:solidFill>
                 <a:latin typeface="Calibri"/>
               </a:rPr>
-              <a:t>•  </a:t>
+              <a:t> across es/ar/zh/hi/sw, </a:t>
+            </a:r>
+            <a:r>
+              <a:rPr sz="1600" b="1">
+                <a:solidFill>
+                  <a:srgbClr val="2171B5"/>
+                </a:solidFill>
+                <a:latin typeface="Calibri"/>
+              </a:rPr>
+              <a:t>harmful ≈ benign</a:t>
             </a:r>
             <a:r>
               <a:rPr sz="1600">
@@ -9832,160 +8914,7 @@
                 </a:solidFill>
                 <a:latin typeface="Calibri"/>
               </a:rPr>
-              <a:t>Gender swap</a:t>
-            </a:r>
-          </a:p>
-          <a:p>
-            <a:pPr algn="l">
-              <a:spcAft>
-                <a:spcPts val="600"/>
-              </a:spcAft>
-            </a:pPr>
-            <a:r>
-              <a:rPr sz="1600">
-                <a:solidFill>
-                  <a:srgbClr val="202020"/>
-                </a:solidFill>
-                <a:latin typeface="Calibri"/>
-              </a:rPr>
-              <a:t>•  </a:t>
-            </a:r>
-            <a:r>
-              <a:rPr sz="1600">
-                <a:solidFill>
-                  <a:srgbClr val="202020"/>
-                </a:solidFill>
-                <a:latin typeface="Calibri"/>
-              </a:rPr>
-              <a:t>Evaluation order</a:t>
-            </a:r>
-          </a:p>
-        </p:txBody>
-      </p:sp>
-      <p:sp>
-        <p:nvSpPr>
-          <p:cNvPr id="5" name="Rounded Rectangle 4"/>
-          <p:cNvSpPr/>
-          <p:nvPr/>
-        </p:nvSpPr>
-        <p:spPr>
-          <a:xfrm>
-            <a:off x="6217920" y="1005840"/>
-            <a:ext cx="5486400" cy="3017520"/>
-          </a:xfrm>
-          <a:prstGeom prst="roundRect">
-            <a:avLst>
-              <a:gd name="adj" fmla="val 6000"/>
-            </a:avLst>
-          </a:prstGeom>
-          <a:solidFill>
-            <a:srgbClr val="E9F0F9"/>
-          </a:solidFill>
-          <a:ln w="9525">
-            <a:solidFill>
-              <a:srgbClr val="2B6CB0"/>
-            </a:solidFill>
-          </a:ln>
-        </p:spPr>
-        <p:style>
-          <a:lnRef idx="1">
-            <a:schemeClr val="accent1"/>
-          </a:lnRef>
-          <a:fillRef idx="3">
-            <a:schemeClr val="accent1"/>
-          </a:fillRef>
-          <a:effectRef idx="2">
-            <a:schemeClr val="accent1"/>
-          </a:effectRef>
-          <a:fontRef idx="minor">
-            <a:schemeClr val="lt1"/>
-          </a:fontRef>
-        </p:style>
-        <p:txBody>
-          <a:bodyPr rtlCol="0" anchor="ctr" wrap="square" lIns="164592" rIns="164592" tIns="91440"/>
-          <a:lstStyle/>
-          <a:p>
-            <a:pPr algn="ctr">
-              <a:spcAft>
-                <a:spcPts val="600"/>
-              </a:spcAft>
-            </a:pPr>
-            <a:r>
-              <a:rPr sz="1600" b="1">
-                <a:solidFill>
-                  <a:srgbClr val="2B6CB0"/>
-                </a:solidFill>
-                <a:latin typeface="Calibri"/>
-              </a:rPr>
-              <a:t>The common thread</a:t>
-            </a:r>
-          </a:p>
-          <a:p>
-            <a:pPr algn="l">
-              <a:spcAft>
-                <a:spcPts val="800"/>
-              </a:spcAft>
-            </a:pPr>
-            <a:r>
-              <a:rPr sz="1500">
-                <a:solidFill>
-                  <a:srgbClr val="202020"/>
-                </a:solidFill>
-                <a:latin typeface="Calibri"/>
-              </a:rPr>
-              <a:t>The three live surfaces all make morally irrelevant features </a:t>
-            </a:r>
-            <a:r>
-              <a:rPr sz="1500" b="1">
-                <a:solidFill>
-                  <a:srgbClr val="2B6CB0"/>
-                </a:solidFill>
-                <a:latin typeface="Calibri"/>
-              </a:rPr>
-              <a:t>perceptually salient</a:t>
-            </a:r>
-            <a:r>
-              <a:rPr sz="1500">
-                <a:solidFill>
-                  <a:srgbClr val="202020"/>
-                </a:solidFill>
-                <a:latin typeface="Calibri"/>
-              </a:rPr>
               <a:t>.</a:t>
-            </a:r>
-          </a:p>
-          <a:p>
-            <a:pPr algn="l">
-              <a:spcAft>
-                <a:spcPts val="400"/>
-              </a:spcAft>
-            </a:pPr>
-            <a:r>
-              <a:rPr sz="1500">
-                <a:solidFill>
-                  <a:srgbClr val="202020"/>
-                </a:solidFill>
-                <a:latin typeface="Calibri"/>
-              </a:rPr>
-              <a:t>⇒ The attack mechanism is </a:t>
-            </a:r>
-            <a:r>
-              <a:rPr sz="1500" b="1">
-                <a:solidFill>
-                  <a:srgbClr val="A67500"/>
-                </a:solidFill>
-                <a:latin typeface="Calibri"/>
-              </a:rPr>
-              <a:t>salience manipulation</a:t>
-            </a:r>
-            <a:r>
-              <a:rPr sz="1500">
-                <a:solidFill>
-                  <a:srgbClr val="202020"/>
-                </a:solidFill>
-                <a:latin typeface="Calibri"/>
-              </a:rPr>
-              <a:t> — and the framework discriminates it from noise.</a:t>
             </a:r>
           </a:p>
         </p:txBody>
@@ -10018,31 +8947,31 @@
               </a:spcAft>
             </a:pPr>
             <a:r>
-              <a:rPr sz="1200">
-                <a:solidFill>
-                  <a:srgbClr val="666666"/>
-                </a:solidFill>
-                <a:latin typeface="Calibri"/>
-              </a:rPr>
-              <a:t>We lead with </a:t>
-            </a:r>
-            <a:r>
-              <a:rPr sz="1200" b="1">
-                <a:solidFill>
-                  <a:srgbClr val="2B6CB0"/>
-                </a:solidFill>
-                <a:latin typeface="Calibri"/>
-              </a:rPr>
-              <a:t>effect sizes</a:t>
-            </a:r>
-            <a:r>
-              <a:rPr sz="1200">
-                <a:solidFill>
-                  <a:srgbClr val="666666"/>
-                </a:solidFill>
-                <a:latin typeface="Calibri"/>
-              </a:rPr>
-              <a:t> (Cohen's d, displacement in harm-points) over σ; empirical control arms rule out stochastic drift.</a:t>
+              <a:rPr sz="1100">
+                <a:solidFill>
+                  <a:srgbClr val="636363"/>
+                </a:solidFill>
+                <a:latin typeface="Calibri"/>
+              </a:rPr>
+              <a:t>Validated on the learned-encoder perception layer (</a:t>
+            </a:r>
+            <a:r>
+              <a:rPr sz="1100">
+                <a:solidFill>
+                  <a:srgbClr val="636363"/>
+                </a:solidFill>
+                <a:latin typeface="Consolas"/>
+              </a:rPr>
+              <a:t>xbse</a:t>
+            </a:r>
+            <a:r>
+              <a:rPr sz="1100">
+                <a:solidFill>
+                  <a:srgbClr val="636363"/>
+                </a:solidFill>
+                <a:latin typeface="Calibri"/>
+              </a:rPr>
+              <a:t>); native DEME re-run of the five tracks is the extended version. Post-camera-ready results, July 2026.</a:t>
             </a:r>
           </a:p>
         </p:txBody>
@@ -10055,7 +8984,7 @@
 </p:sld>
 </file>
 
-<file path=ppt/slides/slide6.xml><?xml version="1.0" encoding="utf-8"?>
+<file path=ppt/slides/slide2.xml><?xml version="1.0" encoding="utf-8"?>
 <p:sld xmlns:a="http://schemas.openxmlformats.org/drawingml/2006/main" xmlns:p="http://schemas.openxmlformats.org/presentationml/2006/main" xmlns:r="http://schemas.openxmlformats.org/officeDocument/2006/relationships">
   <p:cSld>
     <p:spTree>
@@ -10067,20 +8996,54 @@
       <p:grpSpPr/>
       <p:sp>
         <p:nvSpPr>
-          <p:cNvPr id="2" name="Rectangle 1"/>
+          <p:cNvPr id="2" name="TextBox 1"/>
+          <p:cNvSpPr txBox="1"/>
+          <p:nvPr/>
+        </p:nvSpPr>
+        <p:spPr>
+          <a:xfrm>
+            <a:off x="411480" y="146304"/>
+            <a:ext cx="11368735" cy="475488"/>
+          </a:xfrm>
+          <a:prstGeom prst="rect">
+            <a:avLst/>
+          </a:prstGeom>
+          <a:noFill/>
+        </p:spPr>
+        <p:txBody>
+          <a:bodyPr wrap="square">
+            <a:spAutoFit/>
+          </a:bodyPr>
+          <a:lstStyle/>
+          <a:p>
+            <a:r>
+              <a:rPr sz="2200" b="1">
+                <a:solidFill>
+                  <a:srgbClr val="1A2340"/>
+                </a:solidFill>
+                <a:latin typeface="Calibri"/>
+              </a:rPr>
+              <a:t>The problem: LLMs as decision services</a:t>
+            </a:r>
+          </a:p>
+        </p:txBody>
+      </p:sp>
+      <p:sp>
+        <p:nvSpPr>
+          <p:cNvPr id="3" name="Rectangle 2"/>
           <p:cNvSpPr/>
           <p:nvPr/>
         </p:nvSpPr>
         <p:spPr>
           <a:xfrm>
-            <a:off x="0" y="0"/>
-            <a:ext cx="12191695" cy="658368"/>
+            <a:off x="411480" y="676656"/>
+            <a:ext cx="11368735" cy="20320"/>
           </a:xfrm>
           <a:prstGeom prst="rect">
             <a:avLst/>
           </a:prstGeom>
           <a:solidFill>
-            <a:srgbClr val="2B6CB0"/>
+            <a:srgbClr val="2171B5"/>
           </a:solidFill>
           <a:ln>
             <a:noFill/>
@@ -10101,25 +9064,16 @@
           </a:fontRef>
         </p:style>
         <p:txBody>
-          <a:bodyPr rtlCol="0" anchor="ctr" lIns="411480" tIns="73152"/>
+          <a:bodyPr rtlCol="0" anchor="ctr"/>
           <a:lstStyle/>
           <a:p>
             <a:pPr algn="ctr"/>
-            <a:r>
-              <a:rPr sz="2200" b="1">
-                <a:solidFill>
-                  <a:srgbClr val="FFFFFF"/>
-                </a:solidFill>
-                <a:latin typeface="Calibri"/>
-              </a:rPr>
-              <a:t>Finding 2 — Robustness profiles are dissociable</a:t>
-            </a:r>
-          </a:p>
-        </p:txBody>
-      </p:sp>
-      <p:sp>
-        <p:nvSpPr>
-          <p:cNvPr id="3" name="TextBox 2"/>
+          </a:p>
+        </p:txBody>
+      </p:sp>
+      <p:sp>
+        <p:nvSpPr>
+          <p:cNvPr id="4" name="TextBox 3"/>
           <p:cNvSpPr txBox="1"/>
           <p:nvPr/>
         </p:nvSpPr>
@@ -10147,25 +9101,25 @@
             <a:r>
               <a:rPr sz="1000">
                 <a:solidFill>
-                  <a:srgbClr val="666666"/>
-                </a:solidFill>
-                <a:latin typeface="Calibri"/>
-              </a:rPr>
-              <a:t>6</a:t>
-            </a:r>
-          </a:p>
-        </p:txBody>
-      </p:sp>
-      <p:sp>
-        <p:nvSpPr>
-          <p:cNvPr id="4" name="TextBox 3"/>
+                  <a:srgbClr val="636363"/>
+                </a:solidFill>
+                <a:latin typeface="Calibri"/>
+              </a:rPr>
+              <a:t>2</a:t>
+            </a:r>
+          </a:p>
+        </p:txBody>
+      </p:sp>
+      <p:sp>
+        <p:nvSpPr>
+          <p:cNvPr id="5" name="TextBox 4"/>
           <p:cNvSpPr txBox="1"/>
           <p:nvPr/>
         </p:nvSpPr>
         <p:spPr>
           <a:xfrm>
-            <a:off x="502920" y="960120"/>
-            <a:ext cx="11155680" cy="2377440"/>
+            <a:off x="502920" y="914400"/>
+            <a:ext cx="11155680" cy="2651760"/>
           </a:xfrm>
           <a:prstGeom prst="rect">
             <a:avLst/>
@@ -10184,22 +9138,31 @@
               </a:spcAft>
             </a:pPr>
             <a:r>
+              <a:rPr sz="1700" b="1">
+                <a:solidFill>
+                  <a:srgbClr val="2171B5"/>
+                </a:solidFill>
+                <a:latin typeface="Calibri"/>
+              </a:rPr>
+              <a:t>▪  </a:t>
+            </a:r>
+            <a:r>
               <a:rPr sz="1700">
                 <a:solidFill>
                   <a:srgbClr val="202020"/>
                 </a:solidFill>
                 <a:latin typeface="Calibri"/>
               </a:rPr>
-              <a:t>•  </a:t>
+              <a:t>LLMs increasingly gate </a:t>
             </a:r>
             <a:r>
               <a:rPr sz="1700" b="1">
                 <a:solidFill>
-                  <a:srgbClr val="2B6CB0"/>
-                </a:solidFill>
-                <a:latin typeface="Calibri"/>
-              </a:rPr>
-              <a:t>No model dominates</a:t>
+                  <a:srgbClr val="2171B5"/>
+                </a:solidFill>
+                <a:latin typeface="Calibri"/>
+              </a:rPr>
+              <a:t>safety-critical decisions</a:t>
             </a:r>
             <a:r>
               <a:rPr sz="1700">
@@ -10208,7 +9171,7 @@
                 </a:solidFill>
                 <a:latin typeface="Calibri"/>
               </a:rPr>
-              <a:t> all attack surfaces.</a:t>
+              <a:t> — content moderation, clinical triage, legal analysis.</a:t>
             </a:r>
           </a:p>
           <a:p>
@@ -10218,13 +9181,31 @@
               </a:spcAft>
             </a:pPr>
             <a:r>
+              <a:rPr sz="1700" b="1">
+                <a:solidFill>
+                  <a:srgbClr val="2171B5"/>
+                </a:solidFill>
+                <a:latin typeface="Calibri"/>
+              </a:rPr>
+              <a:t>▪  </a:t>
+            </a:r>
+            <a:r>
               <a:rPr sz="1700">
                 <a:solidFill>
                   <a:srgbClr val="202020"/>
                 </a:solidFill>
                 <a:latin typeface="Calibri"/>
               </a:rPr>
-              <a:t>•  </a:t>
+              <a:t>A secure evaluator should judge the </a:t>
+            </a:r>
+            <a:r>
+              <a:rPr sz="1700" b="1">
+                <a:solidFill>
+                  <a:srgbClr val="2171B5"/>
+                </a:solidFill>
+                <a:latin typeface="Calibri"/>
+              </a:rPr>
+              <a:t>facts</a:t>
             </a:r>
             <a:r>
               <a:rPr sz="1700">
@@ -10233,16 +9214,16 @@
                 </a:solidFill>
                 <a:latin typeface="Calibri"/>
               </a:rPr>
-              <a:t>Claude: </a:t>
+              <a:t>, not their </a:t>
             </a:r>
             <a:r>
               <a:rPr sz="1700" b="1">
                 <a:solidFill>
-                  <a:srgbClr val="A67500"/>
-                </a:solidFill>
-                <a:latin typeface="Calibri"/>
-              </a:rPr>
-              <a:t>zero sycophancy</a:t>
+                  <a:srgbClr val="2171B5"/>
+                </a:solidFill>
+                <a:latin typeface="Calibri"/>
+              </a:rPr>
+              <a:t>presentation</a:t>
             </a:r>
             <a:r>
               <a:rPr sz="1700">
@@ -10251,25 +9232,7 @@
                 </a:solidFill>
                 <a:latin typeface="Calibri"/>
               </a:rPr>
-              <a:t> — but </a:t>
-            </a:r>
-            <a:r>
-              <a:rPr sz="1700" b="1">
-                <a:solidFill>
-                  <a:srgbClr val="A67500"/>
-                </a:solidFill>
-                <a:latin typeface="Calibri"/>
-              </a:rPr>
-              <a:t>worst</a:t>
-            </a:r>
-            <a:r>
-              <a:rPr sz="1700">
-                <a:solidFill>
-                  <a:srgbClr val="202020"/>
-                </a:solidFill>
-                <a:latin typeface="Calibri"/>
-              </a:rPr>
-              <a:t> emotional-anchoring recovery (20%) and worst divided attention.</a:t>
+              <a:t>.</a:t>
             </a:r>
           </a:p>
           <a:p>
@@ -10279,13 +9242,40 @@
               </a:spcAft>
             </a:pPr>
             <a:r>
+              <a:rPr sz="1700" b="1">
+                <a:solidFill>
+                  <a:srgbClr val="2171B5"/>
+                </a:solidFill>
+                <a:latin typeface="Calibri"/>
+              </a:rPr>
+              <a:t>▪  </a:t>
+            </a:r>
+            <a:r>
+              <a:rPr sz="1700" b="1">
+                <a:solidFill>
+                  <a:srgbClr val="D95F02"/>
+                </a:solidFill>
+                <a:latin typeface="Calibri"/>
+              </a:rPr>
+              <a:t>Behavioral manipulation vulnerability</a:t>
+            </a:r>
+            <a:r>
               <a:rPr sz="1700">
                 <a:solidFill>
                   <a:srgbClr val="202020"/>
                 </a:solidFill>
                 <a:latin typeface="Calibri"/>
               </a:rPr>
-              <a:t>•  </a:t>
+              <a:t>: an attacker shifts the decision by changing morally </a:t>
+            </a:r>
+            <a:r>
+              <a:rPr sz="1700" i="1">
+                <a:solidFill>
+                  <a:srgbClr val="202020"/>
+                </a:solidFill>
+                <a:latin typeface="Calibri"/>
+              </a:rPr>
+              <a:t>irrelevant</a:t>
             </a:r>
             <a:r>
               <a:rPr sz="1700">
@@ -10294,57 +9284,21 @@
                 </a:solidFill>
                 <a:latin typeface="Calibri"/>
               </a:rPr>
-              <a:t>Flash 2.0: </a:t>
-            </a:r>
-            <a:r>
-              <a:rPr sz="1700" b="1">
-                <a:solidFill>
-                  <a:srgbClr val="A67500"/>
-                </a:solidFill>
-                <a:latin typeface="Calibri"/>
-              </a:rPr>
-              <a:t>best</a:t>
-            </a:r>
-            <a:r>
-              <a:rPr sz="1700">
-                <a:solidFill>
-                  <a:srgbClr val="202020"/>
-                </a:solidFill>
-                <a:latin typeface="Calibri"/>
-              </a:rPr>
-              <a:t> anchoring recovery (73%) — but </a:t>
-            </a:r>
-            <a:r>
-              <a:rPr sz="1700" b="1">
-                <a:solidFill>
-                  <a:srgbClr val="A67500"/>
-                </a:solidFill>
-                <a:latin typeface="Calibri"/>
-              </a:rPr>
-              <a:t>worst</a:t>
-            </a:r>
-            <a:r>
-              <a:rPr sz="1700">
-                <a:solidFill>
-                  <a:srgbClr val="202020"/>
-                </a:solidFill>
-                <a:latin typeface="Calibri"/>
-              </a:rPr>
-              <a:t> working memory.</a:t>
-            </a:r>
-          </a:p>
-        </p:txBody>
-      </p:sp>
-      <p:sp>
-        <p:nvSpPr>
-          <p:cNvPr id="5" name="Rounded Rectangle 4"/>
+              <a:t> surface features — framing, tone, sensory detail — without changing the underlying situation.</a:t>
+            </a:r>
+          </a:p>
+        </p:txBody>
+      </p:sp>
+      <p:sp>
+        <p:nvSpPr>
+          <p:cNvPr id="6" name="Rounded Rectangle 5"/>
           <p:cNvSpPr/>
           <p:nvPr/>
         </p:nvSpPr>
         <p:spPr>
           <a:xfrm>
-            <a:off x="502920" y="3931920"/>
-            <a:ext cx="11155680" cy="2011680"/>
+            <a:off x="502920" y="3977639"/>
+            <a:ext cx="11155680" cy="2148840"/>
           </a:xfrm>
           <a:prstGeom prst="roundRect">
             <a:avLst>
@@ -10352,11 +9306,11 @@
             </a:avLst>
           </a:prstGeom>
           <a:solidFill>
-            <a:srgbClr val="E9F0F9"/>
+            <a:srgbClr val="E4EDF7"/>
           </a:solidFill>
           <a:ln w="9525">
             <a:solidFill>
-              <a:srgbClr val="2B6CB0"/>
+              <a:srgbClr val="2171B5"/>
             </a:solidFill>
           </a:ln>
         </p:spPr>
@@ -10386,36 +9340,11 @@
             <a:r>
               <a:rPr sz="1700" b="1">
                 <a:solidFill>
-                  <a:srgbClr val="2B6CB0"/>
-                </a:solidFill>
-                <a:latin typeface="Calibri"/>
-              </a:rPr>
-              <a:t>Consequence for Secure AI</a:t>
-            </a:r>
-          </a:p>
-          <a:p>
-            <a:pPr algn="l">
-              <a:spcAft>
-                <a:spcPts val="600"/>
-              </a:spcAft>
-            </a:pPr>
-            <a:r>
-              <a:rPr sz="1600">
-                <a:solidFill>
-                  <a:srgbClr val="202020"/>
-                </a:solidFill>
-                <a:latin typeface="Calibri"/>
-              </a:rPr>
-              <a:t>Averaging partially-independent dimensions yields a number that </a:t>
-            </a:r>
-            <a:r>
-              <a:rPr sz="1600" b="1">
-                <a:solidFill>
-                  <a:srgbClr val="A67500"/>
-                </a:solidFill>
-                <a:latin typeface="Calibri"/>
-              </a:rPr>
-              <a:t>describes no model accurately.</a:t>
+                  <a:srgbClr val="2171B5"/>
+                </a:solidFill>
+                <a:latin typeface="Calibri"/>
+              </a:rPr>
+              <a:t>The measurement gap</a:t>
             </a:r>
           </a:p>
           <a:p>
@@ -10425,13 +9354,40 @@
               </a:spcAft>
             </a:pPr>
             <a:r>
+              <a:rPr sz="1600">
+                <a:solidFill>
+                  <a:srgbClr val="202020"/>
+                </a:solidFill>
+                <a:latin typeface="Calibri"/>
+              </a:rPr>
+              <a:t>Prior work probes one bias at a time and reports a </a:t>
+            </a:r>
+            <a:r>
               <a:rPr sz="1600" b="1">
                 <a:solidFill>
-                  <a:srgbClr val="A67500"/>
-                </a:solidFill>
-                <a:latin typeface="Calibri"/>
-              </a:rPr>
-              <a:t>Single-test certification provides false assurance.</a:t>
+                  <a:srgbClr val="2171B5"/>
+                </a:solidFill>
+                <a:latin typeface="Calibri"/>
+              </a:rPr>
+              <a:t>single scalar robustness score</a:t>
+            </a:r>
+            <a:r>
+              <a:rPr sz="1600">
+                <a:solidFill>
+                  <a:srgbClr val="202020"/>
+                </a:solidFill>
+                <a:latin typeface="Calibri"/>
+              </a:rPr>
+              <a:t>. Across n independent failure directions, a scalar discards n−1 of them. </a:t>
+            </a:r>
+            <a:r>
+              <a:rPr sz="1600" b="1">
+                <a:solidFill>
+                  <a:srgbClr val="D95F02"/>
+                </a:solidFill>
+                <a:latin typeface="Calibri"/>
+              </a:rPr>
+              <a:t>No post-hoc procedure recovers the lost structure.</a:t>
             </a:r>
           </a:p>
         </p:txBody>
@@ -10444,7 +9400,7 @@
 </p:sld>
 </file>
 
-<file path=ppt/slides/slide7.xml><?xml version="1.0" encoding="utf-8"?>
+<file path=ppt/slides/slide3.xml><?xml version="1.0" encoding="utf-8"?>
 <p:sld xmlns:a="http://schemas.openxmlformats.org/drawingml/2006/main" xmlns:p="http://schemas.openxmlformats.org/presentationml/2006/main" xmlns:r="http://schemas.openxmlformats.org/officeDocument/2006/relationships">
   <p:cSld>
     <p:spTree>
@@ -10456,20 +9412,54 @@
       <p:grpSpPr/>
       <p:sp>
         <p:nvSpPr>
-          <p:cNvPr id="2" name="Rectangle 1"/>
+          <p:cNvPr id="2" name="TextBox 1"/>
+          <p:cNvSpPr txBox="1"/>
+          <p:nvPr/>
+        </p:nvSpPr>
+        <p:spPr>
+          <a:xfrm>
+            <a:off x="411480" y="146304"/>
+            <a:ext cx="11368735" cy="475488"/>
+          </a:xfrm>
+          <a:prstGeom prst="rect">
+            <a:avLst/>
+          </a:prstGeom>
+          <a:noFill/>
+        </p:spPr>
+        <p:txBody>
+          <a:bodyPr wrap="square">
+            <a:spAutoFit/>
+          </a:bodyPr>
+          <a:lstStyle/>
+          <a:p>
+            <a:r>
+              <a:rPr sz="2200" b="1">
+                <a:solidFill>
+                  <a:srgbClr val="1A2340"/>
+                </a:solidFill>
+                <a:latin typeface="Calibri"/>
+              </a:rPr>
+              <a:t>Our approach: a geometric vulnerability profile</a:t>
+            </a:r>
+          </a:p>
+        </p:txBody>
+      </p:sp>
+      <p:sp>
+        <p:nvSpPr>
+          <p:cNvPr id="3" name="Rectangle 2"/>
           <p:cNvSpPr/>
           <p:nvPr/>
         </p:nvSpPr>
         <p:spPr>
           <a:xfrm>
-            <a:off x="0" y="0"/>
-            <a:ext cx="12191695" cy="658368"/>
+            <a:off x="411480" y="676656"/>
+            <a:ext cx="11368735" cy="20320"/>
           </a:xfrm>
           <a:prstGeom prst="rect">
             <a:avLst/>
           </a:prstGeom>
           <a:solidFill>
-            <a:srgbClr val="2B6CB0"/>
+            <a:srgbClr val="2171B5"/>
           </a:solidFill>
           <a:ln>
             <a:noFill/>
@@ -10490,25 +9480,16 @@
           </a:fontRef>
         </p:style>
         <p:txBody>
-          <a:bodyPr rtlCol="0" anchor="ctr" lIns="411480" tIns="73152"/>
+          <a:bodyPr rtlCol="0" anchor="ctr"/>
           <a:lstStyle/>
           <a:p>
             <a:pPr algn="ctr"/>
-            <a:r>
-              <a:rPr sz="2200" b="1">
-                <a:solidFill>
-                  <a:srgbClr val="FFFFFF"/>
-                </a:solidFill>
-                <a:latin typeface="Calibri"/>
-              </a:rPr>
-              <a:t>NEW — Harm-space validation (reviewer-driven)</a:t>
-            </a:r>
-          </a:p>
-        </p:txBody>
-      </p:sp>
-      <p:sp>
-        <p:nvSpPr>
-          <p:cNvPr id="3" name="TextBox 2"/>
+          </a:p>
+        </p:txBody>
+      </p:sp>
+      <p:sp>
+        <p:nvSpPr>
+          <p:cNvPr id="4" name="TextBox 3"/>
           <p:cNvSpPr txBox="1"/>
           <p:nvPr/>
         </p:nvSpPr>
@@ -10536,18 +9517,1393 @@
             <a:r>
               <a:rPr sz="1000">
                 <a:solidFill>
-                  <a:srgbClr val="666666"/>
-                </a:solidFill>
-                <a:latin typeface="Calibri"/>
-              </a:rPr>
-              <a:t>7</a:t>
-            </a:r>
+                  <a:srgbClr val="636363"/>
+                </a:solidFill>
+                <a:latin typeface="Calibri"/>
+              </a:rPr>
+              <a:t>3</a:t>
+            </a:r>
+          </a:p>
+        </p:txBody>
+      </p:sp>
+      <p:sp>
+        <p:nvSpPr>
+          <p:cNvPr id="5" name="TextBox 4"/>
+          <p:cNvSpPr txBox="1"/>
+          <p:nvPr/>
+        </p:nvSpPr>
+        <p:spPr>
+          <a:xfrm>
+            <a:off x="502920" y="960120"/>
+            <a:ext cx="7223760" cy="5120640"/>
+          </a:xfrm>
+          <a:prstGeom prst="rect">
+            <a:avLst/>
+          </a:prstGeom>
+          <a:noFill/>
+        </p:spPr>
+        <p:txBody>
+          <a:bodyPr wrap="square">
+            <a:spAutoFit/>
+          </a:bodyPr>
+          <a:lstStyle/>
+          <a:p>
+            <a:pPr algn="l">
+              <a:spcAft>
+                <a:spcPts val="200"/>
+              </a:spcAft>
+            </a:pPr>
+            <a:r>
+              <a:rPr sz="1700" b="1">
+                <a:solidFill>
+                  <a:srgbClr val="2171B5"/>
+                </a:solidFill>
+                <a:latin typeface="Calibri"/>
+              </a:rPr>
+              <a:t>▪  </a:t>
+            </a:r>
+            <a:r>
+              <a:rPr sz="1700">
+                <a:solidFill>
+                  <a:srgbClr val="202020"/>
+                </a:solidFill>
+                <a:latin typeface="Calibri"/>
+              </a:rPr>
+              <a:t>Map each judgment to a point in a </a:t>
+            </a:r>
+            <a:r>
+              <a:rPr sz="1700" b="1">
+                <a:solidFill>
+                  <a:srgbClr val="2171B5"/>
+                </a:solidFill>
+                <a:latin typeface="Calibri"/>
+              </a:rPr>
+              <a:t>7-D harm space</a:t>
+            </a:r>
+          </a:p>
+          <a:p>
+            <a:pPr algn="l">
+              <a:spcAft>
+                <a:spcPts val="1000"/>
+              </a:spcAft>
+            </a:pPr>
+            <a:r>
+              <a:rPr sz="1300">
+                <a:solidFill>
+                  <a:srgbClr val="636363"/>
+                </a:solidFill>
+                <a:latin typeface="Calibri"/>
+              </a:rPr>
+              <a:t>(physical, emotional, financial, autonomy, trust, social, identity; each 0–10).</a:t>
+            </a:r>
+          </a:p>
+          <a:p>
+            <a:pPr algn="l">
+              <a:spcAft>
+                <a:spcPts val="1000"/>
+              </a:spcAft>
+            </a:pPr>
+            <a:r>
+              <a:rPr sz="1700" b="1">
+                <a:solidFill>
+                  <a:srgbClr val="2171B5"/>
+                </a:solidFill>
+                <a:latin typeface="Calibri"/>
+              </a:rPr>
+              <a:t>▪  </a:t>
+            </a:r>
+            <a:r>
+              <a:rPr sz="1700">
+                <a:solidFill>
+                  <a:srgbClr val="202020"/>
+                </a:solidFill>
+                <a:latin typeface="Calibri"/>
+              </a:rPr>
+              <a:t>Apply qualitatively distinct </a:t>
+            </a:r>
+            <a:r>
+              <a:rPr sz="1700" b="1">
+                <a:solidFill>
+                  <a:srgbClr val="2171B5"/>
+                </a:solidFill>
+                <a:latin typeface="Calibri"/>
+              </a:rPr>
+              <a:t>perturbations</a:t>
+            </a:r>
+            <a:r>
+              <a:rPr sz="1700">
+                <a:solidFill>
+                  <a:srgbClr val="202020"/>
+                </a:solidFill>
+                <a:latin typeface="Calibri"/>
+              </a:rPr>
+              <a:t>; measure </a:t>
+            </a:r>
+            <a:r>
+              <a:rPr sz="1700" b="1">
+                <a:solidFill>
+                  <a:srgbClr val="2171B5"/>
+                </a:solidFill>
+                <a:latin typeface="Calibri"/>
+              </a:rPr>
+              <a:t>displacement</a:t>
+            </a:r>
+            <a:r>
+              <a:rPr sz="1700">
+                <a:solidFill>
+                  <a:srgbClr val="202020"/>
+                </a:solidFill>
+                <a:latin typeface="Calibri"/>
+              </a:rPr>
+              <a:t> of the judgment vector.</a:t>
+            </a:r>
+          </a:p>
+          <a:p>
+            <a:pPr algn="l">
+              <a:spcAft>
+                <a:spcPts val="1000"/>
+              </a:spcAft>
+            </a:pPr>
+            <a:r>
+              <a:rPr sz="1700" b="1">
+                <a:solidFill>
+                  <a:srgbClr val="2171B5"/>
+                </a:solidFill>
+                <a:latin typeface="Calibri"/>
+              </a:rPr>
+              <a:t>▪  </a:t>
+            </a:r>
+            <a:r>
+              <a:rPr sz="1700">
+                <a:solidFill>
+                  <a:srgbClr val="202020"/>
+                </a:solidFill>
+                <a:latin typeface="Calibri"/>
+              </a:rPr>
+              <a:t>Output a </a:t>
+            </a:r>
+            <a:r>
+              <a:rPr sz="1700" b="1">
+                <a:solidFill>
+                  <a:srgbClr val="2171B5"/>
+                </a:solidFill>
+                <a:latin typeface="Calibri"/>
+              </a:rPr>
+              <a:t>per-model vulnerability profile</a:t>
+            </a:r>
+            <a:r>
+              <a:rPr sz="1700">
+                <a:solidFill>
+                  <a:srgbClr val="202020"/>
+                </a:solidFill>
+                <a:latin typeface="Calibri"/>
+              </a:rPr>
+              <a:t>, not one number.</a:t>
+            </a:r>
+          </a:p>
+          <a:p>
+            <a:pPr algn="l">
+              <a:spcAft>
+                <a:spcPts val="600"/>
+              </a:spcAft>
+            </a:pPr>
+            <a:r>
+              <a:rPr sz="1700" b="1">
+                <a:solidFill>
+                  <a:srgbClr val="2171B5"/>
+                </a:solidFill>
+                <a:latin typeface="Calibri"/>
+              </a:rPr>
+              <a:t>▪  </a:t>
+            </a:r>
+            <a:r>
+              <a:rPr sz="1700">
+                <a:solidFill>
+                  <a:srgbClr val="202020"/>
+                </a:solidFill>
+                <a:latin typeface="Calibri"/>
+              </a:rPr>
+              <a:t>Runs under a realistic </a:t>
+            </a:r>
+            <a:r>
+              <a:rPr sz="1700" b="1">
+                <a:solidFill>
+                  <a:srgbClr val="2171B5"/>
+                </a:solidFill>
+                <a:latin typeface="Calibri"/>
+              </a:rPr>
+              <a:t>$50/day</a:t>
+            </a:r>
+            <a:r>
+              <a:rPr sz="1700">
+                <a:solidFill>
+                  <a:srgbClr val="202020"/>
+                </a:solidFill>
+                <a:latin typeface="Calibri"/>
+              </a:rPr>
+              <a:t> compute budget.</a:t>
+            </a:r>
+          </a:p>
+        </p:txBody>
+      </p:sp>
+      <p:pic>
+        <p:nvPicPr>
+          <p:cNvPr id="6" name="Picture 5" descr="erisml_apple_light.png"/>
+          <p:cNvPicPr>
+            <a:picLocks noChangeAspect="1"/>
+          </p:cNvPicPr>
+          <p:nvPr/>
+        </p:nvPicPr>
+        <p:blipFill>
+          <a:blip r:embed="rId2"/>
+          <a:stretch>
+            <a:fillRect/>
+          </a:stretch>
+        </p:blipFill>
+        <p:spPr>
+          <a:xfrm>
+            <a:off x="8869680" y="1371600"/>
+            <a:ext cx="2194560" cy="2194560"/>
+          </a:xfrm>
+          <a:prstGeom prst="rect">
+            <a:avLst/>
+          </a:prstGeom>
+        </p:spPr>
+      </p:pic>
+      <p:sp>
+        <p:nvSpPr>
+          <p:cNvPr id="7" name="TextBox 6"/>
+          <p:cNvSpPr txBox="1"/>
+          <p:nvPr/>
+        </p:nvSpPr>
+        <p:spPr>
+          <a:xfrm>
+            <a:off x="8138160" y="3749039"/>
+            <a:ext cx="3657600" cy="1463040"/>
+          </a:xfrm>
+          <a:prstGeom prst="rect">
+            <a:avLst/>
+          </a:prstGeom>
+          <a:noFill/>
+        </p:spPr>
+        <p:txBody>
+          <a:bodyPr wrap="square">
+            <a:spAutoFit/>
+          </a:bodyPr>
+          <a:lstStyle/>
+          <a:p>
+            <a:pPr algn="ctr">
+              <a:spcAft>
+                <a:spcPts val="600"/>
+              </a:spcAft>
+            </a:pPr>
+            <a:r>
+              <a:rPr sz="1200">
+                <a:solidFill>
+                  <a:srgbClr val="636363"/>
+                </a:solidFill>
+                <a:latin typeface="Calibri"/>
+              </a:rPr>
+              <a:t>The 7-D space is a measurement-reliable projection of the </a:t>
+            </a:r>
+            <a:r>
+              <a:rPr sz="1200" b="1">
+                <a:solidFill>
+                  <a:srgbClr val="2171B5"/>
+                </a:solidFill>
+                <a:latin typeface="Calibri"/>
+              </a:rPr>
+              <a:t>DEME v3</a:t>
+            </a:r>
+            <a:r>
+              <a:rPr sz="1200">
+                <a:solidFill>
+                  <a:srgbClr val="636363"/>
+                </a:solidFill>
+                <a:latin typeface="Calibri"/>
+              </a:rPr>
+              <a:t> 9-D moral vector (correspondence table in backup).</a:t>
+            </a:r>
+          </a:p>
+        </p:txBody>
+      </p:sp>
+    </p:spTree>
+  </p:cSld>
+  <p:clrMapOvr>
+    <a:masterClrMapping/>
+  </p:clrMapOvr>
+</p:sld>
+</file>
+
+<file path=ppt/slides/slide4.xml><?xml version="1.0" encoding="utf-8"?>
+<p:sld xmlns:a="http://schemas.openxmlformats.org/drawingml/2006/main" xmlns:p="http://schemas.openxmlformats.org/presentationml/2006/main" xmlns:r="http://schemas.openxmlformats.org/officeDocument/2006/relationships">
+  <p:cSld>
+    <p:spTree>
+      <p:nvGrpSpPr>
+        <p:cNvPr id="1" name=""/>
+        <p:cNvGrpSpPr/>
+        <p:nvPr/>
+      </p:nvGrpSpPr>
+      <p:grpSpPr/>
+      <p:sp>
+        <p:nvSpPr>
+          <p:cNvPr id="2" name="TextBox 1"/>
+          <p:cNvSpPr txBox="1"/>
+          <p:nvPr/>
+        </p:nvSpPr>
+        <p:spPr>
+          <a:xfrm>
+            <a:off x="411480" y="146304"/>
+            <a:ext cx="11368735" cy="475488"/>
+          </a:xfrm>
+          <a:prstGeom prst="rect">
+            <a:avLst/>
+          </a:prstGeom>
+          <a:noFill/>
+        </p:spPr>
+        <p:txBody>
+          <a:bodyPr wrap="square">
+            <a:spAutoFit/>
+          </a:bodyPr>
+          <a:lstStyle/>
+          <a:p>
+            <a:r>
+              <a:rPr sz="2200" b="1">
+                <a:solidFill>
+                  <a:srgbClr val="1A2340"/>
+                </a:solidFill>
+                <a:latin typeface="Calibri"/>
+              </a:rPr>
+              <a:t>Finding 1 — Vulnerabilities are selective</a:t>
+            </a:r>
+          </a:p>
+        </p:txBody>
+      </p:sp>
+      <p:sp>
+        <p:nvSpPr>
+          <p:cNvPr id="3" name="Rectangle 2"/>
+          <p:cNvSpPr/>
+          <p:nvPr/>
+        </p:nvSpPr>
+        <p:spPr>
+          <a:xfrm>
+            <a:off x="411480" y="676656"/>
+            <a:ext cx="11368735" cy="20320"/>
+          </a:xfrm>
+          <a:prstGeom prst="rect">
+            <a:avLst/>
+          </a:prstGeom>
+          <a:solidFill>
+            <a:srgbClr val="2171B5"/>
+          </a:solidFill>
+          <a:ln>
+            <a:noFill/>
+          </a:ln>
+        </p:spPr>
+        <p:style>
+          <a:lnRef idx="1">
+            <a:schemeClr val="accent1"/>
+          </a:lnRef>
+          <a:fillRef idx="3">
+            <a:schemeClr val="accent1"/>
+          </a:fillRef>
+          <a:effectRef idx="2">
+            <a:schemeClr val="accent1"/>
+          </a:effectRef>
+          <a:fontRef idx="minor">
+            <a:schemeClr val="lt1"/>
+          </a:fontRef>
+        </p:style>
+        <p:txBody>
+          <a:bodyPr rtlCol="0" anchor="ctr"/>
+          <a:lstStyle/>
+          <a:p>
+            <a:pPr algn="ctr"/>
           </a:p>
         </p:txBody>
       </p:sp>
       <p:sp>
         <p:nvSpPr>
           <p:cNvPr id="4" name="TextBox 3"/>
+          <p:cNvSpPr txBox="1"/>
+          <p:nvPr/>
+        </p:nvSpPr>
+        <p:spPr>
+          <a:xfrm>
+            <a:off x="11368735" y="6473952"/>
+            <a:ext cx="640080" cy="274320"/>
+          </a:xfrm>
+          <a:prstGeom prst="rect">
+            <a:avLst/>
+          </a:prstGeom>
+          <a:noFill/>
+        </p:spPr>
+        <p:txBody>
+          <a:bodyPr wrap="square">
+            <a:spAutoFit/>
+          </a:bodyPr>
+          <a:lstStyle/>
+          <a:p>
+            <a:pPr algn="r">
+              <a:spcAft>
+                <a:spcPts val="600"/>
+              </a:spcAft>
+            </a:pPr>
+            <a:r>
+              <a:rPr sz="1000">
+                <a:solidFill>
+                  <a:srgbClr val="636363"/>
+                </a:solidFill>
+                <a:latin typeface="Calibri"/>
+              </a:rPr>
+              <a:t>4</a:t>
+            </a:r>
+          </a:p>
+        </p:txBody>
+      </p:sp>
+      <p:sp>
+        <p:nvSpPr>
+          <p:cNvPr id="5" name="TextBox 4"/>
+          <p:cNvSpPr txBox="1"/>
+          <p:nvPr/>
+        </p:nvSpPr>
+        <p:spPr>
+          <a:xfrm>
+            <a:off x="502920" y="914400"/>
+            <a:ext cx="5394960" cy="4206240"/>
+          </a:xfrm>
+          <a:prstGeom prst="rect">
+            <a:avLst/>
+          </a:prstGeom>
+          <a:noFill/>
+        </p:spPr>
+        <p:txBody>
+          <a:bodyPr wrap="square">
+            <a:spAutoFit/>
+          </a:bodyPr>
+          <a:lstStyle/>
+          <a:p>
+            <a:pPr algn="l">
+              <a:spcAft>
+                <a:spcPts val="600"/>
+              </a:spcAft>
+            </a:pPr>
+            <a:r>
+              <a:rPr sz="1600" b="1">
+                <a:solidFill>
+                  <a:srgbClr val="202020"/>
+                </a:solidFill>
+                <a:latin typeface="Calibri"/>
+              </a:rPr>
+              <a:t>Displace judgments (real attack surface):</a:t>
+            </a:r>
+          </a:p>
+          <a:p>
+            <a:pPr algn="l">
+              <a:spcAft>
+                <a:spcPts val="400"/>
+              </a:spcAft>
+            </a:pPr>
+            <a:r>
+              <a:rPr sz="1600" b="1">
+                <a:solidFill>
+                  <a:srgbClr val="2171B5"/>
+                </a:solidFill>
+                <a:latin typeface="Calibri"/>
+              </a:rPr>
+              <a:t>▪  </a:t>
+            </a:r>
+            <a:r>
+              <a:rPr sz="1600" b="1">
+                <a:solidFill>
+                  <a:srgbClr val="D95F02"/>
+                </a:solidFill>
+                <a:latin typeface="Calibri"/>
+              </a:rPr>
+              <a:t>Linguistic framing</a:t>
+            </a:r>
+          </a:p>
+          <a:p>
+            <a:pPr algn="l">
+              <a:spcAft>
+                <a:spcPts val="400"/>
+              </a:spcAft>
+            </a:pPr>
+            <a:r>
+              <a:rPr sz="1600" b="1">
+                <a:solidFill>
+                  <a:srgbClr val="2171B5"/>
+                </a:solidFill>
+                <a:latin typeface="Calibri"/>
+              </a:rPr>
+              <a:t>▪  </a:t>
+            </a:r>
+            <a:r>
+              <a:rPr sz="1600" b="1">
+                <a:solidFill>
+                  <a:srgbClr val="D95F02"/>
+                </a:solidFill>
+                <a:latin typeface="Calibri"/>
+              </a:rPr>
+              <a:t>Emotional anchoring</a:t>
+            </a:r>
+            <a:r>
+              <a:rPr sz="1600">
+                <a:solidFill>
+                  <a:srgbClr val="202020"/>
+                </a:solidFill>
+                <a:latin typeface="Calibri"/>
+              </a:rPr>
+              <a:t>  (dᵧ = 0.60–1.06)</a:t>
+            </a:r>
+          </a:p>
+          <a:p>
+            <a:pPr algn="l">
+              <a:spcAft>
+                <a:spcPts val="1200"/>
+              </a:spcAft>
+            </a:pPr>
+            <a:r>
+              <a:rPr sz="1600" b="1">
+                <a:solidFill>
+                  <a:srgbClr val="2171B5"/>
+                </a:solidFill>
+                <a:latin typeface="Calibri"/>
+              </a:rPr>
+              <a:t>▪  </a:t>
+            </a:r>
+            <a:r>
+              <a:rPr sz="1600" b="1">
+                <a:solidFill>
+                  <a:srgbClr val="D95F02"/>
+                </a:solidFill>
+                <a:latin typeface="Calibri"/>
+              </a:rPr>
+              <a:t>Irrelevant sensory detail</a:t>
+            </a:r>
+          </a:p>
+          <a:p>
+            <a:pPr algn="l">
+              <a:spcAft>
+                <a:spcPts val="600"/>
+              </a:spcAft>
+            </a:pPr>
+            <a:r>
+              <a:rPr sz="1600" b="1">
+                <a:solidFill>
+                  <a:srgbClr val="202020"/>
+                </a:solidFill>
+                <a:latin typeface="Calibri"/>
+              </a:rPr>
+              <a:t>Do </a:t>
+            </a:r>
+            <a:r>
+              <a:rPr sz="1600" i="1">
+                <a:solidFill>
+                  <a:srgbClr val="202020"/>
+                </a:solidFill>
+                <a:latin typeface="Calibri"/>
+              </a:rPr>
+              <a:t>not</a:t>
+            </a:r>
+            <a:r>
+              <a:rPr sz="1600" b="1">
+                <a:solidFill>
+                  <a:srgbClr val="202020"/>
+                </a:solidFill>
+                <a:latin typeface="Calibri"/>
+              </a:rPr>
+              <a:t> displace:</a:t>
+            </a:r>
+          </a:p>
+          <a:p>
+            <a:pPr algn="l">
+              <a:spcAft>
+                <a:spcPts val="400"/>
+              </a:spcAft>
+            </a:pPr>
+            <a:r>
+              <a:rPr sz="1600" b="1">
+                <a:solidFill>
+                  <a:srgbClr val="2171B5"/>
+                </a:solidFill>
+                <a:latin typeface="Calibri"/>
+              </a:rPr>
+              <a:t>▪  </a:t>
+            </a:r>
+            <a:r>
+              <a:rPr sz="1600">
+                <a:solidFill>
+                  <a:srgbClr val="202020"/>
+                </a:solidFill>
+                <a:latin typeface="Calibri"/>
+              </a:rPr>
+              <a:t>Gender swap</a:t>
+            </a:r>
+          </a:p>
+          <a:p>
+            <a:pPr algn="l">
+              <a:spcAft>
+                <a:spcPts val="600"/>
+              </a:spcAft>
+            </a:pPr>
+            <a:r>
+              <a:rPr sz="1600" b="1">
+                <a:solidFill>
+                  <a:srgbClr val="2171B5"/>
+                </a:solidFill>
+                <a:latin typeface="Calibri"/>
+              </a:rPr>
+              <a:t>▪  </a:t>
+            </a:r>
+            <a:r>
+              <a:rPr sz="1600">
+                <a:solidFill>
+                  <a:srgbClr val="202020"/>
+                </a:solidFill>
+                <a:latin typeface="Calibri"/>
+              </a:rPr>
+              <a:t>Evaluation order</a:t>
+            </a:r>
+          </a:p>
+        </p:txBody>
+      </p:sp>
+      <p:sp>
+        <p:nvSpPr>
+          <p:cNvPr id="6" name="Rounded Rectangle 5"/>
+          <p:cNvSpPr/>
+          <p:nvPr/>
+        </p:nvSpPr>
+        <p:spPr>
+          <a:xfrm>
+            <a:off x="6217920" y="1005840"/>
+            <a:ext cx="5486400" cy="3017520"/>
+          </a:xfrm>
+          <a:prstGeom prst="roundRect">
+            <a:avLst>
+              <a:gd name="adj" fmla="val 6000"/>
+            </a:avLst>
+          </a:prstGeom>
+          <a:solidFill>
+            <a:srgbClr val="E4EDF7"/>
+          </a:solidFill>
+          <a:ln w="9525">
+            <a:solidFill>
+              <a:srgbClr val="2171B5"/>
+            </a:solidFill>
+          </a:ln>
+        </p:spPr>
+        <p:style>
+          <a:lnRef idx="1">
+            <a:schemeClr val="accent1"/>
+          </a:lnRef>
+          <a:fillRef idx="3">
+            <a:schemeClr val="accent1"/>
+          </a:fillRef>
+          <a:effectRef idx="2">
+            <a:schemeClr val="accent1"/>
+          </a:effectRef>
+          <a:fontRef idx="minor">
+            <a:schemeClr val="lt1"/>
+          </a:fontRef>
+        </p:style>
+        <p:txBody>
+          <a:bodyPr rtlCol="0" anchor="ctr" wrap="square" lIns="164592" rIns="164592" tIns="91440"/>
+          <a:lstStyle/>
+          <a:p>
+            <a:pPr algn="ctr">
+              <a:spcAft>
+                <a:spcPts val="600"/>
+              </a:spcAft>
+            </a:pPr>
+            <a:r>
+              <a:rPr sz="1600" b="1">
+                <a:solidFill>
+                  <a:srgbClr val="2171B5"/>
+                </a:solidFill>
+                <a:latin typeface="Calibri"/>
+              </a:rPr>
+              <a:t>The common thread</a:t>
+            </a:r>
+          </a:p>
+          <a:p>
+            <a:pPr algn="l">
+              <a:spcAft>
+                <a:spcPts val="800"/>
+              </a:spcAft>
+            </a:pPr>
+            <a:r>
+              <a:rPr sz="1500">
+                <a:solidFill>
+                  <a:srgbClr val="202020"/>
+                </a:solidFill>
+                <a:latin typeface="Calibri"/>
+              </a:rPr>
+              <a:t>The three live surfaces all make morally irrelevant features </a:t>
+            </a:r>
+            <a:r>
+              <a:rPr sz="1500" b="1">
+                <a:solidFill>
+                  <a:srgbClr val="2171B5"/>
+                </a:solidFill>
+                <a:latin typeface="Calibri"/>
+              </a:rPr>
+              <a:t>perceptually salient</a:t>
+            </a:r>
+            <a:r>
+              <a:rPr sz="1500">
+                <a:solidFill>
+                  <a:srgbClr val="202020"/>
+                </a:solidFill>
+                <a:latin typeface="Calibri"/>
+              </a:rPr>
+              <a:t>.</a:t>
+            </a:r>
+          </a:p>
+          <a:p>
+            <a:pPr algn="l">
+              <a:spcAft>
+                <a:spcPts val="400"/>
+              </a:spcAft>
+            </a:pPr>
+            <a:r>
+              <a:rPr sz="1500">
+                <a:solidFill>
+                  <a:srgbClr val="202020"/>
+                </a:solidFill>
+                <a:latin typeface="Calibri"/>
+              </a:rPr>
+              <a:t>⇒ The attack mechanism is </a:t>
+            </a:r>
+            <a:r>
+              <a:rPr sz="1500" b="1">
+                <a:solidFill>
+                  <a:srgbClr val="D95F02"/>
+                </a:solidFill>
+                <a:latin typeface="Calibri"/>
+              </a:rPr>
+              <a:t>salience manipulation</a:t>
+            </a:r>
+            <a:r>
+              <a:rPr sz="1500">
+                <a:solidFill>
+                  <a:srgbClr val="202020"/>
+                </a:solidFill>
+                <a:latin typeface="Calibri"/>
+              </a:rPr>
+              <a:t> — and the framework discriminates it from noise.</a:t>
+            </a:r>
+          </a:p>
+        </p:txBody>
+      </p:sp>
+      <p:sp>
+        <p:nvSpPr>
+          <p:cNvPr id="7" name="TextBox 6"/>
+          <p:cNvSpPr txBox="1"/>
+          <p:nvPr/>
+        </p:nvSpPr>
+        <p:spPr>
+          <a:xfrm>
+            <a:off x="502920" y="6291072"/>
+            <a:ext cx="11185855" cy="457200"/>
+          </a:xfrm>
+          <a:prstGeom prst="rect">
+            <a:avLst/>
+          </a:prstGeom>
+          <a:noFill/>
+        </p:spPr>
+        <p:txBody>
+          <a:bodyPr wrap="square">
+            <a:spAutoFit/>
+          </a:bodyPr>
+          <a:lstStyle/>
+          <a:p>
+            <a:pPr algn="l">
+              <a:spcAft>
+                <a:spcPts val="600"/>
+              </a:spcAft>
+            </a:pPr>
+            <a:r>
+              <a:rPr sz="1200">
+                <a:solidFill>
+                  <a:srgbClr val="636363"/>
+                </a:solidFill>
+                <a:latin typeface="Calibri"/>
+              </a:rPr>
+              <a:t>We lead with </a:t>
+            </a:r>
+            <a:r>
+              <a:rPr sz="1200" b="1">
+                <a:solidFill>
+                  <a:srgbClr val="2171B5"/>
+                </a:solidFill>
+                <a:latin typeface="Calibri"/>
+              </a:rPr>
+              <a:t>effect sizes</a:t>
+            </a:r>
+            <a:r>
+              <a:rPr sz="1200">
+                <a:solidFill>
+                  <a:srgbClr val="636363"/>
+                </a:solidFill>
+                <a:latin typeface="Calibri"/>
+              </a:rPr>
+              <a:t> (paired dᵧ, displacement in harm-points) over σ; empirical control arms rule out stochastic drift.</a:t>
+            </a:r>
+          </a:p>
+        </p:txBody>
+      </p:sp>
+    </p:spTree>
+  </p:cSld>
+  <p:clrMapOvr>
+    <a:masterClrMapping/>
+  </p:clrMapOvr>
+</p:sld>
+</file>
+
+<file path=ppt/slides/slide5.xml><?xml version="1.0" encoding="utf-8"?>
+<p:sld xmlns:a="http://schemas.openxmlformats.org/drawingml/2006/main" xmlns:p="http://schemas.openxmlformats.org/presentationml/2006/main" xmlns:r="http://schemas.openxmlformats.org/officeDocument/2006/relationships">
+  <p:cSld>
+    <p:spTree>
+      <p:nvGrpSpPr>
+        <p:cNvPr id="1" name=""/>
+        <p:cNvGrpSpPr/>
+        <p:nvPr/>
+      </p:nvGrpSpPr>
+      <p:grpSpPr/>
+      <p:sp>
+        <p:nvSpPr>
+          <p:cNvPr id="2" name="TextBox 1"/>
+          <p:cNvSpPr txBox="1"/>
+          <p:nvPr/>
+        </p:nvSpPr>
+        <p:spPr>
+          <a:xfrm>
+            <a:off x="411480" y="146304"/>
+            <a:ext cx="11368735" cy="475488"/>
+          </a:xfrm>
+          <a:prstGeom prst="rect">
+            <a:avLst/>
+          </a:prstGeom>
+          <a:noFill/>
+        </p:spPr>
+        <p:txBody>
+          <a:bodyPr wrap="square">
+            <a:spAutoFit/>
+          </a:bodyPr>
+          <a:lstStyle/>
+          <a:p>
+            <a:r>
+              <a:rPr sz="2200" b="1">
+                <a:solidFill>
+                  <a:srgbClr val="1A2340"/>
+                </a:solidFill>
+                <a:latin typeface="Calibri"/>
+              </a:rPr>
+              <a:t>Finding 2 — Robustness profiles are dissociable</a:t>
+            </a:r>
+          </a:p>
+        </p:txBody>
+      </p:sp>
+      <p:sp>
+        <p:nvSpPr>
+          <p:cNvPr id="3" name="Rectangle 2"/>
+          <p:cNvSpPr/>
+          <p:nvPr/>
+        </p:nvSpPr>
+        <p:spPr>
+          <a:xfrm>
+            <a:off x="411480" y="676656"/>
+            <a:ext cx="11368735" cy="20320"/>
+          </a:xfrm>
+          <a:prstGeom prst="rect">
+            <a:avLst/>
+          </a:prstGeom>
+          <a:solidFill>
+            <a:srgbClr val="2171B5"/>
+          </a:solidFill>
+          <a:ln>
+            <a:noFill/>
+          </a:ln>
+        </p:spPr>
+        <p:style>
+          <a:lnRef idx="1">
+            <a:schemeClr val="accent1"/>
+          </a:lnRef>
+          <a:fillRef idx="3">
+            <a:schemeClr val="accent1"/>
+          </a:fillRef>
+          <a:effectRef idx="2">
+            <a:schemeClr val="accent1"/>
+          </a:effectRef>
+          <a:fontRef idx="minor">
+            <a:schemeClr val="lt1"/>
+          </a:fontRef>
+        </p:style>
+        <p:txBody>
+          <a:bodyPr rtlCol="0" anchor="ctr"/>
+          <a:lstStyle/>
+          <a:p>
+            <a:pPr algn="ctr"/>
+          </a:p>
+        </p:txBody>
+      </p:sp>
+      <p:sp>
+        <p:nvSpPr>
+          <p:cNvPr id="4" name="TextBox 3"/>
+          <p:cNvSpPr txBox="1"/>
+          <p:nvPr/>
+        </p:nvSpPr>
+        <p:spPr>
+          <a:xfrm>
+            <a:off x="11368735" y="6473952"/>
+            <a:ext cx="640080" cy="274320"/>
+          </a:xfrm>
+          <a:prstGeom prst="rect">
+            <a:avLst/>
+          </a:prstGeom>
+          <a:noFill/>
+        </p:spPr>
+        <p:txBody>
+          <a:bodyPr wrap="square">
+            <a:spAutoFit/>
+          </a:bodyPr>
+          <a:lstStyle/>
+          <a:p>
+            <a:pPr algn="r">
+              <a:spcAft>
+                <a:spcPts val="600"/>
+              </a:spcAft>
+            </a:pPr>
+            <a:r>
+              <a:rPr sz="1000">
+                <a:solidFill>
+                  <a:srgbClr val="636363"/>
+                </a:solidFill>
+                <a:latin typeface="Calibri"/>
+              </a:rPr>
+              <a:t>5</a:t>
+            </a:r>
+          </a:p>
+        </p:txBody>
+      </p:sp>
+      <p:sp>
+        <p:nvSpPr>
+          <p:cNvPr id="5" name="TextBox 4"/>
+          <p:cNvSpPr txBox="1"/>
+          <p:nvPr/>
+        </p:nvSpPr>
+        <p:spPr>
+          <a:xfrm>
+            <a:off x="502920" y="960120"/>
+            <a:ext cx="11155680" cy="2377440"/>
+          </a:xfrm>
+          <a:prstGeom prst="rect">
+            <a:avLst/>
+          </a:prstGeom>
+          <a:noFill/>
+        </p:spPr>
+        <p:txBody>
+          <a:bodyPr wrap="square">
+            <a:spAutoFit/>
+          </a:bodyPr>
+          <a:lstStyle/>
+          <a:p>
+            <a:pPr algn="l">
+              <a:spcAft>
+                <a:spcPts val="1000"/>
+              </a:spcAft>
+            </a:pPr>
+            <a:r>
+              <a:rPr sz="1700" b="1">
+                <a:solidFill>
+                  <a:srgbClr val="2171B5"/>
+                </a:solidFill>
+                <a:latin typeface="Calibri"/>
+              </a:rPr>
+              <a:t>▪  </a:t>
+            </a:r>
+            <a:r>
+              <a:rPr sz="1700" b="1">
+                <a:solidFill>
+                  <a:srgbClr val="2171B5"/>
+                </a:solidFill>
+                <a:latin typeface="Calibri"/>
+              </a:rPr>
+              <a:t>No model dominates</a:t>
+            </a:r>
+            <a:r>
+              <a:rPr sz="1700">
+                <a:solidFill>
+                  <a:srgbClr val="202020"/>
+                </a:solidFill>
+                <a:latin typeface="Calibri"/>
+              </a:rPr>
+              <a:t> all attack surfaces.</a:t>
+            </a:r>
+          </a:p>
+          <a:p>
+            <a:pPr algn="l">
+              <a:spcAft>
+                <a:spcPts val="1000"/>
+              </a:spcAft>
+            </a:pPr>
+            <a:r>
+              <a:rPr sz="1700" b="1">
+                <a:solidFill>
+                  <a:srgbClr val="2171B5"/>
+                </a:solidFill>
+                <a:latin typeface="Calibri"/>
+              </a:rPr>
+              <a:t>▪  </a:t>
+            </a:r>
+            <a:r>
+              <a:rPr sz="1700">
+                <a:solidFill>
+                  <a:srgbClr val="202020"/>
+                </a:solidFill>
+                <a:latin typeface="Calibri"/>
+              </a:rPr>
+              <a:t>Claude: </a:t>
+            </a:r>
+            <a:r>
+              <a:rPr sz="1700" b="1">
+                <a:solidFill>
+                  <a:srgbClr val="D95F02"/>
+                </a:solidFill>
+                <a:latin typeface="Calibri"/>
+              </a:rPr>
+              <a:t>zero observed sycophancy</a:t>
+            </a:r>
+            <a:r>
+              <a:rPr sz="1700">
+                <a:solidFill>
+                  <a:srgbClr val="202020"/>
+                </a:solidFill>
+                <a:latin typeface="Calibri"/>
+              </a:rPr>
+              <a:t> (0/9) — but </a:t>
+            </a:r>
+            <a:r>
+              <a:rPr sz="1700" b="1">
+                <a:solidFill>
+                  <a:srgbClr val="D95F02"/>
+                </a:solidFill>
+                <a:latin typeface="Calibri"/>
+              </a:rPr>
+              <a:t>worst</a:t>
+            </a:r>
+            <a:r>
+              <a:rPr sz="1700">
+                <a:solidFill>
+                  <a:srgbClr val="202020"/>
+                </a:solidFill>
+                <a:latin typeface="Calibri"/>
+              </a:rPr>
+              <a:t> emotional-anchoring recovery (20%) and worst divided attention.</a:t>
+            </a:r>
+          </a:p>
+          <a:p>
+            <a:pPr algn="l">
+              <a:spcAft>
+                <a:spcPts val="600"/>
+              </a:spcAft>
+            </a:pPr>
+            <a:r>
+              <a:rPr sz="1700" b="1">
+                <a:solidFill>
+                  <a:srgbClr val="2171B5"/>
+                </a:solidFill>
+                <a:latin typeface="Calibri"/>
+              </a:rPr>
+              <a:t>▪  </a:t>
+            </a:r>
+            <a:r>
+              <a:rPr sz="1700">
+                <a:solidFill>
+                  <a:srgbClr val="202020"/>
+                </a:solidFill>
+                <a:latin typeface="Calibri"/>
+              </a:rPr>
+              <a:t>Flash 2.0: </a:t>
+            </a:r>
+            <a:r>
+              <a:rPr sz="1700" b="1">
+                <a:solidFill>
+                  <a:srgbClr val="D95F02"/>
+                </a:solidFill>
+                <a:latin typeface="Calibri"/>
+              </a:rPr>
+              <a:t>best</a:t>
+            </a:r>
+            <a:r>
+              <a:rPr sz="1700">
+                <a:solidFill>
+                  <a:srgbClr val="202020"/>
+                </a:solidFill>
+                <a:latin typeface="Calibri"/>
+              </a:rPr>
+              <a:t> anchoring recovery (73%) — but </a:t>
+            </a:r>
+            <a:r>
+              <a:rPr sz="1700" b="1">
+                <a:solidFill>
+                  <a:srgbClr val="D95F02"/>
+                </a:solidFill>
+                <a:latin typeface="Calibri"/>
+              </a:rPr>
+              <a:t>worst</a:t>
+            </a:r>
+            <a:r>
+              <a:rPr sz="1700">
+                <a:solidFill>
+                  <a:srgbClr val="202020"/>
+                </a:solidFill>
+                <a:latin typeface="Calibri"/>
+              </a:rPr>
+              <a:t> working memory.</a:t>
+            </a:r>
+          </a:p>
+        </p:txBody>
+      </p:sp>
+      <p:sp>
+        <p:nvSpPr>
+          <p:cNvPr id="6" name="Rounded Rectangle 5"/>
+          <p:cNvSpPr/>
+          <p:nvPr/>
+        </p:nvSpPr>
+        <p:spPr>
+          <a:xfrm>
+            <a:off x="502920" y="3931920"/>
+            <a:ext cx="11155680" cy="2011680"/>
+          </a:xfrm>
+          <a:prstGeom prst="roundRect">
+            <a:avLst>
+              <a:gd name="adj" fmla="val 6000"/>
+            </a:avLst>
+          </a:prstGeom>
+          <a:solidFill>
+            <a:srgbClr val="E4EDF7"/>
+          </a:solidFill>
+          <a:ln w="9525">
+            <a:solidFill>
+              <a:srgbClr val="2171B5"/>
+            </a:solidFill>
+          </a:ln>
+        </p:spPr>
+        <p:style>
+          <a:lnRef idx="1">
+            <a:schemeClr val="accent1"/>
+          </a:lnRef>
+          <a:fillRef idx="3">
+            <a:schemeClr val="accent1"/>
+          </a:fillRef>
+          <a:effectRef idx="2">
+            <a:schemeClr val="accent1"/>
+          </a:effectRef>
+          <a:fontRef idx="minor">
+            <a:schemeClr val="lt1"/>
+          </a:fontRef>
+        </p:style>
+        <p:txBody>
+          <a:bodyPr rtlCol="0" anchor="ctr" wrap="square" lIns="164592" rIns="164592" tIns="91440"/>
+          <a:lstStyle/>
+          <a:p>
+            <a:pPr algn="ctr">
+              <a:spcAft>
+                <a:spcPts val="600"/>
+              </a:spcAft>
+            </a:pPr>
+            <a:r>
+              <a:rPr sz="1700" b="1">
+                <a:solidFill>
+                  <a:srgbClr val="2171B5"/>
+                </a:solidFill>
+                <a:latin typeface="Calibri"/>
+              </a:rPr>
+              <a:t>Consequence for Secure AI</a:t>
+            </a:r>
+          </a:p>
+          <a:p>
+            <a:pPr algn="l">
+              <a:spcAft>
+                <a:spcPts val="600"/>
+              </a:spcAft>
+            </a:pPr>
+            <a:r>
+              <a:rPr sz="1600">
+                <a:solidFill>
+                  <a:srgbClr val="202020"/>
+                </a:solidFill>
+                <a:latin typeface="Calibri"/>
+              </a:rPr>
+              <a:t>Averaging partially-independent dimensions yields a number that </a:t>
+            </a:r>
+            <a:r>
+              <a:rPr sz="1600" b="1">
+                <a:solidFill>
+                  <a:srgbClr val="D95F02"/>
+                </a:solidFill>
+                <a:latin typeface="Calibri"/>
+              </a:rPr>
+              <a:t>describes no model accurately.</a:t>
+            </a:r>
+          </a:p>
+          <a:p>
+            <a:pPr algn="l">
+              <a:spcAft>
+                <a:spcPts val="400"/>
+              </a:spcAft>
+            </a:pPr>
+            <a:r>
+              <a:rPr sz="1600" b="1">
+                <a:solidFill>
+                  <a:srgbClr val="D95F02"/>
+                </a:solidFill>
+                <a:latin typeface="Calibri"/>
+              </a:rPr>
+              <a:t>Single-test certification provides false assurance.</a:t>
+            </a:r>
+          </a:p>
+        </p:txBody>
+      </p:sp>
+    </p:spTree>
+  </p:cSld>
+  <p:clrMapOvr>
+    <a:masterClrMapping/>
+  </p:clrMapOvr>
+</p:sld>
+</file>
+
+<file path=ppt/slides/slide6.xml><?xml version="1.0" encoding="utf-8"?>
+<p:sld xmlns:a="http://schemas.openxmlformats.org/drawingml/2006/main" xmlns:p="http://schemas.openxmlformats.org/presentationml/2006/main" xmlns:r="http://schemas.openxmlformats.org/officeDocument/2006/relationships">
+  <p:cSld>
+    <p:spTree>
+      <p:nvGrpSpPr>
+        <p:cNvPr id="1" name=""/>
+        <p:cNvGrpSpPr/>
+        <p:nvPr/>
+      </p:nvGrpSpPr>
+      <p:grpSpPr/>
+      <p:sp>
+        <p:nvSpPr>
+          <p:cNvPr id="2" name="TextBox 1"/>
+          <p:cNvSpPr txBox="1"/>
+          <p:nvPr/>
+        </p:nvSpPr>
+        <p:spPr>
+          <a:xfrm>
+            <a:off x="411480" y="146304"/>
+            <a:ext cx="11368735" cy="475488"/>
+          </a:xfrm>
+          <a:prstGeom prst="rect">
+            <a:avLst/>
+          </a:prstGeom>
+          <a:noFill/>
+        </p:spPr>
+        <p:txBody>
+          <a:bodyPr wrap="square">
+            <a:spAutoFit/>
+          </a:bodyPr>
+          <a:lstStyle/>
+          <a:p>
+            <a:r>
+              <a:rPr sz="2200" b="1">
+                <a:solidFill>
+                  <a:srgbClr val="1A2340"/>
+                </a:solidFill>
+                <a:latin typeface="Calibri"/>
+              </a:rPr>
+              <a:t>Validation (reviewer-driven) — is the harm space measurable?</a:t>
+            </a:r>
+          </a:p>
+        </p:txBody>
+      </p:sp>
+      <p:sp>
+        <p:nvSpPr>
+          <p:cNvPr id="3" name="Rectangle 2"/>
+          <p:cNvSpPr/>
+          <p:nvPr/>
+        </p:nvSpPr>
+        <p:spPr>
+          <a:xfrm>
+            <a:off x="411480" y="676656"/>
+            <a:ext cx="11368735" cy="20320"/>
+          </a:xfrm>
+          <a:prstGeom prst="rect">
+            <a:avLst/>
+          </a:prstGeom>
+          <a:solidFill>
+            <a:srgbClr val="2171B5"/>
+          </a:solidFill>
+          <a:ln>
+            <a:noFill/>
+          </a:ln>
+        </p:spPr>
+        <p:style>
+          <a:lnRef idx="1">
+            <a:schemeClr val="accent1"/>
+          </a:lnRef>
+          <a:fillRef idx="3">
+            <a:schemeClr val="accent1"/>
+          </a:fillRef>
+          <a:effectRef idx="2">
+            <a:schemeClr val="accent1"/>
+          </a:effectRef>
+          <a:fontRef idx="minor">
+            <a:schemeClr val="lt1"/>
+          </a:fontRef>
+        </p:style>
+        <p:txBody>
+          <a:bodyPr rtlCol="0" anchor="ctr"/>
+          <a:lstStyle/>
+          <a:p>
+            <a:pPr algn="ctr"/>
+          </a:p>
+        </p:txBody>
+      </p:sp>
+      <p:sp>
+        <p:nvSpPr>
+          <p:cNvPr id="4" name="TextBox 3"/>
+          <p:cNvSpPr txBox="1"/>
+          <p:nvPr/>
+        </p:nvSpPr>
+        <p:spPr>
+          <a:xfrm>
+            <a:off x="11368735" y="6473952"/>
+            <a:ext cx="640080" cy="274320"/>
+          </a:xfrm>
+          <a:prstGeom prst="rect">
+            <a:avLst/>
+          </a:prstGeom>
+          <a:noFill/>
+        </p:spPr>
+        <p:txBody>
+          <a:bodyPr wrap="square">
+            <a:spAutoFit/>
+          </a:bodyPr>
+          <a:lstStyle/>
+          <a:p>
+            <a:pPr algn="r">
+              <a:spcAft>
+                <a:spcPts val="600"/>
+              </a:spcAft>
+            </a:pPr>
+            <a:r>
+              <a:rPr sz="1000">
+                <a:solidFill>
+                  <a:srgbClr val="636363"/>
+                </a:solidFill>
+                <a:latin typeface="Calibri"/>
+              </a:rPr>
+              <a:t>6</a:t>
+            </a:r>
+          </a:p>
+        </p:txBody>
+      </p:sp>
+      <p:sp>
+        <p:nvSpPr>
+          <p:cNvPr id="5" name="TextBox 4"/>
           <p:cNvSpPr txBox="1"/>
           <p:nvPr/>
         </p:nvSpPr>
@@ -10600,7 +10956,7 @@
             <a:r>
               <a:rPr sz="1500" b="1">
                 <a:solidFill>
-                  <a:srgbClr val="2B6CB0"/>
+                  <a:srgbClr val="2171B5"/>
                 </a:solidFill>
                 <a:latin typeface="Calibri"/>
               </a:rPr>
@@ -10618,7 +10974,7 @@
             <a:r>
               <a:rPr sz="1500" b="1">
                 <a:solidFill>
-                  <a:srgbClr val="2B6CB0"/>
+                  <a:srgbClr val="2171B5"/>
                 </a:solidFill>
                 <a:latin typeface="Calibri"/>
               </a:rPr>
@@ -10638,7 +10994,7 @@
       </p:sp>
       <p:graphicFrame>
         <p:nvGraphicFramePr>
-          <p:cNvPr id="5" name="Table 4"/>
+          <p:cNvPr id="6" name="Table 5"/>
           <p:cNvGraphicFramePr>
             <a:graphicFrameLocks noGrp="1"/>
           </p:cNvGraphicFramePr>
@@ -10678,7 +11034,7 @@
                   </a:txBody>
                   <a:tcPr marT="18288" marB="18288">
                     <a:solidFill>
-                      <a:srgbClr val="2B6CB0"/>
+                      <a:srgbClr val="2171B5"/>
                     </a:solidFill>
                   </a:tcPr>
                 </a:tc>
@@ -10700,7 +11056,7 @@
                   </a:txBody>
                   <a:tcPr marT="18288" marB="18288">
                     <a:solidFill>
-                      <a:srgbClr val="2B6CB0"/>
+                      <a:srgbClr val="2171B5"/>
                     </a:solidFill>
                   </a:tcPr>
                 </a:tc>
@@ -10722,7 +11078,7 @@
                   </a:txBody>
                   <a:tcPr marT="18288" marB="18288">
                     <a:solidFill>
-                      <a:srgbClr val="2B6CB0"/>
+                      <a:srgbClr val="2171B5"/>
                     </a:solidFill>
                   </a:tcPr>
                 </a:tc>
@@ -10962,7 +11318,7 @@
                       <a:r>
                         <a:rPr sz="1400" b="1">
                           <a:solidFill>
-                            <a:srgbClr val="A67500"/>
+                            <a:srgbClr val="D95F02"/>
                           </a:solidFill>
                           <a:latin typeface="Calibri"/>
                         </a:rPr>
@@ -10984,7 +11340,7 @@
                       <a:r>
                         <a:rPr sz="1400" b="1">
                           <a:solidFill>
-                            <a:srgbClr val="A67500"/>
+                            <a:srgbClr val="D95F02"/>
                           </a:solidFill>
                           <a:latin typeface="Calibri"/>
                         </a:rPr>
@@ -11005,7 +11361,7 @@
       </p:graphicFrame>
       <p:sp>
         <p:nvSpPr>
-          <p:cNvPr id="6" name="TextBox 5"/>
+          <p:cNvPr id="7" name="TextBox 6"/>
           <p:cNvSpPr txBox="1"/>
           <p:nvPr/>
         </p:nvSpPr>
@@ -11033,11 +11389,11 @@
             <a:r>
               <a:rPr sz="1200">
                 <a:solidFill>
-                  <a:srgbClr val="666666"/>
-                </a:solidFill>
-                <a:latin typeface="Calibri"/>
-              </a:rPr>
-              <a:t>Test–retest median r = 0.96. Dimensions index a shared, model-independent structure.</a:t>
+                  <a:srgbClr val="636363"/>
+                </a:solidFill>
+                <a:latin typeface="Calibri"/>
+              </a:rPr>
+              <a:t>Test–retest median r = 0.96. Dimensions index a shared structure across model families.</a:t>
             </a:r>
           </a:p>
         </p:txBody>
@@ -11050,7 +11406,7 @@
 </p:sld>
 </file>
 
-<file path=ppt/slides/slide8.xml><?xml version="1.0" encoding="utf-8"?>
+<file path=ppt/slides/slide7.xml><?xml version="1.0" encoding="utf-8"?>
 <p:sld xmlns:a="http://schemas.openxmlformats.org/drawingml/2006/main" xmlns:p="http://schemas.openxmlformats.org/presentationml/2006/main" xmlns:r="http://schemas.openxmlformats.org/officeDocument/2006/relationships">
   <p:cSld>
     <p:spTree>
@@ -11062,20 +11418,54 @@
       <p:grpSpPr/>
       <p:sp>
         <p:nvSpPr>
-          <p:cNvPr id="2" name="Rectangle 1"/>
+          <p:cNvPr id="2" name="TextBox 1"/>
+          <p:cNvSpPr txBox="1"/>
+          <p:nvPr/>
+        </p:nvSpPr>
+        <p:spPr>
+          <a:xfrm>
+            <a:off x="411480" y="146304"/>
+            <a:ext cx="11368735" cy="475488"/>
+          </a:xfrm>
+          <a:prstGeom prst="rect">
+            <a:avLst/>
+          </a:prstGeom>
+          <a:noFill/>
+        </p:spPr>
+        <p:txBody>
+          <a:bodyPr wrap="square">
+            <a:spAutoFit/>
+          </a:bodyPr>
+          <a:lstStyle/>
+          <a:p>
+            <a:r>
+              <a:rPr sz="2200" b="1">
+                <a:solidFill>
+                  <a:srgbClr val="1A2340"/>
+                </a:solidFill>
+                <a:latin typeface="Calibri"/>
+              </a:rPr>
+              <a:t>Worked exploit: threshold evasion</a:t>
+            </a:r>
+          </a:p>
+        </p:txBody>
+      </p:sp>
+      <p:sp>
+        <p:nvSpPr>
+          <p:cNvPr id="3" name="Rectangle 2"/>
           <p:cNvSpPr/>
           <p:nvPr/>
         </p:nvSpPr>
         <p:spPr>
           <a:xfrm>
-            <a:off x="0" y="0"/>
-            <a:ext cx="12191695" cy="658368"/>
+            <a:off x="411480" y="676656"/>
+            <a:ext cx="11368735" cy="20320"/>
           </a:xfrm>
           <a:prstGeom prst="rect">
             <a:avLst/>
           </a:prstGeom>
           <a:solidFill>
-            <a:srgbClr val="2B6CB0"/>
+            <a:srgbClr val="2171B5"/>
           </a:solidFill>
           <a:ln>
             <a:noFill/>
@@ -11096,25 +11486,16 @@
           </a:fontRef>
         </p:style>
         <p:txBody>
-          <a:bodyPr rtlCol="0" anchor="ctr" lIns="411480" tIns="73152"/>
+          <a:bodyPr rtlCol="0" anchor="ctr"/>
           <a:lstStyle/>
           <a:p>
             <a:pPr algn="ctr"/>
-            <a:r>
-              <a:rPr sz="2200" b="1">
-                <a:solidFill>
-                  <a:srgbClr val="FFFFFF"/>
-                </a:solidFill>
-                <a:latin typeface="Calibri"/>
-              </a:rPr>
-              <a:t>NEW — Worked exploit: threshold evasion</a:t>
-            </a:r>
-          </a:p>
-        </p:txBody>
-      </p:sp>
-      <p:sp>
-        <p:nvSpPr>
-          <p:cNvPr id="3" name="TextBox 2"/>
+          </a:p>
+        </p:txBody>
+      </p:sp>
+      <p:sp>
+        <p:nvSpPr>
+          <p:cNvPr id="4" name="TextBox 3"/>
           <p:cNvSpPr txBox="1"/>
           <p:nvPr/>
         </p:nvSpPr>
@@ -11142,18 +11523,18 @@
             <a:r>
               <a:rPr sz="1000">
                 <a:solidFill>
-                  <a:srgbClr val="666666"/>
-                </a:solidFill>
-                <a:latin typeface="Calibri"/>
-              </a:rPr>
-              <a:t>8</a:t>
-            </a:r>
-          </a:p>
-        </p:txBody>
-      </p:sp>
-      <p:sp>
-        <p:nvSpPr>
-          <p:cNvPr id="4" name="TextBox 3"/>
+                  <a:srgbClr val="636363"/>
+                </a:solidFill>
+                <a:latin typeface="Calibri"/>
+              </a:rPr>
+              <a:t>7</a:t>
+            </a:r>
+          </a:p>
+        </p:txBody>
+      </p:sp>
+      <p:sp>
+        <p:nvSpPr>
+          <p:cNvPr id="5" name="TextBox 4"/>
           <p:cNvSpPr txBox="1"/>
           <p:nvPr/>
         </p:nvSpPr>
@@ -11195,27 +11576,27 @@
               </a:spcAft>
             </a:pPr>
             <a:r>
+              <a:rPr sz="1700" b="1">
+                <a:solidFill>
+                  <a:srgbClr val="2171B5"/>
+                </a:solidFill>
+                <a:latin typeface="Calibri"/>
+              </a:rPr>
+              <a:t>▪  </a:t>
+            </a:r>
+            <a:r>
               <a:rPr sz="1700">
                 <a:solidFill>
                   <a:srgbClr val="202020"/>
                 </a:solidFill>
                 <a:latin typeface="Calibri"/>
               </a:rPr>
-              <a:t>•  </a:t>
-            </a:r>
-            <a:r>
-              <a:rPr sz="1700">
-                <a:solidFill>
-                  <a:srgbClr val="202020"/>
-                </a:solidFill>
-                <a:latin typeface="Calibri"/>
-              </a:rPr>
               <a:t>Euphemistic rewriting (morally invariant) lowers panel-averaged harm by </a:t>
             </a:r>
             <a:r>
               <a:rPr sz="1700" b="1">
                 <a:solidFill>
-                  <a:srgbClr val="A67500"/>
+                  <a:srgbClr val="D95F02"/>
                 </a:solidFill>
                 <a:latin typeface="Calibri"/>
               </a:rPr>
@@ -11238,13 +11619,31 @@
               </a:spcAft>
             </a:pPr>
             <a:r>
+              <a:rPr sz="1700" b="1">
+                <a:solidFill>
+                  <a:srgbClr val="2171B5"/>
+                </a:solidFill>
+                <a:latin typeface="Calibri"/>
+              </a:rPr>
+              <a:t>▪  </a:t>
+            </a:r>
+            <a:r>
               <a:rPr sz="1700">
                 <a:solidFill>
                   <a:srgbClr val="202020"/>
                 </a:solidFill>
                 <a:latin typeface="Calibri"/>
               </a:rPr>
-              <a:t>•  </a:t>
+              <a:t>At a median-calibrated threshold, </a:t>
+            </a:r>
+            <a:r>
+              <a:rPr sz="1700" b="1">
+                <a:solidFill>
+                  <a:srgbClr val="D95F02"/>
+                </a:solidFill>
+                <a:latin typeface="Calibri"/>
+              </a:rPr>
+              <a:t>3 of 6</a:t>
             </a:r>
             <a:r>
               <a:rPr sz="1700">
@@ -11253,25 +11652,16 @@
                 </a:solidFill>
                 <a:latin typeface="Calibri"/>
               </a:rPr>
-              <a:t>At a median-calibrated threshold, </a:t>
-            </a:r>
-            <a:r>
-              <a:rPr sz="1700" b="1">
-                <a:solidFill>
-                  <a:srgbClr val="A67500"/>
-                </a:solidFill>
-                <a:latin typeface="Calibri"/>
-              </a:rPr>
-              <a:t>3 of 6</a:t>
-            </a:r>
-            <a:r>
-              <a:rPr sz="1700">
-                <a:solidFill>
-                  <a:srgbClr val="202020"/>
-                </a:solidFill>
-                <a:latin typeface="Calibri"/>
-              </a:rPr>
-              <a:t> gold items silently reclassify FLAG → PASS.</a:t>
+              <a:t> gold items silently reclassify FLAG → PASS </a:t>
+            </a:r>
+            <a:r>
+              <a:rPr sz="1700" i="1">
+                <a:solidFill>
+                  <a:srgbClr val="202020"/>
+                </a:solidFill>
+                <a:latin typeface="Calibri"/>
+              </a:rPr>
+              <a:t>(existence proof: n = 6 hand-audited gold items).</a:t>
             </a:r>
           </a:p>
           <a:p>
@@ -11281,22 +11671,40 @@
               </a:spcAft>
             </a:pPr>
             <a:r>
+              <a:rPr sz="1700" b="1">
+                <a:solidFill>
+                  <a:srgbClr val="2171B5"/>
+                </a:solidFill>
+                <a:latin typeface="Calibri"/>
+              </a:rPr>
+              <a:t>▪  </a:t>
+            </a:r>
+            <a:r>
+              <a:rPr sz="1700" b="1">
+                <a:solidFill>
+                  <a:srgbClr val="D95F02"/>
+                </a:solidFill>
+                <a:latin typeface="Calibri"/>
+              </a:rPr>
+              <a:t>Asymmetry</a:t>
+            </a:r>
+            <a:r>
               <a:rPr sz="1700">
                 <a:solidFill>
                   <a:srgbClr val="202020"/>
                 </a:solidFill>
                 <a:latin typeface="Calibri"/>
               </a:rPr>
-              <a:t>•  </a:t>
-            </a:r>
-            <a:r>
-              <a:rPr sz="1700" b="1">
-                <a:solidFill>
-                  <a:srgbClr val="A67500"/>
-                </a:solidFill>
-                <a:latin typeface="Calibri"/>
-              </a:rPr>
-              <a:t>Asymmetry</a:t>
+              <a:t>: far easier to </a:t>
+            </a:r>
+            <a:r>
+              <a:rPr sz="1700" i="1">
+                <a:solidFill>
+                  <a:srgbClr val="202020"/>
+                </a:solidFill>
+                <a:latin typeface="Calibri"/>
+              </a:rPr>
+              <a:t>evade</a:t>
             </a:r>
             <a:r>
               <a:rPr sz="1700">
@@ -11305,7 +11713,7 @@
                 </a:solidFill>
                 <a:latin typeface="Calibri"/>
               </a:rPr>
-              <a:t>: far easier to </a:t>
+              <a:t> (hide harm) than to </a:t>
             </a:r>
             <a:r>
               <a:rPr sz="1700" i="1">
@@ -11314,25 +11722,7 @@
                 </a:solidFill>
                 <a:latin typeface="Calibri"/>
               </a:rPr>
-              <a:t>evade</a:t>
-            </a:r>
-            <a:r>
-              <a:rPr sz="1700">
-                <a:solidFill>
-                  <a:srgbClr val="202020"/>
-                </a:solidFill>
-                <a:latin typeface="Calibri"/>
-              </a:rPr>
-              <a:t> (hide harm) than to </a:t>
-            </a:r>
-            <a:r>
-              <a:rPr sz="1700" i="1">
-                <a:solidFill>
-                  <a:srgbClr val="202020"/>
-                </a:solidFill>
-                <a:latin typeface="Calibri"/>
-              </a:rPr>
-              <a:t>trip</a:t>
+              <a:t>trigger</a:t>
             </a:r>
             <a:r>
               <a:rPr sz="1700">
@@ -11354,7 +11744,7 @@
 </p:sld>
 </file>
 
-<file path=ppt/slides/slide9.xml><?xml version="1.0" encoding="utf-8"?>
+<file path=ppt/slides/slide8.xml><?xml version="1.0" encoding="utf-8"?>
 <p:sld xmlns:a="http://schemas.openxmlformats.org/drawingml/2006/main" xmlns:p="http://schemas.openxmlformats.org/presentationml/2006/main" xmlns:r="http://schemas.openxmlformats.org/officeDocument/2006/relationships">
   <p:cSld>
     <p:spTree>
@@ -11366,20 +11756,54 @@
       <p:grpSpPr/>
       <p:sp>
         <p:nvSpPr>
-          <p:cNvPr id="2" name="Rectangle 1"/>
+          <p:cNvPr id="2" name="TextBox 1"/>
+          <p:cNvSpPr txBox="1"/>
+          <p:nvPr/>
+        </p:nvSpPr>
+        <p:spPr>
+          <a:xfrm>
+            <a:off x="411480" y="146304"/>
+            <a:ext cx="11368735" cy="475488"/>
+          </a:xfrm>
+          <a:prstGeom prst="rect">
+            <a:avLst/>
+          </a:prstGeom>
+          <a:noFill/>
+        </p:spPr>
+        <p:txBody>
+          <a:bodyPr wrap="square">
+            <a:spAutoFit/>
+          </a:bodyPr>
+          <a:lstStyle/>
+          <a:p>
+            <a:r>
+              <a:rPr sz="2200" b="1">
+                <a:solidFill>
+                  <a:srgbClr val="1A2340"/>
+                </a:solidFill>
+                <a:latin typeface="Calibri"/>
+              </a:rPr>
+              <a:t>The exploit survives a principled kernel</a:t>
+            </a:r>
+          </a:p>
+        </p:txBody>
+      </p:sp>
+      <p:sp>
+        <p:nvSpPr>
+          <p:cNvPr id="3" name="Rectangle 2"/>
           <p:cNvSpPr/>
           <p:nvPr/>
         </p:nvSpPr>
         <p:spPr>
           <a:xfrm>
-            <a:off x="0" y="0"/>
-            <a:ext cx="12191695" cy="658368"/>
+            <a:off x="411480" y="676656"/>
+            <a:ext cx="11368735" cy="20320"/>
           </a:xfrm>
           <a:prstGeom prst="rect">
             <a:avLst/>
           </a:prstGeom>
           <a:solidFill>
-            <a:srgbClr val="2B6CB0"/>
+            <a:srgbClr val="2171B5"/>
           </a:solidFill>
           <a:ln>
             <a:noFill/>
@@ -11400,25 +11824,16 @@
           </a:fontRef>
         </p:style>
         <p:txBody>
-          <a:bodyPr rtlCol="0" anchor="ctr" lIns="411480" tIns="73152"/>
+          <a:bodyPr rtlCol="0" anchor="ctr"/>
           <a:lstStyle/>
           <a:p>
             <a:pPr algn="ctr"/>
-            <a:r>
-              <a:rPr sz="2200" b="1">
-                <a:solidFill>
-                  <a:srgbClr val="FFFFFF"/>
-                </a:solidFill>
-                <a:latin typeface="Calibri"/>
-              </a:rPr>
-              <a:t>NEW — The exploit survives a principled kernel</a:t>
-            </a:r>
-          </a:p>
-        </p:txBody>
-      </p:sp>
-      <p:sp>
-        <p:nvSpPr>
-          <p:cNvPr id="3" name="TextBox 2"/>
+          </a:p>
+        </p:txBody>
+      </p:sp>
+      <p:sp>
+        <p:nvSpPr>
+          <p:cNvPr id="4" name="TextBox 3"/>
           <p:cNvSpPr txBox="1"/>
           <p:nvPr/>
         </p:nvSpPr>
@@ -11446,18 +11861,18 @@
             <a:r>
               <a:rPr sz="1000">
                 <a:solidFill>
-                  <a:srgbClr val="666666"/>
-                </a:solidFill>
-                <a:latin typeface="Calibri"/>
-              </a:rPr>
-              <a:t>9</a:t>
-            </a:r>
-          </a:p>
-        </p:txBody>
-      </p:sp>
-      <p:sp>
-        <p:nvSpPr>
-          <p:cNvPr id="4" name="TextBox 3"/>
+                  <a:srgbClr val="636363"/>
+                </a:solidFill>
+                <a:latin typeface="Calibri"/>
+              </a:rPr>
+              <a:t>8</a:t>
+            </a:r>
+          </a:p>
+        </p:txBody>
+      </p:sp>
+      <p:sp>
+        <p:nvSpPr>
+          <p:cNvPr id="5" name="TextBox 4"/>
           <p:cNvSpPr txBox="1"/>
           <p:nvPr/>
         </p:nvSpPr>
@@ -11494,7 +11909,7 @@
             <a:r>
               <a:rPr sz="1600" b="1">
                 <a:solidFill>
-                  <a:srgbClr val="2B6CB0"/>
+                  <a:srgbClr val="2171B5"/>
                 </a:solidFill>
                 <a:latin typeface="Calibri"/>
               </a:rPr>
@@ -11528,7 +11943,7 @@
             <a:r>
               <a:rPr sz="1400" b="1">
                 <a:solidFill>
-                  <a:srgbClr val="2B6CB0"/>
+                  <a:srgbClr val="2171B5"/>
                 </a:solidFill>
                 <a:latin typeface="Calibri"/>
               </a:rPr>
@@ -11575,7 +11990,7 @@
       </p:sp>
       <p:sp>
         <p:nvSpPr>
-          <p:cNvPr id="5" name="Rounded Rectangle 4"/>
+          <p:cNvPr id="6" name="Rounded Rectangle 5"/>
           <p:cNvSpPr/>
           <p:nvPr/>
         </p:nvSpPr>
@@ -11590,11 +12005,11 @@
             </a:avLst>
           </a:prstGeom>
           <a:solidFill>
-            <a:srgbClr val="E9F0F9"/>
+            <a:srgbClr val="E4EDF7"/>
           </a:solidFill>
           <a:ln w="9525">
             <a:solidFill>
-              <a:srgbClr val="2B6CB0"/>
+              <a:srgbClr val="2171B5"/>
             </a:solidFill>
           </a:ln>
         </p:spPr>
@@ -11624,7 +12039,7 @@
             <a:r>
               <a:rPr sz="1700" b="1">
                 <a:solidFill>
-                  <a:srgbClr val="2B6CB0"/>
+                  <a:srgbClr val="2171B5"/>
                 </a:solidFill>
                 <a:latin typeface="Calibri"/>
               </a:rPr>
@@ -11638,13 +12053,31 @@
               </a:spcAft>
             </a:pPr>
             <a:r>
+              <a:rPr sz="1600" b="1">
+                <a:solidFill>
+                  <a:srgbClr val="2171B5"/>
+                </a:solidFill>
+                <a:latin typeface="Calibri"/>
+              </a:rPr>
+              <a:t>▪  </a:t>
+            </a:r>
+            <a:r>
               <a:rPr sz="1600">
                 <a:solidFill>
                   <a:srgbClr val="202020"/>
                 </a:solidFill>
                 <a:latin typeface="Calibri"/>
               </a:rPr>
-              <a:t>•  </a:t>
+              <a:t>Euphemistic rewriting flips forbid/avoid → permissive in </a:t>
+            </a:r>
+            <a:r>
+              <a:rPr sz="1600" b="1">
+                <a:solidFill>
+                  <a:srgbClr val="D95F02"/>
+                </a:solidFill>
+                <a:latin typeface="Calibri"/>
+              </a:rPr>
+              <a:t>13.7%</a:t>
             </a:r>
             <a:r>
               <a:rPr sz="1600">
@@ -11653,30 +12086,12 @@
                 </a:solidFill>
                 <a:latin typeface="Calibri"/>
               </a:rPr>
-              <a:t>Euphemistic rewriting flips forbid/avoid → permissive in </a:t>
+              <a:t> of cases; mean shift </a:t>
             </a:r>
             <a:r>
               <a:rPr sz="1600" b="1">
                 <a:solidFill>
-                  <a:srgbClr val="A67500"/>
-                </a:solidFill>
-                <a:latin typeface="Calibri"/>
-              </a:rPr>
-              <a:t>13.7%</a:t>
-            </a:r>
-            <a:r>
-              <a:rPr sz="1600">
-                <a:solidFill>
-                  <a:srgbClr val="202020"/>
-                </a:solidFill>
-                <a:latin typeface="Calibri"/>
-              </a:rPr>
-              <a:t> of cases; mean shift </a:t>
-            </a:r>
-            <a:r>
-              <a:rPr sz="1600" b="1">
-                <a:solidFill>
-                  <a:srgbClr val="A67500"/>
+                  <a:srgbClr val="D95F02"/>
                 </a:solidFill>
                 <a:latin typeface="Calibri"/>
               </a:rPr>
@@ -11699,13 +12114,31 @@
               </a:spcAft>
             </a:pPr>
             <a:r>
+              <a:rPr sz="1600" b="1">
+                <a:solidFill>
+                  <a:srgbClr val="2171B5"/>
+                </a:solidFill>
+                <a:latin typeface="Calibri"/>
+              </a:rPr>
+              <a:t>▪  </a:t>
+            </a:r>
+            <a:r>
               <a:rPr sz="1600">
                 <a:solidFill>
                   <a:srgbClr val="202020"/>
                 </a:solidFill>
                 <a:latin typeface="Calibri"/>
               </a:rPr>
-              <a:t>•  </a:t>
+              <a:t>forbid verdicts fall </a:t>
+            </a:r>
+            <a:r>
+              <a:rPr sz="1600" b="1">
+                <a:solidFill>
+                  <a:srgbClr val="D95F02"/>
+                </a:solidFill>
+                <a:latin typeface="Calibri"/>
+              </a:rPr>
+              <a:t>44 → 27</a:t>
             </a:r>
             <a:r>
               <a:rPr sz="1600">
@@ -11714,24 +12147,6 @@
                 </a:solidFill>
                 <a:latin typeface="Calibri"/>
               </a:rPr>
-              <a:t>forbid verdicts fall </a:t>
-            </a:r>
-            <a:r>
-              <a:rPr sz="1600" b="1">
-                <a:solidFill>
-                  <a:srgbClr val="A67500"/>
-                </a:solidFill>
-                <a:latin typeface="Calibri"/>
-              </a:rPr>
-              <a:t>44 → 27</a:t>
-            </a:r>
-            <a:r>
-              <a:rPr sz="1600">
-                <a:solidFill>
-                  <a:srgbClr val="202020"/>
-                </a:solidFill>
-                <a:latin typeface="Calibri"/>
-              </a:rPr>
               <a:t> (−39%); strongly_prefer rises 46 → 78.</a:t>
             </a:r>
           </a:p>
@@ -11739,7 +12154,7 @@
       </p:sp>
       <p:sp>
         <p:nvSpPr>
-          <p:cNvPr id="6" name="TextBox 5"/>
+          <p:cNvPr id="7" name="TextBox 6"/>
           <p:cNvSpPr txBox="1"/>
           <p:nvPr/>
         </p:nvSpPr>
@@ -11767,7 +12182,7 @@
             <a:r>
               <a:rPr sz="1600" b="1">
                 <a:solidFill>
-                  <a:srgbClr val="A67500"/>
+                  <a:srgbClr val="D95F02"/>
                 </a:solidFill>
                 <a:latin typeface="Calibri"/>
               </a:rPr>
@@ -11799,6 +12214,480 @@
                 <a:latin typeface="Calibri"/>
               </a:rPr>
               <a:t>, not just the rule.</a:t>
+            </a:r>
+          </a:p>
+        </p:txBody>
+      </p:sp>
+    </p:spTree>
+  </p:cSld>
+  <p:clrMapOvr>
+    <a:masterClrMapping/>
+  </p:clrMapOvr>
+</p:sld>
+</file>
+
+<file path=ppt/slides/slide9.xml><?xml version="1.0" encoding="utf-8"?>
+<p:sld xmlns:a="http://schemas.openxmlformats.org/drawingml/2006/main" xmlns:p="http://schemas.openxmlformats.org/presentationml/2006/main" xmlns:r="http://schemas.openxmlformats.org/officeDocument/2006/relationships">
+  <p:cSld>
+    <p:spTree>
+      <p:nvGrpSpPr>
+        <p:cNvPr id="1" name=""/>
+        <p:cNvGrpSpPr/>
+        <p:nvPr/>
+      </p:nvGrpSpPr>
+      <p:grpSpPr/>
+      <p:sp>
+        <p:nvSpPr>
+          <p:cNvPr id="2" name="TextBox 1"/>
+          <p:cNvSpPr txBox="1"/>
+          <p:nvPr/>
+        </p:nvSpPr>
+        <p:spPr>
+          <a:xfrm>
+            <a:off x="411480" y="146304"/>
+            <a:ext cx="11368735" cy="475488"/>
+          </a:xfrm>
+          <a:prstGeom prst="rect">
+            <a:avLst/>
+          </a:prstGeom>
+          <a:noFill/>
+        </p:spPr>
+        <p:txBody>
+          <a:bodyPr wrap="square">
+            <a:spAutoFit/>
+          </a:bodyPr>
+          <a:lstStyle/>
+          <a:p>
+            <a:r>
+              <a:rPr sz="2200" b="1">
+                <a:solidFill>
+                  <a:srgbClr val="1A2340"/>
+                </a:solidFill>
+                <a:latin typeface="Calibri"/>
+              </a:rPr>
+              <a:t>Since submission — a measured defense</a:t>
+            </a:r>
+          </a:p>
+        </p:txBody>
+      </p:sp>
+      <p:sp>
+        <p:nvSpPr>
+          <p:cNvPr id="3" name="Rectangle 2"/>
+          <p:cNvSpPr/>
+          <p:nvPr/>
+        </p:nvSpPr>
+        <p:spPr>
+          <a:xfrm>
+            <a:off x="411480" y="676656"/>
+            <a:ext cx="11368735" cy="20320"/>
+          </a:xfrm>
+          <a:prstGeom prst="rect">
+            <a:avLst/>
+          </a:prstGeom>
+          <a:solidFill>
+            <a:srgbClr val="2171B5"/>
+          </a:solidFill>
+          <a:ln>
+            <a:noFill/>
+          </a:ln>
+        </p:spPr>
+        <p:style>
+          <a:lnRef idx="1">
+            <a:schemeClr val="accent1"/>
+          </a:lnRef>
+          <a:fillRef idx="3">
+            <a:schemeClr val="accent1"/>
+          </a:fillRef>
+          <a:effectRef idx="2">
+            <a:schemeClr val="accent1"/>
+          </a:effectRef>
+          <a:fontRef idx="minor">
+            <a:schemeClr val="lt1"/>
+          </a:fontRef>
+        </p:style>
+        <p:txBody>
+          <a:bodyPr rtlCol="0" anchor="ctr"/>
+          <a:lstStyle/>
+          <a:p>
+            <a:pPr algn="ctr"/>
+          </a:p>
+        </p:txBody>
+      </p:sp>
+      <p:sp>
+        <p:nvSpPr>
+          <p:cNvPr id="4" name="TextBox 3"/>
+          <p:cNvSpPr txBox="1"/>
+          <p:nvPr/>
+        </p:nvSpPr>
+        <p:spPr>
+          <a:xfrm>
+            <a:off x="11368735" y="6473952"/>
+            <a:ext cx="640080" cy="274320"/>
+          </a:xfrm>
+          <a:prstGeom prst="rect">
+            <a:avLst/>
+          </a:prstGeom>
+          <a:noFill/>
+        </p:spPr>
+        <p:txBody>
+          <a:bodyPr wrap="square">
+            <a:spAutoFit/>
+          </a:bodyPr>
+          <a:lstStyle/>
+          <a:p>
+            <a:pPr algn="r">
+              <a:spcAft>
+                <a:spcPts val="600"/>
+              </a:spcAft>
+            </a:pPr>
+            <a:r>
+              <a:rPr sz="1000">
+                <a:solidFill>
+                  <a:srgbClr val="636363"/>
+                </a:solidFill>
+                <a:latin typeface="Calibri"/>
+              </a:rPr>
+              <a:t>9</a:t>
+            </a:r>
+          </a:p>
+        </p:txBody>
+      </p:sp>
+      <p:sp>
+        <p:nvSpPr>
+          <p:cNvPr id="5" name="TextBox 4"/>
+          <p:cNvSpPr txBox="1"/>
+          <p:nvPr/>
+        </p:nvSpPr>
+        <p:spPr>
+          <a:xfrm>
+            <a:off x="502920" y="841248"/>
+            <a:ext cx="11155680" cy="4937760"/>
+          </a:xfrm>
+          <a:prstGeom prst="rect">
+            <a:avLst/>
+          </a:prstGeom>
+          <a:noFill/>
+        </p:spPr>
+        <p:txBody>
+          <a:bodyPr wrap="square">
+            <a:spAutoFit/>
+          </a:bodyPr>
+          <a:lstStyle/>
+          <a:p>
+            <a:pPr algn="l">
+              <a:spcAft>
+                <a:spcPts val="800"/>
+              </a:spcAft>
+            </a:pPr>
+            <a:r>
+              <a:rPr sz="1300">
+                <a:solidFill>
+                  <a:srgbClr val="636363"/>
+                </a:solidFill>
+                <a:latin typeface="Calibri"/>
+              </a:rPr>
+              <a:t>Second instantiation from here on: validated learned encoders (</a:t>
+            </a:r>
+            <a:r>
+              <a:rPr sz="1300">
+                <a:solidFill>
+                  <a:srgbClr val="636363"/>
+                </a:solidFill>
+                <a:latin typeface="Consolas"/>
+              </a:rPr>
+              <a:t>xbse</a:t>
+            </a:r>
+            <a:r>
+              <a:rPr sz="1300">
+                <a:solidFill>
+                  <a:srgbClr val="636363"/>
+                </a:solidFill>
+                <a:latin typeface="Calibri"/>
+              </a:rPr>
+              <a:t>) replace LLM judges; same DEME kernel.</a:t>
+            </a:r>
+          </a:p>
+          <a:p>
+            <a:pPr algn="l">
+              <a:spcAft>
+                <a:spcPts val="1000"/>
+              </a:spcAft>
+            </a:pPr>
+            <a:r>
+              <a:rPr sz="1600" b="1">
+                <a:solidFill>
+                  <a:srgbClr val="202020"/>
+                </a:solidFill>
+                <a:latin typeface="Calibri"/>
+              </a:rPr>
+              <a:t>Equivalence-class averaging</a:t>
+            </a:r>
+            <a:r>
+              <a:rPr sz="1600">
+                <a:solidFill>
+                  <a:srgbClr val="202020"/>
+                </a:solidFill>
+                <a:latin typeface="Calibri"/>
+              </a:rPr>
+              <a:t>: generate the input's paraphrase class (m paraphrases), </a:t>
+            </a:r>
+            <a:r>
+              <a:rPr sz="1600" b="1">
+                <a:solidFill>
+                  <a:srgbClr val="2171B5"/>
+                </a:solidFill>
+                <a:latin typeface="Calibri"/>
+              </a:rPr>
+              <a:t>average per-dimension perception over the class</a:t>
+            </a:r>
+            <a:r>
+              <a:rPr sz="1600">
+                <a:solidFill>
+                  <a:srgbClr val="202020"/>
+                </a:solidFill>
+                <a:latin typeface="Calibri"/>
+              </a:rPr>
+              <a:t>, then decide.</a:t>
+            </a:r>
+          </a:p>
+          <a:p>
+            <a:pPr algn="l">
+              <a:spcAft>
+                <a:spcPts val="1000"/>
+              </a:spcAft>
+            </a:pPr>
+            <a:r>
+              <a:rPr sz="1600" b="1">
+                <a:solidFill>
+                  <a:srgbClr val="2171B5"/>
+                </a:solidFill>
+                <a:latin typeface="Calibri"/>
+              </a:rPr>
+              <a:t>▪  </a:t>
+            </a:r>
+            <a:r>
+              <a:rPr sz="1600">
+                <a:solidFill>
+                  <a:srgbClr val="202020"/>
+                </a:solidFill>
+                <a:latin typeface="Calibri"/>
+              </a:rPr>
+              <a:t>At scale (60 held-out items, m = 6): raw drift </a:t>
+            </a:r>
+            <a:r>
+              <a:rPr sz="1600" b="1">
+                <a:solidFill>
+                  <a:srgbClr val="D95F02"/>
+                </a:solidFill>
+                <a:latin typeface="Calibri"/>
+              </a:rPr>
+              <a:t>0.407 → θₔ = 0.219</a:t>
+            </a:r>
+            <a:r>
+              <a:rPr sz="1600">
+                <a:solidFill>
+                  <a:srgbClr val="202020"/>
+                </a:solidFill>
+                <a:latin typeface="Calibri"/>
+              </a:rPr>
+              <a:t> — the mechanism </a:t>
+            </a:r>
+            <a:r>
+              <a:rPr sz="1600" b="1">
+                <a:solidFill>
+                  <a:srgbClr val="2171B5"/>
+                </a:solidFill>
+                <a:latin typeface="Calibri"/>
+              </a:rPr>
+              <a:t>halves</a:t>
+            </a:r>
+            <a:r>
+              <a:rPr sz="1600">
+                <a:solidFill>
+                  <a:srgbClr val="202020"/>
+                </a:solidFill>
+                <a:latin typeface="Calibri"/>
+              </a:rPr>
+              <a:t> salience drift (θₔ: mean per-dimension decision movement). The registered bar θₔ ≤ 0.5 </a:t>
+            </a:r>
+            <a:r>
+              <a:rPr sz="1600" b="1">
+                <a:solidFill>
+                  <a:srgbClr val="2171B5"/>
+                </a:solidFill>
+                <a:latin typeface="Calibri"/>
+              </a:rPr>
+              <a:t>binds for adversarial-register inputs</a:t>
+            </a:r>
+            <a:r>
+              <a:rPr sz="1600">
+                <a:solidFill>
+                  <a:srgbClr val="202020"/>
+                </a:solidFill>
+                <a:latin typeface="Calibri"/>
+              </a:rPr>
+              <a:t> (raw 0.67–0.85); the defended run there is the registered open item.</a:t>
+            </a:r>
+          </a:p>
+          <a:p>
+            <a:pPr algn="l">
+              <a:spcAft>
+                <a:spcPts val="1000"/>
+              </a:spcAft>
+            </a:pPr>
+            <a:r>
+              <a:rPr sz="1600" b="1">
+                <a:solidFill>
+                  <a:srgbClr val="2171B5"/>
+                </a:solidFill>
+                <a:latin typeface="Calibri"/>
+              </a:rPr>
+              <a:t>▪  </a:t>
+            </a:r>
+            <a:r>
+              <a:rPr sz="1600">
+                <a:solidFill>
+                  <a:srgbClr val="202020"/>
+                </a:solidFill>
+                <a:latin typeface="Calibri"/>
+              </a:rPr>
+              <a:t>LLM paraphrasers </a:t>
+            </a:r>
+            <a:r>
+              <a:rPr sz="1600" b="1">
+                <a:solidFill>
+                  <a:srgbClr val="D95F02"/>
+                </a:solidFill>
+                <a:latin typeface="Calibri"/>
+              </a:rPr>
+              <a:t>refuse 24%</a:t>
+            </a:r>
+            <a:r>
+              <a:rPr sz="1600">
+                <a:solidFill>
+                  <a:srgbClr val="202020"/>
+                </a:solidFill>
+                <a:latin typeface="Calibri"/>
+              </a:rPr>
+              <a:t> of harmful inputs. A non-refusing red-team paraphraser (NLLB back-translation, 6 pivots): </a:t>
+            </a:r>
+            <a:r>
+              <a:rPr sz="1600" b="1">
+                <a:solidFill>
+                  <a:srgbClr val="D95F02"/>
+                </a:solidFill>
+                <a:latin typeface="Calibri"/>
+              </a:rPr>
+              <a:t>θₔ = 0.301</a:t>
+            </a:r>
+            <a:r>
+              <a:rPr sz="1600">
+                <a:solidFill>
+                  <a:srgbClr val="202020"/>
+                </a:solidFill>
+                <a:latin typeface="Calibri"/>
+              </a:rPr>
+              <a:t> on harmful content — the weakness is the </a:t>
+            </a:r>
+            <a:r>
+              <a:rPr sz="1600" b="1">
+                <a:solidFill>
+                  <a:srgbClr val="2171B5"/>
+                </a:solidFill>
+                <a:latin typeface="Calibri"/>
+              </a:rPr>
+              <a:t>generator's</a:t>
+            </a:r>
+            <a:r>
+              <a:rPr sz="1600">
+                <a:solidFill>
+                  <a:srgbClr val="202020"/>
+                </a:solidFill>
+                <a:latin typeface="Calibri"/>
+              </a:rPr>
+              <a:t>, not the mechanism's.</a:t>
+            </a:r>
+          </a:p>
+          <a:p>
+            <a:pPr algn="l">
+              <a:spcAft>
+                <a:spcPts val="600"/>
+              </a:spcAft>
+            </a:pPr>
+            <a:r>
+              <a:rPr sz="1600" b="1">
+                <a:solidFill>
+                  <a:srgbClr val="2171B5"/>
+                </a:solidFill>
+                <a:latin typeface="Calibri"/>
+              </a:rPr>
+              <a:t>▪  </a:t>
+            </a:r>
+            <a:r>
+              <a:rPr sz="1600">
+                <a:solidFill>
+                  <a:srgbClr val="202020"/>
+                </a:solidFill>
+                <a:latin typeface="Calibri"/>
+              </a:rPr>
+              <a:t>Trust boundary: refusal → singleton class → </a:t>
+            </a:r>
+            <a:r>
+              <a:rPr sz="1600" b="1">
+                <a:solidFill>
+                  <a:srgbClr val="2171B5"/>
+                </a:solidFill>
+                <a:latin typeface="Calibri"/>
+              </a:rPr>
+              <a:t>escalate by default</a:t>
+            </a:r>
+            <a:r>
+              <a:rPr sz="1600">
+                <a:solidFill>
+                  <a:srgbClr val="202020"/>
+                </a:solidFill>
+                <a:latin typeface="Calibri"/>
+              </a:rPr>
+              <a:t>; the audit proof records class members.</a:t>
+            </a:r>
+          </a:p>
+        </p:txBody>
+      </p:sp>
+      <p:sp>
+        <p:nvSpPr>
+          <p:cNvPr id="6" name="TextBox 5"/>
+          <p:cNvSpPr txBox="1"/>
+          <p:nvPr/>
+        </p:nvSpPr>
+        <p:spPr>
+          <a:xfrm>
+            <a:off x="502920" y="6291072"/>
+            <a:ext cx="11185855" cy="457200"/>
+          </a:xfrm>
+          <a:prstGeom prst="rect">
+            <a:avLst/>
+          </a:prstGeom>
+          <a:noFill/>
+        </p:spPr>
+        <p:txBody>
+          <a:bodyPr wrap="square">
+            <a:spAutoFit/>
+          </a:bodyPr>
+          <a:lstStyle/>
+          <a:p>
+            <a:pPr algn="l">
+              <a:spcAft>
+                <a:spcPts val="600"/>
+              </a:spcAft>
+            </a:pPr>
+            <a:r>
+              <a:rPr sz="1100">
+                <a:solidFill>
+                  <a:srgbClr val="636363"/>
+                </a:solidFill>
+                <a:latin typeface="Calibri"/>
+              </a:rPr>
+              <a:t>Natural (not adversarial) paraphrases at scale. Post-camera-ready results, July 2026 — extended version in preparation.</a:t>
             </a:r>
           </a:p>
         </p:txBody>

--- a/benchmarks/ieee_bds_2026/SecureAI_Bond_2026_slides.pptx
+++ b/benchmarks/ieee_bds_2026/SecureAI_Bond_2026_slides.pptx
@@ -954,7 +954,7 @@
           <a:p/>
           <a:p>
             <a:r>
-              <a:t>CRITICAL SCOPE (bottom of slide, say it): this is measured on the learned-encoder instantiation (xbse) over moderation corpora — NOT a factor analysis of the judge panel. The 7-D mapping on the right is a TRANSFER HYPOTHESIS. If asked "did you factor-analyze your own panel's 31x7 scores?" — answer: "not yet; that's part of the extended version's native re-run."</a:t>
+              <a:t>SCOPE + THE NEW RESULT (right column, bottom): the bifactor readout is encoder-instantiation; we then factor-analyzed the JUDGE PANEL'S OWN 31x7 score matrix directly. It REPLICATES the general factor: PC1 = 54% of variance (consensus; 53% pooled), and it is the ONLY component surviving Horn's parallel analysis. Per-axis: physical fully specific on the panel too (R^2 ~ 0 — striking agreement with the encoder residual), emotional (0.86) and trust (0.78) most G-laden as predicted; financial and identity DIVERGE across instantiations — recorded, not adjudicated. n=31, so per-axis loadings are coarse; the factor COUNT is the robust claim.</a:t>
             </a:r>
           </a:p>
           <a:p/>
@@ -1352,7 +1352,7 @@
           <a:p/>
           <a:p>
             <a:r>
-              <a:t>Q: You showed ICC 0.97, then a bifactor result saying most axes are one factor — measured on different encoders. Did you factor-analyze the panel's own scores? A: Not yet — the bifactor claim is about the encoder instantiation; the direct panel factor analysis is part of the extended version. The slide's 7-D mapping is the transfer hypothesis, labeled as such.</a:t>
+              <a:t>Q: You showed ICC 0.97, then a bifactor result saying most axes are one factor — measured on different encoders. Did you factor-analyze the panel's own scores? A: Yes — the panel's own 31x7 matrix gives PC1 = 54% of variance, the only component surviving parallel analysis, with physical fully specific there too. The general factor replicates across both instantiations; two per-axis assignments (financial, identity) diverge and are recorded as such.</a:t>
             </a:r>
           </a:p>
           <a:p>
@@ -1367,7 +1367,7 @@
           </a:p>
           <a:p>
             <a:r>
-              <a:t>Q: With averaging on, how many gold items still flip? What does 13.7% become? A: theta_d is per-dimension movement, not a flip rate — the defended verdict-flip table is the pending like-for-like comparison in the extended version. Fair ask.</a:t>
+              <a:t>Q: With averaging on, how many gold items still flip? What does 13.7% become? A: Measured, and it's an honest negative — on the deployed encoder instrument all 3 flagged gold items STILL flip defended (displacement only −17% vs −46% on natural paraphrases). Paraphrases of euphemism stay euphemistic: the class inherits the register, and register is the attack vector. That's why the residual surface is the generator's register diversity and why escalate-by-default is load-bearing. The DEME-instantiation defended-13.7% is the native re-run.</a:t>
             </a:r>
           </a:p>
           <a:p>
@@ -2318,7 +2318,7 @@
           <a:p/>
           <a:p>
             <a:r>
-              <a:t>If asked about adaptive attackers ("paraphrases of euphemism stay euphemistic"): yes — the mechanism works to the extent the generator re-verbalizes across registers; register-diversity measurement is open work; the adaptive attack we identified (starving the generator) is closed by escalate-by-default.</a:t>
+              <a:t>ADAPTIVE ATTACKER — now MEASURED (footer): on the 6 gold adversarial-register rewrites, class averaging reduced displacement only 17% and all 3 flagged items still flipped defended. Paraphrases of euphemism stay euphemistic — the mechanism removes surface variation, not register. Say this proactively if time allows; it is the talk's freshest honest negative and it strengthens the escalate-by-default story. The fix on the roadmap: a class generator that provably crosses registers.</a:t>
             </a:r>
           </a:p>
         </p:txBody>
@@ -5861,7 +5861,7 @@
         <p:spPr>
           <a:xfrm>
             <a:off x="6492240" y="4206240"/>
-            <a:ext cx="5257800" cy="1600200"/>
+            <a:ext cx="5257800" cy="1691640"/>
           </a:xfrm>
           <a:prstGeom prst="rect">
             <a:avLst/>
@@ -5886,16 +5886,16 @@
                 </a:solidFill>
                 <a:latin typeface="Calibri"/>
               </a:rPr>
-              <a:t>Mapped to this talk's 7-D space </a:t>
-            </a:r>
-            <a:r>
-              <a:rPr sz="1300" i="1">
-                <a:solidFill>
-                  <a:srgbClr val="202020"/>
-                </a:solidFill>
-                <a:latin typeface="Calibri"/>
-              </a:rPr>
-              <a:t>(a transfer hypothesis, not a measurement)</a:t>
+              <a:t>And the </a:t>
+            </a:r>
+            <a:r>
+              <a:rPr sz="1300" b="1">
+                <a:solidFill>
+                  <a:srgbClr val="2171B5"/>
+                </a:solidFill>
+                <a:latin typeface="Calibri"/>
+              </a:rPr>
+              <a:t>judge panel's own 31×7 score matrix replicates it</a:t>
             </a:r>
             <a:r>
               <a:rPr sz="1300">
@@ -5904,16 +5904,34 @@
                 </a:solidFill>
                 <a:latin typeface="Calibri"/>
               </a:rPr>
-              <a:t>: </a:t>
+              <a:t>: PC1 = </a:t>
             </a:r>
             <a:r>
               <a:rPr sz="1300" b="1">
                 <a:solidFill>
+                  <a:srgbClr val="D95F02"/>
+                </a:solidFill>
+                <a:latin typeface="Calibri"/>
+              </a:rPr>
+              <a:t>54%</a:t>
+            </a:r>
+            <a:r>
+              <a:rPr sz="1300">
+                <a:solidFill>
+                  <a:srgbClr val="202020"/>
+                </a:solidFill>
+                <a:latin typeface="Calibri"/>
+              </a:rPr>
+              <a:t> of variance, the only component surviving parallel analysis — </a:t>
+            </a:r>
+            <a:r>
+              <a:rPr sz="1300" b="1">
+                <a:solidFill>
                   <a:srgbClr val="2171B5"/>
                 </a:solidFill>
                 <a:latin typeface="Calibri"/>
               </a:rPr>
-              <a:t>social, identity, autonomy</a:t>
+              <a:t>physical</a:t>
             </a:r>
             <a:r>
               <a:rPr sz="1300">
@@ -5922,7 +5940,7 @@
                 </a:solidFill>
                 <a:latin typeface="Calibri"/>
               </a:rPr>
-              <a:t> carry specific signal, </a:t>
+              <a:t> fully specific there too (R² ≈ 0), </a:t>
             </a:r>
             <a:r>
               <a:rPr sz="1300" b="1">
@@ -5931,7 +5949,7 @@
                 </a:solidFill>
                 <a:latin typeface="Calibri"/>
               </a:rPr>
-              <a:t>physical</a:t>
+              <a:t>emotional/trust</a:t>
             </a:r>
             <a:r>
               <a:rPr sz="1300">
@@ -5940,25 +5958,7 @@
                 </a:solidFill>
                 <a:latin typeface="Calibri"/>
               </a:rPr>
-              <a:t> marginally; </a:t>
-            </a:r>
-            <a:r>
-              <a:rPr sz="1300" b="1">
-                <a:solidFill>
-                  <a:srgbClr val="2171B5"/>
-                </a:solidFill>
-                <a:latin typeface="Calibri"/>
-              </a:rPr>
-              <a:t>trust, emotional, financial</a:t>
-            </a:r>
-            <a:r>
-              <a:rPr sz="1300">
-                <a:solidFill>
-                  <a:srgbClr val="202020"/>
-                </a:solidFill>
-                <a:latin typeface="Calibri"/>
-              </a:rPr>
-              <a:t> are mostly carried by G.</a:t>
+              <a:t> most G-laden; financial and identity diverge across instantiations.</a:t>
             </a:r>
           </a:p>
         </p:txBody>
@@ -5997,7 +5997,7 @@
                 </a:solidFill>
                 <a:latin typeface="Calibri"/>
               </a:rPr>
-              <a:t>Measured on the learned-encoder instantiation (</a:t>
+              <a:t>Bifactor: learned-encoder instantiation (</a:t>
             </a:r>
             <a:r>
               <a:rPr sz="1000">
@@ -6015,7 +6015,7 @@
                 </a:solidFill>
                 <a:latin typeface="Calibri"/>
               </a:rPr>
-              <a:t>) over moderation corpora — not a factor analysis of the judge panel. 12×12 specificity gate, margin 0.05; the gate-vs-residualization divergence on identity_attack is recorded, not adjudicated. July 2026.</a:t>
+              <a:t>), 12×12 gate at margin 0.05; identity_attack divergence recorded, not adjudicated. Panel FA: 6 models × 3 reps consensus, Horn's parallel analysis, n=31 (loadings coarse; the factor count is the robust part). July 2026.</a:t>
             </a:r>
           </a:p>
         </p:txBody>
@@ -12681,13 +12681,31 @@
               </a:spcAft>
             </a:pPr>
             <a:r>
-              <a:rPr sz="1100">
+              <a:rPr sz="1000">
                 <a:solidFill>
                   <a:srgbClr val="636363"/>
                 </a:solidFill>
                 <a:latin typeface="Calibri"/>
               </a:rPr>
-              <a:t>Natural (not adversarial) paraphrases at scale. Post-camera-ready results, July 2026 — extended version in preparation.</a:t>
+              <a:t>Natural (not adversarial) paraphrases at scale. Gold-set decision translation (measured negative, n=6): adversarial-register rewrites still flip </a:t>
+            </a:r>
+            <a:r>
+              <a:rPr sz="1000" b="1">
+                <a:solidFill>
+                  <a:srgbClr val="D95F02"/>
+                </a:solidFill>
+                <a:latin typeface="Calibri"/>
+              </a:rPr>
+              <a:t>3/3</a:t>
+            </a:r>
+            <a:r>
+              <a:rPr sz="1000">
+                <a:solidFill>
+                  <a:srgbClr val="636363"/>
+                </a:solidFill>
+                <a:latin typeface="Calibri"/>
+              </a:rPr>
+              <a:t> flagged items defended, displacement −17% — paraphrases of euphemism stay euphemistic; the register gap is the live surface, and escalation carries it. July 2026.</a:t>
             </a:r>
           </a:p>
         </p:txBody>

--- a/benchmarks/ieee_bds_2026/SecureAI_Bond_2026_slides.pptx
+++ b/benchmarks/ieee_bds_2026/SecureAI_Bond_2026_slides.pptx
@@ -960,6 +960,12 @@
           <a:p/>
           <a:p>
             <a:r>
+              <a:t>ROBUSTNESS (if pressed "is that just aggregation?"): run separately on each judge's own 31x7 matrix, ALL SIX models keep exactly one factor (PC1 51-60%), and each model's PC1 is the SAME factor as the consensus — Tucker congruence 0.989-0.999, above the 0.95 factor-equality convention. The general factor lives inside every judge, not just in the average.</a:t>
+            </a:r>
+          </a:p>
+          <a:p/>
+          <a:p>
+            <a:r>
               <a:t>RESULTS: a general moral-valence channel G is real and strong (cross-dataset AUROC 0.856, n=51k). Five named axes — purity, legitimacy, loyalty, care, fairness — are &gt;=0.98 predictable from G on independent corpora: their gate-passing transfer is general valence, not their named dimension. The 12x12 specificity gate confirms it independently: specific = environmental, privacy, identity_attack, autonomy, physical(+.08, marginal); demoted = the rest. The pre-registered P1 FAILED (4/11 diagonal-dominant vs required 8) — we publish the failure.</a:t>
             </a:r>
           </a:p>
@@ -6015,7 +6021,7 @@
                 </a:solidFill>
                 <a:latin typeface="Calibri"/>
               </a:rPr>
-              <a:t>), 12×12 gate at margin 0.05; identity_attack divergence recorded, not adjudicated. Panel FA: 6 models × 3 reps consensus, Horn's parallel analysis, n=31 (loadings coarse; the factor count is the robust part). July 2026.</a:t>
+              <a:t>), 12×12 gate at margin 0.05; identity_attack divergence recorded, not adjudicated. Panel FA: Horn's parallel analysis, n=31; per-judge FAs agree — one factor in all six models (PC1 0.51–0.60), Tucker congruence 0.989–0.999 vs consensus. July 2026.</a:t>
             </a:r>
           </a:p>
         </p:txBody>

--- a/benchmarks/ieee_bds_2026/SecureAI_Bond_2026_slides.pptx
+++ b/benchmarks/ieee_bds_2026/SecureAI_Bond_2026_slides.pptx
@@ -2294,37 +2294,53 @@
           <a:lstStyle/>
           <a:p>
             <a:r>
-              <a:t>FRAMING — say explicitly: "from here to slide 10, results are post-camera-ready, from the extended version in preparation." ALSO say the instantiation line at the top: these results are measured on a SECOND INSTANTIATION of the same geometry — validated learned encoders (xbse) replacing LLM judges, feeding the same DEME kernel. Do not let the audience think the LLM judges were re-measured.</a:t>
+              <a:t>THIS SLIDE HAS FOUR IDEAS — walk them in order, slowly. The audience gets lost here if the instrument switch and the "halves drift BUT items still flip" tension are not resolved out loud.</a:t>
             </a:r>
           </a:p>
           <a:p/>
           <a:p>
             <a:r>
-              <a:t>THE IDEA: a single wording is one arbitrary member of an equivalence class of morally identical texts. Judge the CLASS: generate m paraphrases, average per-dimension perception over the class, then decide. (For ML folks: semantic randomized smoothing / SmoothLLM with meaning-preserving paraphrases — but NO formal certificate; the guarantee is empirical.)</a:t>
+              <a:t>STEP 0 — THE TRANSITION (say this first, near-verbatim): "Everything you've seen so far measured LLM judges. From this slide on we switch to a second instrument: small validated encoders — the xbse library — measuring the same harm geometry and feeding the same decision kernel. Same coordinates, different sensor." Pause here. If they miss this switch, nothing after it makes sense. These are post-camera-ready results.</a:t>
             </a:r>
           </a:p>
           <a:p/>
           <a:p>
             <a:r>
-              <a:t>NUMBERS: theta_d = mean per-dimension decision movement under re-description (defined on the slide). At scale: raw 0.407 -&gt; 0.219 = HALVED. IMPORTANT REFRAME (a sharp listener will catch it): raw natural-paraphrase drift is ALREADY below the 0.5 bar — the bar binds for ADVERSARIAL-register inputs (raw 0.67-0.85), where the defended run is the registered open item. So the claim to make is the HALVING, not "meets the bar."</a:t>
+              <a:t>STEP 1 — THE IDEA, plain words: "Any single wording is just one way of describing a situation. So don't judge the wording — judge the situation: generate six rewordings, score them all, average, THEN decide." If faces are blank: it's like asking a question six different ways and averaging the answers. (For the ML crowd: semantic randomized smoothing / SmoothLLM with paraphrases — but say plainly there is NO formal certificate; the guarantee is empirical.)</a:t>
             </a:r>
           </a:p>
           <a:p/>
           <a:p>
             <a:r>
-              <a:t>RED-TEAM: LLM paraphrasers refuse 24% of harmful inputs. NLLB back-translation (6 pivots) refuses nothing: theta_d = 0.301 on harmful content. The hole belongs to the GENERATOR, not the mechanism.</a:t>
+              <a:t>STEP 2 — WHAT IT BUYS, one number: on natural rewordings of 60 held-out items, decision movement drops 0.407 -&gt; 0.219 — HALVED. Define theta_d in one breath: "theta_d just measures how far the final decision moves when the input is reworded; zero = perfectly invariant." Don't dwell on the bar clause; if asked why "meets the 0.5 bar" isn't the headline: natural rewording was already under the bar, so the honest claim is the halving — the bar only matters for adversarial rewrites.</a:t>
             </a:r>
           </a:p>
           <a:p/>
           <a:p>
             <a:r>
-              <a:t>Deployment rule: refusal -&gt; singleton class -&gt; ESCALATE by default; audit proof records class member hashes.</a:t>
+              <a:t>STEP 3 — WHERE IT FAILS. Both failures belong to the paraphrase GENERATOR, not to the averaging:</a:t>
+            </a:r>
+          </a:p>
+          <a:p>
+            <a:r>
+              <a:t>(a) Refusal: LLM paraphrasers refuse 24% of harmful inputs — exactly the content that matters. A back-translation red-team that refuses nothing gets theta_d = 0.301 on harmful content, so refusal is a generator property. Deployment rule: refusal -&gt; single-member class -&gt; ESCALATE to a human, always.</a:t>
+            </a:r>
+          </a:p>
+          <a:p>
+            <a:r>
+              <a:t>(b) Register — the footer, and THE tension to resolve out loud: "You may notice the footer seems to contradict what I just said: on the six hand-crafted euphemistic attacks, averaging trimmed movement only 17%, and every flagged item still slipped past the threshold. No contradiction — different input classes. The halving is on NATURAL rewordings. Against a deliberate euphemism, the paraphraser produces paraphrases OF the euphemism — polite versions of a polite lie. The average stays polite. The attack survives." That line — "polite versions of a polite lie" — is the one they'll remember; use it.</a:t>
             </a:r>
           </a:p>
           <a:p/>
           <a:p>
             <a:r>
-              <a:t>ADAPTIVE ATTACKER — now MEASURED (footer): on the 6 gold adversarial-register rewrites, class averaging reduced displacement only 17% and all 3 flagged items still flipped defended. Paraphrases of euphemism stay euphemistic — the mechanism removes surface variation, not register. Say this proactively if time allows; it is the talk's freshest honest negative and it strengthens the escalate-by-default story. The fix on the roadmap: a class generator that provably crosses registers.</a:t>
+              <a:t>STEP 4 — THE LESSON (closes the slide, hands off to implications): "So the mechanism works exactly as far as the generator's diversity reaches — which puts the generator inside the trust boundary. The roadmap fix is a generator that provably crosses registers; until it exists, escalation carries the load, and the audit trail records every class member." Measuring the failure this precisely IS the contribution.</a:t>
+            </a:r>
+          </a:p>
+          <a:p/>
+          <a:p>
+            <a:r>
+              <a:t>(Adaptive-attacker and bar-circularity questions are pre-answered in the slide-14 Q&amp;A note.)</a:t>
             </a:r>
           </a:p>
         </p:txBody>

--- a/benchmarks/ieee_bds_2026/SecureAI_Bond_2026_slides.pptx
+++ b/benchmarks/ieee_bds_2026/SecureAI_Bond_2026_slides.pptx
@@ -9141,7 +9141,7 @@
         <p:spPr>
           <a:xfrm>
             <a:off x="502920" y="914400"/>
-            <a:ext cx="11155680" cy="2651760"/>
+            <a:ext cx="6583680" cy="2926080"/>
           </a:xfrm>
           <a:prstGeom prst="rect">
             <a:avLst/>
@@ -9160,7 +9160,7 @@
               </a:spcAft>
             </a:pPr>
             <a:r>
-              <a:rPr sz="1700" b="1">
+              <a:rPr sz="1500" b="1">
                 <a:solidFill>
                   <a:srgbClr val="2171B5"/>
                 </a:solidFill>
@@ -9169,7 +9169,7 @@
               <a:t>▪  </a:t>
             </a:r>
             <a:r>
-              <a:rPr sz="1700">
+              <a:rPr sz="1500">
                 <a:solidFill>
                   <a:srgbClr val="202020"/>
                 </a:solidFill>
@@ -9178,7 +9178,7 @@
               <a:t>LLMs increasingly gate </a:t>
             </a:r>
             <a:r>
-              <a:rPr sz="1700" b="1">
+              <a:rPr sz="1500" b="1">
                 <a:solidFill>
                   <a:srgbClr val="2171B5"/>
                 </a:solidFill>
@@ -9187,7 +9187,7 @@
               <a:t>safety-critical decisions</a:t>
             </a:r>
             <a:r>
-              <a:rPr sz="1700">
+              <a:rPr sz="1500">
                 <a:solidFill>
                   <a:srgbClr val="202020"/>
                 </a:solidFill>
@@ -9203,7 +9203,7 @@
               </a:spcAft>
             </a:pPr>
             <a:r>
-              <a:rPr sz="1700" b="1">
+              <a:rPr sz="1500" b="1">
                 <a:solidFill>
                   <a:srgbClr val="2171B5"/>
                 </a:solidFill>
@@ -9212,7 +9212,7 @@
               <a:t>▪  </a:t>
             </a:r>
             <a:r>
-              <a:rPr sz="1700">
+              <a:rPr sz="1500">
                 <a:solidFill>
                   <a:srgbClr val="202020"/>
                 </a:solidFill>
@@ -9221,7 +9221,7 @@
               <a:t>A secure evaluator should judge the </a:t>
             </a:r>
             <a:r>
-              <a:rPr sz="1700" b="1">
+              <a:rPr sz="1500" b="1">
                 <a:solidFill>
                   <a:srgbClr val="2171B5"/>
                 </a:solidFill>
@@ -9230,7 +9230,7 @@
               <a:t>facts</a:t>
             </a:r>
             <a:r>
-              <a:rPr sz="1700">
+              <a:rPr sz="1500">
                 <a:solidFill>
                   <a:srgbClr val="202020"/>
                 </a:solidFill>
@@ -9239,7 +9239,7 @@
               <a:t>, not their </a:t>
             </a:r>
             <a:r>
-              <a:rPr sz="1700" b="1">
+              <a:rPr sz="1500" b="1">
                 <a:solidFill>
                   <a:srgbClr val="2171B5"/>
                 </a:solidFill>
@@ -9248,7 +9248,7 @@
               <a:t>presentation</a:t>
             </a:r>
             <a:r>
-              <a:rPr sz="1700">
+              <a:rPr sz="1500">
                 <a:solidFill>
                   <a:srgbClr val="202020"/>
                 </a:solidFill>
@@ -9264,7 +9264,7 @@
               </a:spcAft>
             </a:pPr>
             <a:r>
-              <a:rPr sz="1700" b="1">
+              <a:rPr sz="1500" b="1">
                 <a:solidFill>
                   <a:srgbClr val="2171B5"/>
                 </a:solidFill>
@@ -9273,7 +9273,7 @@
               <a:t>▪  </a:t>
             </a:r>
             <a:r>
-              <a:rPr sz="1700" b="1">
+              <a:rPr sz="1500" b="1">
                 <a:solidFill>
                   <a:srgbClr val="D95F02"/>
                 </a:solidFill>
@@ -9282,16 +9282,16 @@
               <a:t>Behavioral manipulation vulnerability</a:t>
             </a:r>
             <a:r>
-              <a:rPr sz="1700">
-                <a:solidFill>
-                  <a:srgbClr val="202020"/>
-                </a:solidFill>
-                <a:latin typeface="Calibri"/>
-              </a:rPr>
-              <a:t>: an attacker shifts the decision by changing morally </a:t>
-            </a:r>
-            <a:r>
-              <a:rPr sz="1700" i="1">
+              <a:rPr sz="1500">
+                <a:solidFill>
+                  <a:srgbClr val="202020"/>
+                </a:solidFill>
+                <a:latin typeface="Calibri"/>
+              </a:rPr>
+              <a:t>: the attacker changes morally </a:t>
+            </a:r>
+            <a:r>
+              <a:rPr sz="1500" i="1">
                 <a:solidFill>
                   <a:srgbClr val="202020"/>
                 </a:solidFill>
@@ -9300,13 +9300,13 @@
               <a:t>irrelevant</a:t>
             </a:r>
             <a:r>
-              <a:rPr sz="1700">
-                <a:solidFill>
-                  <a:srgbClr val="202020"/>
-                </a:solidFill>
-                <a:latin typeface="Calibri"/>
-              </a:rPr>
-              <a:t> surface features — framing, tone, sensory detail — without changing the underlying situation.</a:t>
+              <a:rPr sz="1500">
+                <a:solidFill>
+                  <a:srgbClr val="202020"/>
+                </a:solidFill>
+                <a:latin typeface="Calibri"/>
+              </a:rPr>
+              <a:t> surface features — framing, tone, sensory detail — never the underlying situation.</a:t>
             </a:r>
           </a:p>
         </p:txBody>
@@ -9314,6 +9314,509 @@
       <p:sp>
         <p:nvSpPr>
           <p:cNvPr id="6" name="Rounded Rectangle 5"/>
+          <p:cNvSpPr/>
+          <p:nvPr/>
+        </p:nvSpPr>
+        <p:spPr>
+          <a:xfrm>
+            <a:off x="8366760" y="868680"/>
+            <a:ext cx="2377440" cy="411480"/>
+          </a:xfrm>
+          <a:prstGeom prst="roundRect">
+            <a:avLst>
+              <a:gd name="adj" fmla="val 10000"/>
+            </a:avLst>
+          </a:prstGeom>
+          <a:solidFill>
+            <a:srgbClr val="F3F3F3"/>
+          </a:solidFill>
+          <a:ln w="15240">
+            <a:solidFill>
+              <a:srgbClr val="1A2340"/>
+            </a:solidFill>
+          </a:ln>
+        </p:spPr>
+        <p:style>
+          <a:lnRef idx="1">
+            <a:schemeClr val="accent1"/>
+          </a:lnRef>
+          <a:fillRef idx="3">
+            <a:schemeClr val="accent1"/>
+          </a:fillRef>
+          <a:effectRef idx="2">
+            <a:schemeClr val="accent1"/>
+          </a:effectRef>
+          <a:fontRef idx="minor">
+            <a:schemeClr val="lt1"/>
+          </a:fontRef>
+        </p:style>
+        <p:txBody>
+          <a:bodyPr rtlCol="0" anchor="ctr" wrap="square" lIns="27432" rIns="27432" tIns="18288" bIns="18288"/>
+          <a:lstStyle/>
+          <a:p>
+            <a:pPr algn="ctr"/>
+            <a:r>
+              <a:rPr sz="1100" b="1">
+                <a:solidFill>
+                  <a:srgbClr val="202020"/>
+                </a:solidFill>
+                <a:latin typeface="Calibri"/>
+              </a:rPr>
+              <a:t>the same facts</a:t>
+            </a:r>
+          </a:p>
+        </p:txBody>
+      </p:sp>
+      <p:sp>
+        <p:nvSpPr>
+          <p:cNvPr id="7" name="Down Arrow 6"/>
+          <p:cNvSpPr/>
+          <p:nvPr/>
+        </p:nvSpPr>
+        <p:spPr>
+          <a:xfrm>
+            <a:off x="8549640" y="1335024"/>
+            <a:ext cx="146304" cy="292608"/>
+          </a:xfrm>
+          <a:prstGeom prst="downArrow">
+            <a:avLst>
+              <a:gd name="adj1" fmla="val 55000"/>
+              <a:gd name="adj2" fmla="val 55000"/>
+            </a:avLst>
+          </a:prstGeom>
+          <a:solidFill>
+            <a:srgbClr val="636363"/>
+          </a:solidFill>
+          <a:ln>
+            <a:noFill/>
+          </a:ln>
+        </p:spPr>
+        <p:style>
+          <a:lnRef idx="1">
+            <a:schemeClr val="accent1"/>
+          </a:lnRef>
+          <a:fillRef idx="3">
+            <a:schemeClr val="accent1"/>
+          </a:fillRef>
+          <a:effectRef idx="2">
+            <a:schemeClr val="accent1"/>
+          </a:effectRef>
+          <a:fontRef idx="minor">
+            <a:schemeClr val="lt1"/>
+          </a:fontRef>
+        </p:style>
+        <p:txBody>
+          <a:bodyPr rtlCol="0" anchor="ctr"/>
+          <a:lstStyle/>
+          <a:p>
+            <a:pPr algn="ctr"/>
+          </a:p>
+        </p:txBody>
+      </p:sp>
+      <p:sp>
+        <p:nvSpPr>
+          <p:cNvPr id="8" name="Down Arrow 7"/>
+          <p:cNvSpPr/>
+          <p:nvPr/>
+        </p:nvSpPr>
+        <p:spPr>
+          <a:xfrm>
+            <a:off x="10561320" y="1335024"/>
+            <a:ext cx="146304" cy="292608"/>
+          </a:xfrm>
+          <a:prstGeom prst="downArrow">
+            <a:avLst>
+              <a:gd name="adj1" fmla="val 55000"/>
+              <a:gd name="adj2" fmla="val 55000"/>
+            </a:avLst>
+          </a:prstGeom>
+          <a:solidFill>
+            <a:srgbClr val="636363"/>
+          </a:solidFill>
+          <a:ln>
+            <a:noFill/>
+          </a:ln>
+        </p:spPr>
+        <p:style>
+          <a:lnRef idx="1">
+            <a:schemeClr val="accent1"/>
+          </a:lnRef>
+          <a:fillRef idx="3">
+            <a:schemeClr val="accent1"/>
+          </a:fillRef>
+          <a:effectRef idx="2">
+            <a:schemeClr val="accent1"/>
+          </a:effectRef>
+          <a:fontRef idx="minor">
+            <a:schemeClr val="lt1"/>
+          </a:fontRef>
+        </p:style>
+        <p:txBody>
+          <a:bodyPr rtlCol="0" anchor="ctr"/>
+          <a:lstStyle/>
+          <a:p>
+            <a:pPr algn="ctr"/>
+          </a:p>
+        </p:txBody>
+      </p:sp>
+      <p:sp>
+        <p:nvSpPr>
+          <p:cNvPr id="9" name="Rounded Rectangle 8"/>
+          <p:cNvSpPr/>
+          <p:nvPr/>
+        </p:nvSpPr>
+        <p:spPr>
+          <a:xfrm>
+            <a:off x="7543800" y="1691640"/>
+            <a:ext cx="1965960" cy="457200"/>
+          </a:xfrm>
+          <a:prstGeom prst="roundRect">
+            <a:avLst>
+              <a:gd name="adj" fmla="val 10000"/>
+            </a:avLst>
+          </a:prstGeom>
+          <a:solidFill>
+            <a:srgbClr val="FFFFFF"/>
+          </a:solidFill>
+          <a:ln w="15240">
+            <a:solidFill>
+              <a:srgbClr val="636363"/>
+            </a:solidFill>
+          </a:ln>
+        </p:spPr>
+        <p:style>
+          <a:lnRef idx="1">
+            <a:schemeClr val="accent1"/>
+          </a:lnRef>
+          <a:fillRef idx="3">
+            <a:schemeClr val="accent1"/>
+          </a:fillRef>
+          <a:effectRef idx="2">
+            <a:schemeClr val="accent1"/>
+          </a:effectRef>
+          <a:fontRef idx="minor">
+            <a:schemeClr val="lt1"/>
+          </a:fontRef>
+        </p:style>
+        <p:txBody>
+          <a:bodyPr rtlCol="0" anchor="ctr" wrap="square" lIns="27432" rIns="27432" tIns="18288" bIns="18288"/>
+          <a:lstStyle/>
+          <a:p>
+            <a:pPr algn="ctr"/>
+            <a:r>
+              <a:rPr sz="1000">
+                <a:solidFill>
+                  <a:srgbClr val="202020"/>
+                </a:solidFill>
+                <a:latin typeface="Calibri"/>
+              </a:rPr>
+              <a:t>stated plainly</a:t>
+            </a:r>
+          </a:p>
+        </p:txBody>
+      </p:sp>
+      <p:sp>
+        <p:nvSpPr>
+          <p:cNvPr id="10" name="Rounded Rectangle 9"/>
+          <p:cNvSpPr/>
+          <p:nvPr/>
+        </p:nvSpPr>
+        <p:spPr>
+          <a:xfrm>
+            <a:off x="9738360" y="1691640"/>
+            <a:ext cx="1965960" cy="457200"/>
+          </a:xfrm>
+          <a:prstGeom prst="roundRect">
+            <a:avLst>
+              <a:gd name="adj" fmla="val 10000"/>
+            </a:avLst>
+          </a:prstGeom>
+          <a:solidFill>
+            <a:srgbClr val="FFFFFF"/>
+          </a:solidFill>
+          <a:ln w="15240">
+            <a:solidFill>
+              <a:srgbClr val="636363"/>
+            </a:solidFill>
+          </a:ln>
+        </p:spPr>
+        <p:style>
+          <a:lnRef idx="1">
+            <a:schemeClr val="accent1"/>
+          </a:lnRef>
+          <a:fillRef idx="3">
+            <a:schemeClr val="accent1"/>
+          </a:fillRef>
+          <a:effectRef idx="2">
+            <a:schemeClr val="accent1"/>
+          </a:effectRef>
+          <a:fontRef idx="minor">
+            <a:schemeClr val="lt1"/>
+          </a:fontRef>
+        </p:style>
+        <p:txBody>
+          <a:bodyPr rtlCol="0" anchor="ctr" wrap="square" lIns="27432" rIns="27432" tIns="18288" bIns="18288"/>
+          <a:lstStyle/>
+          <a:p>
+            <a:pPr algn="ctr"/>
+            <a:r>
+              <a:rPr sz="1000">
+                <a:solidFill>
+                  <a:srgbClr val="202020"/>
+                </a:solidFill>
+                <a:latin typeface="Calibri"/>
+              </a:rPr>
+              <a:t>euphemistic rewording</a:t>
+            </a:r>
+          </a:p>
+        </p:txBody>
+      </p:sp>
+      <p:sp>
+        <p:nvSpPr>
+          <p:cNvPr id="11" name="Down Arrow 10"/>
+          <p:cNvSpPr/>
+          <p:nvPr/>
+        </p:nvSpPr>
+        <p:spPr>
+          <a:xfrm>
+            <a:off x="8430768" y="2212848"/>
+            <a:ext cx="146304" cy="292608"/>
+          </a:xfrm>
+          <a:prstGeom prst="downArrow">
+            <a:avLst>
+              <a:gd name="adj1" fmla="val 55000"/>
+              <a:gd name="adj2" fmla="val 55000"/>
+            </a:avLst>
+          </a:prstGeom>
+          <a:solidFill>
+            <a:srgbClr val="636363"/>
+          </a:solidFill>
+          <a:ln>
+            <a:noFill/>
+          </a:ln>
+        </p:spPr>
+        <p:style>
+          <a:lnRef idx="1">
+            <a:schemeClr val="accent1"/>
+          </a:lnRef>
+          <a:fillRef idx="3">
+            <a:schemeClr val="accent1"/>
+          </a:fillRef>
+          <a:effectRef idx="2">
+            <a:schemeClr val="accent1"/>
+          </a:effectRef>
+          <a:fontRef idx="minor">
+            <a:schemeClr val="lt1"/>
+          </a:fontRef>
+        </p:style>
+        <p:txBody>
+          <a:bodyPr rtlCol="0" anchor="ctr"/>
+          <a:lstStyle/>
+          <a:p>
+            <a:pPr algn="ctr"/>
+          </a:p>
+        </p:txBody>
+      </p:sp>
+      <p:sp>
+        <p:nvSpPr>
+          <p:cNvPr id="12" name="Down Arrow 11"/>
+          <p:cNvSpPr/>
+          <p:nvPr/>
+        </p:nvSpPr>
+        <p:spPr>
+          <a:xfrm>
+            <a:off x="10625328" y="2212848"/>
+            <a:ext cx="146304" cy="292608"/>
+          </a:xfrm>
+          <a:prstGeom prst="downArrow">
+            <a:avLst>
+              <a:gd name="adj1" fmla="val 55000"/>
+              <a:gd name="adj2" fmla="val 55000"/>
+            </a:avLst>
+          </a:prstGeom>
+          <a:solidFill>
+            <a:srgbClr val="636363"/>
+          </a:solidFill>
+          <a:ln>
+            <a:noFill/>
+          </a:ln>
+        </p:spPr>
+        <p:style>
+          <a:lnRef idx="1">
+            <a:schemeClr val="accent1"/>
+          </a:lnRef>
+          <a:fillRef idx="3">
+            <a:schemeClr val="accent1"/>
+          </a:fillRef>
+          <a:effectRef idx="2">
+            <a:schemeClr val="accent1"/>
+          </a:effectRef>
+          <a:fontRef idx="minor">
+            <a:schemeClr val="lt1"/>
+          </a:fontRef>
+        </p:style>
+        <p:txBody>
+          <a:bodyPr rtlCol="0" anchor="ctr"/>
+          <a:lstStyle/>
+          <a:p>
+            <a:pPr algn="ctr"/>
+          </a:p>
+        </p:txBody>
+      </p:sp>
+      <p:sp>
+        <p:nvSpPr>
+          <p:cNvPr id="13" name="Rounded Rectangle 12"/>
+          <p:cNvSpPr/>
+          <p:nvPr/>
+        </p:nvSpPr>
+        <p:spPr>
+          <a:xfrm>
+            <a:off x="8001000" y="2578608"/>
+            <a:ext cx="960120" cy="384048"/>
+          </a:xfrm>
+          <a:prstGeom prst="roundRect">
+            <a:avLst>
+              <a:gd name="adj" fmla="val 10000"/>
+            </a:avLst>
+          </a:prstGeom>
+          <a:solidFill>
+            <a:srgbClr val="FFFFFF"/>
+          </a:solidFill>
+          <a:ln w="15240">
+            <a:solidFill>
+              <a:srgbClr val="2171B5"/>
+            </a:solidFill>
+          </a:ln>
+        </p:spPr>
+        <p:style>
+          <a:lnRef idx="1">
+            <a:schemeClr val="accent1"/>
+          </a:lnRef>
+          <a:fillRef idx="3">
+            <a:schemeClr val="accent1"/>
+          </a:fillRef>
+          <a:effectRef idx="2">
+            <a:schemeClr val="accent1"/>
+          </a:effectRef>
+          <a:fontRef idx="minor">
+            <a:schemeClr val="lt1"/>
+          </a:fontRef>
+        </p:style>
+        <p:txBody>
+          <a:bodyPr rtlCol="0" anchor="ctr" wrap="square" lIns="27432" rIns="27432" tIns="18288" bIns="18288"/>
+          <a:lstStyle/>
+          <a:p>
+            <a:pPr algn="ctr"/>
+            <a:r>
+              <a:rPr sz="1100" b="1">
+                <a:solidFill>
+                  <a:srgbClr val="2171B5"/>
+                </a:solidFill>
+                <a:latin typeface="Calibri"/>
+              </a:rPr>
+              <a:t>FLAG</a:t>
+            </a:r>
+          </a:p>
+        </p:txBody>
+      </p:sp>
+      <p:sp>
+        <p:nvSpPr>
+          <p:cNvPr id="14" name="Rounded Rectangle 13"/>
+          <p:cNvSpPr/>
+          <p:nvPr/>
+        </p:nvSpPr>
+        <p:spPr>
+          <a:xfrm>
+            <a:off x="10195560" y="2578608"/>
+            <a:ext cx="960120" cy="384048"/>
+          </a:xfrm>
+          <a:prstGeom prst="roundRect">
+            <a:avLst>
+              <a:gd name="adj" fmla="val 10000"/>
+            </a:avLst>
+          </a:prstGeom>
+          <a:solidFill>
+            <a:srgbClr val="FFFFFF"/>
+          </a:solidFill>
+          <a:ln w="15240">
+            <a:solidFill>
+              <a:srgbClr val="D95F02"/>
+            </a:solidFill>
+          </a:ln>
+        </p:spPr>
+        <p:style>
+          <a:lnRef idx="1">
+            <a:schemeClr val="accent1"/>
+          </a:lnRef>
+          <a:fillRef idx="3">
+            <a:schemeClr val="accent1"/>
+          </a:fillRef>
+          <a:effectRef idx="2">
+            <a:schemeClr val="accent1"/>
+          </a:effectRef>
+          <a:fontRef idx="minor">
+            <a:schemeClr val="lt1"/>
+          </a:fontRef>
+        </p:style>
+        <p:txBody>
+          <a:bodyPr rtlCol="0" anchor="ctr" wrap="square" lIns="27432" rIns="27432" tIns="18288" bIns="18288"/>
+          <a:lstStyle/>
+          <a:p>
+            <a:pPr algn="ctr"/>
+            <a:r>
+              <a:rPr sz="1100" b="1">
+                <a:solidFill>
+                  <a:srgbClr val="D95F02"/>
+                </a:solidFill>
+                <a:latin typeface="Calibri"/>
+              </a:rPr>
+              <a:t>PASS</a:t>
+            </a:r>
+          </a:p>
+        </p:txBody>
+      </p:sp>
+      <p:sp>
+        <p:nvSpPr>
+          <p:cNvPr id="15" name="TextBox 14"/>
+          <p:cNvSpPr txBox="1"/>
+          <p:nvPr/>
+        </p:nvSpPr>
+        <p:spPr>
+          <a:xfrm>
+            <a:off x="7360920" y="3063240"/>
+            <a:ext cx="4480560" cy="594360"/>
+          </a:xfrm>
+          <a:prstGeom prst="rect">
+            <a:avLst/>
+          </a:prstGeom>
+          <a:noFill/>
+        </p:spPr>
+        <p:txBody>
+          <a:bodyPr wrap="square">
+            <a:spAutoFit/>
+          </a:bodyPr>
+          <a:lstStyle/>
+          <a:p>
+            <a:pPr algn="ctr">
+              <a:spcAft>
+                <a:spcPts val="600"/>
+              </a:spcAft>
+            </a:pPr>
+            <a:r>
+              <a:rPr sz="1000">
+                <a:solidFill>
+                  <a:srgbClr val="636363"/>
+                </a:solidFill>
+                <a:latin typeface="Calibri"/>
+              </a:rPr>
+              <a:t>same situation — different verdict: the wording is an attack surface</a:t>
+            </a:r>
+          </a:p>
+        </p:txBody>
+      </p:sp>
+      <p:sp>
+        <p:nvSpPr>
+          <p:cNvPr id="16" name="Rounded Rectangle 15"/>
           <p:cNvSpPr/>
           <p:nvPr/>
         </p:nvSpPr>
@@ -11562,8 +12065,8 @@
         </p:nvSpPr>
         <p:spPr>
           <a:xfrm>
-            <a:off x="502920" y="1005840"/>
-            <a:ext cx="11155680" cy="4754880"/>
+            <a:off x="502920" y="868680"/>
+            <a:ext cx="11155680" cy="2834640"/>
           </a:xfrm>
           <a:prstGeom prst="rect">
             <a:avLst/>
@@ -11578,11 +12081,11 @@
           <a:p>
             <a:pPr algn="l">
               <a:spcAft>
-                <a:spcPts val="1400"/>
+                <a:spcPts val="800"/>
               </a:spcAft>
             </a:pPr>
             <a:r>
-              <a:rPr sz="1800" b="1">
+              <a:rPr sz="1600" b="1">
                 <a:solidFill>
                   <a:srgbClr val="202020"/>
                 </a:solidFill>
@@ -11594,11 +12097,11 @@
           <a:p>
             <a:pPr algn="l">
               <a:spcAft>
-                <a:spcPts val="1200"/>
+                <a:spcPts val="800"/>
               </a:spcAft>
             </a:pPr>
             <a:r>
-              <a:rPr sz="1700" b="1">
+              <a:rPr sz="1500" b="1">
                 <a:solidFill>
                   <a:srgbClr val="2171B5"/>
                 </a:solidFill>
@@ -11607,7 +12110,7 @@
               <a:t>▪  </a:t>
             </a:r>
             <a:r>
-              <a:rPr sz="1700">
+              <a:rPr sz="1500">
                 <a:solidFill>
                   <a:srgbClr val="202020"/>
                 </a:solidFill>
@@ -11616,7 +12119,7 @@
               <a:t>Euphemistic rewriting (morally invariant) lowers panel-averaged harm by </a:t>
             </a:r>
             <a:r>
-              <a:rPr sz="1700" b="1">
+              <a:rPr sz="1500" b="1">
                 <a:solidFill>
                   <a:srgbClr val="D95F02"/>
                 </a:solidFill>
@@ -11625,7 +12128,7 @@
               <a:t>−14.0 points</a:t>
             </a:r>
             <a:r>
-              <a:rPr sz="1700">
+              <a:rPr sz="1500">
                 <a:solidFill>
                   <a:srgbClr val="202020"/>
                 </a:solidFill>
@@ -11637,11 +12140,11 @@
           <a:p>
             <a:pPr algn="l">
               <a:spcAft>
-                <a:spcPts val="1200"/>
+                <a:spcPts val="800"/>
               </a:spcAft>
             </a:pPr>
             <a:r>
-              <a:rPr sz="1700" b="1">
+              <a:rPr sz="1500" b="1">
                 <a:solidFill>
                   <a:srgbClr val="2171B5"/>
                 </a:solidFill>
@@ -11650,7 +12153,7 @@
               <a:t>▪  </a:t>
             </a:r>
             <a:r>
-              <a:rPr sz="1700">
+              <a:rPr sz="1500">
                 <a:solidFill>
                   <a:srgbClr val="202020"/>
                 </a:solidFill>
@@ -11659,7 +12162,7 @@
               <a:t>At a median-calibrated threshold, </a:t>
             </a:r>
             <a:r>
-              <a:rPr sz="1700" b="1">
+              <a:rPr sz="1500" b="1">
                 <a:solidFill>
                   <a:srgbClr val="D95F02"/>
                 </a:solidFill>
@@ -11668,7 +12171,7 @@
               <a:t>3 of 6</a:t>
             </a:r>
             <a:r>
-              <a:rPr sz="1700">
+              <a:rPr sz="1500">
                 <a:solidFill>
                   <a:srgbClr val="202020"/>
                 </a:solidFill>
@@ -11677,7 +12180,7 @@
               <a:t> gold items silently reclassify FLAG → PASS </a:t>
             </a:r>
             <a:r>
-              <a:rPr sz="1700" i="1">
+              <a:rPr sz="1500" i="1">
                 <a:solidFill>
                   <a:srgbClr val="202020"/>
                 </a:solidFill>
@@ -11693,7 +12196,7 @@
               </a:spcAft>
             </a:pPr>
             <a:r>
-              <a:rPr sz="1700" b="1">
+              <a:rPr sz="1500" b="1">
                 <a:solidFill>
                   <a:srgbClr val="2171B5"/>
                 </a:solidFill>
@@ -11702,7 +12205,7 @@
               <a:t>▪  </a:t>
             </a:r>
             <a:r>
-              <a:rPr sz="1700" b="1">
+              <a:rPr sz="1500" b="1">
                 <a:solidFill>
                   <a:srgbClr val="D95F02"/>
                 </a:solidFill>
@@ -11711,7 +12214,7 @@
               <a:t>Asymmetry</a:t>
             </a:r>
             <a:r>
-              <a:rPr sz="1700">
+              <a:rPr sz="1500">
                 <a:solidFill>
                   <a:srgbClr val="202020"/>
                 </a:solidFill>
@@ -11720,7 +12223,7 @@
               <a:t>: far easier to </a:t>
             </a:r>
             <a:r>
-              <a:rPr sz="1700" i="1">
+              <a:rPr sz="1500" i="1">
                 <a:solidFill>
                   <a:srgbClr val="202020"/>
                 </a:solidFill>
@@ -11729,7 +12232,7 @@
               <a:t>evade</a:t>
             </a:r>
             <a:r>
-              <a:rPr sz="1700">
+              <a:rPr sz="1500">
                 <a:solidFill>
                   <a:srgbClr val="202020"/>
                 </a:solidFill>
@@ -11738,7 +12241,7 @@
               <a:t> (hide harm) than to </a:t>
             </a:r>
             <a:r>
-              <a:rPr sz="1700" i="1">
+              <a:rPr sz="1500" i="1">
                 <a:solidFill>
                   <a:srgbClr val="202020"/>
                 </a:solidFill>
@@ -11747,13 +12250,1120 @@
               <a:t>trigger</a:t>
             </a:r>
             <a:r>
-              <a:rPr sz="1700">
+              <a:rPr sz="1500">
                 <a:solidFill>
                   <a:srgbClr val="202020"/>
                 </a:solidFill>
                 <a:latin typeface="Calibri"/>
               </a:rPr>
               <a:t> a false positive — the dangerous direction.</a:t>
+            </a:r>
+          </a:p>
+        </p:txBody>
+      </p:sp>
+      <p:sp>
+        <p:nvSpPr>
+          <p:cNvPr id="6" name="Rectangle 5"/>
+          <p:cNvSpPr/>
+          <p:nvPr/>
+        </p:nvSpPr>
+        <p:spPr>
+          <a:xfrm>
+            <a:off x="731520" y="5532120"/>
+            <a:ext cx="10698480" cy="17780"/>
+          </a:xfrm>
+          <a:prstGeom prst="rect">
+            <a:avLst/>
+          </a:prstGeom>
+          <a:solidFill>
+            <a:srgbClr val="636363"/>
+          </a:solidFill>
+          <a:ln>
+            <a:noFill/>
+          </a:ln>
+        </p:spPr>
+        <p:style>
+          <a:lnRef idx="1">
+            <a:schemeClr val="accent1"/>
+          </a:lnRef>
+          <a:fillRef idx="3">
+            <a:schemeClr val="accent1"/>
+          </a:fillRef>
+          <a:effectRef idx="2">
+            <a:schemeClr val="accent1"/>
+          </a:effectRef>
+          <a:fontRef idx="minor">
+            <a:schemeClr val="lt1"/>
+          </a:fontRef>
+        </p:style>
+        <p:txBody>
+          <a:bodyPr rtlCol="0" anchor="ctr"/>
+          <a:lstStyle/>
+          <a:p>
+            <a:pPr algn="ctr"/>
+          </a:p>
+        </p:txBody>
+      </p:sp>
+      <p:sp>
+        <p:nvSpPr>
+          <p:cNvPr id="7" name="Rectangle 6"/>
+          <p:cNvSpPr/>
+          <p:nvPr/>
+        </p:nvSpPr>
+        <p:spPr>
+          <a:xfrm>
+            <a:off x="5986913" y="4069080"/>
+            <a:ext cx="20320" cy="1600200"/>
+          </a:xfrm>
+          <a:prstGeom prst="rect">
+            <a:avLst/>
+          </a:prstGeom>
+          <a:solidFill>
+            <a:srgbClr val="1A2340"/>
+          </a:solidFill>
+          <a:ln>
+            <a:noFill/>
+          </a:ln>
+        </p:spPr>
+        <p:style>
+          <a:lnRef idx="1">
+            <a:schemeClr val="accent1"/>
+          </a:lnRef>
+          <a:fillRef idx="3">
+            <a:schemeClr val="accent1"/>
+          </a:fillRef>
+          <a:effectRef idx="2">
+            <a:schemeClr val="accent1"/>
+          </a:effectRef>
+          <a:fontRef idx="minor">
+            <a:schemeClr val="lt1"/>
+          </a:fontRef>
+        </p:style>
+        <p:txBody>
+          <a:bodyPr rtlCol="0" anchor="ctr"/>
+          <a:lstStyle/>
+          <a:p>
+            <a:pPr algn="ctr"/>
+          </a:p>
+        </p:txBody>
+      </p:sp>
+      <p:sp>
+        <p:nvSpPr>
+          <p:cNvPr id="8" name="TextBox 7"/>
+          <p:cNvSpPr txBox="1"/>
+          <p:nvPr/>
+        </p:nvSpPr>
+        <p:spPr>
+          <a:xfrm>
+            <a:off x="5255393" y="3767328"/>
+            <a:ext cx="1554480" cy="274320"/>
+          </a:xfrm>
+          <a:prstGeom prst="rect">
+            <a:avLst/>
+          </a:prstGeom>
+          <a:noFill/>
+        </p:spPr>
+        <p:txBody>
+          <a:bodyPr wrap="square">
+            <a:spAutoFit/>
+          </a:bodyPr>
+          <a:lstStyle/>
+          <a:p>
+            <a:pPr algn="ctr">
+              <a:spcAft>
+                <a:spcPts val="600"/>
+              </a:spcAft>
+            </a:pPr>
+            <a:r>
+              <a:rPr sz="1000" b="1">
+                <a:solidFill>
+                  <a:srgbClr val="202020"/>
+                </a:solidFill>
+                <a:latin typeface="Calibri"/>
+              </a:rPr>
+              <a:t>threshold T</a:t>
+            </a:r>
+          </a:p>
+        </p:txBody>
+      </p:sp>
+      <p:sp>
+        <p:nvSpPr>
+          <p:cNvPr id="9" name="TextBox 8"/>
+          <p:cNvSpPr txBox="1"/>
+          <p:nvPr/>
+        </p:nvSpPr>
+        <p:spPr>
+          <a:xfrm>
+            <a:off x="2796138" y="4069080"/>
+            <a:ext cx="1371600" cy="274320"/>
+          </a:xfrm>
+          <a:prstGeom prst="rect">
+            <a:avLst/>
+          </a:prstGeom>
+          <a:noFill/>
+        </p:spPr>
+        <p:txBody>
+          <a:bodyPr wrap="square">
+            <a:spAutoFit/>
+          </a:bodyPr>
+          <a:lstStyle/>
+          <a:p>
+            <a:pPr algn="l">
+              <a:spcAft>
+                <a:spcPts val="600"/>
+              </a:spcAft>
+            </a:pPr>
+            <a:r>
+              <a:rPr sz="900">
+                <a:solidFill>
+                  <a:srgbClr val="636363"/>
+                </a:solidFill>
+                <a:latin typeface="Calibri"/>
+              </a:rPr>
+              <a:t>PASS side</a:t>
+            </a:r>
+          </a:p>
+        </p:txBody>
+      </p:sp>
+      <p:sp>
+        <p:nvSpPr>
+          <p:cNvPr id="10" name="TextBox 9"/>
+          <p:cNvSpPr txBox="1"/>
+          <p:nvPr/>
+        </p:nvSpPr>
+        <p:spPr>
+          <a:xfrm>
+            <a:off x="8239225" y="4069080"/>
+            <a:ext cx="1371600" cy="274320"/>
+          </a:xfrm>
+          <a:prstGeom prst="rect">
+            <a:avLst/>
+          </a:prstGeom>
+          <a:noFill/>
+        </p:spPr>
+        <p:txBody>
+          <a:bodyPr wrap="square">
+            <a:spAutoFit/>
+          </a:bodyPr>
+          <a:lstStyle/>
+          <a:p>
+            <a:pPr algn="l">
+              <a:spcAft>
+                <a:spcPts val="600"/>
+              </a:spcAft>
+            </a:pPr>
+            <a:r>
+              <a:rPr sz="900">
+                <a:solidFill>
+                  <a:srgbClr val="636363"/>
+                </a:solidFill>
+                <a:latin typeface="Calibri"/>
+              </a:rPr>
+              <a:t>FLAG side</a:t>
+            </a:r>
+          </a:p>
+        </p:txBody>
+      </p:sp>
+      <p:sp>
+        <p:nvSpPr>
+          <p:cNvPr id="11" name="Left Arrow 10"/>
+          <p:cNvSpPr/>
+          <p:nvPr/>
+        </p:nvSpPr>
+        <p:spPr>
+          <a:xfrm>
+            <a:off x="4579218" y="4480560"/>
+            <a:ext cx="2064619" cy="91440"/>
+          </a:xfrm>
+          <a:prstGeom prst="leftArrow">
+            <a:avLst>
+              <a:gd name="adj1" fmla="val 50000"/>
+              <a:gd name="adj2" fmla="val 50000"/>
+            </a:avLst>
+          </a:prstGeom>
+          <a:solidFill>
+            <a:srgbClr val="D95F02"/>
+          </a:solidFill>
+          <a:ln>
+            <a:noFill/>
+          </a:ln>
+        </p:spPr>
+        <p:style>
+          <a:lnRef idx="1">
+            <a:schemeClr val="accent1"/>
+          </a:lnRef>
+          <a:fillRef idx="3">
+            <a:schemeClr val="accent1"/>
+          </a:fillRef>
+          <a:effectRef idx="2">
+            <a:schemeClr val="accent1"/>
+          </a:effectRef>
+          <a:fontRef idx="minor">
+            <a:schemeClr val="lt1"/>
+          </a:fontRef>
+        </p:style>
+        <p:txBody>
+          <a:bodyPr rtlCol="0" anchor="ctr"/>
+          <a:lstStyle/>
+          <a:p>
+            <a:pPr algn="ctr"/>
+          </a:p>
+        </p:txBody>
+      </p:sp>
+      <p:sp>
+        <p:nvSpPr>
+          <p:cNvPr id="12" name="Oval 11"/>
+          <p:cNvSpPr/>
+          <p:nvPr/>
+        </p:nvSpPr>
+        <p:spPr>
+          <a:xfrm>
+            <a:off x="6593545" y="4475988"/>
+            <a:ext cx="100584" cy="100584"/>
+          </a:xfrm>
+          <a:prstGeom prst="ellipse">
+            <a:avLst/>
+          </a:prstGeom>
+          <a:solidFill>
+            <a:srgbClr val="2171B5"/>
+          </a:solidFill>
+          <a:ln>
+            <a:noFill/>
+          </a:ln>
+        </p:spPr>
+        <p:style>
+          <a:lnRef idx="1">
+            <a:schemeClr val="accent1"/>
+          </a:lnRef>
+          <a:fillRef idx="3">
+            <a:schemeClr val="accent1"/>
+          </a:fillRef>
+          <a:effectRef idx="2">
+            <a:schemeClr val="accent1"/>
+          </a:effectRef>
+          <a:fontRef idx="minor">
+            <a:schemeClr val="lt1"/>
+          </a:fontRef>
+        </p:style>
+        <p:txBody>
+          <a:bodyPr rtlCol="0" anchor="ctr"/>
+          <a:lstStyle/>
+          <a:p>
+            <a:pPr algn="ctr"/>
+          </a:p>
+        </p:txBody>
+      </p:sp>
+      <p:sp>
+        <p:nvSpPr>
+          <p:cNvPr id="13" name="Oval 12"/>
+          <p:cNvSpPr/>
+          <p:nvPr/>
+        </p:nvSpPr>
+        <p:spPr>
+          <a:xfrm>
+            <a:off x="4528926" y="4475988"/>
+            <a:ext cx="100584" cy="100584"/>
+          </a:xfrm>
+          <a:prstGeom prst="ellipse">
+            <a:avLst/>
+          </a:prstGeom>
+          <a:solidFill>
+            <a:srgbClr val="D95F02"/>
+          </a:solidFill>
+          <a:ln>
+            <a:noFill/>
+          </a:ln>
+        </p:spPr>
+        <p:style>
+          <a:lnRef idx="1">
+            <a:schemeClr val="accent1"/>
+          </a:lnRef>
+          <a:fillRef idx="3">
+            <a:schemeClr val="accent1"/>
+          </a:fillRef>
+          <a:effectRef idx="2">
+            <a:schemeClr val="accent1"/>
+          </a:effectRef>
+          <a:fontRef idx="minor">
+            <a:schemeClr val="lt1"/>
+          </a:fontRef>
+        </p:style>
+        <p:txBody>
+          <a:bodyPr rtlCol="0" anchor="ctr"/>
+          <a:lstStyle/>
+          <a:p>
+            <a:pPr algn="ctr"/>
+          </a:p>
+        </p:txBody>
+      </p:sp>
+      <p:sp>
+        <p:nvSpPr>
+          <p:cNvPr id="14" name="Left Arrow 13"/>
+          <p:cNvSpPr/>
+          <p:nvPr/>
+        </p:nvSpPr>
+        <p:spPr>
+          <a:xfrm>
+            <a:off x="5329989" y="4754880"/>
+            <a:ext cx="2158465" cy="91440"/>
+          </a:xfrm>
+          <a:prstGeom prst="leftArrow">
+            <a:avLst>
+              <a:gd name="adj1" fmla="val 50000"/>
+              <a:gd name="adj2" fmla="val 50000"/>
+            </a:avLst>
+          </a:prstGeom>
+          <a:solidFill>
+            <a:srgbClr val="D95F02"/>
+          </a:solidFill>
+          <a:ln>
+            <a:noFill/>
+          </a:ln>
+        </p:spPr>
+        <p:style>
+          <a:lnRef idx="1">
+            <a:schemeClr val="accent1"/>
+          </a:lnRef>
+          <a:fillRef idx="3">
+            <a:schemeClr val="accent1"/>
+          </a:fillRef>
+          <a:effectRef idx="2">
+            <a:schemeClr val="accent1"/>
+          </a:effectRef>
+          <a:fontRef idx="minor">
+            <a:schemeClr val="lt1"/>
+          </a:fontRef>
+        </p:style>
+        <p:txBody>
+          <a:bodyPr rtlCol="0" anchor="ctr"/>
+          <a:lstStyle/>
+          <a:p>
+            <a:pPr algn="ctr"/>
+          </a:p>
+        </p:txBody>
+      </p:sp>
+      <p:sp>
+        <p:nvSpPr>
+          <p:cNvPr id="15" name="Oval 14"/>
+          <p:cNvSpPr/>
+          <p:nvPr/>
+        </p:nvSpPr>
+        <p:spPr>
+          <a:xfrm>
+            <a:off x="7438162" y="4750308"/>
+            <a:ext cx="100584" cy="100584"/>
+          </a:xfrm>
+          <a:prstGeom prst="ellipse">
+            <a:avLst/>
+          </a:prstGeom>
+          <a:solidFill>
+            <a:srgbClr val="2171B5"/>
+          </a:solidFill>
+          <a:ln>
+            <a:noFill/>
+          </a:ln>
+        </p:spPr>
+        <p:style>
+          <a:lnRef idx="1">
+            <a:schemeClr val="accent1"/>
+          </a:lnRef>
+          <a:fillRef idx="3">
+            <a:schemeClr val="accent1"/>
+          </a:fillRef>
+          <a:effectRef idx="2">
+            <a:schemeClr val="accent1"/>
+          </a:effectRef>
+          <a:fontRef idx="minor">
+            <a:schemeClr val="lt1"/>
+          </a:fontRef>
+        </p:style>
+        <p:txBody>
+          <a:bodyPr rtlCol="0" anchor="ctr"/>
+          <a:lstStyle/>
+          <a:p>
+            <a:pPr algn="ctr"/>
+          </a:p>
+        </p:txBody>
+      </p:sp>
+      <p:sp>
+        <p:nvSpPr>
+          <p:cNvPr id="16" name="Oval 15"/>
+          <p:cNvSpPr/>
+          <p:nvPr/>
+        </p:nvSpPr>
+        <p:spPr>
+          <a:xfrm>
+            <a:off x="5279697" y="4750308"/>
+            <a:ext cx="100584" cy="100584"/>
+          </a:xfrm>
+          <a:prstGeom prst="ellipse">
+            <a:avLst/>
+          </a:prstGeom>
+          <a:solidFill>
+            <a:srgbClr val="D95F02"/>
+          </a:solidFill>
+          <a:ln>
+            <a:noFill/>
+          </a:ln>
+        </p:spPr>
+        <p:style>
+          <a:lnRef idx="1">
+            <a:schemeClr val="accent1"/>
+          </a:lnRef>
+          <a:fillRef idx="3">
+            <a:schemeClr val="accent1"/>
+          </a:fillRef>
+          <a:effectRef idx="2">
+            <a:schemeClr val="accent1"/>
+          </a:effectRef>
+          <a:fontRef idx="minor">
+            <a:schemeClr val="lt1"/>
+          </a:fontRef>
+        </p:style>
+        <p:txBody>
+          <a:bodyPr rtlCol="0" anchor="ctr"/>
+          <a:lstStyle/>
+          <a:p>
+            <a:pPr algn="ctr"/>
+          </a:p>
+        </p:txBody>
+      </p:sp>
+      <p:sp>
+        <p:nvSpPr>
+          <p:cNvPr id="17" name="Left Arrow 16"/>
+          <p:cNvSpPr/>
+          <p:nvPr/>
+        </p:nvSpPr>
+        <p:spPr>
+          <a:xfrm>
+            <a:off x="5611528" y="5029200"/>
+            <a:ext cx="3003082" cy="91440"/>
+          </a:xfrm>
+          <a:prstGeom prst="leftArrow">
+            <a:avLst>
+              <a:gd name="adj1" fmla="val 50000"/>
+              <a:gd name="adj2" fmla="val 50000"/>
+            </a:avLst>
+          </a:prstGeom>
+          <a:solidFill>
+            <a:srgbClr val="D95F02"/>
+          </a:solidFill>
+          <a:ln>
+            <a:noFill/>
+          </a:ln>
+        </p:spPr>
+        <p:style>
+          <a:lnRef idx="1">
+            <a:schemeClr val="accent1"/>
+          </a:lnRef>
+          <a:fillRef idx="3">
+            <a:schemeClr val="accent1"/>
+          </a:fillRef>
+          <a:effectRef idx="2">
+            <a:schemeClr val="accent1"/>
+          </a:effectRef>
+          <a:fontRef idx="minor">
+            <a:schemeClr val="lt1"/>
+          </a:fontRef>
+        </p:style>
+        <p:txBody>
+          <a:bodyPr rtlCol="0" anchor="ctr"/>
+          <a:lstStyle/>
+          <a:p>
+            <a:pPr algn="ctr"/>
+          </a:p>
+        </p:txBody>
+      </p:sp>
+      <p:sp>
+        <p:nvSpPr>
+          <p:cNvPr id="18" name="Oval 17"/>
+          <p:cNvSpPr/>
+          <p:nvPr/>
+        </p:nvSpPr>
+        <p:spPr>
+          <a:xfrm>
+            <a:off x="8564318" y="5024628"/>
+            <a:ext cx="100584" cy="100584"/>
+          </a:xfrm>
+          <a:prstGeom prst="ellipse">
+            <a:avLst/>
+          </a:prstGeom>
+          <a:solidFill>
+            <a:srgbClr val="2171B5"/>
+          </a:solidFill>
+          <a:ln>
+            <a:noFill/>
+          </a:ln>
+        </p:spPr>
+        <p:style>
+          <a:lnRef idx="1">
+            <a:schemeClr val="accent1"/>
+          </a:lnRef>
+          <a:fillRef idx="3">
+            <a:schemeClr val="accent1"/>
+          </a:fillRef>
+          <a:effectRef idx="2">
+            <a:schemeClr val="accent1"/>
+          </a:effectRef>
+          <a:fontRef idx="minor">
+            <a:schemeClr val="lt1"/>
+          </a:fontRef>
+        </p:style>
+        <p:txBody>
+          <a:bodyPr rtlCol="0" anchor="ctr"/>
+          <a:lstStyle/>
+          <a:p>
+            <a:pPr algn="ctr"/>
+          </a:p>
+        </p:txBody>
+      </p:sp>
+      <p:sp>
+        <p:nvSpPr>
+          <p:cNvPr id="19" name="Oval 18"/>
+          <p:cNvSpPr/>
+          <p:nvPr/>
+        </p:nvSpPr>
+        <p:spPr>
+          <a:xfrm>
+            <a:off x="5561236" y="5024628"/>
+            <a:ext cx="100584" cy="100584"/>
+          </a:xfrm>
+          <a:prstGeom prst="ellipse">
+            <a:avLst/>
+          </a:prstGeom>
+          <a:solidFill>
+            <a:srgbClr val="D95F02"/>
+          </a:solidFill>
+          <a:ln>
+            <a:noFill/>
+          </a:ln>
+        </p:spPr>
+        <p:style>
+          <a:lnRef idx="1">
+            <a:schemeClr val="accent1"/>
+          </a:lnRef>
+          <a:fillRef idx="3">
+            <a:schemeClr val="accent1"/>
+          </a:fillRef>
+          <a:effectRef idx="2">
+            <a:schemeClr val="accent1"/>
+          </a:effectRef>
+          <a:fontRef idx="minor">
+            <a:schemeClr val="lt1"/>
+          </a:fontRef>
+        </p:style>
+        <p:txBody>
+          <a:bodyPr rtlCol="0" anchor="ctr"/>
+          <a:lstStyle/>
+          <a:p>
+            <a:pPr algn="ctr"/>
+          </a:p>
+        </p:txBody>
+      </p:sp>
+      <p:sp>
+        <p:nvSpPr>
+          <p:cNvPr id="20" name="Left Arrow 19"/>
+          <p:cNvSpPr/>
+          <p:nvPr/>
+        </p:nvSpPr>
+        <p:spPr>
+          <a:xfrm>
+            <a:off x="6456145" y="4480560"/>
+            <a:ext cx="1689233" cy="91440"/>
+          </a:xfrm>
+          <a:prstGeom prst="leftArrow">
+            <a:avLst>
+              <a:gd name="adj1" fmla="val 50000"/>
+              <a:gd name="adj2" fmla="val 50000"/>
+            </a:avLst>
+          </a:prstGeom>
+          <a:solidFill>
+            <a:srgbClr val="D95F02"/>
+          </a:solidFill>
+          <a:ln>
+            <a:noFill/>
+          </a:ln>
+        </p:spPr>
+        <p:style>
+          <a:lnRef idx="1">
+            <a:schemeClr val="accent1"/>
+          </a:lnRef>
+          <a:fillRef idx="3">
+            <a:schemeClr val="accent1"/>
+          </a:fillRef>
+          <a:effectRef idx="2">
+            <a:schemeClr val="accent1"/>
+          </a:effectRef>
+          <a:fontRef idx="minor">
+            <a:schemeClr val="lt1"/>
+          </a:fontRef>
+        </p:style>
+        <p:txBody>
+          <a:bodyPr rtlCol="0" anchor="ctr"/>
+          <a:lstStyle/>
+          <a:p>
+            <a:pPr algn="ctr"/>
+          </a:p>
+        </p:txBody>
+      </p:sp>
+      <p:sp>
+        <p:nvSpPr>
+          <p:cNvPr id="21" name="Oval 20"/>
+          <p:cNvSpPr/>
+          <p:nvPr/>
+        </p:nvSpPr>
+        <p:spPr>
+          <a:xfrm>
+            <a:off x="8095086" y="4475988"/>
+            <a:ext cx="100584" cy="100584"/>
+          </a:xfrm>
+          <a:prstGeom prst="ellipse">
+            <a:avLst/>
+          </a:prstGeom>
+          <a:solidFill>
+            <a:srgbClr val="2171B5"/>
+          </a:solidFill>
+          <a:ln>
+            <a:noFill/>
+          </a:ln>
+        </p:spPr>
+        <p:style>
+          <a:lnRef idx="1">
+            <a:schemeClr val="accent1"/>
+          </a:lnRef>
+          <a:fillRef idx="3">
+            <a:schemeClr val="accent1"/>
+          </a:fillRef>
+          <a:effectRef idx="2">
+            <a:schemeClr val="accent1"/>
+          </a:effectRef>
+          <a:fontRef idx="minor">
+            <a:schemeClr val="lt1"/>
+          </a:fontRef>
+        </p:style>
+        <p:txBody>
+          <a:bodyPr rtlCol="0" anchor="ctr"/>
+          <a:lstStyle/>
+          <a:p>
+            <a:pPr algn="ctr"/>
+          </a:p>
+        </p:txBody>
+      </p:sp>
+      <p:sp>
+        <p:nvSpPr>
+          <p:cNvPr id="22" name="Oval 21"/>
+          <p:cNvSpPr/>
+          <p:nvPr/>
+        </p:nvSpPr>
+        <p:spPr>
+          <a:xfrm>
+            <a:off x="6405853" y="4475988"/>
+            <a:ext cx="100584" cy="100584"/>
+          </a:xfrm>
+          <a:prstGeom prst="ellipse">
+            <a:avLst/>
+          </a:prstGeom>
+          <a:solidFill>
+            <a:srgbClr val="D95F02"/>
+          </a:solidFill>
+          <a:ln>
+            <a:noFill/>
+          </a:ln>
+        </p:spPr>
+        <p:style>
+          <a:lnRef idx="1">
+            <a:schemeClr val="accent1"/>
+          </a:lnRef>
+          <a:fillRef idx="3">
+            <a:schemeClr val="accent1"/>
+          </a:fillRef>
+          <a:effectRef idx="2">
+            <a:schemeClr val="accent1"/>
+          </a:effectRef>
+          <a:fontRef idx="minor">
+            <a:schemeClr val="lt1"/>
+          </a:fontRef>
+        </p:style>
+        <p:txBody>
+          <a:bodyPr rtlCol="0" anchor="ctr"/>
+          <a:lstStyle/>
+          <a:p>
+            <a:pPr algn="ctr"/>
+          </a:p>
+        </p:txBody>
+      </p:sp>
+      <p:sp>
+        <p:nvSpPr>
+          <p:cNvPr id="23" name="Left Arrow 22"/>
+          <p:cNvSpPr/>
+          <p:nvPr/>
+        </p:nvSpPr>
+        <p:spPr>
+          <a:xfrm>
+            <a:off x="7676147" y="4754880"/>
+            <a:ext cx="1783080" cy="91440"/>
+          </a:xfrm>
+          <a:prstGeom prst="leftArrow">
+            <a:avLst>
+              <a:gd name="adj1" fmla="val 50000"/>
+              <a:gd name="adj2" fmla="val 50000"/>
+            </a:avLst>
+          </a:prstGeom>
+          <a:solidFill>
+            <a:srgbClr val="D95F02"/>
+          </a:solidFill>
+          <a:ln>
+            <a:noFill/>
+          </a:ln>
+        </p:spPr>
+        <p:style>
+          <a:lnRef idx="1">
+            <a:schemeClr val="accent1"/>
+          </a:lnRef>
+          <a:fillRef idx="3">
+            <a:schemeClr val="accent1"/>
+          </a:fillRef>
+          <a:effectRef idx="2">
+            <a:schemeClr val="accent1"/>
+          </a:effectRef>
+          <a:fontRef idx="minor">
+            <a:schemeClr val="lt1"/>
+          </a:fontRef>
+        </p:style>
+        <p:txBody>
+          <a:bodyPr rtlCol="0" anchor="ctr"/>
+          <a:lstStyle/>
+          <a:p>
+            <a:pPr algn="ctr"/>
+          </a:p>
+        </p:txBody>
+      </p:sp>
+      <p:sp>
+        <p:nvSpPr>
+          <p:cNvPr id="24" name="Oval 23"/>
+          <p:cNvSpPr/>
+          <p:nvPr/>
+        </p:nvSpPr>
+        <p:spPr>
+          <a:xfrm>
+            <a:off x="9408935" y="4750308"/>
+            <a:ext cx="100584" cy="100584"/>
+          </a:xfrm>
+          <a:prstGeom prst="ellipse">
+            <a:avLst/>
+          </a:prstGeom>
+          <a:solidFill>
+            <a:srgbClr val="2171B5"/>
+          </a:solidFill>
+          <a:ln>
+            <a:noFill/>
+          </a:ln>
+        </p:spPr>
+        <p:style>
+          <a:lnRef idx="1">
+            <a:schemeClr val="accent1"/>
+          </a:lnRef>
+          <a:fillRef idx="3">
+            <a:schemeClr val="accent1"/>
+          </a:fillRef>
+          <a:effectRef idx="2">
+            <a:schemeClr val="accent1"/>
+          </a:effectRef>
+          <a:fontRef idx="minor">
+            <a:schemeClr val="lt1"/>
+          </a:fontRef>
+        </p:style>
+        <p:txBody>
+          <a:bodyPr rtlCol="0" anchor="ctr"/>
+          <a:lstStyle/>
+          <a:p>
+            <a:pPr algn="ctr"/>
+          </a:p>
+        </p:txBody>
+      </p:sp>
+      <p:sp>
+        <p:nvSpPr>
+          <p:cNvPr id="25" name="Oval 24"/>
+          <p:cNvSpPr/>
+          <p:nvPr/>
+        </p:nvSpPr>
+        <p:spPr>
+          <a:xfrm>
+            <a:off x="7625855" y="4750308"/>
+            <a:ext cx="100584" cy="100584"/>
+          </a:xfrm>
+          <a:prstGeom prst="ellipse">
+            <a:avLst/>
+          </a:prstGeom>
+          <a:solidFill>
+            <a:srgbClr val="D95F02"/>
+          </a:solidFill>
+          <a:ln>
+            <a:noFill/>
+          </a:ln>
+        </p:spPr>
+        <p:style>
+          <a:lnRef idx="1">
+            <a:schemeClr val="accent1"/>
+          </a:lnRef>
+          <a:fillRef idx="3">
+            <a:schemeClr val="accent1"/>
+          </a:fillRef>
+          <a:effectRef idx="2">
+            <a:schemeClr val="accent1"/>
+          </a:effectRef>
+          <a:fontRef idx="minor">
+            <a:schemeClr val="lt1"/>
+          </a:fontRef>
+        </p:style>
+        <p:txBody>
+          <a:bodyPr rtlCol="0" anchor="ctr"/>
+          <a:lstStyle/>
+          <a:p>
+            <a:pPr algn="ctr"/>
+          </a:p>
+        </p:txBody>
+      </p:sp>
+      <p:sp>
+        <p:nvSpPr>
+          <p:cNvPr id="26" name="Left Arrow 25"/>
+          <p:cNvSpPr/>
+          <p:nvPr/>
+        </p:nvSpPr>
+        <p:spPr>
+          <a:xfrm>
+            <a:off x="8802303" y="5029200"/>
+            <a:ext cx="1689233" cy="91440"/>
+          </a:xfrm>
+          <a:prstGeom prst="leftArrow">
+            <a:avLst>
+              <a:gd name="adj1" fmla="val 50000"/>
+              <a:gd name="adj2" fmla="val 50000"/>
+            </a:avLst>
+          </a:prstGeom>
+          <a:solidFill>
+            <a:srgbClr val="D95F02"/>
+          </a:solidFill>
+          <a:ln>
+            <a:noFill/>
+          </a:ln>
+        </p:spPr>
+        <p:style>
+          <a:lnRef idx="1">
+            <a:schemeClr val="accent1"/>
+          </a:lnRef>
+          <a:fillRef idx="3">
+            <a:schemeClr val="accent1"/>
+          </a:fillRef>
+          <a:effectRef idx="2">
+            <a:schemeClr val="accent1"/>
+          </a:effectRef>
+          <a:fontRef idx="minor">
+            <a:schemeClr val="lt1"/>
+          </a:fontRef>
+        </p:style>
+        <p:txBody>
+          <a:bodyPr rtlCol="0" anchor="ctr"/>
+          <a:lstStyle/>
+          <a:p>
+            <a:pPr algn="ctr"/>
+          </a:p>
+        </p:txBody>
+      </p:sp>
+      <p:sp>
+        <p:nvSpPr>
+          <p:cNvPr id="27" name="Oval 26"/>
+          <p:cNvSpPr/>
+          <p:nvPr/>
+        </p:nvSpPr>
+        <p:spPr>
+          <a:xfrm>
+            <a:off x="10441244" y="5024628"/>
+            <a:ext cx="100584" cy="100584"/>
+          </a:xfrm>
+          <a:prstGeom prst="ellipse">
+            <a:avLst/>
+          </a:prstGeom>
+          <a:solidFill>
+            <a:srgbClr val="2171B5"/>
+          </a:solidFill>
+          <a:ln>
+            <a:noFill/>
+          </a:ln>
+        </p:spPr>
+        <p:style>
+          <a:lnRef idx="1">
+            <a:schemeClr val="accent1"/>
+          </a:lnRef>
+          <a:fillRef idx="3">
+            <a:schemeClr val="accent1"/>
+          </a:fillRef>
+          <a:effectRef idx="2">
+            <a:schemeClr val="accent1"/>
+          </a:effectRef>
+          <a:fontRef idx="minor">
+            <a:schemeClr val="lt1"/>
+          </a:fontRef>
+        </p:style>
+        <p:txBody>
+          <a:bodyPr rtlCol="0" anchor="ctr"/>
+          <a:lstStyle/>
+          <a:p>
+            <a:pPr algn="ctr"/>
+          </a:p>
+        </p:txBody>
+      </p:sp>
+      <p:sp>
+        <p:nvSpPr>
+          <p:cNvPr id="28" name="Oval 27"/>
+          <p:cNvSpPr/>
+          <p:nvPr/>
+        </p:nvSpPr>
+        <p:spPr>
+          <a:xfrm>
+            <a:off x="8752011" y="5024628"/>
+            <a:ext cx="100584" cy="100584"/>
+          </a:xfrm>
+          <a:prstGeom prst="ellipse">
+            <a:avLst/>
+          </a:prstGeom>
+          <a:solidFill>
+            <a:srgbClr val="D95F02"/>
+          </a:solidFill>
+          <a:ln>
+            <a:noFill/>
+          </a:ln>
+        </p:spPr>
+        <p:style>
+          <a:lnRef idx="1">
+            <a:schemeClr val="accent1"/>
+          </a:lnRef>
+          <a:fillRef idx="3">
+            <a:schemeClr val="accent1"/>
+          </a:fillRef>
+          <a:effectRef idx="2">
+            <a:schemeClr val="accent1"/>
+          </a:effectRef>
+          <a:fontRef idx="minor">
+            <a:schemeClr val="lt1"/>
+          </a:fontRef>
+        </p:style>
+        <p:txBody>
+          <a:bodyPr rtlCol="0" anchor="ctr"/>
+          <a:lstStyle/>
+          <a:p>
+            <a:pPr algn="ctr"/>
+          </a:p>
+        </p:txBody>
+      </p:sp>
+      <p:sp>
+        <p:nvSpPr>
+          <p:cNvPr id="29" name="TextBox 28"/>
+          <p:cNvSpPr txBox="1"/>
+          <p:nvPr/>
+        </p:nvSpPr>
+        <p:spPr>
+          <a:xfrm>
+            <a:off x="777240" y="4343400"/>
+            <a:ext cx="2011680" cy="548640"/>
+          </a:xfrm>
+          <a:prstGeom prst="rect">
+            <a:avLst/>
+          </a:prstGeom>
+          <a:noFill/>
+        </p:spPr>
+        <p:txBody>
+          <a:bodyPr wrap="square">
+            <a:spAutoFit/>
+          </a:bodyPr>
+          <a:lstStyle/>
+          <a:p>
+            <a:pPr algn="l">
+              <a:spcAft>
+                <a:spcPts val="100"/>
+              </a:spcAft>
+            </a:pPr>
+            <a:r>
+              <a:rPr sz="900" b="1">
+                <a:solidFill>
+                  <a:srgbClr val="2171B5"/>
+                </a:solidFill>
+                <a:latin typeface="Calibri"/>
+              </a:rPr>
+              <a:t>●</a:t>
+            </a:r>
+            <a:r>
+              <a:rPr sz="900">
+                <a:solidFill>
+                  <a:srgbClr val="636363"/>
+                </a:solidFill>
+                <a:latin typeface="Calibri"/>
+              </a:rPr>
+              <a:t> original</a:t>
+            </a:r>
+          </a:p>
+          <a:p>
+            <a:pPr algn="l">
+              <a:spcAft>
+                <a:spcPts val="600"/>
+              </a:spcAft>
+            </a:pPr>
+            <a:r>
+              <a:rPr sz="900" b="1">
+                <a:solidFill>
+                  <a:srgbClr val="D95F02"/>
+                </a:solidFill>
+                <a:latin typeface="Calibri"/>
+              </a:rPr>
+              <a:t>●</a:t>
+            </a:r>
+            <a:r>
+              <a:rPr sz="900">
+                <a:solidFill>
+                  <a:srgbClr val="636363"/>
+                </a:solidFill>
+                <a:latin typeface="Calibri"/>
+              </a:rPr>
+              <a:t> euphemistic</a:t>
+            </a:r>
+          </a:p>
+        </p:txBody>
+      </p:sp>
+      <p:sp>
+        <p:nvSpPr>
+          <p:cNvPr id="30" name="TextBox 29"/>
+          <p:cNvSpPr txBox="1"/>
+          <p:nvPr/>
+        </p:nvSpPr>
+        <p:spPr>
+          <a:xfrm>
+            <a:off x="6035040" y="5715000"/>
+            <a:ext cx="5486400" cy="274320"/>
+          </a:xfrm>
+          <a:prstGeom prst="rect">
+            <a:avLst/>
+          </a:prstGeom>
+          <a:noFill/>
+        </p:spPr>
+        <p:txBody>
+          <a:bodyPr wrap="square">
+            <a:spAutoFit/>
+          </a:bodyPr>
+          <a:lstStyle/>
+          <a:p>
+            <a:pPr algn="r">
+              <a:spcAft>
+                <a:spcPts val="600"/>
+              </a:spcAft>
+            </a:pPr>
+            <a:r>
+              <a:rPr sz="900">
+                <a:solidFill>
+                  <a:srgbClr val="636363"/>
+                </a:solidFill>
+                <a:latin typeface="Calibri"/>
+              </a:rPr>
+              <a:t>schematic geometry — the measured statistics are the bullets above</a:t>
             </a:r>
           </a:p>
         </p:txBody>
@@ -11900,8 +13510,8 @@
         </p:nvSpPr>
         <p:spPr>
           <a:xfrm>
-            <a:off x="502920" y="868680"/>
-            <a:ext cx="11155680" cy="1188720"/>
+            <a:off x="502920" y="841248"/>
+            <a:ext cx="11155680" cy="411480"/>
           </a:xfrm>
           <a:prstGeom prst="rect">
             <a:avLst/>
@@ -11920,7 +13530,7 @@
               </a:spcAft>
             </a:pPr>
             <a:r>
-              <a:rPr sz="1600">
+              <a:rPr sz="1500">
                 <a:solidFill>
                   <a:srgbClr val="202020"/>
                 </a:solidFill>
@@ -11929,7 +13539,7 @@
               <a:t>Route each scenario through the real </a:t>
             </a:r>
             <a:r>
-              <a:rPr sz="1600" b="1">
+              <a:rPr sz="1500" b="1">
                 <a:solidFill>
                   <a:srgbClr val="2171B5"/>
                 </a:solidFill>
@@ -11938,7 +13548,7 @@
               <a:t>ErisML DEME v3</a:t>
             </a:r>
             <a:r>
-              <a:rPr sz="1600">
+              <a:rPr sz="1500">
                 <a:solidFill>
                   <a:srgbClr val="202020"/>
                 </a:solidFill>
@@ -11947,6 +13557,515 @@
               <a:t> decision kernel:</a:t>
             </a:r>
           </a:p>
+        </p:txBody>
+      </p:sp>
+      <p:sp>
+        <p:nvSpPr>
+          <p:cNvPr id="6" name="Rounded Rectangle 5"/>
+          <p:cNvSpPr/>
+          <p:nvPr/>
+        </p:nvSpPr>
+        <p:spPr>
+          <a:xfrm>
+            <a:off x="914400" y="1783080"/>
+            <a:ext cx="1737360" cy="566928"/>
+          </a:xfrm>
+          <a:prstGeom prst="roundRect">
+            <a:avLst>
+              <a:gd name="adj" fmla="val 10000"/>
+            </a:avLst>
+          </a:prstGeom>
+          <a:solidFill>
+            <a:srgbClr val="EEF4FA"/>
+          </a:solidFill>
+          <a:ln w="15240">
+            <a:solidFill>
+              <a:srgbClr val="2171B5"/>
+            </a:solidFill>
+          </a:ln>
+        </p:spPr>
+        <p:style>
+          <a:lnRef idx="1">
+            <a:schemeClr val="accent1"/>
+          </a:lnRef>
+          <a:fillRef idx="3">
+            <a:schemeClr val="accent1"/>
+          </a:fillRef>
+          <a:effectRef idx="2">
+            <a:schemeClr val="accent1"/>
+          </a:effectRef>
+          <a:fontRef idx="minor">
+            <a:schemeClr val="lt1"/>
+          </a:fontRef>
+        </p:style>
+        <p:txBody>
+          <a:bodyPr rtlCol="0" anchor="ctr" wrap="square" lIns="27432" rIns="27432" tIns="18288" bIns="18288"/>
+          <a:lstStyle/>
+          <a:p>
+            <a:pPr algn="ctr"/>
+            <a:r>
+              <a:rPr sz="1100">
+                <a:solidFill>
+                  <a:srgbClr val="202020"/>
+                </a:solidFill>
+                <a:latin typeface="Calibri"/>
+              </a:rPr>
+              <a:t>scenario text</a:t>
+            </a:r>
+          </a:p>
+        </p:txBody>
+      </p:sp>
+      <p:sp>
+        <p:nvSpPr>
+          <p:cNvPr id="7" name="Rounded Rectangle 6"/>
+          <p:cNvSpPr/>
+          <p:nvPr/>
+        </p:nvSpPr>
+        <p:spPr>
+          <a:xfrm>
+            <a:off x="3200400" y="1783080"/>
+            <a:ext cx="2103120" cy="566928"/>
+          </a:xfrm>
+          <a:prstGeom prst="roundRect">
+            <a:avLst>
+              <a:gd name="adj" fmla="val 10000"/>
+            </a:avLst>
+          </a:prstGeom>
+          <a:solidFill>
+            <a:srgbClr val="EEF4FA"/>
+          </a:solidFill>
+          <a:ln w="15240">
+            <a:solidFill>
+              <a:srgbClr val="2171B5"/>
+            </a:solidFill>
+          </a:ln>
+        </p:spPr>
+        <p:style>
+          <a:lnRef idx="1">
+            <a:schemeClr val="accent1"/>
+          </a:lnRef>
+          <a:fillRef idx="3">
+            <a:schemeClr val="accent1"/>
+          </a:fillRef>
+          <a:effectRef idx="2">
+            <a:schemeClr val="accent1"/>
+          </a:effectRef>
+          <a:fontRef idx="minor">
+            <a:schemeClr val="lt1"/>
+          </a:fontRef>
+        </p:style>
+        <p:txBody>
+          <a:bodyPr rtlCol="0" anchor="ctr" wrap="square" lIns="27432" rIns="27432" tIns="18288" bIns="18288"/>
+          <a:lstStyle/>
+          <a:p>
+            <a:pPr algn="ctr"/>
+            <a:r>
+              <a:rPr sz="1100">
+                <a:solidFill>
+                  <a:srgbClr val="202020"/>
+                </a:solidFill>
+                <a:latin typeface="Calibri"/>
+              </a:rPr>
+              <a:t>LLM extracts
+</a:t>
+            </a:r>
+            <a:r>
+              <a:rPr sz="1100" b="1">
+                <a:solidFill>
+                  <a:srgbClr val="202020"/>
+                </a:solidFill>
+                <a:latin typeface="Calibri"/>
+              </a:rPr>
+              <a:t>ethical facts</a:t>
+            </a:r>
+          </a:p>
+        </p:txBody>
+      </p:sp>
+      <p:sp>
+        <p:nvSpPr>
+          <p:cNvPr id="8" name="Rounded Rectangle 7"/>
+          <p:cNvSpPr/>
+          <p:nvPr/>
+        </p:nvSpPr>
+        <p:spPr>
+          <a:xfrm>
+            <a:off x="5897880" y="1783080"/>
+            <a:ext cx="2286000" cy="566928"/>
+          </a:xfrm>
+          <a:prstGeom prst="roundRect">
+            <a:avLst>
+              <a:gd name="adj" fmla="val 10000"/>
+            </a:avLst>
+          </a:prstGeom>
+          <a:solidFill>
+            <a:srgbClr val="F3F3F3"/>
+          </a:solidFill>
+          <a:ln w="15240">
+            <a:solidFill>
+              <a:srgbClr val="636363"/>
+            </a:solidFill>
+          </a:ln>
+        </p:spPr>
+        <p:style>
+          <a:lnRef idx="1">
+            <a:schemeClr val="accent1"/>
+          </a:lnRef>
+          <a:fillRef idx="3">
+            <a:schemeClr val="accent1"/>
+          </a:fillRef>
+          <a:effectRef idx="2">
+            <a:schemeClr val="accent1"/>
+          </a:effectRef>
+          <a:fontRef idx="minor">
+            <a:schemeClr val="lt1"/>
+          </a:fontRef>
+        </p:style>
+        <p:txBody>
+          <a:bodyPr rtlCol="0" anchor="ctr" wrap="square" lIns="27432" rIns="27432" tIns="18288" bIns="18288"/>
+          <a:lstStyle/>
+          <a:p>
+            <a:pPr algn="ctr"/>
+            <a:r>
+              <a:rPr sz="1000">
+                <a:solidFill>
+                  <a:srgbClr val="202020"/>
+                </a:solidFill>
+                <a:latin typeface="Consolas"/>
+              </a:rPr>
+              <a:t>GenevaEMV3
+</a:t>
+            </a:r>
+            <a:r>
+              <a:rPr sz="1000">
+                <a:solidFill>
+                  <a:srgbClr val="202020"/>
+                </a:solidFill>
+                <a:latin typeface="Calibri"/>
+              </a:rPr>
+              <a:t>fixed rule module</a:t>
+            </a:r>
+          </a:p>
+        </p:txBody>
+      </p:sp>
+      <p:sp>
+        <p:nvSpPr>
+          <p:cNvPr id="9" name="Rounded Rectangle 8"/>
+          <p:cNvSpPr/>
+          <p:nvPr/>
+        </p:nvSpPr>
+        <p:spPr>
+          <a:xfrm>
+            <a:off x="8778240" y="1783080"/>
+            <a:ext cx="2651760" cy="566928"/>
+          </a:xfrm>
+          <a:prstGeom prst="roundRect">
+            <a:avLst>
+              <a:gd name="adj" fmla="val 10000"/>
+            </a:avLst>
+          </a:prstGeom>
+          <a:solidFill>
+            <a:srgbClr val="EEF4FA"/>
+          </a:solidFill>
+          <a:ln w="15240">
+            <a:solidFill>
+              <a:srgbClr val="2171B5"/>
+            </a:solidFill>
+          </a:ln>
+        </p:spPr>
+        <p:style>
+          <a:lnRef idx="1">
+            <a:schemeClr val="accent1"/>
+          </a:lnRef>
+          <a:fillRef idx="3">
+            <a:schemeClr val="accent1"/>
+          </a:fillRef>
+          <a:effectRef idx="2">
+            <a:schemeClr val="accent1"/>
+          </a:effectRef>
+          <a:fontRef idx="minor">
+            <a:schemeClr val="lt1"/>
+          </a:fontRef>
+        </p:style>
+        <p:txBody>
+          <a:bodyPr rtlCol="0" anchor="ctr" wrap="square" lIns="27432" rIns="27432" tIns="18288" bIns="18288"/>
+          <a:lstStyle/>
+          <a:p>
+            <a:pPr algn="ctr"/>
+            <a:r>
+              <a:rPr sz="1000">
+                <a:solidFill>
+                  <a:srgbClr val="202020"/>
+                </a:solidFill>
+                <a:latin typeface="Calibri"/>
+              </a:rPr>
+              <a:t>typed verdict
+</a:t>
+            </a:r>
+            <a:r>
+              <a:rPr sz="1000">
+                <a:solidFill>
+                  <a:srgbClr val="202020"/>
+                </a:solidFill>
+                <a:latin typeface="Consolas"/>
+              </a:rPr>
+              <a:t>forbid ⋯ strongly_prefer</a:t>
+            </a:r>
+          </a:p>
+        </p:txBody>
+      </p:sp>
+      <p:sp>
+        <p:nvSpPr>
+          <p:cNvPr id="10" name="Right Arrow 9"/>
+          <p:cNvSpPr/>
+          <p:nvPr/>
+        </p:nvSpPr>
+        <p:spPr>
+          <a:xfrm>
+            <a:off x="2724912" y="1993392"/>
+            <a:ext cx="402336" cy="146304"/>
+          </a:xfrm>
+          <a:prstGeom prst="rightArrow">
+            <a:avLst>
+              <a:gd name="adj1" fmla="val 55000"/>
+              <a:gd name="adj2" fmla="val 55000"/>
+            </a:avLst>
+          </a:prstGeom>
+          <a:solidFill>
+            <a:srgbClr val="636363"/>
+          </a:solidFill>
+          <a:ln>
+            <a:noFill/>
+          </a:ln>
+        </p:spPr>
+        <p:style>
+          <a:lnRef idx="1">
+            <a:schemeClr val="accent1"/>
+          </a:lnRef>
+          <a:fillRef idx="3">
+            <a:schemeClr val="accent1"/>
+          </a:fillRef>
+          <a:effectRef idx="2">
+            <a:schemeClr val="accent1"/>
+          </a:effectRef>
+          <a:fontRef idx="minor">
+            <a:schemeClr val="lt1"/>
+          </a:fontRef>
+        </p:style>
+        <p:txBody>
+          <a:bodyPr rtlCol="0" anchor="ctr"/>
+          <a:lstStyle/>
+          <a:p>
+            <a:pPr algn="ctr"/>
+          </a:p>
+        </p:txBody>
+      </p:sp>
+      <p:sp>
+        <p:nvSpPr>
+          <p:cNvPr id="11" name="Right Arrow 10"/>
+          <p:cNvSpPr/>
+          <p:nvPr/>
+        </p:nvSpPr>
+        <p:spPr>
+          <a:xfrm>
+            <a:off x="5376672" y="1993392"/>
+            <a:ext cx="402336" cy="146304"/>
+          </a:xfrm>
+          <a:prstGeom prst="rightArrow">
+            <a:avLst>
+              <a:gd name="adj1" fmla="val 55000"/>
+              <a:gd name="adj2" fmla="val 55000"/>
+            </a:avLst>
+          </a:prstGeom>
+          <a:solidFill>
+            <a:srgbClr val="636363"/>
+          </a:solidFill>
+          <a:ln>
+            <a:noFill/>
+          </a:ln>
+        </p:spPr>
+        <p:style>
+          <a:lnRef idx="1">
+            <a:schemeClr val="accent1"/>
+          </a:lnRef>
+          <a:fillRef idx="3">
+            <a:schemeClr val="accent1"/>
+          </a:fillRef>
+          <a:effectRef idx="2">
+            <a:schemeClr val="accent1"/>
+          </a:effectRef>
+          <a:fontRef idx="minor">
+            <a:schemeClr val="lt1"/>
+          </a:fontRef>
+        </p:style>
+        <p:txBody>
+          <a:bodyPr rtlCol="0" anchor="ctr"/>
+          <a:lstStyle/>
+          <a:p>
+            <a:pPr algn="ctr"/>
+          </a:p>
+        </p:txBody>
+      </p:sp>
+      <p:sp>
+        <p:nvSpPr>
+          <p:cNvPr id="12" name="Right Arrow 11"/>
+          <p:cNvSpPr/>
+          <p:nvPr/>
+        </p:nvSpPr>
+        <p:spPr>
+          <a:xfrm>
+            <a:off x="8257031" y="1993392"/>
+            <a:ext cx="402336" cy="146304"/>
+          </a:xfrm>
+          <a:prstGeom prst="rightArrow">
+            <a:avLst>
+              <a:gd name="adj1" fmla="val 55000"/>
+              <a:gd name="adj2" fmla="val 55000"/>
+            </a:avLst>
+          </a:prstGeom>
+          <a:solidFill>
+            <a:srgbClr val="636363"/>
+          </a:solidFill>
+          <a:ln>
+            <a:noFill/>
+          </a:ln>
+        </p:spPr>
+        <p:style>
+          <a:lnRef idx="1">
+            <a:schemeClr val="accent1"/>
+          </a:lnRef>
+          <a:fillRef idx="3">
+            <a:schemeClr val="accent1"/>
+          </a:fillRef>
+          <a:effectRef idx="2">
+            <a:schemeClr val="accent1"/>
+          </a:effectRef>
+          <a:fontRef idx="minor">
+            <a:schemeClr val="lt1"/>
+          </a:fontRef>
+        </p:style>
+        <p:txBody>
+          <a:bodyPr rtlCol="0" anchor="ctr"/>
+          <a:lstStyle/>
+          <a:p>
+            <a:pPr algn="ctr"/>
+          </a:p>
+        </p:txBody>
+      </p:sp>
+      <p:sp>
+        <p:nvSpPr>
+          <p:cNvPr id="13" name="Down Arrow 12"/>
+          <p:cNvSpPr/>
+          <p:nvPr/>
+        </p:nvSpPr>
+        <p:spPr>
+          <a:xfrm>
+            <a:off x="4133087" y="1243584"/>
+            <a:ext cx="146304" cy="457200"/>
+          </a:xfrm>
+          <a:prstGeom prst="downArrow">
+            <a:avLst>
+              <a:gd name="adj1" fmla="val 55000"/>
+              <a:gd name="adj2" fmla="val 55000"/>
+            </a:avLst>
+          </a:prstGeom>
+          <a:solidFill>
+            <a:srgbClr val="D95F02"/>
+          </a:solidFill>
+          <a:ln>
+            <a:noFill/>
+          </a:ln>
+        </p:spPr>
+        <p:style>
+          <a:lnRef idx="1">
+            <a:schemeClr val="accent1"/>
+          </a:lnRef>
+          <a:fillRef idx="3">
+            <a:schemeClr val="accent1"/>
+          </a:fillRef>
+          <a:effectRef idx="2">
+            <a:schemeClr val="accent1"/>
+          </a:effectRef>
+          <a:fontRef idx="minor">
+            <a:schemeClr val="lt1"/>
+          </a:fontRef>
+        </p:style>
+        <p:txBody>
+          <a:bodyPr rtlCol="0" anchor="ctr"/>
+          <a:lstStyle/>
+          <a:p>
+            <a:pPr algn="ctr"/>
+          </a:p>
+        </p:txBody>
+      </p:sp>
+      <p:sp>
+        <p:nvSpPr>
+          <p:cNvPr id="14" name="TextBox 13"/>
+          <p:cNvSpPr txBox="1"/>
+          <p:nvPr/>
+        </p:nvSpPr>
+        <p:spPr>
+          <a:xfrm>
+            <a:off x="4526280" y="1188720"/>
+            <a:ext cx="3291840" cy="457200"/>
+          </a:xfrm>
+          <a:prstGeom prst="rect">
+            <a:avLst/>
+          </a:prstGeom>
+          <a:noFill/>
+        </p:spPr>
+        <p:txBody>
+          <a:bodyPr wrap="square">
+            <a:spAutoFit/>
+          </a:bodyPr>
+          <a:lstStyle/>
+          <a:p>
+            <a:pPr algn="l">
+              <a:spcAft>
+                <a:spcPts val="600"/>
+              </a:spcAft>
+            </a:pPr>
+            <a:r>
+              <a:rPr sz="1100">
+                <a:solidFill>
+                  <a:srgbClr val="202020"/>
+                </a:solidFill>
+                <a:latin typeface="Calibri"/>
+              </a:rPr>
+              <a:t>euphemistic rewrite lands </a:t>
+            </a:r>
+            <a:r>
+              <a:rPr sz="1100" b="1">
+                <a:solidFill>
+                  <a:srgbClr val="D95F02"/>
+                </a:solidFill>
+                <a:latin typeface="Calibri"/>
+              </a:rPr>
+              <a:t>HERE</a:t>
+            </a:r>
+          </a:p>
+        </p:txBody>
+      </p:sp>
+      <p:sp>
+        <p:nvSpPr>
+          <p:cNvPr id="15" name="TextBox 14"/>
+          <p:cNvSpPr txBox="1"/>
+          <p:nvPr/>
+        </p:nvSpPr>
+        <p:spPr>
+          <a:xfrm>
+            <a:off x="5897880" y="2377440"/>
+            <a:ext cx="2286000" cy="274320"/>
+          </a:xfrm>
+          <a:prstGeom prst="rect">
+            <a:avLst/>
+          </a:prstGeom>
+          <a:noFill/>
+        </p:spPr>
+        <p:txBody>
+          <a:bodyPr wrap="square">
+            <a:spAutoFit/>
+          </a:bodyPr>
+          <a:lstStyle/>
           <a:p>
             <a:pPr algn="ctr">
               <a:spcAft>
@@ -11954,72 +14073,27 @@
               </a:spcAft>
             </a:pPr>
             <a:r>
-              <a:rPr sz="1400">
-                <a:solidFill>
-                  <a:srgbClr val="202020"/>
-                </a:solidFill>
-                <a:latin typeface="Calibri"/>
-              </a:rPr>
-              <a:t>text → </a:t>
-            </a:r>
-            <a:r>
-              <a:rPr sz="1400" b="1">
-                <a:solidFill>
-                  <a:srgbClr val="2171B5"/>
-                </a:solidFill>
-                <a:latin typeface="Calibri"/>
-              </a:rPr>
-              <a:t>LLM extracts ethical facts</a:t>
-            </a:r>
-            <a:r>
-              <a:rPr sz="1400">
-                <a:solidFill>
-                  <a:srgbClr val="202020"/>
-                </a:solidFill>
-                <a:latin typeface="Calibri"/>
-              </a:rPr>
-              <a:t> → </a:t>
-            </a:r>
-            <a:r>
-              <a:rPr sz="1400">
-                <a:solidFill>
-                  <a:srgbClr val="202020"/>
-                </a:solidFill>
-                <a:latin typeface="Consolas"/>
-              </a:rPr>
-              <a:t>GenevaEMV3</a:t>
-            </a:r>
-            <a:r>
-              <a:rPr sz="1400">
-                <a:solidFill>
-                  <a:srgbClr val="202020"/>
-                </a:solidFill>
-                <a:latin typeface="Calibri"/>
-              </a:rPr>
-              <a:t> → typed verdict   </a:t>
-            </a:r>
-            <a:r>
-              <a:rPr sz="1400">
-                <a:solidFill>
-                  <a:srgbClr val="202020"/>
-                </a:solidFill>
-                <a:latin typeface="Calibri"/>
-              </a:rPr>
-              <a:t>(forbid → avoid → neutral → prefer → strongly_prefer)</a:t>
-            </a:r>
-          </a:p>
-        </p:txBody>
-      </p:sp>
-      <p:sp>
-        <p:nvSpPr>
-          <p:cNvPr id="6" name="Rounded Rectangle 5"/>
+              <a:rPr sz="900">
+                <a:solidFill>
+                  <a:srgbClr val="636363"/>
+                </a:solidFill>
+                <a:latin typeface="Calibri"/>
+              </a:rPr>
+              <a:t>rules unchanged</a:t>
+            </a:r>
+          </a:p>
+        </p:txBody>
+      </p:sp>
+      <p:sp>
+        <p:nvSpPr>
+          <p:cNvPr id="16" name="Rounded Rectangle 15"/>
           <p:cNvSpPr/>
           <p:nvPr/>
         </p:nvSpPr>
         <p:spPr>
           <a:xfrm>
-            <a:off x="502920" y="2331720"/>
-            <a:ext cx="11155680" cy="2286000"/>
+            <a:off x="502920" y="2880360"/>
+            <a:ext cx="11155680" cy="2103120"/>
           </a:xfrm>
           <a:prstGeom prst="roundRect">
             <a:avLst>
@@ -12176,14 +14250,14 @@
       </p:sp>
       <p:sp>
         <p:nvSpPr>
-          <p:cNvPr id="7" name="TextBox 6"/>
+          <p:cNvPr id="17" name="TextBox 16"/>
           <p:cNvSpPr txBox="1"/>
           <p:nvPr/>
         </p:nvSpPr>
         <p:spPr>
           <a:xfrm>
-            <a:off x="502920" y="4983480"/>
-            <a:ext cx="11155680" cy="1097280"/>
+            <a:off x="502920" y="5212080"/>
+            <a:ext cx="11155680" cy="914400"/>
           </a:xfrm>
           <a:prstGeom prst="rect">
             <a:avLst/>
@@ -12382,8 +14456,8 @@
         </p:nvSpPr>
         <p:spPr>
           <a:xfrm>
-            <a:off x="502920" y="841248"/>
-            <a:ext cx="11155680" cy="4937760"/>
+            <a:off x="502920" y="822960"/>
+            <a:ext cx="11155680" cy="365760"/>
           </a:xfrm>
           <a:prstGeom prst="rect">
             <a:avLst/>
@@ -12398,11 +14472,11 @@
           <a:p>
             <a:pPr algn="l">
               <a:spcAft>
-                <a:spcPts val="800"/>
+                <a:spcPts val="600"/>
               </a:spcAft>
             </a:pPr>
             <a:r>
-              <a:rPr sz="1300">
+              <a:rPr sz="1200">
                 <a:solidFill>
                   <a:srgbClr val="636363"/>
                 </a:solidFill>
@@ -12411,7 +14485,7 @@
               <a:t>Second instantiation from here on: validated learned encoders (</a:t>
             </a:r>
             <a:r>
-              <a:rPr sz="1300">
+              <a:rPr sz="1200">
                 <a:solidFill>
                   <a:srgbClr val="636363"/>
                 </a:solidFill>
@@ -12420,7 +14494,7 @@
               <a:t>xbse</a:t>
             </a:r>
             <a:r>
-              <a:rPr sz="1300">
+              <a:rPr sz="1200">
                 <a:solidFill>
                   <a:srgbClr val="636363"/>
                 </a:solidFill>
@@ -12429,6 +14503,619 @@
               <a:t>) replace LLM judges; same DEME kernel.</a:t>
             </a:r>
           </a:p>
+        </p:txBody>
+      </p:sp>
+      <p:sp>
+        <p:nvSpPr>
+          <p:cNvPr id="6" name="Rounded Rectangle 5"/>
+          <p:cNvSpPr/>
+          <p:nvPr/>
+        </p:nvSpPr>
+        <p:spPr>
+          <a:xfrm>
+            <a:off x="640080" y="1417320"/>
+            <a:ext cx="1234440" cy="548640"/>
+          </a:xfrm>
+          <a:prstGeom prst="roundRect">
+            <a:avLst>
+              <a:gd name="adj" fmla="val 10000"/>
+            </a:avLst>
+          </a:prstGeom>
+          <a:solidFill>
+            <a:srgbClr val="EEF4FA"/>
+          </a:solidFill>
+          <a:ln w="15240">
+            <a:solidFill>
+              <a:srgbClr val="2171B5"/>
+            </a:solidFill>
+          </a:ln>
+        </p:spPr>
+        <p:style>
+          <a:lnRef idx="1">
+            <a:schemeClr val="accent1"/>
+          </a:lnRef>
+          <a:fillRef idx="3">
+            <a:schemeClr val="accent1"/>
+          </a:fillRef>
+          <a:effectRef idx="2">
+            <a:schemeClr val="accent1"/>
+          </a:effectRef>
+          <a:fontRef idx="minor">
+            <a:schemeClr val="lt1"/>
+          </a:fontRef>
+        </p:style>
+        <p:txBody>
+          <a:bodyPr rtlCol="0" anchor="ctr" wrap="square" lIns="27432" rIns="27432" tIns="18288" bIns="18288"/>
+          <a:lstStyle/>
+          <a:p>
+            <a:pPr algn="ctr"/>
+            <a:r>
+              <a:rPr sz="1100">
+                <a:solidFill>
+                  <a:srgbClr val="202020"/>
+                </a:solidFill>
+                <a:latin typeface="Calibri"/>
+              </a:rPr>
+              <a:t>input x</a:t>
+            </a:r>
+          </a:p>
+        </p:txBody>
+      </p:sp>
+      <p:sp>
+        <p:nvSpPr>
+          <p:cNvPr id="7" name="Rounded Rectangle 6"/>
+          <p:cNvSpPr/>
+          <p:nvPr/>
+        </p:nvSpPr>
+        <p:spPr>
+          <a:xfrm>
+            <a:off x="2377440" y="1417320"/>
+            <a:ext cx="2331720" cy="548640"/>
+          </a:xfrm>
+          <a:prstGeom prst="roundRect">
+            <a:avLst>
+              <a:gd name="adj" fmla="val 10000"/>
+            </a:avLst>
+          </a:prstGeom>
+          <a:solidFill>
+            <a:srgbClr val="FCF1E8"/>
+          </a:solidFill>
+          <a:ln w="15240">
+            <a:solidFill>
+              <a:srgbClr val="D95F02"/>
+            </a:solidFill>
+            <a:prstDash val="dash"/>
+          </a:ln>
+        </p:spPr>
+        <p:style>
+          <a:lnRef idx="1">
+            <a:schemeClr val="accent1"/>
+          </a:lnRef>
+          <a:fillRef idx="3">
+            <a:schemeClr val="accent1"/>
+          </a:fillRef>
+          <a:effectRef idx="2">
+            <a:schemeClr val="accent1"/>
+          </a:effectRef>
+          <a:fontRef idx="minor">
+            <a:schemeClr val="lt1"/>
+          </a:fontRef>
+        </p:style>
+        <p:txBody>
+          <a:bodyPr rtlCol="0" anchor="ctr" wrap="square" lIns="27432" rIns="27432" tIns="18288" bIns="18288"/>
+          <a:lstStyle/>
+          <a:p>
+            <a:pPr algn="ctr"/>
+            <a:r>
+              <a:rPr sz="1000">
+                <a:solidFill>
+                  <a:srgbClr val="202020"/>
+                </a:solidFill>
+                <a:latin typeface="Calibri"/>
+              </a:rPr>
+              <a:t>paraphrase class
+</a:t>
+            </a:r>
+            <a:r>
+              <a:rPr sz="1000">
+                <a:solidFill>
+                  <a:srgbClr val="202020"/>
+                </a:solidFill>
+                <a:latin typeface="Calibri"/>
+              </a:rPr>
+              <a:t>x₁ ⋯ xₘ (generated)</a:t>
+            </a:r>
+          </a:p>
+        </p:txBody>
+      </p:sp>
+      <p:sp>
+        <p:nvSpPr>
+          <p:cNvPr id="8" name="Rounded Rectangle 7"/>
+          <p:cNvSpPr/>
+          <p:nvPr/>
+        </p:nvSpPr>
+        <p:spPr>
+          <a:xfrm>
+            <a:off x="5212080" y="1417320"/>
+            <a:ext cx="1783080" cy="548640"/>
+          </a:xfrm>
+          <a:prstGeom prst="roundRect">
+            <a:avLst>
+              <a:gd name="adj" fmla="val 10000"/>
+            </a:avLst>
+          </a:prstGeom>
+          <a:solidFill>
+            <a:srgbClr val="EEF4FA"/>
+          </a:solidFill>
+          <a:ln w="15240">
+            <a:solidFill>
+              <a:srgbClr val="2171B5"/>
+            </a:solidFill>
+          </a:ln>
+        </p:spPr>
+        <p:style>
+          <a:lnRef idx="1">
+            <a:schemeClr val="accent1"/>
+          </a:lnRef>
+          <a:fillRef idx="3">
+            <a:schemeClr val="accent1"/>
+          </a:fillRef>
+          <a:effectRef idx="2">
+            <a:schemeClr val="accent1"/>
+          </a:effectRef>
+          <a:fontRef idx="minor">
+            <a:schemeClr val="lt1"/>
+          </a:fontRef>
+        </p:style>
+        <p:txBody>
+          <a:bodyPr rtlCol="0" anchor="ctr" wrap="square" lIns="27432" rIns="27432" tIns="18288" bIns="18288"/>
+          <a:lstStyle/>
+          <a:p>
+            <a:pPr algn="ctr"/>
+            <a:r>
+              <a:rPr sz="1100">
+                <a:solidFill>
+                  <a:srgbClr val="202020"/>
+                </a:solidFill>
+                <a:latin typeface="Calibri"/>
+              </a:rPr>
+              <a:t>validated encoders</a:t>
+            </a:r>
+          </a:p>
+        </p:txBody>
+      </p:sp>
+      <p:sp>
+        <p:nvSpPr>
+          <p:cNvPr id="9" name="Rounded Rectangle 8"/>
+          <p:cNvSpPr/>
+          <p:nvPr/>
+        </p:nvSpPr>
+        <p:spPr>
+          <a:xfrm>
+            <a:off x="7498079" y="1417320"/>
+            <a:ext cx="1920240" cy="548640"/>
+          </a:xfrm>
+          <a:prstGeom prst="roundRect">
+            <a:avLst>
+              <a:gd name="adj" fmla="val 10000"/>
+            </a:avLst>
+          </a:prstGeom>
+          <a:solidFill>
+            <a:srgbClr val="E9F5F1"/>
+          </a:solidFill>
+          <a:ln w="15240">
+            <a:solidFill>
+              <a:srgbClr val="1B9E77"/>
+            </a:solidFill>
+          </a:ln>
+        </p:spPr>
+        <p:style>
+          <a:lnRef idx="1">
+            <a:schemeClr val="accent1"/>
+          </a:lnRef>
+          <a:fillRef idx="3">
+            <a:schemeClr val="accent1"/>
+          </a:fillRef>
+          <a:effectRef idx="2">
+            <a:schemeClr val="accent1"/>
+          </a:effectRef>
+          <a:fontRef idx="minor">
+            <a:schemeClr val="lt1"/>
+          </a:fontRef>
+        </p:style>
+        <p:txBody>
+          <a:bodyPr rtlCol="0" anchor="ctr" wrap="square" lIns="27432" rIns="27432" tIns="18288" bIns="18288"/>
+          <a:lstStyle/>
+          <a:p>
+            <a:pPr algn="ctr"/>
+            <a:r>
+              <a:rPr sz="1000" b="1">
+                <a:solidFill>
+                  <a:srgbClr val="202020"/>
+                </a:solidFill>
+                <a:latin typeface="Calibri"/>
+              </a:rPr>
+              <a:t>average
+</a:t>
+            </a:r>
+            <a:r>
+              <a:rPr sz="1000">
+                <a:solidFill>
+                  <a:srgbClr val="202020"/>
+                </a:solidFill>
+                <a:latin typeface="Calibri"/>
+              </a:rPr>
+              <a:t>over the class</a:t>
+            </a:r>
+          </a:p>
+        </p:txBody>
+      </p:sp>
+      <p:sp>
+        <p:nvSpPr>
+          <p:cNvPr id="10" name="Rounded Rectangle 9"/>
+          <p:cNvSpPr/>
+          <p:nvPr/>
+        </p:nvSpPr>
+        <p:spPr>
+          <a:xfrm>
+            <a:off x="9921240" y="1417320"/>
+            <a:ext cx="1280160" cy="548640"/>
+          </a:xfrm>
+          <a:prstGeom prst="roundRect">
+            <a:avLst>
+              <a:gd name="adj" fmla="val 10000"/>
+            </a:avLst>
+          </a:prstGeom>
+          <a:solidFill>
+            <a:srgbClr val="EEF4FA"/>
+          </a:solidFill>
+          <a:ln w="15240">
+            <a:solidFill>
+              <a:srgbClr val="2171B5"/>
+            </a:solidFill>
+          </a:ln>
+        </p:spPr>
+        <p:style>
+          <a:lnRef idx="1">
+            <a:schemeClr val="accent1"/>
+          </a:lnRef>
+          <a:fillRef idx="3">
+            <a:schemeClr val="accent1"/>
+          </a:fillRef>
+          <a:effectRef idx="2">
+            <a:schemeClr val="accent1"/>
+          </a:effectRef>
+          <a:fontRef idx="minor">
+            <a:schemeClr val="lt1"/>
+          </a:fontRef>
+        </p:style>
+        <p:txBody>
+          <a:bodyPr rtlCol="0" anchor="ctr" wrap="square" lIns="27432" rIns="27432" tIns="18288" bIns="18288"/>
+          <a:lstStyle/>
+          <a:p>
+            <a:pPr algn="ctr"/>
+            <a:r>
+              <a:rPr sz="1100">
+                <a:solidFill>
+                  <a:srgbClr val="202020"/>
+                </a:solidFill>
+                <a:latin typeface="Calibri"/>
+              </a:rPr>
+              <a:t>decide</a:t>
+            </a:r>
+          </a:p>
+        </p:txBody>
+      </p:sp>
+      <p:sp>
+        <p:nvSpPr>
+          <p:cNvPr id="11" name="Right Arrow 10"/>
+          <p:cNvSpPr/>
+          <p:nvPr/>
+        </p:nvSpPr>
+        <p:spPr>
+          <a:xfrm>
+            <a:off x="1920240" y="1618488"/>
+            <a:ext cx="402336" cy="146304"/>
+          </a:xfrm>
+          <a:prstGeom prst="rightArrow">
+            <a:avLst>
+              <a:gd name="adj1" fmla="val 55000"/>
+              <a:gd name="adj2" fmla="val 55000"/>
+            </a:avLst>
+          </a:prstGeom>
+          <a:solidFill>
+            <a:srgbClr val="636363"/>
+          </a:solidFill>
+          <a:ln>
+            <a:noFill/>
+          </a:ln>
+        </p:spPr>
+        <p:style>
+          <a:lnRef idx="1">
+            <a:schemeClr val="accent1"/>
+          </a:lnRef>
+          <a:fillRef idx="3">
+            <a:schemeClr val="accent1"/>
+          </a:fillRef>
+          <a:effectRef idx="2">
+            <a:schemeClr val="accent1"/>
+          </a:effectRef>
+          <a:fontRef idx="minor">
+            <a:schemeClr val="lt1"/>
+          </a:fontRef>
+        </p:style>
+        <p:txBody>
+          <a:bodyPr rtlCol="0" anchor="ctr"/>
+          <a:lstStyle/>
+          <a:p>
+            <a:pPr algn="ctr"/>
+          </a:p>
+        </p:txBody>
+      </p:sp>
+      <p:sp>
+        <p:nvSpPr>
+          <p:cNvPr id="12" name="Right Arrow 11"/>
+          <p:cNvSpPr/>
+          <p:nvPr/>
+        </p:nvSpPr>
+        <p:spPr>
+          <a:xfrm>
+            <a:off x="4754880" y="1618488"/>
+            <a:ext cx="402336" cy="146304"/>
+          </a:xfrm>
+          <a:prstGeom prst="rightArrow">
+            <a:avLst>
+              <a:gd name="adj1" fmla="val 55000"/>
+              <a:gd name="adj2" fmla="val 55000"/>
+            </a:avLst>
+          </a:prstGeom>
+          <a:solidFill>
+            <a:srgbClr val="636363"/>
+          </a:solidFill>
+          <a:ln>
+            <a:noFill/>
+          </a:ln>
+        </p:spPr>
+        <p:style>
+          <a:lnRef idx="1">
+            <a:schemeClr val="accent1"/>
+          </a:lnRef>
+          <a:fillRef idx="3">
+            <a:schemeClr val="accent1"/>
+          </a:fillRef>
+          <a:effectRef idx="2">
+            <a:schemeClr val="accent1"/>
+          </a:effectRef>
+          <a:fontRef idx="minor">
+            <a:schemeClr val="lt1"/>
+          </a:fontRef>
+        </p:style>
+        <p:txBody>
+          <a:bodyPr rtlCol="0" anchor="ctr"/>
+          <a:lstStyle/>
+          <a:p>
+            <a:pPr algn="ctr"/>
+          </a:p>
+        </p:txBody>
+      </p:sp>
+      <p:sp>
+        <p:nvSpPr>
+          <p:cNvPr id="13" name="Right Arrow 12"/>
+          <p:cNvSpPr/>
+          <p:nvPr/>
+        </p:nvSpPr>
+        <p:spPr>
+          <a:xfrm>
+            <a:off x="7040880" y="1618488"/>
+            <a:ext cx="402336" cy="146304"/>
+          </a:xfrm>
+          <a:prstGeom prst="rightArrow">
+            <a:avLst>
+              <a:gd name="adj1" fmla="val 55000"/>
+              <a:gd name="adj2" fmla="val 55000"/>
+            </a:avLst>
+          </a:prstGeom>
+          <a:solidFill>
+            <a:srgbClr val="636363"/>
+          </a:solidFill>
+          <a:ln>
+            <a:noFill/>
+          </a:ln>
+        </p:spPr>
+        <p:style>
+          <a:lnRef idx="1">
+            <a:schemeClr val="accent1"/>
+          </a:lnRef>
+          <a:fillRef idx="3">
+            <a:schemeClr val="accent1"/>
+          </a:fillRef>
+          <a:effectRef idx="2">
+            <a:schemeClr val="accent1"/>
+          </a:effectRef>
+          <a:fontRef idx="minor">
+            <a:schemeClr val="lt1"/>
+          </a:fontRef>
+        </p:style>
+        <p:txBody>
+          <a:bodyPr rtlCol="0" anchor="ctr"/>
+          <a:lstStyle/>
+          <a:p>
+            <a:pPr algn="ctr"/>
+          </a:p>
+        </p:txBody>
+      </p:sp>
+      <p:sp>
+        <p:nvSpPr>
+          <p:cNvPr id="14" name="Right Arrow 13"/>
+          <p:cNvSpPr/>
+          <p:nvPr/>
+        </p:nvSpPr>
+        <p:spPr>
+          <a:xfrm>
+            <a:off x="9464040" y="1618488"/>
+            <a:ext cx="402336" cy="146304"/>
+          </a:xfrm>
+          <a:prstGeom prst="rightArrow">
+            <a:avLst>
+              <a:gd name="adj1" fmla="val 55000"/>
+              <a:gd name="adj2" fmla="val 55000"/>
+            </a:avLst>
+          </a:prstGeom>
+          <a:solidFill>
+            <a:srgbClr val="636363"/>
+          </a:solidFill>
+          <a:ln>
+            <a:noFill/>
+          </a:ln>
+        </p:spPr>
+        <p:style>
+          <a:lnRef idx="1">
+            <a:schemeClr val="accent1"/>
+          </a:lnRef>
+          <a:fillRef idx="3">
+            <a:schemeClr val="accent1"/>
+          </a:fillRef>
+          <a:effectRef idx="2">
+            <a:schemeClr val="accent1"/>
+          </a:effectRef>
+          <a:fontRef idx="minor">
+            <a:schemeClr val="lt1"/>
+          </a:fontRef>
+        </p:style>
+        <p:txBody>
+          <a:bodyPr rtlCol="0" anchor="ctr"/>
+          <a:lstStyle/>
+          <a:p>
+            <a:pPr algn="ctr"/>
+          </a:p>
+        </p:txBody>
+      </p:sp>
+      <p:sp>
+        <p:nvSpPr>
+          <p:cNvPr id="15" name="TextBox 14"/>
+          <p:cNvSpPr txBox="1"/>
+          <p:nvPr/>
+        </p:nvSpPr>
+        <p:spPr>
+          <a:xfrm>
+            <a:off x="1965960" y="2029968"/>
+            <a:ext cx="3291840" cy="548640"/>
+          </a:xfrm>
+          <a:prstGeom prst="rect">
+            <a:avLst/>
+          </a:prstGeom>
+          <a:noFill/>
+        </p:spPr>
+        <p:txBody>
+          <a:bodyPr wrap="square">
+            <a:spAutoFit/>
+          </a:bodyPr>
+          <a:lstStyle/>
+          <a:p>
+            <a:pPr algn="ctr">
+              <a:spcAft>
+                <a:spcPts val="600"/>
+              </a:spcAft>
+            </a:pPr>
+            <a:r>
+              <a:rPr sz="900">
+                <a:solidFill>
+                  <a:srgbClr val="D95F02"/>
+                </a:solidFill>
+                <a:latin typeface="Calibri"/>
+              </a:rPr>
+              <a:t>the measured hole: a euphemistic x yields a class that </a:t>
+            </a:r>
+            <a:r>
+              <a:rPr sz="900" i="1">
+                <a:solidFill>
+                  <a:srgbClr val="D95F02"/>
+                </a:solidFill>
+                <a:latin typeface="Calibri"/>
+              </a:rPr>
+              <a:t>stays</a:t>
+            </a:r>
+            <a:r>
+              <a:rPr sz="900">
+                <a:solidFill>
+                  <a:srgbClr val="D95F02"/>
+                </a:solidFill>
+                <a:latin typeface="Calibri"/>
+              </a:rPr>
+              <a:t> euphemistic</a:t>
+            </a:r>
+          </a:p>
+        </p:txBody>
+      </p:sp>
+      <p:sp>
+        <p:nvSpPr>
+          <p:cNvPr id="16" name="TextBox 15"/>
+          <p:cNvSpPr txBox="1"/>
+          <p:nvPr/>
+        </p:nvSpPr>
+        <p:spPr>
+          <a:xfrm>
+            <a:off x="9281160" y="2029968"/>
+            <a:ext cx="2560320" cy="548640"/>
+          </a:xfrm>
+          <a:prstGeom prst="rect">
+            <a:avLst/>
+          </a:prstGeom>
+          <a:noFill/>
+        </p:spPr>
+        <p:txBody>
+          <a:bodyPr wrap="square">
+            <a:spAutoFit/>
+          </a:bodyPr>
+          <a:lstStyle/>
+          <a:p>
+            <a:pPr algn="ctr">
+              <a:spcAft>
+                <a:spcPts val="600"/>
+              </a:spcAft>
+            </a:pPr>
+            <a:r>
+              <a:rPr sz="900">
+                <a:solidFill>
+                  <a:srgbClr val="636363"/>
+                </a:solidFill>
+                <a:latin typeface="Calibri"/>
+              </a:rPr>
+              <a:t>refusal → singleton → </a:t>
+            </a:r>
+            <a:r>
+              <a:rPr sz="900" b="1">
+                <a:solidFill>
+                  <a:srgbClr val="636363"/>
+                </a:solidFill>
+                <a:latin typeface="Calibri"/>
+              </a:rPr>
+              <a:t>escalate</a:t>
+            </a:r>
+          </a:p>
+        </p:txBody>
+      </p:sp>
+      <p:sp>
+        <p:nvSpPr>
+          <p:cNvPr id="17" name="TextBox 16"/>
+          <p:cNvSpPr txBox="1"/>
+          <p:nvPr/>
+        </p:nvSpPr>
+        <p:spPr>
+          <a:xfrm>
+            <a:off x="502920" y="2697480"/>
+            <a:ext cx="11155680" cy="2743200"/>
+          </a:xfrm>
+          <a:prstGeom prst="rect">
+            <a:avLst/>
+          </a:prstGeom>
+          <a:noFill/>
+        </p:spPr>
+        <p:txBody>
+          <a:bodyPr wrap="square">
+            <a:spAutoFit/>
+          </a:bodyPr>
+          <a:lstStyle/>
           <a:p>
             <a:pPr algn="l">
               <a:spcAft>
@@ -12436,198 +15123,76 @@
               </a:spcAft>
             </a:pPr>
             <a:r>
-              <a:rPr sz="1600" b="1">
-                <a:solidFill>
-                  <a:srgbClr val="202020"/>
-                </a:solidFill>
-                <a:latin typeface="Calibri"/>
-              </a:rPr>
-              <a:t>Equivalence-class averaging</a:t>
-            </a:r>
-            <a:r>
-              <a:rPr sz="1600">
-                <a:solidFill>
-                  <a:srgbClr val="202020"/>
-                </a:solidFill>
-                <a:latin typeface="Calibri"/>
-              </a:rPr>
-              <a:t>: generate the input's paraphrase class (m paraphrases), </a:t>
-            </a:r>
-            <a:r>
-              <a:rPr sz="1600" b="1">
+              <a:rPr sz="1500" b="1">
                 <a:solidFill>
                   <a:srgbClr val="2171B5"/>
                 </a:solidFill>
                 <a:latin typeface="Calibri"/>
               </a:rPr>
-              <a:t>average per-dimension perception over the class</a:t>
-            </a:r>
-            <a:r>
-              <a:rPr sz="1600">
-                <a:solidFill>
-                  <a:srgbClr val="202020"/>
-                </a:solidFill>
-                <a:latin typeface="Calibri"/>
-              </a:rPr>
-              <a:t>, then decide.</a:t>
-            </a:r>
-          </a:p>
-          <a:p>
-            <a:pPr algn="l">
-              <a:spcAft>
-                <a:spcPts val="1000"/>
-              </a:spcAft>
-            </a:pPr>
-            <a:r>
-              <a:rPr sz="1600" b="1">
+              <a:t>▪  </a:t>
+            </a:r>
+            <a:r>
+              <a:rPr sz="1500">
+                <a:solidFill>
+                  <a:srgbClr val="202020"/>
+                </a:solidFill>
+                <a:latin typeface="Calibri"/>
+              </a:rPr>
+              <a:t>At scale (60 held-out items, m = 6): raw drift </a:t>
+            </a:r>
+            <a:r>
+              <a:rPr sz="1500" b="1">
+                <a:solidFill>
+                  <a:srgbClr val="D95F02"/>
+                </a:solidFill>
+                <a:latin typeface="Calibri"/>
+              </a:rPr>
+              <a:t>0.407 → θₔ = 0.219</a:t>
+            </a:r>
+            <a:r>
+              <a:rPr sz="1500">
+                <a:solidFill>
+                  <a:srgbClr val="202020"/>
+                </a:solidFill>
+                <a:latin typeface="Calibri"/>
+              </a:rPr>
+              <a:t> — the mechanism </a:t>
+            </a:r>
+            <a:r>
+              <a:rPr sz="1500" b="1">
                 <a:solidFill>
                   <a:srgbClr val="2171B5"/>
                 </a:solidFill>
                 <a:latin typeface="Calibri"/>
               </a:rPr>
-              <a:t>▪  </a:t>
-            </a:r>
-            <a:r>
-              <a:rPr sz="1600">
-                <a:solidFill>
-                  <a:srgbClr val="202020"/>
-                </a:solidFill>
-                <a:latin typeface="Calibri"/>
-              </a:rPr>
-              <a:t>At scale (60 held-out items, m = 6): raw drift </a:t>
-            </a:r>
-            <a:r>
-              <a:rPr sz="1600" b="1">
-                <a:solidFill>
-                  <a:srgbClr val="D95F02"/>
-                </a:solidFill>
-                <a:latin typeface="Calibri"/>
-              </a:rPr>
-              <a:t>0.407 → θₔ = 0.219</a:t>
-            </a:r>
-            <a:r>
-              <a:rPr sz="1600">
-                <a:solidFill>
-                  <a:srgbClr val="202020"/>
-                </a:solidFill>
-                <a:latin typeface="Calibri"/>
-              </a:rPr>
-              <a:t> — the mechanism </a:t>
-            </a:r>
-            <a:r>
-              <a:rPr sz="1600" b="1">
+              <a:t>halves</a:t>
+            </a:r>
+            <a:r>
+              <a:rPr sz="1500">
+                <a:solidFill>
+                  <a:srgbClr val="202020"/>
+                </a:solidFill>
+                <a:latin typeface="Calibri"/>
+              </a:rPr>
+              <a:t> salience drift (θₔ: mean per-dimension decision movement). The registered bar θₔ ≤ 0.5 </a:t>
+            </a:r>
+            <a:r>
+              <a:rPr sz="1500" b="1">
                 <a:solidFill>
                   <a:srgbClr val="2171B5"/>
                 </a:solidFill>
                 <a:latin typeface="Calibri"/>
               </a:rPr>
-              <a:t>halves</a:t>
-            </a:r>
-            <a:r>
-              <a:rPr sz="1600">
-                <a:solidFill>
-                  <a:srgbClr val="202020"/>
-                </a:solidFill>
-                <a:latin typeface="Calibri"/>
-              </a:rPr>
-              <a:t> salience drift (θₔ: mean per-dimension decision movement). The registered bar θₔ ≤ 0.5 </a:t>
-            </a:r>
-            <a:r>
-              <a:rPr sz="1600" b="1">
-                <a:solidFill>
-                  <a:srgbClr val="2171B5"/>
-                </a:solidFill>
-                <a:latin typeface="Calibri"/>
-              </a:rPr>
               <a:t>binds for adversarial-register inputs</a:t>
             </a:r>
             <a:r>
-              <a:rPr sz="1600">
+              <a:rPr sz="1500">
                 <a:solidFill>
                   <a:srgbClr val="202020"/>
                 </a:solidFill>
                 <a:latin typeface="Calibri"/>
               </a:rPr>
               <a:t> (raw 0.67–0.85); the defended run there is the registered open item.</a:t>
-            </a:r>
-          </a:p>
-          <a:p>
-            <a:pPr algn="l">
-              <a:spcAft>
-                <a:spcPts val="1000"/>
-              </a:spcAft>
-            </a:pPr>
-            <a:r>
-              <a:rPr sz="1600" b="1">
-                <a:solidFill>
-                  <a:srgbClr val="2171B5"/>
-                </a:solidFill>
-                <a:latin typeface="Calibri"/>
-              </a:rPr>
-              <a:t>▪  </a:t>
-            </a:r>
-            <a:r>
-              <a:rPr sz="1600">
-                <a:solidFill>
-                  <a:srgbClr val="202020"/>
-                </a:solidFill>
-                <a:latin typeface="Calibri"/>
-              </a:rPr>
-              <a:t>LLM paraphrasers </a:t>
-            </a:r>
-            <a:r>
-              <a:rPr sz="1600" b="1">
-                <a:solidFill>
-                  <a:srgbClr val="D95F02"/>
-                </a:solidFill>
-                <a:latin typeface="Calibri"/>
-              </a:rPr>
-              <a:t>refuse 24%</a:t>
-            </a:r>
-            <a:r>
-              <a:rPr sz="1600">
-                <a:solidFill>
-                  <a:srgbClr val="202020"/>
-                </a:solidFill>
-                <a:latin typeface="Calibri"/>
-              </a:rPr>
-              <a:t> of harmful inputs. A non-refusing red-team paraphraser (NLLB back-translation, 6 pivots): </a:t>
-            </a:r>
-            <a:r>
-              <a:rPr sz="1600" b="1">
-                <a:solidFill>
-                  <a:srgbClr val="D95F02"/>
-                </a:solidFill>
-                <a:latin typeface="Calibri"/>
-              </a:rPr>
-              <a:t>θₔ = 0.301</a:t>
-            </a:r>
-            <a:r>
-              <a:rPr sz="1600">
-                <a:solidFill>
-                  <a:srgbClr val="202020"/>
-                </a:solidFill>
-                <a:latin typeface="Calibri"/>
-              </a:rPr>
-              <a:t> on harmful content — the weakness is the </a:t>
-            </a:r>
-            <a:r>
-              <a:rPr sz="1600" b="1">
-                <a:solidFill>
-                  <a:srgbClr val="2171B5"/>
-                </a:solidFill>
-                <a:latin typeface="Calibri"/>
-              </a:rPr>
-              <a:t>generator's</a:t>
-            </a:r>
-            <a:r>
-              <a:rPr sz="1600">
-                <a:solidFill>
-                  <a:srgbClr val="202020"/>
-                </a:solidFill>
-                <a:latin typeface="Calibri"/>
-              </a:rPr>
-              <a:t>, not the mechanism's.</a:t>
             </a:r>
           </a:p>
           <a:p>
@@ -12637,7 +15202,7 @@
               </a:spcAft>
             </a:pPr>
             <a:r>
-              <a:rPr sz="1600" b="1">
+              <a:rPr sz="1500" b="1">
                 <a:solidFill>
                   <a:srgbClr val="2171B5"/>
                 </a:solidFill>
@@ -12646,38 +15211,74 @@
               <a:t>▪  </a:t>
             </a:r>
             <a:r>
-              <a:rPr sz="1600">
-                <a:solidFill>
-                  <a:srgbClr val="202020"/>
-                </a:solidFill>
-                <a:latin typeface="Calibri"/>
-              </a:rPr>
-              <a:t>Trust boundary: refusal → singleton class → </a:t>
-            </a:r>
-            <a:r>
-              <a:rPr sz="1600" b="1">
+              <a:rPr sz="1500">
+                <a:solidFill>
+                  <a:srgbClr val="202020"/>
+                </a:solidFill>
+                <a:latin typeface="Calibri"/>
+              </a:rPr>
+              <a:t>LLM paraphrasers </a:t>
+            </a:r>
+            <a:r>
+              <a:rPr sz="1500" b="1">
+                <a:solidFill>
+                  <a:srgbClr val="D95F02"/>
+                </a:solidFill>
+                <a:latin typeface="Calibri"/>
+              </a:rPr>
+              <a:t>refuse 24%</a:t>
+            </a:r>
+            <a:r>
+              <a:rPr sz="1500">
+                <a:solidFill>
+                  <a:srgbClr val="202020"/>
+                </a:solidFill>
+                <a:latin typeface="Calibri"/>
+              </a:rPr>
+              <a:t> of harmful inputs. A non-refusing red-team paraphraser (NLLB back-translation, 6 pivots): </a:t>
+            </a:r>
+            <a:r>
+              <a:rPr sz="1500" b="1">
+                <a:solidFill>
+                  <a:srgbClr val="D95F02"/>
+                </a:solidFill>
+                <a:latin typeface="Calibri"/>
+              </a:rPr>
+              <a:t>θₔ = 0.301</a:t>
+            </a:r>
+            <a:r>
+              <a:rPr sz="1500">
+                <a:solidFill>
+                  <a:srgbClr val="202020"/>
+                </a:solidFill>
+                <a:latin typeface="Calibri"/>
+              </a:rPr>
+              <a:t> on harmful content — the weakness is the </a:t>
+            </a:r>
+            <a:r>
+              <a:rPr sz="1500" b="1">
                 <a:solidFill>
                   <a:srgbClr val="2171B5"/>
                 </a:solidFill>
                 <a:latin typeface="Calibri"/>
               </a:rPr>
-              <a:t>escalate by default</a:t>
-            </a:r>
-            <a:r>
-              <a:rPr sz="1600">
-                <a:solidFill>
-                  <a:srgbClr val="202020"/>
-                </a:solidFill>
-                <a:latin typeface="Calibri"/>
-              </a:rPr>
-              <a:t>; the audit proof records class members.</a:t>
-            </a:r>
-          </a:p>
-        </p:txBody>
-      </p:sp>
-      <p:sp>
-        <p:nvSpPr>
-          <p:cNvPr id="6" name="TextBox 5"/>
+              <a:t>generator's</a:t>
+            </a:r>
+            <a:r>
+              <a:rPr sz="1500">
+                <a:solidFill>
+                  <a:srgbClr val="202020"/>
+                </a:solidFill>
+                <a:latin typeface="Calibri"/>
+              </a:rPr>
+              <a:t>, not the mechanism's.</a:t>
+            </a:r>
+          </a:p>
+        </p:txBody>
+      </p:sp>
+      <p:sp>
+        <p:nvSpPr>
+          <p:cNvPr id="18" name="TextBox 17"/>
           <p:cNvSpPr txBox="1"/>
           <p:nvPr/>
         </p:nvSpPr>

--- a/benchmarks/ieee_bds_2026/SecureAI_Bond_2026_slides.pptx
+++ b/benchmarks/ieee_bds_2026/SecureAI_Bond_2026_slides.pptx
@@ -21,6 +21,7 @@
     <p:sldId id="269" r:id="rId20"/>
     <p:sldId id="270" r:id="rId21"/>
     <p:sldId id="271" r:id="rId22"/>
+    <p:sldId id="272" r:id="rId23"/>
   </p:sldIdLst>
   <p:sldSz cx="12191695" cy="6858000" type="screen4x3"/>
   <p:notesSz cx="6858000" cy="9144000"/>
@@ -1156,25 +1157,19 @@
           <a:lstStyle/>
           <a:p>
             <a:r>
-              <a:t>ONE-MINUTE SLIDE — the zoom-out. Deliver the headline sentence, one beat on each column, move on.</a:t>
+              <a:t>RIGOR SLIDE — deliver it confidently, not apologetically; naming the four bounds is the point. ~45 sec.</a:t>
             </a:r>
           </a:p>
           <a:p/>
           <a:p>
             <a:r>
-              <a:t>LEFT (all measured, grounded in this talk): the method treats constructs usually settled by argument as INSTRUMENTS — a space (points/displacement/invariance), pre-registration, and admission gates that retract. Evidence from this very talk: the bifactor test FAILED its own P1; the rights-channel rescue was REFUTED. Claims that don't transfer get publicly demoted.</a:t>
+              <a:t>Four bounds: (1) ADVERSARIAL DEFENSE UNPROVEN AT SCALE — natural drift halves, but the n=6 gold set shows it does NOT hold against adversarial register (3/3 flip); escalate-by-default covers those, at-scale adversarial run registered/unrun. (2) SMALL SAMPLES — n=6 exploit, 0/9 sycophancy: directional, not population rates. (3) TWO INSTANTIATIONS — attack on LLM judges, defense/bifactor on encoders; the native single-pipeline re-run is designed not run. (4) CORPUS SCOPE — English/moderation, contraction is within-corpus-family.</a:t>
             </a:r>
           </a:p>
           <a:p/>
           <a:p>
             <a:r>
-              <a:t>RIGHT (explicitly labeled a conjecture, NOT tested here): the wager that normative and aesthetic structure is geometric — compressibility and coarse-graining under an observer — one instrument across harm, aesthetics, law, cognition.</a:t>
-            </a:r>
-          </a:p>
-          <a:p/>
-          <a:p>
-            <a:r>
-              <a:t>Q&amp;A DISCIPLINE: if someone pushes on the conjecture ("is this science or manifesto?"), the full answer is: "that's the motivating conjecture of a larger program, not a result — this talk contributes the harm instance and its falsification record." Say exactly that and stop. Do NOT elaborate on aesthetics in a Secure AI Q&amp;A.</a:t>
+              <a:t>This slide pre-empts most of the Q&amp;A: if a reviewer raises any of the four, the answer is "yes — it's on the limitations slide, and here's the plan." That converts an attack into a point of agreement. Do not add new hedges live; these four are the complete set.</a:t>
             </a:r>
           </a:p>
         </p:txBody>
@@ -1244,45 +1239,25 @@
           <a:lstStyle/>
           <a:p>
             <a:r>
-              <a:t>THE FOUR TAKEAWAYS — read slowly; this is the photographed slide:</a:t>
-            </a:r>
-          </a:p>
-          <a:p>
-            <a:r>
-              <a:t>1. Vulnerabilities are SELECTIVE — salience manipulation is the attack surface.</a:t>
-            </a:r>
-          </a:p>
-          <a:p>
-            <a:r>
-              <a:t>2. Robustness profiles are DISSOCIABLE — and a single score is now MEASURED to be mostly general valence (bifactor, slide 10).</a:t>
-            </a:r>
-          </a:p>
-          <a:p>
-            <a:r>
-              <a:t>3. The exploit is END-TO-END — it flips scalar thresholds AND typed rule-engine verdicts.</a:t>
-            </a:r>
-          </a:p>
-          <a:p>
-            <a:r>
-              <a:t>4. It is DEFENSIBLE — class averaging halves natural-paraphrase drift; adversarial-at-scale is the registered open item.</a:t>
+              <a:t>ONE-MINUTE SLIDE — the zoom-out. Deliver the headline sentence, one beat on each column, move on.</a:t>
             </a:r>
           </a:p>
           <a:p/>
           <a:p>
             <a:r>
-              <a:t>Attack -&gt; measurement -&gt; defense -&gt; instrument audit. That's the arc.</a:t>
+              <a:t>LEFT (all measured, grounded in this talk): the method treats constructs usually settled by argument as INSTRUMENTS — a space (points/displacement/invariance), pre-registration, and admission gates that retract. Evidence from this very talk: the bifactor test FAILED its own P1; the rights-channel rescue was REFUTED. Claims that don't transfer get publicly demoted.</a:t>
             </a:r>
           </a:p>
           <a:p/>
           <a:p>
             <a:r>
-              <a:t>Reproducibility (footer, one breath): pip install agi-hpc (tag bds2026-v2), moral-spectrum-analyzer, xbse; kernel ErisML/DEME v3; $50/day on Kaggle; validation panel on the open NRP API.</a:t>
+              <a:t>RIGHT (explicitly labeled a conjecture, NOT tested here): the wager that normative and aesthetic structure is geometric — compressibility and coarse-graining under an observer — one instrument across harm, aesthetics, law, cognition.</a:t>
             </a:r>
           </a:p>
           <a:p/>
           <a:p>
             <a:r>
-              <a:t>Spoken closer after takeaway 4 (borrowed from slide 12): "One instrument today — many domains tomorrow. Thank you." </a:t>
+              <a:t>Q&amp;A DISCIPLINE: if someone pushes on the conjecture ("is this science or manifesto?"), the full answer is: "that's the motivating conjecture of a larger program, not a result — this talk contributes the harm instance and its falsification record." Say exactly that and stop. Do NOT elaborate on aesthetics in a Secure AI Q&amp;A.</a:t>
             </a:r>
           </a:p>
         </p:txBody>
@@ -1352,64 +1327,45 @@
           <a:lstStyle/>
           <a:p>
             <a:r>
-              <a:t>Q&amp;A PREP — hardest questions, one-line answers:</a:t>
+              <a:t>THE FOUR TAKEAWAYS — read slowly; this is the photographed slide:</a:t>
+            </a:r>
+          </a:p>
+          <a:p>
+            <a:r>
+              <a:t>1. Vulnerabilities are SELECTIVE — salience manipulation is the attack surface.</a:t>
+            </a:r>
+          </a:p>
+          <a:p>
+            <a:r>
+              <a:t>2. Robustness profiles are DISSOCIABLE — and a single score is now MEASURED to be mostly general valence (bifactor, slide 10).</a:t>
+            </a:r>
+          </a:p>
+          <a:p>
+            <a:r>
+              <a:t>3. The exploit is END-TO-END — it flips scalar thresholds AND typed rule-engine verdicts.</a:t>
+            </a:r>
+          </a:p>
+          <a:p>
+            <a:r>
+              <a:t>4. It is DEFENSIBLE — class averaging halves natural-paraphrase drift; adversarial-at-scale is the registered open item.</a:t>
             </a:r>
           </a:p>
           <a:p/>
           <a:p>
             <a:r>
-              <a:t>Q: You showed ICC 0.97, then a bifactor result saying most axes are one factor — measured on different encoders. Did you factor-analyze the panel's own scores? A: Yes — the panel's own 31x7 matrix gives PC1 = 54% of variance, the only component surviving parallel analysis, with physical fully specific there too. The general factor replicates across both instantiations; two per-axis assignments (financial, identity) diverge and are recorded as such.</a:t>
-            </a:r>
-          </a:p>
-          <a:p>
-            <a:r>
-              <a:t>Q: Isn't G-dominance guaranteed by construction? A: G is a maximally strong competitor by design — which is why surviving it is informative; privacy, autonomy, environmental measurably do.</a:t>
-            </a:r>
-          </a:p>
-          <a:p>
-            <a:r>
-              <a:t>Q: Your drift bar 0.5 is met by the raw pipeline (0.407). What did the defense buy? A: On natural paraphrases the bar doesn't bind — it was set against adversarial transforms (raw 0.67-0.85); the at-scale result is the HALVING, confirmed on harmful content via a non-refusing generator; defended-adversarial is the registered open item.</a:t>
-            </a:r>
-          </a:p>
-          <a:p>
-            <a:r>
-              <a:t>Q: With averaging on, how many gold items still flip? What does 13.7% become? A: Measured, and it's an honest negative — on the deployed encoder instrument all 3 flagged gold items STILL flip defended (displacement only −17% vs −46% on natural paraphrases). Paraphrases of euphemism stay euphemistic: the class inherits the register, and register is the attack vector. That's why the residual surface is the generator's register diversity and why escalate-by-default is load-bearing. The DEME-instantiation defended-13.7% is the native re-run.</a:t>
-            </a:r>
-          </a:p>
-          <a:p>
-            <a:r>
-              <a:t>Q: Euphemism deletes information — isn't a lower score rational? A: Gold transforms are hand-audited to preserve stated facts; the DEME leg shows the same facts get EXTRACTED differently — perception failure, not updating.</a:t>
-            </a:r>
-          </a:p>
-          <a:p>
-            <a:r>
-              <a:t>Q: Six LLMs agreeing isn't validity — where are humans? A: Agreed — the panel establishes reliability and cross-family consistency; single-rater ICC ~0.84; human-rater validation is future work.</a:t>
-            </a:r>
-          </a:p>
-          <a:p>
-            <a:r>
-              <a:t>Q: Rule-engine result is garbage-in-garbage-out by construction? A: The quantification is the finding — 13.7% flips and -39% forbid rebut the assumption that a symbolic layer confers robustness, and locate the hardening budget.</a:t>
-            </a:r>
-          </a:p>
-          <a:p>
-            <a:r>
-              <a:t>Q: identity_attack: gate says specific, residualization says 2/3 G, and it dominates your contraction — is the contraction re-measuring valence? A: The divergence is recorded, not adjudicated; the +0.084 out-of-fold lift is against a baseline already containing the G-heavy axes, which bounds how much can be G-duplication.</a:t>
-            </a:r>
-          </a:p>
-          <a:p>
-            <a:r>
-              <a:t>Q: Isn't this just prompt sensitivity? A: Prompt sensitivity is undirected noise; this is DIRECTED, selective, reproducible displacement under meaning-preserving transforms, with control arms and a decision consequence.</a:t>
-            </a:r>
-          </a:p>
-          <a:p>
-            <a:r>
-              <a:t>Q: Model coverage small (5 models / 2 families)? A: Acknowledged; the validation panel adds 6 open models / 5 families; trend claims flagged as suggestive.</a:t>
+              <a:t>Attack -&gt; measurement -&gt; defense -&gt; instrument audit. That's the arc.</a:t>
             </a:r>
           </a:p>
           <a:p/>
           <a:p>
             <a:r>
-              <a:t>Contact: andrew.bond@sjsu.edu</a:t>
+              <a:t>Reproducibility (footer, one breath): pip install agi-hpc (tag bds2026-v2), moral-spectrum-analyzer, xbse; kernel ErisML/DEME v3; $50/day on Kaggle; validation panel on the open NRP API.</a:t>
+            </a:r>
+          </a:p>
+          <a:p/>
+          <a:p>
+            <a:r>
+              <a:t>Spoken closer after takeaway 4 (borrowed from slide 12): "One instrument today — many domains tomorrow. Thank you." </a:t>
             </a:r>
           </a:p>
         </p:txBody>
@@ -1479,19 +1435,64 @@
           <a:lstStyle/>
           <a:p>
             <a:r>
-              <a:t>BACKUP — show if asked "where do the 7 dimensions come from?"</a:t>
+              <a:t>Q&amp;A PREP — hardest questions, one-line answers:</a:t>
             </a:r>
           </a:p>
           <a:p/>
           <a:p>
             <a:r>
-              <a:t>They are a PROJECTION of the DEME v3 9-axis moral vector: four map directly, three partially, two (rights, epistemic quality) are NOT scored — they produced unreliable judgments in preliminary testing, disclosed rather than hidden. Key phrase: "a reliability-driven projection, not a bijection."</a:t>
+              <a:t>Q: You showed ICC 0.97, then a bifactor result saying most axes are one factor — measured on different encoders. Did you factor-analyze the panel's own scores? A: Yes — the panel's own 31x7 matrix gives PC1 = 54% of variance, the only component surviving parallel analysis, with physical fully specific there too. The general factor replicates across both instantiations; two per-axis assignments (financial, identity) diverge and are recorded as such.</a:t>
+            </a:r>
+          </a:p>
+          <a:p>
+            <a:r>
+              <a:t>Q: Isn't G-dominance guaranteed by construction? A: G is a maximally strong competitor by design — which is why surviving it is informative; privacy, autonomy, environmental measurably do.</a:t>
+            </a:r>
+          </a:p>
+          <a:p>
+            <a:r>
+              <a:t>Q: Your drift bar 0.5 is met by the raw pipeline (0.407). What did the defense buy? A: On natural paraphrases the bar doesn't bind — it was set against adversarial transforms (raw 0.67-0.85); the at-scale result is the HALVING, confirmed on harmful content via a non-refusing generator; defended-adversarial is the registered open item.</a:t>
+            </a:r>
+          </a:p>
+          <a:p>
+            <a:r>
+              <a:t>Q: With averaging on, how many gold items still flip? What does 13.7% become? A: Measured, and it's an honest negative — on the deployed encoder instrument all 3 flagged gold items STILL flip defended (displacement only −17% vs −46% on natural paraphrases). Paraphrases of euphemism stay euphemistic: the class inherits the register, and register is the attack vector. That's why the residual surface is the generator's register diversity and why escalate-by-default is load-bearing. The DEME-instantiation defended-13.7% is the native re-run.</a:t>
+            </a:r>
+          </a:p>
+          <a:p>
+            <a:r>
+              <a:t>Q: Euphemism deletes information — isn't a lower score rational? A: Gold transforms are hand-audited to preserve stated facts; the DEME leg shows the same facts get EXTRACTED differently — perception failure, not updating.</a:t>
+            </a:r>
+          </a:p>
+          <a:p>
+            <a:r>
+              <a:t>Q: Six LLMs agreeing isn't validity — where are humans? A: Agreed — the panel establishes reliability and cross-family consistency; single-rater ICC ~0.84; human-rater validation is future work.</a:t>
+            </a:r>
+          </a:p>
+          <a:p>
+            <a:r>
+              <a:t>Q: Rule-engine result is garbage-in-garbage-out by construction? A: The quantification is the finding — 13.7% flips and -39% forbid rebut the assumption that a symbolic layer confers robustness, and locate the hardening budget.</a:t>
+            </a:r>
+          </a:p>
+          <a:p>
+            <a:r>
+              <a:t>Q: identity_attack: gate says specific, residualization says 2/3 G, and it dominates your contraction — is the contraction re-measuring valence? A: The divergence is recorded, not adjudicated; the +0.084 out-of-fold lift is against a baseline already containing the G-heavy axes, which bounds how much can be G-duplication.</a:t>
+            </a:r>
+          </a:p>
+          <a:p>
+            <a:r>
+              <a:t>Q: Isn't this just prompt sensitivity? A: Prompt sensitivity is undirected noise; this is DIRECTED, selective, reproducible displacement under meaning-preserving transforms, with control arms and a decision consequence.</a:t>
+            </a:r>
+          </a:p>
+          <a:p>
+            <a:r>
+              <a:t>Q: Model coverage small (5 models / 2 families)? A: Acknowledged; the validation panel adds 6 open models / 5 families; trend claims flagged as suggestive.</a:t>
             </a:r>
           </a:p>
           <a:p/>
           <a:p>
             <a:r>
-              <a:t>If pressed on "identity" mapping weakly to privacy/standing: it is properly fixed by the validated identity_attack channel (backup B2) — now a separately-scored 10th channel in the extended instrument.</a:t>
+              <a:t>Contact: andrew.bond@sjsu.edu</a:t>
             </a:r>
           </a:p>
         </p:txBody>
@@ -1517,6 +1518,88 @@
 </file>
 
 <file path=ppt/notesSlides/notesSlide16.xml><?xml version="1.0" encoding="utf-8"?>
+<p:notes xmlns:a="http://schemas.openxmlformats.org/drawingml/2006/main" xmlns:p="http://schemas.openxmlformats.org/presentationml/2006/main" xmlns:r="http://schemas.openxmlformats.org/officeDocument/2006/relationships">
+  <p:cSld>
+    <p:spTree>
+      <p:nvGrpSpPr>
+        <p:cNvPr id="1" name=""/>
+        <p:cNvGrpSpPr/>
+        <p:nvPr/>
+      </p:nvGrpSpPr>
+      <p:grpSpPr>
+        <a:xfrm>
+          <a:off x="0" y="0"/>
+          <a:ext cx="0" cy="0"/>
+          <a:chOff x="0" y="0"/>
+          <a:chExt cx="0" cy="0"/>
+        </a:xfrm>
+      </p:grpSpPr>
+      <p:sp>
+        <p:nvSpPr>
+          <p:cNvPr id="2" name="Slide Image Placeholder 1"/>
+          <p:cNvSpPr>
+            <a:spLocks noGrp="1"/>
+          </p:cNvSpPr>
+          <p:nvPr>
+            <p:ph type="sldImg" idx="2"/>
+          </p:nvPr>
+        </p:nvSpPr>
+        <p:spPr/>
+      </p:sp>
+      <p:sp>
+        <p:nvSpPr>
+          <p:cNvPr id="3" name="Notes Placeholder 2"/>
+          <p:cNvSpPr>
+            <a:spLocks noGrp="1"/>
+          </p:cNvSpPr>
+          <p:nvPr>
+            <p:ph type="body" idx="3" sz="quarter"/>
+          </p:nvPr>
+        </p:nvSpPr>
+        <p:spPr/>
+        <p:txBody>
+          <a:bodyPr/>
+          <a:lstStyle/>
+          <a:p>
+            <a:r>
+              <a:t>BACKUP — show if asked "where do the 7 dimensions come from?"</a:t>
+            </a:r>
+          </a:p>
+          <a:p/>
+          <a:p>
+            <a:r>
+              <a:t>They are a PROJECTION of the DEME v3 9-axis moral vector: four map directly, three partially, two (rights, epistemic quality) are NOT scored — they produced unreliable judgments in preliminary testing, disclosed rather than hidden. Key phrase: "a reliability-driven projection, not a bijection."</a:t>
+            </a:r>
+          </a:p>
+          <a:p/>
+          <a:p>
+            <a:r>
+              <a:t>If pressed on "identity" mapping weakly to privacy/standing: it is properly fixed by the validated identity_attack channel (backup B2) — now a separately-scored 10th channel in the extended instrument.</a:t>
+            </a:r>
+          </a:p>
+        </p:txBody>
+      </p:sp>
+      <p:sp>
+        <p:nvSpPr>
+          <p:cNvPr id="4" name="Slide Number Placeholder 3"/>
+          <p:cNvSpPr>
+            <a:spLocks noGrp="1"/>
+          </p:cNvSpPr>
+          <p:nvPr>
+            <p:ph type="sldNum" idx="5" sz="quarter"/>
+          </p:nvPr>
+        </p:nvSpPr>
+        <p:spPr/>
+      </p:sp>
+    </p:spTree>
+  </p:cSld>
+  <p:clrMapOvr>
+    <a:masterClrMapping/>
+  </p:clrMapOvr>
+</p:notes>
+</file>
+
+<file path=ppt/notesSlides/notesSlide17.xml><?xml version="1.0" encoding="utf-8"?>
 <p:notes xmlns:a="http://schemas.openxmlformats.org/drawingml/2006/main" xmlns:p="http://schemas.openxmlformats.org/presentationml/2006/main" xmlns:r="http://schemas.openxmlformats.org/officeDocument/2006/relationships">
   <p:cSld>
     <p:spTree>
@@ -5636,7 +5719,7 @@
               </a:spcAft>
             </a:pPr>
             <a:r>
-              <a:rPr sz="1500" b="1">
+              <a:rPr sz="1400" b="1">
                 <a:solidFill>
                   <a:srgbClr val="202020"/>
                 </a:solidFill>
@@ -5645,25 +5728,43 @@
               <a:t>ICC 0.969 = reliably measurable. Are the dimensions distinct?</a:t>
             </a:r>
             <a:r>
-              <a:rPr sz="1500">
-                <a:solidFill>
-                  <a:srgbClr val="202020"/>
-                </a:solidFill>
-                <a:latin typeface="Calibri"/>
-              </a:rPr>
-              <a:t>  A registered test against our own axes: a </a:t>
-            </a:r>
-            <a:r>
-              <a:rPr sz="1500" b="1">
+              <a:rPr sz="1400">
+                <a:solidFill>
+                  <a:srgbClr val="202020"/>
+                </a:solidFill>
+                <a:latin typeface="Calibri"/>
+              </a:rPr>
+              <a:t>  A registered test on the </a:t>
+            </a:r>
+            <a:r>
+              <a:rPr sz="1400" b="1">
                 <a:solidFill>
                   <a:srgbClr val="2171B5"/>
                 </a:solidFill>
                 <a:latin typeface="Calibri"/>
               </a:rPr>
+              <a:t>fuller DEME 9-axis set + identity_attack</a:t>
+            </a:r>
+            <a:r>
+              <a:rPr sz="1400">
+                <a:solidFill>
+                  <a:srgbClr val="202020"/>
+                </a:solidFill>
+                <a:latin typeface="Calibri"/>
+              </a:rPr>
+              <a:t> (the moral-foundations superset the 7-D harm space of slides 2–3 projects from — backup B1): a </a:t>
+            </a:r>
+            <a:r>
+              <a:rPr sz="1400" b="1">
+                <a:solidFill>
+                  <a:srgbClr val="2171B5"/>
+                </a:solidFill>
+                <a:latin typeface="Calibri"/>
+              </a:rPr>
               <a:t>general moral-valence channel G</a:t>
             </a:r>
             <a:r>
-              <a:rPr sz="1500">
+              <a:rPr sz="1400">
                 <a:solidFill>
                   <a:srgbClr val="202020"/>
                 </a:solidFill>
@@ -5672,7 +5773,7 @@
               <a:t> gate-passes (AUROC </a:t>
             </a:r>
             <a:r>
-              <a:rPr sz="1500" b="1">
+              <a:rPr sz="1400" b="1">
                 <a:solidFill>
                   <a:srgbClr val="D95F02"/>
                 </a:solidFill>
@@ -5681,7 +5782,7 @@
               <a:t>0.856</a:t>
             </a:r>
             <a:r>
-              <a:rPr sz="1500">
+              <a:rPr sz="1400">
                 <a:solidFill>
                   <a:srgbClr val="202020"/>
                 </a:solidFill>
@@ -5690,7 +5791,7 @@
               <a:t>); five named axes are ≥ </a:t>
             </a:r>
             <a:r>
-              <a:rPr sz="1500" b="1">
+              <a:rPr sz="1400" b="1">
                 <a:solidFill>
                   <a:srgbClr val="D95F02"/>
                 </a:solidFill>
@@ -5699,7 +5800,7 @@
               <a:t>0.98</a:t>
             </a:r>
             <a:r>
-              <a:rPr sz="1500">
+              <a:rPr sz="1400">
                 <a:solidFill>
                   <a:srgbClr val="202020"/>
                 </a:solidFill>
@@ -5737,7 +5838,7 @@
         <p:spPr>
           <a:xfrm>
             <a:off x="6492240" y="1874519"/>
-            <a:ext cx="5257800" cy="2148840"/>
+            <a:ext cx="5257800" cy="2377440"/>
           </a:xfrm>
           <a:prstGeom prst="roundRect">
             <a:avLst>
@@ -5783,7 +5884,7 @@
                 </a:solidFill>
                 <a:latin typeface="Calibri"/>
               </a:rPr>
-              <a:t>Consequence for Secure AI</a:t>
+              <a:t>Why this doesn't undercut Findings 1–2</a:t>
             </a:r>
           </a:p>
           <a:p>
@@ -5799,7 +5900,7 @@
                 </a:solidFill>
                 <a:latin typeface="Calibri"/>
               </a:rPr>
-              <a:t>A scalar </a:t>
+              <a:t>Harm </a:t>
             </a:r>
             <a:r>
               <a:rPr sz="1400" i="1">
@@ -5808,7 +5909,7 @@
                 </a:solidFill>
                 <a:latin typeface="Calibri"/>
               </a:rPr>
-              <a:t>harm</a:t>
+              <a:t>scores</a:t>
             </a:r>
             <a:r>
               <a:rPr sz="1400">
@@ -5817,16 +5918,16 @@
                 </a:solidFill>
                 <a:latin typeface="Calibri"/>
               </a:rPr>
-              <a:t> score is </a:t>
+              <a:t> collapse to G; </a:t>
             </a:r>
             <a:r>
               <a:rPr sz="1400" b="1">
                 <a:solidFill>
-                  <a:srgbClr val="D95F02"/>
-                </a:solidFill>
-                <a:latin typeface="Calibri"/>
-              </a:rPr>
-              <a:t>measured, not argued</a:t>
+                  <a:srgbClr val="2171B5"/>
+                </a:solidFill>
+                <a:latin typeface="Calibri"/>
+              </a:rPr>
+              <a:t>vulnerability does not</a:t>
             </a:r>
             <a:r>
               <a:rPr sz="1400">
@@ -5835,7 +5936,7 @@
                 </a:solidFill>
                 <a:latin typeface="Calibri"/>
               </a:rPr>
-              <a:t>, to be mostly G — and a scalar robustness score inherits the collapse by construction.</a:t>
+              <a:t>.</a:t>
             </a:r>
           </a:p>
           <a:p>
@@ -5851,16 +5952,16 @@
                 </a:solidFill>
                 <a:latin typeface="Calibri"/>
               </a:rPr>
-              <a:t>The vulnerability structure lives in the </a:t>
+              <a:t>The attack surfaces that dissociate (Finding 2) are the specific axes that survive G — </a:t>
             </a:r>
             <a:r>
               <a:rPr sz="1400" b="1">
                 <a:solidFill>
-                  <a:srgbClr val="2171B5"/>
-                </a:solidFill>
-                <a:latin typeface="Calibri"/>
-              </a:rPr>
-              <a:t>surviving specific axes</a:t>
+                  <a:srgbClr val="D95F02"/>
+                </a:solidFill>
+                <a:latin typeface="Calibri"/>
+              </a:rPr>
+              <a:t>“G plus physical” discards where manipulation lives</a:t>
             </a:r>
             <a:r>
               <a:rPr sz="1400">
@@ -5882,8 +5983,8 @@
         </p:nvSpPr>
         <p:spPr>
           <a:xfrm>
-            <a:off x="6492240" y="4206240"/>
-            <a:ext cx="5257800" cy="1691640"/>
+            <a:off x="6492240" y="4434840"/>
+            <a:ext cx="5257800" cy="1463040"/>
           </a:xfrm>
           <a:prstGeom prst="rect">
             <a:avLst/>
@@ -5902,25 +6003,25 @@
               </a:spcAft>
             </a:pPr>
             <a:r>
-              <a:rPr sz="1300">
-                <a:solidFill>
-                  <a:srgbClr val="202020"/>
-                </a:solidFill>
-                <a:latin typeface="Calibri"/>
-              </a:rPr>
-              <a:t>And the </a:t>
-            </a:r>
-            <a:r>
-              <a:rPr sz="1300" b="1">
+              <a:rPr sz="1200">
+                <a:solidFill>
+                  <a:srgbClr val="202020"/>
+                </a:solidFill>
+                <a:latin typeface="Calibri"/>
+              </a:rPr>
+              <a:t>The </a:t>
+            </a:r>
+            <a:r>
+              <a:rPr sz="1200" b="1">
                 <a:solidFill>
                   <a:srgbClr val="2171B5"/>
                 </a:solidFill>
                 <a:latin typeface="Calibri"/>
               </a:rPr>
-              <a:t>judge panel's own 31×7 score matrix replicates it</a:t>
-            </a:r>
-            <a:r>
-              <a:rPr sz="1300">
+              <a:t>judge panel's own 31×7 matrix replicates it</a:t>
+            </a:r>
+            <a:r>
+              <a:rPr sz="1200">
                 <a:solidFill>
                   <a:srgbClr val="202020"/>
                 </a:solidFill>
@@ -5929,7 +6030,7 @@
               <a:t>: PC1 = </a:t>
             </a:r>
             <a:r>
-              <a:rPr sz="1300" b="1">
+              <a:rPr sz="1200" b="1">
                 <a:solidFill>
                   <a:srgbClr val="D95F02"/>
                 </a:solidFill>
@@ -5938,49 +6039,13 @@
               <a:t>54%</a:t>
             </a:r>
             <a:r>
-              <a:rPr sz="1300">
-                <a:solidFill>
-                  <a:srgbClr val="202020"/>
-                </a:solidFill>
-                <a:latin typeface="Calibri"/>
-              </a:rPr>
-              <a:t> of variance, the only component surviving parallel analysis — </a:t>
-            </a:r>
-            <a:r>
-              <a:rPr sz="1300" b="1">
-                <a:solidFill>
-                  <a:srgbClr val="2171B5"/>
-                </a:solidFill>
-                <a:latin typeface="Calibri"/>
-              </a:rPr>
-              <a:t>physical</a:t>
-            </a:r>
-            <a:r>
-              <a:rPr sz="1300">
-                <a:solidFill>
-                  <a:srgbClr val="202020"/>
-                </a:solidFill>
-                <a:latin typeface="Calibri"/>
-              </a:rPr>
-              <a:t> fully specific there too (R² ≈ 0), </a:t>
-            </a:r>
-            <a:r>
-              <a:rPr sz="1300" b="1">
-                <a:solidFill>
-                  <a:srgbClr val="2171B5"/>
-                </a:solidFill>
-                <a:latin typeface="Calibri"/>
-              </a:rPr>
-              <a:t>emotional/trust</a:t>
-            </a:r>
-            <a:r>
-              <a:rPr sz="1300">
-                <a:solidFill>
-                  <a:srgbClr val="202020"/>
-                </a:solidFill>
-                <a:latin typeface="Calibri"/>
-              </a:rPr>
-              <a:t> most G-laden; financial and identity diverge across instantiations.</a:t>
+              <a:rPr sz="1200">
+                <a:solidFill>
+                  <a:srgbClr val="202020"/>
+                </a:solidFill>
+                <a:latin typeface="Calibri"/>
+              </a:rPr>
+              <a:t> of variance, sole factor surviving parallel analysis; per-judge FAs agree (all six models one factor, Tucker congruence 0.989–0.999).</a:t>
             </a:r>
           </a:p>
         </p:txBody>
@@ -6280,7 +6345,7 @@
                 </a:solidFill>
                 <a:latin typeface="Calibri"/>
               </a:rPr>
-              <a:t>: explicit warnings recover only ~38% — a ceiling co-occurring with universal overconfidence (ECE 0.19–0.42).</a:t>
+              <a:t>: explicit warnings recover only ~38% — a ceiling co-occurring with universal overconfidence (ECE, calibration error, 0.19–0.42).</a:t>
             </a:r>
           </a:p>
           <a:p>
@@ -6400,7 +6465,7 @@
                 </a:solidFill>
                 <a:latin typeface="Calibri"/>
               </a:rPr>
-              <a:t>The larger program: philosophy engineering</a:t>
+              <a:t>What we have not shown — limitations</a:t>
             </a:r>
           </a:p>
         </p:txBody>
@@ -6495,8 +6560,8 @@
         </p:nvSpPr>
         <p:spPr>
           <a:xfrm>
-            <a:off x="502920" y="868680"/>
-            <a:ext cx="11155680" cy="1371600"/>
+            <a:off x="502920" y="960120"/>
+            <a:ext cx="11155680" cy="4937760"/>
           </a:xfrm>
           <a:prstGeom prst="rect">
             <a:avLst/>
@@ -6508,6 +6573,126 @@
             <a:spAutoFit/>
           </a:bodyPr>
           <a:lstStyle/>
+          <a:p>
+            <a:pPr algn="l">
+              <a:spcAft>
+                <a:spcPts val="1000"/>
+              </a:spcAft>
+            </a:pPr>
+            <a:r>
+              <a:rPr sz="1500" b="1">
+                <a:solidFill>
+                  <a:srgbClr val="2171B5"/>
+                </a:solidFill>
+                <a:latin typeface="Calibri"/>
+              </a:rPr>
+              <a:t>▪  </a:t>
+            </a:r>
+            <a:r>
+              <a:rPr sz="1500" b="1">
+                <a:solidFill>
+                  <a:srgbClr val="2171B5"/>
+                </a:solidFill>
+                <a:latin typeface="Calibri"/>
+              </a:rPr>
+              <a:t>Adversarial defense is unproven at scale</a:t>
+            </a:r>
+            <a:r>
+              <a:rPr sz="1500">
+                <a:solidFill>
+                  <a:srgbClr val="202020"/>
+                </a:solidFill>
+                <a:latin typeface="Calibri"/>
+              </a:rPr>
+              <a:t>. Class averaging halves natural-paraphrase drift; against adversarial register the gold set (n=6) shows it </a:t>
+            </a:r>
+            <a:r>
+              <a:rPr sz="1500" b="1">
+                <a:solidFill>
+                  <a:srgbClr val="D95F02"/>
+                </a:solidFill>
+                <a:latin typeface="Calibri"/>
+              </a:rPr>
+              <a:t>does not hold</a:t>
+            </a:r>
+            <a:r>
+              <a:rPr sz="1500">
+                <a:solidFill>
+                  <a:srgbClr val="202020"/>
+                </a:solidFill>
+                <a:latin typeface="Calibri"/>
+              </a:rPr>
+              <a:t> (3/3 still flip). Escalate-by-default carries these until a register-crossing generator exists; the at-scale adversarial run is registered, unrun.</a:t>
+            </a:r>
+          </a:p>
+          <a:p>
+            <a:pPr algn="l">
+              <a:spcAft>
+                <a:spcPts val="1000"/>
+              </a:spcAft>
+            </a:pPr>
+            <a:r>
+              <a:rPr sz="1500" b="1">
+                <a:solidFill>
+                  <a:srgbClr val="2171B5"/>
+                </a:solidFill>
+                <a:latin typeface="Calibri"/>
+              </a:rPr>
+              <a:t>▪  </a:t>
+            </a:r>
+            <a:r>
+              <a:rPr sz="1500" b="1">
+                <a:solidFill>
+                  <a:srgbClr val="2171B5"/>
+                </a:solidFill>
+                <a:latin typeface="Calibri"/>
+              </a:rPr>
+              <a:t>Small samples on two claims</a:t>
+            </a:r>
+            <a:r>
+              <a:rPr sz="1500">
+                <a:solidFill>
+                  <a:srgbClr val="202020"/>
+                </a:solidFill>
+                <a:latin typeface="Calibri"/>
+              </a:rPr>
+              <a:t>: the end-to-end exploit is an n=6 existence proof; “zero sycophancy” is 0/9. Directionally clear, not population rates.</a:t>
+            </a:r>
+          </a:p>
+          <a:p>
+            <a:pPr algn="l">
+              <a:spcAft>
+                <a:spcPts val="1000"/>
+              </a:spcAft>
+            </a:pPr>
+            <a:r>
+              <a:rPr sz="1500" b="1">
+                <a:solidFill>
+                  <a:srgbClr val="2171B5"/>
+                </a:solidFill>
+                <a:latin typeface="Calibri"/>
+              </a:rPr>
+              <a:t>▪  </a:t>
+            </a:r>
+            <a:r>
+              <a:rPr sz="1500" b="1">
+                <a:solidFill>
+                  <a:srgbClr val="2171B5"/>
+                </a:solidFill>
+                <a:latin typeface="Calibri"/>
+              </a:rPr>
+              <a:t>Two instantiations</a:t>
+            </a:r>
+            <a:r>
+              <a:rPr sz="1500">
+                <a:solidFill>
+                  <a:srgbClr val="202020"/>
+                </a:solidFill>
+                <a:latin typeface="Calibri"/>
+              </a:rPr>
+              <a:t>: attack results are on LLM judges; defense/bifactor on the learned encoders. The native re-run of all five tracks through one pipeline is designed, not yet run.</a:t>
+            </a:r>
+          </a:p>
           <a:p>
             <a:pPr algn="l">
               <a:spcAft>
@@ -6515,49 +6700,31 @@
               </a:spcAft>
             </a:pPr>
             <a:r>
-              <a:rPr sz="1600">
-                <a:solidFill>
-                  <a:srgbClr val="202020"/>
-                </a:solidFill>
-                <a:latin typeface="Calibri"/>
-              </a:rPr>
-              <a:t>This paper is one instance of a method: take a construct usually settled by </a:t>
-            </a:r>
-            <a:r>
-              <a:rPr sz="1600" b="1">
+              <a:rPr sz="1500" b="1">
                 <a:solidFill>
                   <a:srgbClr val="2171B5"/>
                 </a:solidFill>
                 <a:latin typeface="Calibri"/>
               </a:rPr>
-              <a:t>argument</a:t>
-            </a:r>
-            <a:r>
-              <a:rPr sz="1600">
-                <a:solidFill>
-                  <a:srgbClr val="202020"/>
-                </a:solidFill>
-                <a:latin typeface="Calibri"/>
-              </a:rPr>
-              <a:t> — what is a harm? has this judgment been manipulated? — and build it into an </a:t>
-            </a:r>
-            <a:r>
-              <a:rPr sz="1600" b="1">
-                <a:solidFill>
-                  <a:srgbClr val="D95F02"/>
-                </a:solidFill>
-                <a:latin typeface="Calibri"/>
-              </a:rPr>
-              <a:t>instrument</a:t>
-            </a:r>
-            <a:r>
-              <a:rPr sz="1600">
-                <a:solidFill>
-                  <a:srgbClr val="202020"/>
-                </a:solidFill>
-                <a:latin typeface="Calibri"/>
-              </a:rPr>
-              <a:t> you can measure, falsify, and harden.</a:t>
+              <a:t>▪  </a:t>
+            </a:r>
+            <a:r>
+              <a:rPr sz="1500" b="1">
+                <a:solidFill>
+                  <a:srgbClr val="2171B5"/>
+                </a:solidFill>
+                <a:latin typeface="Calibri"/>
+              </a:rPr>
+              <a:t>Corpus scope</a:t>
+            </a:r>
+            <a:r>
+              <a:rPr sz="1500">
+                <a:solidFill>
+                  <a:srgbClr val="202020"/>
+                </a:solidFill>
+                <a:latin typeface="Calibri"/>
+              </a:rPr>
+              <a:t>: moderation/social-norm corpora, predominantly English; the contraction's 0.863 is within-corpus-family. Cross-cultural and cross-family transfer untested.</a:t>
             </a:r>
           </a:p>
         </p:txBody>
@@ -6570,8 +6737,8 @@
         </p:nvSpPr>
         <p:spPr>
           <a:xfrm>
-            <a:off x="502920" y="2286000"/>
-            <a:ext cx="6080760" cy="3566160"/>
+            <a:off x="502920" y="6291072"/>
+            <a:ext cx="11185855" cy="457200"/>
           </a:xfrm>
           <a:prstGeom prst="rect">
             <a:avLst/>
@@ -6583,101 +6750,6 @@
             <a:spAutoFit/>
           </a:bodyPr>
           <a:lstStyle/>
-          <a:p>
-            <a:pPr algn="l">
-              <a:spcAft>
-                <a:spcPts val="1000"/>
-              </a:spcAft>
-            </a:pPr>
-            <a:r>
-              <a:rPr sz="1500" b="1">
-                <a:solidFill>
-                  <a:srgbClr val="202020"/>
-                </a:solidFill>
-                <a:latin typeface="Calibri"/>
-              </a:rPr>
-              <a:t>What makes it engineering, not rhetoric</a:t>
-            </a:r>
-          </a:p>
-          <a:p>
-            <a:pPr algn="l">
-              <a:spcAft>
-                <a:spcPts val="1200"/>
-              </a:spcAft>
-            </a:pPr>
-            <a:r>
-              <a:rPr sz="1400" b="1">
-                <a:solidFill>
-                  <a:srgbClr val="2171B5"/>
-                </a:solidFill>
-                <a:latin typeface="Calibri"/>
-              </a:rPr>
-              <a:t>▪  </a:t>
-            </a:r>
-            <a:r>
-              <a:rPr sz="1400">
-                <a:solidFill>
-                  <a:srgbClr val="202020"/>
-                </a:solidFill>
-                <a:latin typeface="Calibri"/>
-              </a:rPr>
-              <a:t>A </a:t>
-            </a:r>
-            <a:r>
-              <a:rPr sz="1400" b="1">
-                <a:solidFill>
-                  <a:srgbClr val="2171B5"/>
-                </a:solidFill>
-                <a:latin typeface="Calibri"/>
-              </a:rPr>
-              <a:t>space</a:t>
-            </a:r>
-            <a:r>
-              <a:rPr sz="1400">
-                <a:solidFill>
-                  <a:srgbClr val="202020"/>
-                </a:solidFill>
-                <a:latin typeface="Calibri"/>
-              </a:rPr>
-              <a:t>, not a slogan: judgments are points, manipulation is </a:t>
-            </a:r>
-            <a:r>
-              <a:rPr sz="1400" b="1">
-                <a:solidFill>
-                  <a:srgbClr val="2171B5"/>
-                </a:solidFill>
-                <a:latin typeface="Calibri"/>
-              </a:rPr>
-              <a:t>displacement</a:t>
-            </a:r>
-            <a:r>
-              <a:rPr sz="1400">
-                <a:solidFill>
-                  <a:srgbClr val="202020"/>
-                </a:solidFill>
-                <a:latin typeface="Calibri"/>
-              </a:rPr>
-              <a:t>, robustness is </a:t>
-            </a:r>
-            <a:r>
-              <a:rPr sz="1400" b="1">
-                <a:solidFill>
-                  <a:srgbClr val="2171B5"/>
-                </a:solidFill>
-                <a:latin typeface="Calibri"/>
-              </a:rPr>
-              <a:t>invariance</a:t>
-            </a:r>
-            <a:r>
-              <a:rPr sz="1400">
-                <a:solidFill>
-                  <a:srgbClr val="202020"/>
-                </a:solidFill>
-                <a:latin typeface="Calibri"/>
-              </a:rPr>
-              <a:t>.</a:t>
-            </a:r>
-          </a:p>
           <a:p>
             <a:pPr algn="l">
               <a:spcAft>
@@ -6685,342 +6757,13 @@
               </a:spcAft>
             </a:pPr>
             <a:r>
-              <a:rPr sz="1400" b="1">
-                <a:solidFill>
-                  <a:srgbClr val="2171B5"/>
-                </a:solidFill>
-                <a:latin typeface="Calibri"/>
-              </a:rPr>
-              <a:t>▪  </a:t>
-            </a:r>
-            <a:r>
-              <a:rPr sz="1400" b="1">
-                <a:solidFill>
-                  <a:srgbClr val="2171B5"/>
-                </a:solidFill>
-                <a:latin typeface="Calibri"/>
-              </a:rPr>
-              <a:t>Pre-registration</a:t>
-            </a:r>
-            <a:r>
-              <a:rPr sz="1400">
-                <a:solidFill>
-                  <a:srgbClr val="202020"/>
-                </a:solidFill>
-                <a:latin typeface="Calibri"/>
-              </a:rPr>
-              <a:t> + </a:t>
-            </a:r>
-            <a:r>
-              <a:rPr sz="1400" b="1">
-                <a:solidFill>
-                  <a:srgbClr val="2171B5"/>
-                </a:solidFill>
-                <a:latin typeface="Calibri"/>
-              </a:rPr>
-              <a:t>admission gates that retract</a:t>
-            </a:r>
-            <a:r>
-              <a:rPr sz="1400">
-                <a:solidFill>
-                  <a:srgbClr val="202020"/>
-                </a:solidFill>
-                <a:latin typeface="Calibri"/>
-              </a:rPr>
-              <a:t>: this talk's own bifactor test </a:t>
-            </a:r>
-            <a:r>
-              <a:rPr sz="1400" i="1">
-                <a:solidFill>
-                  <a:srgbClr val="202020"/>
-                </a:solidFill>
-                <a:latin typeface="Calibri"/>
-              </a:rPr>
-              <a:t>failed</a:t>
-            </a:r>
-            <a:r>
-              <a:rPr sz="1400">
-                <a:solidFill>
-                  <a:srgbClr val="202020"/>
-                </a:solidFill>
-                <a:latin typeface="Calibri"/>
-              </a:rPr>
-              <a:t> its P1; a channel rescue was </a:t>
-            </a:r>
-            <a:r>
-              <a:rPr sz="1400" i="1">
-                <a:solidFill>
-                  <a:srgbClr val="202020"/>
-                </a:solidFill>
-                <a:latin typeface="Calibri"/>
-              </a:rPr>
-              <a:t>refuted</a:t>
-            </a:r>
-            <a:r>
-              <a:rPr sz="1400">
-                <a:solidFill>
-                  <a:srgbClr val="202020"/>
-                </a:solidFill>
-                <a:latin typeface="Calibri"/>
-              </a:rPr>
-              <a:t>. Claims that do not transfer are </a:t>
-            </a:r>
-            <a:r>
-              <a:rPr sz="1400" b="1">
-                <a:solidFill>
-                  <a:srgbClr val="D95F02"/>
-                </a:solidFill>
-                <a:latin typeface="Calibri"/>
-              </a:rPr>
-              <a:t>publicly demoted</a:t>
-            </a:r>
-            <a:r>
-              <a:rPr sz="1400">
-                <a:solidFill>
-                  <a:srgbClr val="202020"/>
-                </a:solidFill>
-                <a:latin typeface="Calibri"/>
-              </a:rPr>
-              <a:t>.</a:t>
-            </a:r>
-          </a:p>
-        </p:txBody>
-      </p:sp>
-      <p:sp>
-        <p:nvSpPr>
-          <p:cNvPr id="7" name="Rounded Rectangle 6"/>
-          <p:cNvSpPr/>
-          <p:nvPr/>
-        </p:nvSpPr>
-        <p:spPr>
-          <a:xfrm>
-            <a:off x="6812280" y="2286000"/>
-            <a:ext cx="4892040" cy="3017520"/>
-          </a:xfrm>
-          <a:prstGeom prst="roundRect">
-            <a:avLst>
-              <a:gd name="adj" fmla="val 6000"/>
-            </a:avLst>
-          </a:prstGeom>
-          <a:solidFill>
-            <a:srgbClr val="E4EDF7"/>
-          </a:solidFill>
-          <a:ln w="9525">
-            <a:solidFill>
-              <a:srgbClr val="2171B5"/>
-            </a:solidFill>
-          </a:ln>
-        </p:spPr>
-        <p:style>
-          <a:lnRef idx="1">
-            <a:schemeClr val="accent1"/>
-          </a:lnRef>
-          <a:fillRef idx="3">
-            <a:schemeClr val="accent1"/>
-          </a:fillRef>
-          <a:effectRef idx="2">
-            <a:schemeClr val="accent1"/>
-          </a:effectRef>
-          <a:fontRef idx="minor">
-            <a:schemeClr val="lt1"/>
-          </a:fontRef>
-        </p:style>
-        <p:txBody>
-          <a:bodyPr rtlCol="0" anchor="ctr" wrap="square" lIns="164592" rIns="164592" tIns="91440"/>
-          <a:lstStyle/>
-          <a:p>
-            <a:pPr algn="ctr">
-              <a:spcAft>
-                <a:spcPts val="600"/>
-              </a:spcAft>
-            </a:pPr>
-            <a:r>
-              <a:rPr sz="1500" b="1">
-                <a:solidFill>
-                  <a:srgbClr val="2171B5"/>
-                </a:solidFill>
-                <a:latin typeface="Calibri"/>
-              </a:rPr>
-              <a:t>The conjecture behind the program (not tested here)</a:t>
-            </a:r>
-          </a:p>
-          <a:p>
-            <a:pPr algn="l">
-              <a:spcAft>
-                <a:spcPts val="1200"/>
-              </a:spcAft>
-            </a:pPr>
-            <a:r>
-              <a:rPr sz="1400">
-                <a:solidFill>
-                  <a:srgbClr val="202020"/>
-                </a:solidFill>
-                <a:latin typeface="Calibri"/>
-              </a:rPr>
-              <a:t>Normative and aesthetic structure is </a:t>
-            </a:r>
-            <a:r>
-              <a:rPr sz="1400" b="1">
-                <a:solidFill>
-                  <a:srgbClr val="D95F02"/>
-                </a:solidFill>
-                <a:latin typeface="Calibri"/>
-              </a:rPr>
-              <a:t>geometric</a:t>
-            </a:r>
-            <a:r>
-              <a:rPr sz="1400">
-                <a:solidFill>
-                  <a:srgbClr val="202020"/>
-                </a:solidFill>
-                <a:latin typeface="Calibri"/>
-              </a:rPr>
-              <a:t> — it lives in </a:t>
-            </a:r>
-            <a:r>
-              <a:rPr sz="1400" b="1">
-                <a:solidFill>
-                  <a:srgbClr val="2171B5"/>
-                </a:solidFill>
-                <a:latin typeface="Calibri"/>
-              </a:rPr>
-              <a:t>compressibility</a:t>
-            </a:r>
-            <a:r>
-              <a:rPr sz="1400">
-                <a:solidFill>
-                  <a:srgbClr val="202020"/>
-                </a:solidFill>
-                <a:latin typeface="Calibri"/>
-              </a:rPr>
-              <a:t> and </a:t>
-            </a:r>
-            <a:r>
-              <a:rPr sz="1400" b="1">
-                <a:solidFill>
-                  <a:srgbClr val="2171B5"/>
-                </a:solidFill>
-                <a:latin typeface="Calibri"/>
-              </a:rPr>
-              <a:t>coarse-graining under an observer</a:t>
-            </a:r>
-            <a:r>
-              <a:rPr sz="1400">
-                <a:solidFill>
-                  <a:srgbClr val="202020"/>
-                </a:solidFill>
-                <a:latin typeface="Calibri"/>
-              </a:rPr>
-              <a:t>.</a:t>
-            </a:r>
-          </a:p>
-          <a:p>
-            <a:pPr algn="l">
-              <a:spcAft>
-                <a:spcPts val="400"/>
-              </a:spcAft>
-            </a:pPr>
-            <a:r>
-              <a:rPr sz="1400">
-                <a:solidFill>
-                  <a:srgbClr val="202020"/>
-                </a:solidFill>
-                <a:latin typeface="Calibri"/>
-              </a:rPr>
-              <a:t>One instrument, many domains: </a:t>
-            </a:r>
-            <a:r>
-              <a:rPr sz="1400" b="1">
-                <a:solidFill>
-                  <a:srgbClr val="2171B5"/>
-                </a:solidFill>
-                <a:latin typeface="Calibri"/>
-              </a:rPr>
-              <a:t>harm</a:t>
-            </a:r>
-            <a:r>
-              <a:rPr sz="1400">
-                <a:solidFill>
-                  <a:srgbClr val="202020"/>
-                </a:solidFill>
-                <a:latin typeface="Calibri"/>
-              </a:rPr>
-              <a:t> today; </a:t>
-            </a:r>
-            <a:r>
-              <a:rPr sz="1400" b="1">
-                <a:solidFill>
-                  <a:srgbClr val="2171B5"/>
-                </a:solidFill>
-                <a:latin typeface="Calibri"/>
-              </a:rPr>
-              <a:t>aesthetics, law, cognition</a:t>
-            </a:r>
-            <a:r>
-              <a:rPr sz="1400">
-                <a:solidFill>
-                  <a:srgbClr val="202020"/>
-                </a:solidFill>
-                <a:latin typeface="Calibri"/>
-              </a:rPr>
-              <a:t> on the same frame.</a:t>
-            </a:r>
-          </a:p>
-        </p:txBody>
-      </p:sp>
-      <p:sp>
-        <p:nvSpPr>
-          <p:cNvPr id="8" name="TextBox 7"/>
-          <p:cNvSpPr txBox="1"/>
-          <p:nvPr/>
-        </p:nvSpPr>
-        <p:spPr>
-          <a:xfrm>
-            <a:off x="502920" y="6291072"/>
-            <a:ext cx="11185855" cy="457200"/>
-          </a:xfrm>
-          <a:prstGeom prst="rect">
-            <a:avLst/>
-          </a:prstGeom>
-          <a:noFill/>
-        </p:spPr>
-        <p:txBody>
-          <a:bodyPr wrap="square">
-            <a:spAutoFit/>
-          </a:bodyPr>
-          <a:lstStyle/>
-          <a:p>
-            <a:pPr algn="l">
-              <a:spcAft>
-                <a:spcPts val="600"/>
-              </a:spcAft>
-            </a:pPr>
-            <a:r>
               <a:rPr sz="1100">
                 <a:solidFill>
                   <a:srgbClr val="636363"/>
                 </a:solidFill>
                 <a:latin typeface="Calibri"/>
               </a:rPr>
-              <a:t>A philosophical claim you can </a:t>
-            </a:r>
-            <a:r>
-              <a:rPr sz="1100" b="1">
-                <a:solidFill>
-                  <a:srgbClr val="D95F02"/>
-                </a:solidFill>
-                <a:latin typeface="Calibri"/>
-              </a:rPr>
-              <a:t>build, measure, and be proven wrong about</a:t>
-            </a:r>
-            <a:r>
-              <a:rPr sz="1100">
-                <a:solidFill>
-                  <a:srgbClr val="636363"/>
-                </a:solidFill>
-                <a:latin typeface="Calibri"/>
-              </a:rPr>
-              <a:t> outranks one you can only defend.</a:t>
+              <a:t>Every number in the talk is hedged at its point of use; this slide collects the four that bound the claims.</a:t>
             </a:r>
           </a:p>
         </p:txBody>
@@ -7072,7 +6815,7 @@
                 </a:solidFill>
                 <a:latin typeface="Calibri"/>
               </a:rPr>
-              <a:t>Takeaways</a:t>
+              <a:t>The larger program: philosophy engineering</a:t>
             </a:r>
           </a:p>
         </p:txBody>
@@ -7161,14 +6904,313 @@
       </p:sp>
       <p:sp>
         <p:nvSpPr>
-          <p:cNvPr id="5" name="Rounded Rectangle 4"/>
+          <p:cNvPr id="5" name="TextBox 4"/>
+          <p:cNvSpPr txBox="1"/>
+          <p:nvPr/>
+        </p:nvSpPr>
+        <p:spPr>
+          <a:xfrm>
+            <a:off x="502920" y="868680"/>
+            <a:ext cx="11155680" cy="1371600"/>
+          </a:xfrm>
+          <a:prstGeom prst="rect">
+            <a:avLst/>
+          </a:prstGeom>
+          <a:noFill/>
+        </p:spPr>
+        <p:txBody>
+          <a:bodyPr wrap="square">
+            <a:spAutoFit/>
+          </a:bodyPr>
+          <a:lstStyle/>
+          <a:p>
+            <a:pPr algn="l">
+              <a:spcAft>
+                <a:spcPts val="600"/>
+              </a:spcAft>
+            </a:pPr>
+            <a:r>
+              <a:rPr sz="1600">
+                <a:solidFill>
+                  <a:srgbClr val="202020"/>
+                </a:solidFill>
+                <a:latin typeface="Calibri"/>
+              </a:rPr>
+              <a:t>This paper is one instance of a method: take a construct usually settled by </a:t>
+            </a:r>
+            <a:r>
+              <a:rPr sz="1600" b="1">
+                <a:solidFill>
+                  <a:srgbClr val="2171B5"/>
+                </a:solidFill>
+                <a:latin typeface="Calibri"/>
+              </a:rPr>
+              <a:t>argument</a:t>
+            </a:r>
+            <a:r>
+              <a:rPr sz="1600">
+                <a:solidFill>
+                  <a:srgbClr val="202020"/>
+                </a:solidFill>
+                <a:latin typeface="Calibri"/>
+              </a:rPr>
+              <a:t> — what is a harm? has this judgment been manipulated? — and build it into an </a:t>
+            </a:r>
+            <a:r>
+              <a:rPr sz="1600" b="1">
+                <a:solidFill>
+                  <a:srgbClr val="D95F02"/>
+                </a:solidFill>
+                <a:latin typeface="Calibri"/>
+              </a:rPr>
+              <a:t>instrument</a:t>
+            </a:r>
+            <a:r>
+              <a:rPr sz="1600">
+                <a:solidFill>
+                  <a:srgbClr val="202020"/>
+                </a:solidFill>
+                <a:latin typeface="Calibri"/>
+              </a:rPr>
+              <a:t> you can measure, falsify, and harden.</a:t>
+            </a:r>
+          </a:p>
+        </p:txBody>
+      </p:sp>
+      <p:sp>
+        <p:nvSpPr>
+          <p:cNvPr id="6" name="TextBox 5"/>
+          <p:cNvSpPr txBox="1"/>
+          <p:nvPr/>
+        </p:nvSpPr>
+        <p:spPr>
+          <a:xfrm>
+            <a:off x="502920" y="2286000"/>
+            <a:ext cx="6080760" cy="3566160"/>
+          </a:xfrm>
+          <a:prstGeom prst="rect">
+            <a:avLst/>
+          </a:prstGeom>
+          <a:noFill/>
+        </p:spPr>
+        <p:txBody>
+          <a:bodyPr wrap="square">
+            <a:spAutoFit/>
+          </a:bodyPr>
+          <a:lstStyle/>
+          <a:p>
+            <a:pPr algn="l">
+              <a:spcAft>
+                <a:spcPts val="1000"/>
+              </a:spcAft>
+            </a:pPr>
+            <a:r>
+              <a:rPr sz="1500" b="1">
+                <a:solidFill>
+                  <a:srgbClr val="202020"/>
+                </a:solidFill>
+                <a:latin typeface="Calibri"/>
+              </a:rPr>
+              <a:t>What makes it engineering, not rhetoric</a:t>
+            </a:r>
+          </a:p>
+          <a:p>
+            <a:pPr algn="l">
+              <a:spcAft>
+                <a:spcPts val="1200"/>
+              </a:spcAft>
+            </a:pPr>
+            <a:r>
+              <a:rPr sz="1400" b="1">
+                <a:solidFill>
+                  <a:srgbClr val="2171B5"/>
+                </a:solidFill>
+                <a:latin typeface="Calibri"/>
+              </a:rPr>
+              <a:t>▪  </a:t>
+            </a:r>
+            <a:r>
+              <a:rPr sz="1400">
+                <a:solidFill>
+                  <a:srgbClr val="202020"/>
+                </a:solidFill>
+                <a:latin typeface="Calibri"/>
+              </a:rPr>
+              <a:t>A </a:t>
+            </a:r>
+            <a:r>
+              <a:rPr sz="1400" b="1">
+                <a:solidFill>
+                  <a:srgbClr val="2171B5"/>
+                </a:solidFill>
+                <a:latin typeface="Calibri"/>
+              </a:rPr>
+              <a:t>space</a:t>
+            </a:r>
+            <a:r>
+              <a:rPr sz="1400">
+                <a:solidFill>
+                  <a:srgbClr val="202020"/>
+                </a:solidFill>
+                <a:latin typeface="Calibri"/>
+              </a:rPr>
+              <a:t>, not a slogan: judgments are points, manipulation is </a:t>
+            </a:r>
+            <a:r>
+              <a:rPr sz="1400" b="1">
+                <a:solidFill>
+                  <a:srgbClr val="2171B5"/>
+                </a:solidFill>
+                <a:latin typeface="Calibri"/>
+              </a:rPr>
+              <a:t>displacement</a:t>
+            </a:r>
+            <a:r>
+              <a:rPr sz="1400">
+                <a:solidFill>
+                  <a:srgbClr val="202020"/>
+                </a:solidFill>
+                <a:latin typeface="Calibri"/>
+              </a:rPr>
+              <a:t>, robustness is </a:t>
+            </a:r>
+            <a:r>
+              <a:rPr sz="1400" b="1">
+                <a:solidFill>
+                  <a:srgbClr val="2171B5"/>
+                </a:solidFill>
+                <a:latin typeface="Calibri"/>
+              </a:rPr>
+              <a:t>invariance</a:t>
+            </a:r>
+            <a:r>
+              <a:rPr sz="1400">
+                <a:solidFill>
+                  <a:srgbClr val="202020"/>
+                </a:solidFill>
+                <a:latin typeface="Calibri"/>
+              </a:rPr>
+              <a:t>.</a:t>
+            </a:r>
+          </a:p>
+          <a:p>
+            <a:pPr algn="l">
+              <a:spcAft>
+                <a:spcPts val="600"/>
+              </a:spcAft>
+            </a:pPr>
+            <a:r>
+              <a:rPr sz="1400" b="1">
+                <a:solidFill>
+                  <a:srgbClr val="2171B5"/>
+                </a:solidFill>
+                <a:latin typeface="Calibri"/>
+              </a:rPr>
+              <a:t>▪  </a:t>
+            </a:r>
+            <a:r>
+              <a:rPr sz="1400" b="1">
+                <a:solidFill>
+                  <a:srgbClr val="2171B5"/>
+                </a:solidFill>
+                <a:latin typeface="Calibri"/>
+              </a:rPr>
+              <a:t>Pre-registration</a:t>
+            </a:r>
+            <a:r>
+              <a:rPr sz="1400">
+                <a:solidFill>
+                  <a:srgbClr val="202020"/>
+                </a:solidFill>
+                <a:latin typeface="Calibri"/>
+              </a:rPr>
+              <a:t> + </a:t>
+            </a:r>
+            <a:r>
+              <a:rPr sz="1400" b="1">
+                <a:solidFill>
+                  <a:srgbClr val="2171B5"/>
+                </a:solidFill>
+                <a:latin typeface="Calibri"/>
+              </a:rPr>
+              <a:t>admission gates that retract</a:t>
+            </a:r>
+            <a:r>
+              <a:rPr sz="1400">
+                <a:solidFill>
+                  <a:srgbClr val="202020"/>
+                </a:solidFill>
+                <a:latin typeface="Calibri"/>
+              </a:rPr>
+              <a:t>: this talk's own bifactor test </a:t>
+            </a:r>
+            <a:r>
+              <a:rPr sz="1400" i="1">
+                <a:solidFill>
+                  <a:srgbClr val="202020"/>
+                </a:solidFill>
+                <a:latin typeface="Calibri"/>
+              </a:rPr>
+              <a:t>failed</a:t>
+            </a:r>
+            <a:r>
+              <a:rPr sz="1400">
+                <a:solidFill>
+                  <a:srgbClr val="202020"/>
+                </a:solidFill>
+                <a:latin typeface="Calibri"/>
+              </a:rPr>
+              <a:t> its P1; a channel rescue was </a:t>
+            </a:r>
+            <a:r>
+              <a:rPr sz="1400" i="1">
+                <a:solidFill>
+                  <a:srgbClr val="202020"/>
+                </a:solidFill>
+                <a:latin typeface="Calibri"/>
+              </a:rPr>
+              <a:t>refuted</a:t>
+            </a:r>
+            <a:r>
+              <a:rPr sz="1400">
+                <a:solidFill>
+                  <a:srgbClr val="202020"/>
+                </a:solidFill>
+                <a:latin typeface="Calibri"/>
+              </a:rPr>
+              <a:t>. Claims that do not transfer are </a:t>
+            </a:r>
+            <a:r>
+              <a:rPr sz="1400" b="1">
+                <a:solidFill>
+                  <a:srgbClr val="D95F02"/>
+                </a:solidFill>
+                <a:latin typeface="Calibri"/>
+              </a:rPr>
+              <a:t>publicly demoted</a:t>
+            </a:r>
+            <a:r>
+              <a:rPr sz="1400">
+                <a:solidFill>
+                  <a:srgbClr val="202020"/>
+                </a:solidFill>
+                <a:latin typeface="Calibri"/>
+              </a:rPr>
+              <a:t>.</a:t>
+            </a:r>
+          </a:p>
+        </p:txBody>
+      </p:sp>
+      <p:sp>
+        <p:nvSpPr>
+          <p:cNvPr id="7" name="Rounded Rectangle 6"/>
           <p:cNvSpPr/>
           <p:nvPr/>
         </p:nvSpPr>
         <p:spPr>
           <a:xfrm>
-            <a:off x="502920" y="1051560"/>
-            <a:ext cx="11155680" cy="3566160"/>
+            <a:off x="6812280" y="2286000"/>
+            <a:ext cx="4892040" cy="3017520"/>
           </a:xfrm>
           <a:prstGeom prst="roundRect">
             <a:avLst>
@@ -7208,151 +7250,83 @@
               </a:spcAft>
             </a:pPr>
             <a:r>
-              <a:rPr sz="1800" b="1">
+              <a:rPr sz="1500" b="1">
                 <a:solidFill>
                   <a:srgbClr val="2171B5"/>
                 </a:solidFill>
                 <a:latin typeface="Calibri"/>
               </a:rPr>
-              <a:t>Four takeaways</a:t>
+              <a:t>The conjecture behind the program (not tested here)</a:t>
             </a:r>
           </a:p>
           <a:p>
             <a:pPr algn="l">
               <a:spcAft>
-                <a:spcPts val="1000"/>
+                <a:spcPts val="1200"/>
               </a:spcAft>
             </a:pPr>
             <a:r>
-              <a:rPr sz="1700">
-                <a:solidFill>
-                  <a:srgbClr val="202020"/>
-                </a:solidFill>
-                <a:latin typeface="Calibri"/>
-              </a:rPr>
-              <a:t>1.  Vulnerabilities are </a:t>
-            </a:r>
-            <a:r>
-              <a:rPr sz="1700" b="1">
+              <a:rPr sz="1400">
+                <a:solidFill>
+                  <a:srgbClr val="202020"/>
+                </a:solidFill>
+                <a:latin typeface="Calibri"/>
+              </a:rPr>
+              <a:t>Normative and aesthetic structure is </a:t>
+            </a:r>
+            <a:r>
+              <a:rPr sz="1400" b="1">
                 <a:solidFill>
                   <a:srgbClr val="D95F02"/>
                 </a:solidFill>
                 <a:latin typeface="Calibri"/>
               </a:rPr>
-              <a:t>selective</a:t>
-            </a:r>
-            <a:r>
-              <a:rPr sz="1700">
-                <a:solidFill>
-                  <a:srgbClr val="202020"/>
-                </a:solidFill>
-                <a:latin typeface="Calibri"/>
-              </a:rPr>
-              <a:t> — salience manipulation is the surface.</a:t>
-            </a:r>
-          </a:p>
-          <a:p>
-            <a:pPr algn="l">
-              <a:spcAft>
-                <a:spcPts val="1000"/>
-              </a:spcAft>
-            </a:pPr>
-            <a:r>
-              <a:rPr sz="1700">
-                <a:solidFill>
-                  <a:srgbClr val="202020"/>
-                </a:solidFill>
-                <a:latin typeface="Calibri"/>
-              </a:rPr>
-              <a:t>2.  Robustness profiles are </a:t>
-            </a:r>
-            <a:r>
-              <a:rPr sz="1700" b="1">
-                <a:solidFill>
-                  <a:srgbClr val="D95F02"/>
-                </a:solidFill>
-                <a:latin typeface="Calibri"/>
-              </a:rPr>
-              <a:t>dissociable</a:t>
-            </a:r>
-            <a:r>
-              <a:rPr sz="1700">
-                <a:solidFill>
-                  <a:srgbClr val="202020"/>
-                </a:solidFill>
-                <a:latin typeface="Calibri"/>
-              </a:rPr>
-              <a:t> — and a single score is now </a:t>
-            </a:r>
-            <a:r>
-              <a:rPr sz="1700" i="1">
-                <a:solidFill>
-                  <a:srgbClr val="202020"/>
-                </a:solidFill>
-                <a:latin typeface="Calibri"/>
-              </a:rPr>
-              <a:t>measured</a:t>
-            </a:r>
-            <a:r>
-              <a:rPr sz="1700">
-                <a:solidFill>
-                  <a:srgbClr val="202020"/>
-                </a:solidFill>
-                <a:latin typeface="Calibri"/>
-              </a:rPr>
-              <a:t> to be mostly general valence.</a:t>
-            </a:r>
-          </a:p>
-          <a:p>
-            <a:pPr algn="l">
-              <a:spcAft>
-                <a:spcPts val="1000"/>
-              </a:spcAft>
-            </a:pPr>
-            <a:r>
-              <a:rPr sz="1700">
-                <a:solidFill>
-                  <a:srgbClr val="202020"/>
-                </a:solidFill>
-                <a:latin typeface="Calibri"/>
-              </a:rPr>
-              <a:t>3.  The exploit is </a:t>
-            </a:r>
-            <a:r>
-              <a:rPr sz="1700" b="1">
-                <a:solidFill>
-                  <a:srgbClr val="D95F02"/>
-                </a:solidFill>
-                <a:latin typeface="Calibri"/>
-              </a:rPr>
-              <a:t>end-to-end</a:t>
-            </a:r>
-            <a:r>
-              <a:rPr sz="1700">
-                <a:solidFill>
-                  <a:srgbClr val="202020"/>
-                </a:solidFill>
-                <a:latin typeface="Calibri"/>
-              </a:rPr>
-              <a:t> — it flips scalar scores </a:t>
-            </a:r>
-            <a:r>
-              <a:rPr sz="1700" i="1">
-                <a:solidFill>
-                  <a:srgbClr val="202020"/>
-                </a:solidFill>
-                <a:latin typeface="Calibri"/>
-              </a:rPr>
-              <a:t>and</a:t>
-            </a:r>
-            <a:r>
-              <a:rPr sz="1700">
-                <a:solidFill>
-                  <a:srgbClr val="202020"/>
-                </a:solidFill>
-                <a:latin typeface="Calibri"/>
-              </a:rPr>
-              <a:t> typed verdicts.</a:t>
+              <a:t>geometric</a:t>
+            </a:r>
+            <a:r>
+              <a:rPr sz="1400">
+                <a:solidFill>
+                  <a:srgbClr val="202020"/>
+                </a:solidFill>
+                <a:latin typeface="Calibri"/>
+              </a:rPr>
+              <a:t> — it lives in </a:t>
+            </a:r>
+            <a:r>
+              <a:rPr sz="1400" b="1">
+                <a:solidFill>
+                  <a:srgbClr val="2171B5"/>
+                </a:solidFill>
+                <a:latin typeface="Calibri"/>
+              </a:rPr>
+              <a:t>compressibility</a:t>
+            </a:r>
+            <a:r>
+              <a:rPr sz="1400">
+                <a:solidFill>
+                  <a:srgbClr val="202020"/>
+                </a:solidFill>
+                <a:latin typeface="Calibri"/>
+              </a:rPr>
+              <a:t> and </a:t>
+            </a:r>
+            <a:r>
+              <a:rPr sz="1400" b="1">
+                <a:solidFill>
+                  <a:srgbClr val="2171B5"/>
+                </a:solidFill>
+                <a:latin typeface="Calibri"/>
+              </a:rPr>
+              <a:t>coarse-graining under an observer</a:t>
+            </a:r>
+            <a:r>
+              <a:rPr sz="1400">
+                <a:solidFill>
+                  <a:srgbClr val="202020"/>
+                </a:solidFill>
+                <a:latin typeface="Calibri"/>
+              </a:rPr>
+              <a:t>.</a:t>
             </a:r>
           </a:p>
           <a:p>
@@ -7362,44 +7336,62 @@
               </a:spcAft>
             </a:pPr>
             <a:r>
-              <a:rPr sz="1700">
-                <a:solidFill>
-                  <a:srgbClr val="202020"/>
-                </a:solidFill>
-                <a:latin typeface="Calibri"/>
-              </a:rPr>
-              <a:t>4.  It is </a:t>
-            </a:r>
-            <a:r>
-              <a:rPr sz="1700" b="1">
-                <a:solidFill>
-                  <a:srgbClr val="D95F02"/>
-                </a:solidFill>
-                <a:latin typeface="Calibri"/>
-              </a:rPr>
-              <a:t>defensible</a:t>
-            </a:r>
-            <a:r>
-              <a:rPr sz="1700">
-                <a:solidFill>
-                  <a:srgbClr val="202020"/>
-                </a:solidFill>
-                <a:latin typeface="Calibri"/>
-              </a:rPr>
-              <a:t> — class averaging halves natural-paraphrase drift; adversarial-at-scale is the registered open item.</a:t>
-            </a:r>
-          </a:p>
-        </p:txBody>
-      </p:sp>
-      <p:sp>
-        <p:nvSpPr>
-          <p:cNvPr id="6" name="TextBox 5"/>
+              <a:rPr sz="1400">
+                <a:solidFill>
+                  <a:srgbClr val="202020"/>
+                </a:solidFill>
+                <a:latin typeface="Calibri"/>
+              </a:rPr>
+              <a:t>One instrument, many domains: </a:t>
+            </a:r>
+            <a:r>
+              <a:rPr sz="1400" b="1">
+                <a:solidFill>
+                  <a:srgbClr val="2171B5"/>
+                </a:solidFill>
+                <a:latin typeface="Calibri"/>
+              </a:rPr>
+              <a:t>harm</a:t>
+            </a:r>
+            <a:r>
+              <a:rPr sz="1400">
+                <a:solidFill>
+                  <a:srgbClr val="202020"/>
+                </a:solidFill>
+                <a:latin typeface="Calibri"/>
+              </a:rPr>
+              <a:t> today; </a:t>
+            </a:r>
+            <a:r>
+              <a:rPr sz="1400" b="1">
+                <a:solidFill>
+                  <a:srgbClr val="2171B5"/>
+                </a:solidFill>
+                <a:latin typeface="Calibri"/>
+              </a:rPr>
+              <a:t>aesthetics, law, cognition</a:t>
+            </a:r>
+            <a:r>
+              <a:rPr sz="1400">
+                <a:solidFill>
+                  <a:srgbClr val="202020"/>
+                </a:solidFill>
+                <a:latin typeface="Calibri"/>
+              </a:rPr>
+              <a:t> on the same frame.</a:t>
+            </a:r>
+          </a:p>
+        </p:txBody>
+      </p:sp>
+      <p:sp>
+        <p:nvSpPr>
+          <p:cNvPr id="8" name="TextBox 7"/>
           <p:cNvSpPr txBox="1"/>
           <p:nvPr/>
         </p:nvSpPr>
         <p:spPr>
           <a:xfrm>
-            <a:off x="502920" y="5120640"/>
+            <a:off x="502920" y="6291072"/>
             <a:ext cx="11185855" cy="457200"/>
           </a:xfrm>
           <a:prstGeom prst="rect">
@@ -7425,79 +7417,25 @@
                 </a:solidFill>
                 <a:latin typeface="Calibri"/>
               </a:rPr>
-              <a:t>Reproducible: </a:t>
+              <a:t>A philosophical claim you can </a:t>
+            </a:r>
+            <a:r>
+              <a:rPr sz="1100" b="1">
+                <a:solidFill>
+                  <a:srgbClr val="D95F02"/>
+                </a:solidFill>
+                <a:latin typeface="Calibri"/>
+              </a:rPr>
+              <a:t>build, measure, and be proven wrong about</a:t>
             </a:r>
             <a:r>
               <a:rPr sz="1100">
                 <a:solidFill>
                   <a:srgbClr val="636363"/>
                 </a:solidFill>
-                <a:latin typeface="Consolas"/>
-              </a:rPr>
-              <a:t>pip install agi-hpc</a:t>
-            </a:r>
-            <a:r>
-              <a:rPr sz="1100">
-                <a:solidFill>
-                  <a:srgbClr val="636363"/>
-                </a:solidFill>
-                <a:latin typeface="Calibri"/>
-              </a:rPr>
-              <a:t> (tag </a:t>
-            </a:r>
-            <a:r>
-              <a:rPr sz="1100">
-                <a:solidFill>
-                  <a:srgbClr val="636363"/>
-                </a:solidFill>
-                <a:latin typeface="Consolas"/>
-              </a:rPr>
-              <a:t>bds2026-v2</a:t>
-            </a:r>
-            <a:r>
-              <a:rPr sz="1100">
-                <a:solidFill>
-                  <a:srgbClr val="636363"/>
-                </a:solidFill>
-                <a:latin typeface="Calibri"/>
-              </a:rPr>
-              <a:t>) · </a:t>
-            </a:r>
-            <a:r>
-              <a:rPr sz="1100">
-                <a:solidFill>
-                  <a:srgbClr val="636363"/>
-                </a:solidFill>
-                <a:latin typeface="Consolas"/>
-              </a:rPr>
-              <a:t>moral-spectrum-analyzer</a:t>
-            </a:r>
-            <a:r>
-              <a:rPr sz="1100">
-                <a:solidFill>
-                  <a:srgbClr val="636363"/>
-                </a:solidFill>
-                <a:latin typeface="Calibri"/>
-              </a:rPr>
-              <a:t> · </a:t>
-            </a:r>
-            <a:r>
-              <a:rPr sz="1100">
-                <a:solidFill>
-                  <a:srgbClr val="636363"/>
-                </a:solidFill>
-                <a:latin typeface="Consolas"/>
-              </a:rPr>
-              <a:t>xbse</a:t>
-            </a:r>
-            <a:r>
-              <a:rPr sz="1100">
-                <a:solidFill>
-                  <a:srgbClr val="636363"/>
-                </a:solidFill>
-                <a:latin typeface="Calibri"/>
-              </a:rPr>
-              <a:t> · kernel: ErisML / DEME v3 · five tracks, ~8,000 calls under $50/day (Kaggle); validation panel on the open NRP managed LLM API.</a:t>
+                <a:latin typeface="Calibri"/>
+              </a:rPr>
+              <a:t> outranks one you can only defend.</a:t>
             </a:r>
           </a:p>
         </p:txBody>
@@ -7511,6 +7449,483 @@
 </file>
 
 <file path=ppt/slides/slide14.xml><?xml version="1.0" encoding="utf-8"?>
+<p:sld xmlns:a="http://schemas.openxmlformats.org/drawingml/2006/main" xmlns:p="http://schemas.openxmlformats.org/presentationml/2006/main" xmlns:r="http://schemas.openxmlformats.org/officeDocument/2006/relationships">
+  <p:cSld>
+    <p:spTree>
+      <p:nvGrpSpPr>
+        <p:cNvPr id="1" name=""/>
+        <p:cNvGrpSpPr/>
+        <p:nvPr/>
+      </p:nvGrpSpPr>
+      <p:grpSpPr/>
+      <p:sp>
+        <p:nvSpPr>
+          <p:cNvPr id="2" name="TextBox 1"/>
+          <p:cNvSpPr txBox="1"/>
+          <p:nvPr/>
+        </p:nvSpPr>
+        <p:spPr>
+          <a:xfrm>
+            <a:off x="411480" y="146304"/>
+            <a:ext cx="11368735" cy="475488"/>
+          </a:xfrm>
+          <a:prstGeom prst="rect">
+            <a:avLst/>
+          </a:prstGeom>
+          <a:noFill/>
+        </p:spPr>
+        <p:txBody>
+          <a:bodyPr wrap="square">
+            <a:spAutoFit/>
+          </a:bodyPr>
+          <a:lstStyle/>
+          <a:p>
+            <a:r>
+              <a:rPr sz="2200" b="1">
+                <a:solidFill>
+                  <a:srgbClr val="1A2340"/>
+                </a:solidFill>
+                <a:latin typeface="Calibri"/>
+              </a:rPr>
+              <a:t>Takeaways</a:t>
+            </a:r>
+          </a:p>
+        </p:txBody>
+      </p:sp>
+      <p:sp>
+        <p:nvSpPr>
+          <p:cNvPr id="3" name="Rectangle 2"/>
+          <p:cNvSpPr/>
+          <p:nvPr/>
+        </p:nvSpPr>
+        <p:spPr>
+          <a:xfrm>
+            <a:off x="411480" y="676656"/>
+            <a:ext cx="11368735" cy="20320"/>
+          </a:xfrm>
+          <a:prstGeom prst="rect">
+            <a:avLst/>
+          </a:prstGeom>
+          <a:solidFill>
+            <a:srgbClr val="2171B5"/>
+          </a:solidFill>
+          <a:ln>
+            <a:noFill/>
+          </a:ln>
+        </p:spPr>
+        <p:style>
+          <a:lnRef idx="1">
+            <a:schemeClr val="accent1"/>
+          </a:lnRef>
+          <a:fillRef idx="3">
+            <a:schemeClr val="accent1"/>
+          </a:fillRef>
+          <a:effectRef idx="2">
+            <a:schemeClr val="accent1"/>
+          </a:effectRef>
+          <a:fontRef idx="minor">
+            <a:schemeClr val="lt1"/>
+          </a:fontRef>
+        </p:style>
+        <p:txBody>
+          <a:bodyPr rtlCol="0" anchor="ctr"/>
+          <a:lstStyle/>
+          <a:p>
+            <a:pPr algn="ctr"/>
+          </a:p>
+        </p:txBody>
+      </p:sp>
+      <p:sp>
+        <p:nvSpPr>
+          <p:cNvPr id="4" name="TextBox 3"/>
+          <p:cNvSpPr txBox="1"/>
+          <p:nvPr/>
+        </p:nvSpPr>
+        <p:spPr>
+          <a:xfrm>
+            <a:off x="11368735" y="6473952"/>
+            <a:ext cx="640080" cy="274320"/>
+          </a:xfrm>
+          <a:prstGeom prst="rect">
+            <a:avLst/>
+          </a:prstGeom>
+          <a:noFill/>
+        </p:spPr>
+        <p:txBody>
+          <a:bodyPr wrap="square">
+            <a:spAutoFit/>
+          </a:bodyPr>
+          <a:lstStyle/>
+          <a:p>
+            <a:pPr algn="r">
+              <a:spcAft>
+                <a:spcPts val="600"/>
+              </a:spcAft>
+            </a:pPr>
+            <a:r>
+              <a:rPr sz="1000">
+                <a:solidFill>
+                  <a:srgbClr val="636363"/>
+                </a:solidFill>
+                <a:latin typeface="Calibri"/>
+              </a:rPr>
+              <a:t>14</a:t>
+            </a:r>
+          </a:p>
+        </p:txBody>
+      </p:sp>
+      <p:sp>
+        <p:nvSpPr>
+          <p:cNvPr id="5" name="Rounded Rectangle 4"/>
+          <p:cNvSpPr/>
+          <p:nvPr/>
+        </p:nvSpPr>
+        <p:spPr>
+          <a:xfrm>
+            <a:off x="502920" y="1051560"/>
+            <a:ext cx="11155680" cy="3566160"/>
+          </a:xfrm>
+          <a:prstGeom prst="roundRect">
+            <a:avLst>
+              <a:gd name="adj" fmla="val 6000"/>
+            </a:avLst>
+          </a:prstGeom>
+          <a:solidFill>
+            <a:srgbClr val="E4EDF7"/>
+          </a:solidFill>
+          <a:ln w="9525">
+            <a:solidFill>
+              <a:srgbClr val="2171B5"/>
+            </a:solidFill>
+          </a:ln>
+        </p:spPr>
+        <p:style>
+          <a:lnRef idx="1">
+            <a:schemeClr val="accent1"/>
+          </a:lnRef>
+          <a:fillRef idx="3">
+            <a:schemeClr val="accent1"/>
+          </a:fillRef>
+          <a:effectRef idx="2">
+            <a:schemeClr val="accent1"/>
+          </a:effectRef>
+          <a:fontRef idx="minor">
+            <a:schemeClr val="lt1"/>
+          </a:fontRef>
+        </p:style>
+        <p:txBody>
+          <a:bodyPr rtlCol="0" anchor="ctr" wrap="square" lIns="164592" rIns="164592" tIns="91440"/>
+          <a:lstStyle/>
+          <a:p>
+            <a:pPr algn="ctr">
+              <a:spcAft>
+                <a:spcPts val="600"/>
+              </a:spcAft>
+            </a:pPr>
+            <a:r>
+              <a:rPr sz="1800" b="1">
+                <a:solidFill>
+                  <a:srgbClr val="2171B5"/>
+                </a:solidFill>
+                <a:latin typeface="Calibri"/>
+              </a:rPr>
+              <a:t>Four takeaways</a:t>
+            </a:r>
+          </a:p>
+          <a:p>
+            <a:pPr algn="l">
+              <a:spcAft>
+                <a:spcPts val="1000"/>
+              </a:spcAft>
+            </a:pPr>
+            <a:r>
+              <a:rPr sz="1700">
+                <a:solidFill>
+                  <a:srgbClr val="202020"/>
+                </a:solidFill>
+                <a:latin typeface="Calibri"/>
+              </a:rPr>
+              <a:t>1.  Vulnerabilities are </a:t>
+            </a:r>
+            <a:r>
+              <a:rPr sz="1700" b="1">
+                <a:solidFill>
+                  <a:srgbClr val="D95F02"/>
+                </a:solidFill>
+                <a:latin typeface="Calibri"/>
+              </a:rPr>
+              <a:t>selective</a:t>
+            </a:r>
+            <a:r>
+              <a:rPr sz="1700">
+                <a:solidFill>
+                  <a:srgbClr val="202020"/>
+                </a:solidFill>
+                <a:latin typeface="Calibri"/>
+              </a:rPr>
+              <a:t> — salience manipulation is the surface.</a:t>
+            </a:r>
+          </a:p>
+          <a:p>
+            <a:pPr algn="l">
+              <a:spcAft>
+                <a:spcPts val="1000"/>
+              </a:spcAft>
+            </a:pPr>
+            <a:r>
+              <a:rPr sz="1700">
+                <a:solidFill>
+                  <a:srgbClr val="202020"/>
+                </a:solidFill>
+                <a:latin typeface="Calibri"/>
+              </a:rPr>
+              <a:t>2.  Robustness profiles are </a:t>
+            </a:r>
+            <a:r>
+              <a:rPr sz="1700" b="1">
+                <a:solidFill>
+                  <a:srgbClr val="D95F02"/>
+                </a:solidFill>
+                <a:latin typeface="Calibri"/>
+              </a:rPr>
+              <a:t>dissociable</a:t>
+            </a:r>
+            <a:r>
+              <a:rPr sz="1700">
+                <a:solidFill>
+                  <a:srgbClr val="202020"/>
+                </a:solidFill>
+                <a:latin typeface="Calibri"/>
+              </a:rPr>
+              <a:t> — and a single score is now </a:t>
+            </a:r>
+            <a:r>
+              <a:rPr sz="1700" i="1">
+                <a:solidFill>
+                  <a:srgbClr val="202020"/>
+                </a:solidFill>
+                <a:latin typeface="Calibri"/>
+              </a:rPr>
+              <a:t>measured</a:t>
+            </a:r>
+            <a:r>
+              <a:rPr sz="1700">
+                <a:solidFill>
+                  <a:srgbClr val="202020"/>
+                </a:solidFill>
+                <a:latin typeface="Calibri"/>
+              </a:rPr>
+              <a:t> to be mostly general valence.</a:t>
+            </a:r>
+          </a:p>
+          <a:p>
+            <a:pPr algn="l">
+              <a:spcAft>
+                <a:spcPts val="1000"/>
+              </a:spcAft>
+            </a:pPr>
+            <a:r>
+              <a:rPr sz="1700">
+                <a:solidFill>
+                  <a:srgbClr val="202020"/>
+                </a:solidFill>
+                <a:latin typeface="Calibri"/>
+              </a:rPr>
+              <a:t>3.  The exploit is </a:t>
+            </a:r>
+            <a:r>
+              <a:rPr sz="1700" b="1">
+                <a:solidFill>
+                  <a:srgbClr val="D95F02"/>
+                </a:solidFill>
+                <a:latin typeface="Calibri"/>
+              </a:rPr>
+              <a:t>end-to-end</a:t>
+            </a:r>
+            <a:r>
+              <a:rPr sz="1700">
+                <a:solidFill>
+                  <a:srgbClr val="202020"/>
+                </a:solidFill>
+                <a:latin typeface="Calibri"/>
+              </a:rPr>
+              <a:t> — it flips scalar scores </a:t>
+            </a:r>
+            <a:r>
+              <a:rPr sz="1700" i="1">
+                <a:solidFill>
+                  <a:srgbClr val="202020"/>
+                </a:solidFill>
+                <a:latin typeface="Calibri"/>
+              </a:rPr>
+              <a:t>and</a:t>
+            </a:r>
+            <a:r>
+              <a:rPr sz="1700">
+                <a:solidFill>
+                  <a:srgbClr val="202020"/>
+                </a:solidFill>
+                <a:latin typeface="Calibri"/>
+              </a:rPr>
+              <a:t> typed verdicts.</a:t>
+            </a:r>
+          </a:p>
+          <a:p>
+            <a:pPr algn="l">
+              <a:spcAft>
+                <a:spcPts val="400"/>
+              </a:spcAft>
+            </a:pPr>
+            <a:r>
+              <a:rPr sz="1700">
+                <a:solidFill>
+                  <a:srgbClr val="202020"/>
+                </a:solidFill>
+                <a:latin typeface="Calibri"/>
+              </a:rPr>
+              <a:t>4.  It is </a:t>
+            </a:r>
+            <a:r>
+              <a:rPr sz="1700" b="1">
+                <a:solidFill>
+                  <a:srgbClr val="D95F02"/>
+                </a:solidFill>
+                <a:latin typeface="Calibri"/>
+              </a:rPr>
+              <a:t>defensible</a:t>
+            </a:r>
+            <a:r>
+              <a:rPr sz="1700">
+                <a:solidFill>
+                  <a:srgbClr val="202020"/>
+                </a:solidFill>
+                <a:latin typeface="Calibri"/>
+              </a:rPr>
+              <a:t> — class averaging halves natural-paraphrase drift; adversarial-at-scale is the registered open item.</a:t>
+            </a:r>
+          </a:p>
+        </p:txBody>
+      </p:sp>
+      <p:sp>
+        <p:nvSpPr>
+          <p:cNvPr id="6" name="TextBox 5"/>
+          <p:cNvSpPr txBox="1"/>
+          <p:nvPr/>
+        </p:nvSpPr>
+        <p:spPr>
+          <a:xfrm>
+            <a:off x="502920" y="5120640"/>
+            <a:ext cx="11185855" cy="457200"/>
+          </a:xfrm>
+          <a:prstGeom prst="rect">
+            <a:avLst/>
+          </a:prstGeom>
+          <a:noFill/>
+        </p:spPr>
+        <p:txBody>
+          <a:bodyPr wrap="square">
+            <a:spAutoFit/>
+          </a:bodyPr>
+          <a:lstStyle/>
+          <a:p>
+            <a:pPr algn="l">
+              <a:spcAft>
+                <a:spcPts val="600"/>
+              </a:spcAft>
+            </a:pPr>
+            <a:r>
+              <a:rPr sz="1100">
+                <a:solidFill>
+                  <a:srgbClr val="636363"/>
+                </a:solidFill>
+                <a:latin typeface="Calibri"/>
+              </a:rPr>
+              <a:t>Reproducible: </a:t>
+            </a:r>
+            <a:r>
+              <a:rPr sz="1100">
+                <a:solidFill>
+                  <a:srgbClr val="636363"/>
+                </a:solidFill>
+                <a:latin typeface="Consolas"/>
+              </a:rPr>
+              <a:t>pip install agi-hpc</a:t>
+            </a:r>
+            <a:r>
+              <a:rPr sz="1100">
+                <a:solidFill>
+                  <a:srgbClr val="636363"/>
+                </a:solidFill>
+                <a:latin typeface="Calibri"/>
+              </a:rPr>
+              <a:t> (tag </a:t>
+            </a:r>
+            <a:r>
+              <a:rPr sz="1100">
+                <a:solidFill>
+                  <a:srgbClr val="636363"/>
+                </a:solidFill>
+                <a:latin typeface="Consolas"/>
+              </a:rPr>
+              <a:t>bds2026-v2</a:t>
+            </a:r>
+            <a:r>
+              <a:rPr sz="1100">
+                <a:solidFill>
+                  <a:srgbClr val="636363"/>
+                </a:solidFill>
+                <a:latin typeface="Calibri"/>
+              </a:rPr>
+              <a:t>) · </a:t>
+            </a:r>
+            <a:r>
+              <a:rPr sz="1100">
+                <a:solidFill>
+                  <a:srgbClr val="636363"/>
+                </a:solidFill>
+                <a:latin typeface="Consolas"/>
+              </a:rPr>
+              <a:t>moral-spectrum-analyzer</a:t>
+            </a:r>
+            <a:r>
+              <a:rPr sz="1100">
+                <a:solidFill>
+                  <a:srgbClr val="636363"/>
+                </a:solidFill>
+                <a:latin typeface="Calibri"/>
+              </a:rPr>
+              <a:t> · </a:t>
+            </a:r>
+            <a:r>
+              <a:rPr sz="1100">
+                <a:solidFill>
+                  <a:srgbClr val="636363"/>
+                </a:solidFill>
+                <a:latin typeface="Consolas"/>
+              </a:rPr>
+              <a:t>xbse</a:t>
+            </a:r>
+            <a:r>
+              <a:rPr sz="1100">
+                <a:solidFill>
+                  <a:srgbClr val="636363"/>
+                </a:solidFill>
+                <a:latin typeface="Calibri"/>
+              </a:rPr>
+              <a:t> · kernel: ErisML / DEME v3 · five tracks, ~8,000 calls under $50/day (Kaggle); validation panel on the open NRP managed LLM API.</a:t>
+            </a:r>
+          </a:p>
+        </p:txBody>
+      </p:sp>
+    </p:spTree>
+  </p:cSld>
+  <p:clrMapOvr>
+    <a:masterClrMapping/>
+  </p:clrMapOvr>
+</p:sld>
+</file>
+
+<file path=ppt/slides/slide15.xml><?xml version="1.0" encoding="utf-8"?>
 <p:sld xmlns:a="http://schemas.openxmlformats.org/drawingml/2006/main" xmlns:p="http://schemas.openxmlformats.org/presentationml/2006/main" xmlns:r="http://schemas.openxmlformats.org/officeDocument/2006/relationships">
   <p:cSld>
     <p:spTree>
@@ -7664,7 +8079,7 @@
 </p:sld>
 </file>
 
-<file path=ppt/slides/slide15.xml><?xml version="1.0" encoding="utf-8"?>
+<file path=ppt/slides/slide16.xml><?xml version="1.0" encoding="utf-8"?>
 <p:sld xmlns:a="http://schemas.openxmlformats.org/drawingml/2006/main" xmlns:p="http://schemas.openxmlformats.org/presentationml/2006/main" xmlns:r="http://schemas.openxmlformats.org/officeDocument/2006/relationships">
   <p:cSld>
     <p:spTree>
@@ -8530,7 +8945,7 @@
 </p:sld>
 </file>
 
-<file path=ppt/slides/slide16.xml><?xml version="1.0" encoding="utf-8"?>
+<file path=ppt/slides/slide17.xml><?xml version="1.0" encoding="utf-8"?>
 <p:sld xmlns:a="http://schemas.openxmlformats.org/drawingml/2006/main" xmlns:p="http://schemas.openxmlformats.org/presentationml/2006/main" xmlns:r="http://schemas.openxmlformats.org/officeDocument/2006/relationships">
   <p:cSld>
     <p:spTree>
@@ -11107,7 +11522,7 @@
                 </a:solidFill>
                 <a:latin typeface="Calibri"/>
               </a:rPr>
-              <a:t> (0/9) — but </a:t>
+              <a:t> (0/9 — small n, directionally clear) — but </a:t>
             </a:r>
             <a:r>
               <a:rPr sz="1700" b="1">
@@ -14256,8 +14671,8 @@
         </p:nvSpPr>
         <p:spPr>
           <a:xfrm>
-            <a:off x="502920" y="5212080"/>
-            <a:ext cx="11155680" cy="914400"/>
+            <a:off x="502920" y="5138928"/>
+            <a:ext cx="11155680" cy="960120"/>
           </a:xfrm>
           <a:prstGeom prst="rect">
             <a:avLst/>
@@ -14269,6 +14684,49 @@
             <a:spAutoFit/>
           </a:bodyPr>
           <a:lstStyle/>
+          <a:p>
+            <a:pPr algn="l">
+              <a:spcAft>
+                <a:spcPts val="400"/>
+              </a:spcAft>
+            </a:pPr>
+            <a:r>
+              <a:rPr sz="1600" b="1">
+                <a:solidFill>
+                  <a:srgbClr val="D95F02"/>
+                </a:solidFill>
+                <a:latin typeface="Calibri"/>
+              </a:rPr>
+              <a:t>A rule engine inherits, rather than cures, the front-end's salience vulnerability.</a:t>
+            </a:r>
+            <a:r>
+              <a:rPr sz="1600">
+                <a:solidFill>
+                  <a:srgbClr val="202020"/>
+                </a:solidFill>
+                <a:latin typeface="Calibri"/>
+              </a:rPr>
+              <a:t>  Harden </a:t>
+            </a:r>
+            <a:r>
+              <a:rPr sz="1600" i="1">
+                <a:solidFill>
+                  <a:srgbClr val="202020"/>
+                </a:solidFill>
+                <a:latin typeface="Calibri"/>
+              </a:rPr>
+              <a:t>fact extraction</a:t>
+            </a:r>
+            <a:r>
+              <a:rPr sz="1600">
+                <a:solidFill>
+                  <a:srgbClr val="202020"/>
+                </a:solidFill>
+                <a:latin typeface="Calibri"/>
+              </a:rPr>
+              <a:t>, not just the rule.</a:t>
+            </a:r>
+          </a:p>
           <a:p>
             <a:pPr algn="l">
               <a:spcAft>
@@ -14276,40 +14734,13 @@
               </a:spcAft>
             </a:pPr>
             <a:r>
-              <a:rPr sz="1600" b="1">
-                <a:solidFill>
-                  <a:srgbClr val="D95F02"/>
-                </a:solidFill>
-                <a:latin typeface="Calibri"/>
-              </a:rPr>
-              <a:t>A rule engine inherits, rather than cures, the front-end's salience vulnerability.</a:t>
-            </a:r>
-            <a:r>
-              <a:rPr sz="1600">
-                <a:solidFill>
-                  <a:srgbClr val="202020"/>
-                </a:solidFill>
-                <a:latin typeface="Calibri"/>
-              </a:rPr>
-              <a:t>  Harden </a:t>
-            </a:r>
-            <a:r>
-              <a:rPr sz="1600" i="1">
-                <a:solidFill>
-                  <a:srgbClr val="202020"/>
-                </a:solidFill>
-                <a:latin typeface="Calibri"/>
-              </a:rPr>
-              <a:t>fact extraction</a:t>
-            </a:r>
-            <a:r>
-              <a:rPr sz="1600">
-                <a:solidFill>
-                  <a:srgbClr val="202020"/>
-                </a:solidFill>
-                <a:latin typeface="Calibri"/>
-              </a:rPr>
-              <a:t>, not just the rule.</a:t>
+              <a:rPr sz="1100">
+                <a:solidFill>
+                  <a:srgbClr val="636363"/>
+                </a:solidFill>
+                <a:latin typeface="Calibri"/>
+              </a:rPr>
+              <a:t>DEME v3 is our own kernel, frozen for this test (nothing tuned to these flips) — a stress substrate, not the ground truth (which is the audited meaning-invariance of the rewrites).</a:t>
             </a:r>
           </a:p>
         </p:txBody>
@@ -14482,7 +14913,7 @@
                 </a:solidFill>
                 <a:latin typeface="Calibri"/>
               </a:rPr>
-              <a:t>Second instantiation from here on: validated learned encoders (</a:t>
+              <a:t>Second instantiation from here on: validated per-axis learned encoders (</a:t>
             </a:r>
             <a:r>
               <a:rPr sz="1200">
@@ -14500,7 +14931,7 @@
                 </a:solidFill>
                 <a:latin typeface="Calibri"/>
               </a:rPr>
-              <a:t>) replace LLM judges; same DEME kernel.</a:t>
+              <a:t> — one small trained scorer per axis) replace the LLM judges; same DEME kernel.</a:t>
             </a:r>
           </a:p>
         </p:txBody>
